--- a/PPT/math.pptx
+++ b/PPT/math.pptx
@@ -9,6 +9,9 @@
     <p:sldId id="256" r:id="rId3"/>
     <p:sldId id="258" r:id="rId4"/>
     <p:sldId id="259" r:id="rId5"/>
+    <p:sldId id="260" r:id="rId6"/>
+    <p:sldId id="261" r:id="rId7"/>
+    <p:sldId id="262" r:id="rId8"/>
   </p:sldIdLst>
   <p:sldSz cx="12192000" cy="6858000"/>
   <p:notesSz cx="6858000" cy="9144000"/>
@@ -244,7 +247,7 @@
           <a:p>
             <a:fld id="{D997B5FA-0921-464F-AAE1-844C04324D75}" type="datetimeFigureOut">
               <a:rPr lang="zh-CN" altLang="en-US" smtClean="0"/>
-              <a:t>2025-08-11</a:t>
+              <a:t>2026-07-29</a:t>
             </a:fld>
             <a:endParaRPr lang="zh-CN" altLang="en-US"/>
           </a:p>
@@ -407,7 +410,7 @@
           <a:p>
             <a:fld id="{D997B5FA-0921-464F-AAE1-844C04324D75}" type="datetimeFigureOut">
               <a:rPr lang="zh-CN" altLang="en-US" smtClean="0"/>
-              <a:t>2025-08-11</a:t>
+              <a:t>2026-07-29</a:t>
             </a:fld>
             <a:endParaRPr lang="zh-CN" altLang="en-US"/>
           </a:p>
@@ -580,7 +583,7 @@
           <a:p>
             <a:fld id="{D997B5FA-0921-464F-AAE1-844C04324D75}" type="datetimeFigureOut">
               <a:rPr lang="zh-CN" altLang="en-US" smtClean="0"/>
-              <a:t>2025-08-11</a:t>
+              <a:t>2026-07-29</a:t>
             </a:fld>
             <a:endParaRPr lang="zh-CN" altLang="en-US"/>
           </a:p>
@@ -743,7 +746,7 @@
           <a:p>
             <a:fld id="{D997B5FA-0921-464F-AAE1-844C04324D75}" type="datetimeFigureOut">
               <a:rPr lang="zh-CN" altLang="en-US" smtClean="0"/>
-              <a:t>2025-08-11</a:t>
+              <a:t>2026-07-29</a:t>
             </a:fld>
             <a:endParaRPr lang="zh-CN" altLang="en-US"/>
           </a:p>
@@ -983,7 +986,7 @@
           <a:p>
             <a:fld id="{D997B5FA-0921-464F-AAE1-844C04324D75}" type="datetimeFigureOut">
               <a:rPr lang="zh-CN" altLang="en-US" smtClean="0"/>
-              <a:t>2025-08-11</a:t>
+              <a:t>2026-07-29</a:t>
             </a:fld>
             <a:endParaRPr lang="zh-CN" altLang="en-US"/>
           </a:p>
@@ -1207,7 +1210,7 @@
           <a:p>
             <a:fld id="{D997B5FA-0921-464F-AAE1-844C04324D75}" type="datetimeFigureOut">
               <a:rPr lang="zh-CN" altLang="en-US" smtClean="0"/>
-              <a:t>2025-08-11</a:t>
+              <a:t>2026-07-29</a:t>
             </a:fld>
             <a:endParaRPr lang="zh-CN" altLang="en-US"/>
           </a:p>
@@ -1566,7 +1569,7 @@
           <a:p>
             <a:fld id="{D997B5FA-0921-464F-AAE1-844C04324D75}" type="datetimeFigureOut">
               <a:rPr lang="zh-CN" altLang="en-US" smtClean="0"/>
-              <a:t>2025-08-11</a:t>
+              <a:t>2026-07-29</a:t>
             </a:fld>
             <a:endParaRPr lang="zh-CN" altLang="en-US"/>
           </a:p>
@@ -1678,7 +1681,7 @@
           <a:p>
             <a:fld id="{D997B5FA-0921-464F-AAE1-844C04324D75}" type="datetimeFigureOut">
               <a:rPr lang="zh-CN" altLang="en-US" smtClean="0"/>
-              <a:t>2025-08-11</a:t>
+              <a:t>2026-07-29</a:t>
             </a:fld>
             <a:endParaRPr lang="zh-CN" altLang="en-US"/>
           </a:p>
@@ -1768,7 +1771,7 @@
           <a:p>
             <a:fld id="{D997B5FA-0921-464F-AAE1-844C04324D75}" type="datetimeFigureOut">
               <a:rPr lang="zh-CN" altLang="en-US" smtClean="0"/>
-              <a:t>2025-08-11</a:t>
+              <a:t>2026-07-29</a:t>
             </a:fld>
             <a:endParaRPr lang="zh-CN" altLang="en-US"/>
           </a:p>
@@ -2038,7 +2041,7 @@
           <a:p>
             <a:fld id="{D997B5FA-0921-464F-AAE1-844C04324D75}" type="datetimeFigureOut">
               <a:rPr lang="zh-CN" altLang="en-US" smtClean="0"/>
-              <a:t>2025-08-11</a:t>
+              <a:t>2026-07-29</a:t>
             </a:fld>
             <a:endParaRPr lang="zh-CN" altLang="en-US"/>
           </a:p>
@@ -2285,7 +2288,7 @@
           <a:p>
             <a:fld id="{D997B5FA-0921-464F-AAE1-844C04324D75}" type="datetimeFigureOut">
               <a:rPr lang="zh-CN" altLang="en-US" smtClean="0"/>
-              <a:t>2025-08-11</a:t>
+              <a:t>2026-07-29</a:t>
             </a:fld>
             <a:endParaRPr lang="zh-CN" altLang="en-US"/>
           </a:p>
@@ -2491,7 +2494,7 @@
           <a:p>
             <a:fld id="{D997B5FA-0921-464F-AAE1-844C04324D75}" type="datetimeFigureOut">
               <a:rPr lang="zh-CN" altLang="en-US" smtClean="0"/>
-              <a:t>2025-08-11</a:t>
+              <a:t>2026-07-29</a:t>
             </a:fld>
             <a:endParaRPr lang="zh-CN" altLang="en-US"/>
           </a:p>
@@ -2893,13 +2896,7 @@
       </p:grpSpPr>
       <p:grpSp>
         <p:nvGrpSpPr>
-          <p:cNvPr id="8" name="组合 7">
-            <a:extLst>
-              <a:ext uri="{FF2B5EF4-FFF2-40B4-BE49-F238E27FC236}">
-                <a16:creationId xmlns:a16="http://schemas.microsoft.com/office/drawing/2014/main" id="{75BE6DB2-2B77-795B-4515-66D17F1D5942}"/>
-              </a:ext>
-            </a:extLst>
-          </p:cNvPr>
+          <p:cNvPr id="8" name="组合 7"/>
           <p:cNvGrpSpPr/>
           <p:nvPr/>
         </p:nvGrpSpPr>
@@ -2913,13 +2910,7 @@
         </p:grpSpPr>
         <p:grpSp>
           <p:nvGrpSpPr>
-            <p:cNvPr id="50" name="组合 49">
-              <a:extLst>
-                <a:ext uri="{FF2B5EF4-FFF2-40B4-BE49-F238E27FC236}">
-                  <a16:creationId xmlns:a16="http://schemas.microsoft.com/office/drawing/2014/main" id="{692E9762-875A-293C-8CBF-64B0FAD6CA0B}"/>
-                </a:ext>
-              </a:extLst>
-            </p:cNvPr>
+            <p:cNvPr id="50" name="组合 49"/>
             <p:cNvGrpSpPr/>
             <p:nvPr/>
           </p:nvGrpSpPr>
@@ -2933,13 +2924,7 @@
           </p:grpSpPr>
           <p:grpSp>
             <p:nvGrpSpPr>
-              <p:cNvPr id="15" name="组合 14">
-                <a:extLst>
-                  <a:ext uri="{FF2B5EF4-FFF2-40B4-BE49-F238E27FC236}">
-                    <a16:creationId xmlns:a16="http://schemas.microsoft.com/office/drawing/2014/main" id="{4681ACFF-9E13-A173-5709-187F43745D00}"/>
-                  </a:ext>
-                </a:extLst>
-              </p:cNvPr>
+              <p:cNvPr id="15" name="组合 14"/>
               <p:cNvGrpSpPr/>
               <p:nvPr/>
             </p:nvGrpSpPr>
@@ -2953,13 +2938,7 @@
             </p:grpSpPr>
             <p:cxnSp>
               <p:nvCxnSpPr>
-                <p:cNvPr id="5" name="直接连接符 4">
-                  <a:extLst>
-                    <a:ext uri="{FF2B5EF4-FFF2-40B4-BE49-F238E27FC236}">
-                      <a16:creationId xmlns:a16="http://schemas.microsoft.com/office/drawing/2014/main" id="{E189C48A-D1AA-E098-EC40-355FDA8A828C}"/>
-                    </a:ext>
-                  </a:extLst>
-                </p:cNvPr>
+                <p:cNvPr id="5" name="直接连接符 4"/>
                 <p:cNvCxnSpPr/>
                 <p:nvPr/>
               </p:nvCxnSpPr>
@@ -2989,16 +2968,8 @@
             </p:cxnSp>
             <p:cxnSp>
               <p:nvCxnSpPr>
-                <p:cNvPr id="11" name="直接连接符 10">
-                  <a:extLst>
-                    <a:ext uri="{FF2B5EF4-FFF2-40B4-BE49-F238E27FC236}">
-                      <a16:creationId xmlns:a16="http://schemas.microsoft.com/office/drawing/2014/main" id="{1AF3B8D4-84C5-7A2C-8DC5-D793EE1DB911}"/>
-                    </a:ext>
-                  </a:extLst>
-                </p:cNvPr>
-                <p:cNvCxnSpPr>
-                  <a:cxnSpLocks/>
-                </p:cNvCxnSpPr>
+                <p:cNvPr id="11" name="直接连接符 10"/>
+                <p:cNvCxnSpPr/>
                 <p:nvPr/>
               </p:nvCxnSpPr>
               <p:spPr>
@@ -3027,16 +2998,8 @@
             </p:cxnSp>
             <p:cxnSp>
               <p:nvCxnSpPr>
-                <p:cNvPr id="14" name="直接连接符 13">
-                  <a:extLst>
-                    <a:ext uri="{FF2B5EF4-FFF2-40B4-BE49-F238E27FC236}">
-                      <a16:creationId xmlns:a16="http://schemas.microsoft.com/office/drawing/2014/main" id="{3719E9FE-2BE8-7FF0-2871-9BDB019E6627}"/>
-                    </a:ext>
-                  </a:extLst>
-                </p:cNvPr>
-                <p:cNvCxnSpPr>
-                  <a:cxnSpLocks/>
-                </p:cNvCxnSpPr>
+                <p:cNvPr id="14" name="直接连接符 13"/>
+                <p:cNvCxnSpPr/>
                 <p:nvPr/>
               </p:nvCxnSpPr>
               <p:spPr>
@@ -3066,13 +3029,7 @@
           </p:grpSp>
           <p:grpSp>
             <p:nvGrpSpPr>
-              <p:cNvPr id="16" name="组合 15">
-                <a:extLst>
-                  <a:ext uri="{FF2B5EF4-FFF2-40B4-BE49-F238E27FC236}">
-                    <a16:creationId xmlns:a16="http://schemas.microsoft.com/office/drawing/2014/main" id="{775229A3-68A2-9061-EDE2-665640711444}"/>
-                  </a:ext>
-                </a:extLst>
-              </p:cNvPr>
+              <p:cNvPr id="16" name="组合 15"/>
               <p:cNvGrpSpPr/>
               <p:nvPr/>
             </p:nvGrpSpPr>
@@ -3086,13 +3043,7 @@
             </p:grpSpPr>
             <p:cxnSp>
               <p:nvCxnSpPr>
-                <p:cNvPr id="17" name="直接连接符 16">
-                  <a:extLst>
-                    <a:ext uri="{FF2B5EF4-FFF2-40B4-BE49-F238E27FC236}">
-                      <a16:creationId xmlns:a16="http://schemas.microsoft.com/office/drawing/2014/main" id="{ABC1975C-D21C-D497-0F86-3E134CD7303F}"/>
-                    </a:ext>
-                  </a:extLst>
-                </p:cNvPr>
+                <p:cNvPr id="17" name="直接连接符 16"/>
                 <p:cNvCxnSpPr/>
                 <p:nvPr/>
               </p:nvCxnSpPr>
@@ -3122,16 +3073,8 @@
             </p:cxnSp>
             <p:cxnSp>
               <p:nvCxnSpPr>
-                <p:cNvPr id="18" name="直接连接符 17">
-                  <a:extLst>
-                    <a:ext uri="{FF2B5EF4-FFF2-40B4-BE49-F238E27FC236}">
-                      <a16:creationId xmlns:a16="http://schemas.microsoft.com/office/drawing/2014/main" id="{DBD39734-4D9F-A73C-0649-32686ABDCA2B}"/>
-                    </a:ext>
-                  </a:extLst>
-                </p:cNvPr>
-                <p:cNvCxnSpPr>
-                  <a:cxnSpLocks/>
-                </p:cNvCxnSpPr>
+                <p:cNvPr id="18" name="直接连接符 17"/>
+                <p:cNvCxnSpPr/>
                 <p:nvPr/>
               </p:nvCxnSpPr>
               <p:spPr>
@@ -3160,16 +3103,8 @@
             </p:cxnSp>
             <p:cxnSp>
               <p:nvCxnSpPr>
-                <p:cNvPr id="19" name="直接连接符 18">
-                  <a:extLst>
-                    <a:ext uri="{FF2B5EF4-FFF2-40B4-BE49-F238E27FC236}">
-                      <a16:creationId xmlns:a16="http://schemas.microsoft.com/office/drawing/2014/main" id="{044F8ACC-7745-BB00-C504-16DBF4867454}"/>
-                    </a:ext>
-                  </a:extLst>
-                </p:cNvPr>
-                <p:cNvCxnSpPr>
-                  <a:cxnSpLocks/>
-                </p:cNvCxnSpPr>
+                <p:cNvPr id="19" name="直接连接符 18"/>
+                <p:cNvCxnSpPr/>
                 <p:nvPr/>
               </p:nvCxnSpPr>
               <p:spPr>
@@ -3199,13 +3134,7 @@
           </p:grpSp>
           <p:grpSp>
             <p:nvGrpSpPr>
-              <p:cNvPr id="20" name="组合 19">
-                <a:extLst>
-                  <a:ext uri="{FF2B5EF4-FFF2-40B4-BE49-F238E27FC236}">
-                    <a16:creationId xmlns:a16="http://schemas.microsoft.com/office/drawing/2014/main" id="{00E6A881-8E48-FEB1-F6AB-FD4EC9641522}"/>
-                  </a:ext>
-                </a:extLst>
-              </p:cNvPr>
+              <p:cNvPr id="20" name="组合 19"/>
               <p:cNvGrpSpPr/>
               <p:nvPr/>
             </p:nvGrpSpPr>
@@ -3219,13 +3148,7 @@
             </p:grpSpPr>
             <p:cxnSp>
               <p:nvCxnSpPr>
-                <p:cNvPr id="21" name="直接连接符 20">
-                  <a:extLst>
-                    <a:ext uri="{FF2B5EF4-FFF2-40B4-BE49-F238E27FC236}">
-                      <a16:creationId xmlns:a16="http://schemas.microsoft.com/office/drawing/2014/main" id="{96C133B4-A86D-9986-2620-196DD8C48BFA}"/>
-                    </a:ext>
-                  </a:extLst>
-                </p:cNvPr>
+                <p:cNvPr id="21" name="直接连接符 20"/>
                 <p:cNvCxnSpPr/>
                 <p:nvPr/>
               </p:nvCxnSpPr>
@@ -3255,16 +3178,8 @@
             </p:cxnSp>
             <p:cxnSp>
               <p:nvCxnSpPr>
-                <p:cNvPr id="22" name="直接连接符 21">
-                  <a:extLst>
-                    <a:ext uri="{FF2B5EF4-FFF2-40B4-BE49-F238E27FC236}">
-                      <a16:creationId xmlns:a16="http://schemas.microsoft.com/office/drawing/2014/main" id="{993F438D-30EA-9557-9D79-89F0FA4F04F3}"/>
-                    </a:ext>
-                  </a:extLst>
-                </p:cNvPr>
-                <p:cNvCxnSpPr>
-                  <a:cxnSpLocks/>
-                </p:cNvCxnSpPr>
+                <p:cNvPr id="22" name="直接连接符 21"/>
+                <p:cNvCxnSpPr/>
                 <p:nvPr/>
               </p:nvCxnSpPr>
               <p:spPr>
@@ -3293,16 +3208,8 @@
             </p:cxnSp>
             <p:cxnSp>
               <p:nvCxnSpPr>
-                <p:cNvPr id="23" name="直接连接符 22">
-                  <a:extLst>
-                    <a:ext uri="{FF2B5EF4-FFF2-40B4-BE49-F238E27FC236}">
-                      <a16:creationId xmlns:a16="http://schemas.microsoft.com/office/drawing/2014/main" id="{C734D5C7-B1D3-FBD3-E7A2-072EEE7EA3D9}"/>
-                    </a:ext>
-                  </a:extLst>
-                </p:cNvPr>
-                <p:cNvCxnSpPr>
-                  <a:cxnSpLocks/>
-                </p:cNvCxnSpPr>
+                <p:cNvPr id="23" name="直接连接符 22"/>
+                <p:cNvCxnSpPr/>
                 <p:nvPr/>
               </p:nvCxnSpPr>
               <p:spPr>
@@ -3332,13 +3239,7 @@
           </p:grpSp>
           <p:grpSp>
             <p:nvGrpSpPr>
-              <p:cNvPr id="24" name="组合 23">
-                <a:extLst>
-                  <a:ext uri="{FF2B5EF4-FFF2-40B4-BE49-F238E27FC236}">
-                    <a16:creationId xmlns:a16="http://schemas.microsoft.com/office/drawing/2014/main" id="{B7370D56-09F1-4CA7-8140-149912A1ECD7}"/>
-                  </a:ext>
-                </a:extLst>
-              </p:cNvPr>
+              <p:cNvPr id="24" name="组合 23"/>
               <p:cNvGrpSpPr/>
               <p:nvPr/>
             </p:nvGrpSpPr>
@@ -3352,13 +3253,7 @@
             </p:grpSpPr>
             <p:cxnSp>
               <p:nvCxnSpPr>
-                <p:cNvPr id="25" name="直接连接符 24">
-                  <a:extLst>
-                    <a:ext uri="{FF2B5EF4-FFF2-40B4-BE49-F238E27FC236}">
-                      <a16:creationId xmlns:a16="http://schemas.microsoft.com/office/drawing/2014/main" id="{E5F3E3D7-C596-6CE5-6588-296432EF1401}"/>
-                    </a:ext>
-                  </a:extLst>
-                </p:cNvPr>
+                <p:cNvPr id="25" name="直接连接符 24"/>
                 <p:cNvCxnSpPr/>
                 <p:nvPr/>
               </p:nvCxnSpPr>
@@ -3388,16 +3283,8 @@
             </p:cxnSp>
             <p:cxnSp>
               <p:nvCxnSpPr>
-                <p:cNvPr id="26" name="直接连接符 25">
-                  <a:extLst>
-                    <a:ext uri="{FF2B5EF4-FFF2-40B4-BE49-F238E27FC236}">
-                      <a16:creationId xmlns:a16="http://schemas.microsoft.com/office/drawing/2014/main" id="{7800BC1E-8778-FD99-3062-20170D20BF6B}"/>
-                    </a:ext>
-                  </a:extLst>
-                </p:cNvPr>
-                <p:cNvCxnSpPr>
-                  <a:cxnSpLocks/>
-                </p:cNvCxnSpPr>
+                <p:cNvPr id="26" name="直接连接符 25"/>
+                <p:cNvCxnSpPr/>
                 <p:nvPr/>
               </p:nvCxnSpPr>
               <p:spPr>
@@ -3426,16 +3313,8 @@
             </p:cxnSp>
             <p:cxnSp>
               <p:nvCxnSpPr>
-                <p:cNvPr id="27" name="直接连接符 26">
-                  <a:extLst>
-                    <a:ext uri="{FF2B5EF4-FFF2-40B4-BE49-F238E27FC236}">
-                      <a16:creationId xmlns:a16="http://schemas.microsoft.com/office/drawing/2014/main" id="{2CAB6A66-56D3-E433-4C91-2DACCA7F83AB}"/>
-                    </a:ext>
-                  </a:extLst>
-                </p:cNvPr>
-                <p:cNvCxnSpPr>
-                  <a:cxnSpLocks/>
-                </p:cNvCxnSpPr>
+                <p:cNvPr id="27" name="直接连接符 26"/>
+                <p:cNvCxnSpPr/>
                 <p:nvPr/>
               </p:nvCxnSpPr>
               <p:spPr>
@@ -3467,13 +3346,7 @@
             <mc:Choice Requires="a14">
               <p:sp>
                 <p:nvSpPr>
-                  <p:cNvPr id="40" name="文本框 39">
-                    <a:extLst>
-                      <a:ext uri="{FF2B5EF4-FFF2-40B4-BE49-F238E27FC236}">
-                        <a16:creationId xmlns:a16="http://schemas.microsoft.com/office/drawing/2014/main" id="{86AE51CD-A645-3717-ADB8-7F2DEA4E898C}"/>
-                      </a:ext>
-                    </a:extLst>
-                  </p:cNvPr>
+                  <p:cNvPr id="40" name="文本框 39"/>
                   <p:cNvSpPr txBox="1"/>
                   <p:nvPr/>
                 </p:nvSpPr>
@@ -3517,13 +3390,7 @@
             <mc:Fallback xmlns="">
               <p:sp>
                 <p:nvSpPr>
-                  <p:cNvPr id="40" name="文本框 39">
-                    <a:extLst>
-                      <a:ext uri="{FF2B5EF4-FFF2-40B4-BE49-F238E27FC236}">
-                        <a16:creationId xmlns:a16="http://schemas.microsoft.com/office/drawing/2014/main" id="{86AE51CD-A645-3717-ADB8-7F2DEA4E898C}"/>
-                      </a:ext>
-                    </a:extLst>
-                  </p:cNvPr>
+                  <p:cNvPr id="40" name="文本框 39"/>
                   <p:cNvSpPr txBox="1">
                     <a:spLocks noRot="1" noChangeAspect="1" noMove="1" noResize="1" noEditPoints="1" noAdjustHandles="1" noChangeArrowheads="1" noChangeShapeType="1" noTextEdit="1"/>
                   </p:cNvSpPr>
@@ -3537,11 +3404,8 @@
                   <a:prstGeom prst="rect">
                     <a:avLst/>
                   </a:prstGeom>
-                  <a:blipFill>
+                  <a:blipFill rotWithShape="1">
                     <a:blip r:embed="rId2"/>
-                    <a:stretch>
-                      <a:fillRect r="-64286"/>
-                    </a:stretch>
                   </a:blipFill>
                 </p:spPr>
                 <p:txBody>
@@ -3563,13 +3427,7 @@
             <mc:Choice Requires="a14">
               <p:sp>
                 <p:nvSpPr>
-                  <p:cNvPr id="41" name="文本框 40">
-                    <a:extLst>
-                      <a:ext uri="{FF2B5EF4-FFF2-40B4-BE49-F238E27FC236}">
-                        <a16:creationId xmlns:a16="http://schemas.microsoft.com/office/drawing/2014/main" id="{134AB8D4-3E1A-F3CF-EF67-1FE4800AD7D2}"/>
-                      </a:ext>
-                    </a:extLst>
-                  </p:cNvPr>
+                  <p:cNvPr id="41" name="文本框 40"/>
                   <p:cNvSpPr txBox="1"/>
                   <p:nvPr/>
                 </p:nvSpPr>
@@ -3622,13 +3480,7 @@
             <mc:Fallback xmlns="">
               <p:sp>
                 <p:nvSpPr>
-                  <p:cNvPr id="41" name="文本框 40">
-                    <a:extLst>
-                      <a:ext uri="{FF2B5EF4-FFF2-40B4-BE49-F238E27FC236}">
-                        <a16:creationId xmlns:a16="http://schemas.microsoft.com/office/drawing/2014/main" id="{134AB8D4-3E1A-F3CF-EF67-1FE4800AD7D2}"/>
-                      </a:ext>
-                    </a:extLst>
-                  </p:cNvPr>
+                  <p:cNvPr id="41" name="文本框 40"/>
                   <p:cNvSpPr txBox="1">
                     <a:spLocks noRot="1" noChangeAspect="1" noMove="1" noResize="1" noEditPoints="1" noAdjustHandles="1" noChangeArrowheads="1" noChangeShapeType="1" noTextEdit="1"/>
                   </p:cNvSpPr>
@@ -3642,11 +3494,8 @@
                   <a:prstGeom prst="rect">
                     <a:avLst/>
                   </a:prstGeom>
-                  <a:blipFill>
+                  <a:blipFill rotWithShape="1">
                     <a:blip r:embed="rId3"/>
-                    <a:stretch>
-                      <a:fillRect r="-235714"/>
-                    </a:stretch>
                   </a:blipFill>
                 </p:spPr>
                 <p:txBody>
@@ -3668,13 +3517,7 @@
             <mc:Choice Requires="a14">
               <p:sp>
                 <p:nvSpPr>
-                  <p:cNvPr id="42" name="文本框 41">
-                    <a:extLst>
-                      <a:ext uri="{FF2B5EF4-FFF2-40B4-BE49-F238E27FC236}">
-                        <a16:creationId xmlns:a16="http://schemas.microsoft.com/office/drawing/2014/main" id="{97B6E20E-9165-DEA2-F5C1-D0B49F81A6BB}"/>
-                      </a:ext>
-                    </a:extLst>
-                  </p:cNvPr>
+                  <p:cNvPr id="42" name="文本框 41"/>
                   <p:cNvSpPr txBox="1"/>
                   <p:nvPr/>
                 </p:nvSpPr>
@@ -3727,13 +3570,7 @@
             <mc:Fallback xmlns="">
               <p:sp>
                 <p:nvSpPr>
-                  <p:cNvPr id="42" name="文本框 41">
-                    <a:extLst>
-                      <a:ext uri="{FF2B5EF4-FFF2-40B4-BE49-F238E27FC236}">
-                        <a16:creationId xmlns:a16="http://schemas.microsoft.com/office/drawing/2014/main" id="{97B6E20E-9165-DEA2-F5C1-D0B49F81A6BB}"/>
-                      </a:ext>
-                    </a:extLst>
-                  </p:cNvPr>
+                  <p:cNvPr id="42" name="文本框 41"/>
                   <p:cNvSpPr txBox="1">
                     <a:spLocks noRot="1" noChangeAspect="1" noMove="1" noResize="1" noEditPoints="1" noAdjustHandles="1" noChangeArrowheads="1" noChangeShapeType="1" noTextEdit="1"/>
                   </p:cNvSpPr>
@@ -3747,11 +3584,8 @@
                   <a:prstGeom prst="rect">
                     <a:avLst/>
                   </a:prstGeom>
-                  <a:blipFill>
+                  <a:blipFill rotWithShape="1">
                     <a:blip r:embed="rId4"/>
-                    <a:stretch>
-                      <a:fillRect r="-414286"/>
-                    </a:stretch>
                   </a:blipFill>
                 </p:spPr>
                 <p:txBody>
@@ -3773,13 +3607,7 @@
             <mc:Choice Requires="a14">
               <p:sp>
                 <p:nvSpPr>
-                  <p:cNvPr id="43" name="文本框 42">
-                    <a:extLst>
-                      <a:ext uri="{FF2B5EF4-FFF2-40B4-BE49-F238E27FC236}">
-                        <a16:creationId xmlns:a16="http://schemas.microsoft.com/office/drawing/2014/main" id="{E4FA83A8-9BC3-5C90-0F48-C0B223CA5361}"/>
-                      </a:ext>
-                    </a:extLst>
-                  </p:cNvPr>
+                  <p:cNvPr id="43" name="文本框 42"/>
                   <p:cNvSpPr txBox="1"/>
                   <p:nvPr/>
                 </p:nvSpPr>
@@ -3832,13 +3660,7 @@
             <mc:Fallback xmlns="">
               <p:sp>
                 <p:nvSpPr>
-                  <p:cNvPr id="43" name="文本框 42">
-                    <a:extLst>
-                      <a:ext uri="{FF2B5EF4-FFF2-40B4-BE49-F238E27FC236}">
-                        <a16:creationId xmlns:a16="http://schemas.microsoft.com/office/drawing/2014/main" id="{E4FA83A8-9BC3-5C90-0F48-C0B223CA5361}"/>
-                      </a:ext>
-                    </a:extLst>
-                  </p:cNvPr>
+                  <p:cNvPr id="43" name="文本框 42"/>
                   <p:cNvSpPr txBox="1">
                     <a:spLocks noRot="1" noChangeAspect="1" noMove="1" noResize="1" noEditPoints="1" noAdjustHandles="1" noChangeArrowheads="1" noChangeShapeType="1" noTextEdit="1"/>
                   </p:cNvSpPr>
@@ -3852,11 +3674,8 @@
                   <a:prstGeom prst="rect">
                     <a:avLst/>
                   </a:prstGeom>
-                  <a:blipFill>
+                  <a:blipFill rotWithShape="1">
                     <a:blip r:embed="rId5"/>
-                    <a:stretch>
-                      <a:fillRect r="-250000"/>
-                    </a:stretch>
                   </a:blipFill>
                 </p:spPr>
                 <p:txBody>
@@ -3878,13 +3697,7 @@
             <mc:Choice Requires="a14">
               <p:sp>
                 <p:nvSpPr>
-                  <p:cNvPr id="44" name="文本框 43">
-                    <a:extLst>
-                      <a:ext uri="{FF2B5EF4-FFF2-40B4-BE49-F238E27FC236}">
-                        <a16:creationId xmlns:a16="http://schemas.microsoft.com/office/drawing/2014/main" id="{065B59E0-AA88-24AA-A532-051D68870381}"/>
-                      </a:ext>
-                    </a:extLst>
-                  </p:cNvPr>
+                  <p:cNvPr id="44" name="文本框 43"/>
                   <p:cNvSpPr txBox="1"/>
                   <p:nvPr/>
                 </p:nvSpPr>
@@ -3937,13 +3750,7 @@
             <mc:Fallback xmlns="">
               <p:sp>
                 <p:nvSpPr>
-                  <p:cNvPr id="44" name="文本框 43">
-                    <a:extLst>
-                      <a:ext uri="{FF2B5EF4-FFF2-40B4-BE49-F238E27FC236}">
-                        <a16:creationId xmlns:a16="http://schemas.microsoft.com/office/drawing/2014/main" id="{065B59E0-AA88-24AA-A532-051D68870381}"/>
-                      </a:ext>
-                    </a:extLst>
-                  </p:cNvPr>
+                  <p:cNvPr id="44" name="文本框 43"/>
                   <p:cNvSpPr txBox="1">
                     <a:spLocks noRot="1" noChangeAspect="1" noMove="1" noResize="1" noEditPoints="1" noAdjustHandles="1" noChangeArrowheads="1" noChangeShapeType="1" noTextEdit="1"/>
                   </p:cNvSpPr>
@@ -3957,11 +3764,8 @@
                   <a:prstGeom prst="rect">
                     <a:avLst/>
                   </a:prstGeom>
-                  <a:blipFill>
+                  <a:blipFill rotWithShape="1">
                     <a:blip r:embed="rId6"/>
-                    <a:stretch>
-                      <a:fillRect r="-432143"/>
-                    </a:stretch>
                   </a:blipFill>
                 </p:spPr>
                 <p:txBody>
@@ -3981,13 +3785,7 @@
           </mc:AlternateContent>
           <p:grpSp>
             <p:nvGrpSpPr>
-              <p:cNvPr id="45" name="组合 44">
-                <a:extLst>
-                  <a:ext uri="{FF2B5EF4-FFF2-40B4-BE49-F238E27FC236}">
-                    <a16:creationId xmlns:a16="http://schemas.microsoft.com/office/drawing/2014/main" id="{155569B9-58F5-DA88-7CC0-10F87D3374DF}"/>
-                  </a:ext>
-                </a:extLst>
-              </p:cNvPr>
+              <p:cNvPr id="45" name="组合 44"/>
               <p:cNvGrpSpPr/>
               <p:nvPr/>
             </p:nvGrpSpPr>
@@ -4001,13 +3799,7 @@
             </p:grpSpPr>
             <p:cxnSp>
               <p:nvCxnSpPr>
-                <p:cNvPr id="46" name="直接连接符 45">
-                  <a:extLst>
-                    <a:ext uri="{FF2B5EF4-FFF2-40B4-BE49-F238E27FC236}">
-                      <a16:creationId xmlns:a16="http://schemas.microsoft.com/office/drawing/2014/main" id="{12E354B6-B23E-7926-75DE-90FA2ABD16F0}"/>
-                    </a:ext>
-                  </a:extLst>
-                </p:cNvPr>
+                <p:cNvPr id="46" name="直接连接符 45"/>
                 <p:cNvCxnSpPr/>
                 <p:nvPr/>
               </p:nvCxnSpPr>
@@ -4037,16 +3829,8 @@
             </p:cxnSp>
             <p:cxnSp>
               <p:nvCxnSpPr>
-                <p:cNvPr id="47" name="直接连接符 46">
-                  <a:extLst>
-                    <a:ext uri="{FF2B5EF4-FFF2-40B4-BE49-F238E27FC236}">
-                      <a16:creationId xmlns:a16="http://schemas.microsoft.com/office/drawing/2014/main" id="{CE9FA6C9-FE45-6DF9-28D8-75BE0DD9E6BD}"/>
-                    </a:ext>
-                  </a:extLst>
-                </p:cNvPr>
-                <p:cNvCxnSpPr>
-                  <a:cxnSpLocks/>
-                </p:cNvCxnSpPr>
+                <p:cNvPr id="47" name="直接连接符 46"/>
+                <p:cNvCxnSpPr/>
                 <p:nvPr/>
               </p:nvCxnSpPr>
               <p:spPr>
@@ -4075,16 +3859,8 @@
             </p:cxnSp>
             <p:cxnSp>
               <p:nvCxnSpPr>
-                <p:cNvPr id="48" name="直接连接符 47">
-                  <a:extLst>
-                    <a:ext uri="{FF2B5EF4-FFF2-40B4-BE49-F238E27FC236}">
-                      <a16:creationId xmlns:a16="http://schemas.microsoft.com/office/drawing/2014/main" id="{873D1DD3-49D8-81A3-9178-D580D80B79D8}"/>
-                    </a:ext>
-                  </a:extLst>
-                </p:cNvPr>
-                <p:cNvCxnSpPr>
-                  <a:cxnSpLocks/>
-                </p:cNvCxnSpPr>
+                <p:cNvPr id="48" name="直接连接符 47"/>
+                <p:cNvCxnSpPr/>
                 <p:nvPr/>
               </p:nvCxnSpPr>
               <p:spPr>
@@ -4116,13 +3892,7 @@
             <mc:Choice Requires="a14">
               <p:sp>
                 <p:nvSpPr>
-                  <p:cNvPr id="49" name="文本框 48">
-                    <a:extLst>
-                      <a:ext uri="{FF2B5EF4-FFF2-40B4-BE49-F238E27FC236}">
-                        <a16:creationId xmlns:a16="http://schemas.microsoft.com/office/drawing/2014/main" id="{AD8E781D-F03F-77F7-1FFE-3E3BC8337B7A}"/>
-                      </a:ext>
-                    </a:extLst>
-                  </p:cNvPr>
+                  <p:cNvPr id="49" name="文本框 48"/>
                   <p:cNvSpPr txBox="1"/>
                   <p:nvPr/>
                 </p:nvSpPr>
@@ -4216,13 +3986,7 @@
             <mc:Fallback xmlns="">
               <p:sp>
                 <p:nvSpPr>
-                  <p:cNvPr id="49" name="文本框 48">
-                    <a:extLst>
-                      <a:ext uri="{FF2B5EF4-FFF2-40B4-BE49-F238E27FC236}">
-                        <a16:creationId xmlns:a16="http://schemas.microsoft.com/office/drawing/2014/main" id="{AD8E781D-F03F-77F7-1FFE-3E3BC8337B7A}"/>
-                      </a:ext>
-                    </a:extLst>
-                  </p:cNvPr>
+                  <p:cNvPr id="49" name="文本框 48"/>
                   <p:cNvSpPr txBox="1">
                     <a:spLocks noRot="1" noChangeAspect="1" noMove="1" noResize="1" noEditPoints="1" noAdjustHandles="1" noChangeArrowheads="1" noChangeShapeType="1" noTextEdit="1"/>
                   </p:cNvSpPr>
@@ -4236,11 +4000,8 @@
                   <a:prstGeom prst="rect">
                     <a:avLst/>
                   </a:prstGeom>
-                  <a:blipFill>
+                  <a:blipFill rotWithShape="1">
                     <a:blip r:embed="rId7"/>
-                    <a:stretch>
-                      <a:fillRect r="-203571"/>
-                    </a:stretch>
                   </a:blipFill>
                 </p:spPr>
                 <p:txBody>
@@ -4263,13 +4024,7 @@
           <mc:Choice Requires="a14">
             <p:sp>
               <p:nvSpPr>
-                <p:cNvPr id="3" name="文本框 2">
-                  <a:extLst>
-                    <a:ext uri="{FF2B5EF4-FFF2-40B4-BE49-F238E27FC236}">
-                      <a16:creationId xmlns:a16="http://schemas.microsoft.com/office/drawing/2014/main" id="{39E18D8E-F8D3-8F46-B935-1F45EEC39D85}"/>
-                    </a:ext>
-                  </a:extLst>
-                </p:cNvPr>
+                <p:cNvPr id="3" name="文本框 2"/>
                 <p:cNvSpPr txBox="1"/>
                 <p:nvPr/>
               </p:nvSpPr>
@@ -4313,13 +4068,7 @@
           <mc:Fallback xmlns="">
             <p:sp>
               <p:nvSpPr>
-                <p:cNvPr id="3" name="文本框 2">
-                  <a:extLst>
-                    <a:ext uri="{FF2B5EF4-FFF2-40B4-BE49-F238E27FC236}">
-                      <a16:creationId xmlns:a16="http://schemas.microsoft.com/office/drawing/2014/main" id="{39E18D8E-F8D3-8F46-B935-1F45EEC39D85}"/>
-                    </a:ext>
-                  </a:extLst>
-                </p:cNvPr>
+                <p:cNvPr id="3" name="文本框 2"/>
                 <p:cNvSpPr txBox="1">
                   <a:spLocks noRot="1" noChangeAspect="1" noMove="1" noResize="1" noEditPoints="1" noAdjustHandles="1" noChangeArrowheads="1" noChangeShapeType="1" noTextEdit="1"/>
                 </p:cNvSpPr>
@@ -4333,11 +4082,8 @@
                 <a:prstGeom prst="rect">
                   <a:avLst/>
                 </a:prstGeom>
-                <a:blipFill>
+                <a:blipFill rotWithShape="1">
                   <a:blip r:embed="rId8"/>
-                  <a:stretch>
-                    <a:fillRect r="-71429"/>
-                  </a:stretch>
                 </a:blipFill>
               </p:spPr>
               <p:txBody>
@@ -4359,13 +4105,7 @@
           <mc:Choice Requires="a14">
             <p:sp>
               <p:nvSpPr>
-                <p:cNvPr id="4" name="文本框 3">
-                  <a:extLst>
-                    <a:ext uri="{FF2B5EF4-FFF2-40B4-BE49-F238E27FC236}">
-                      <a16:creationId xmlns:a16="http://schemas.microsoft.com/office/drawing/2014/main" id="{6992F0BE-85D2-FB44-DDB0-8CCE97AE34DA}"/>
-                    </a:ext>
-                  </a:extLst>
-                </p:cNvPr>
+                <p:cNvPr id="4" name="文本框 3"/>
                 <p:cNvSpPr txBox="1"/>
                 <p:nvPr/>
               </p:nvSpPr>
@@ -4409,13 +4149,7 @@
           <mc:Fallback xmlns="">
             <p:sp>
               <p:nvSpPr>
-                <p:cNvPr id="4" name="文本框 3">
-                  <a:extLst>
-                    <a:ext uri="{FF2B5EF4-FFF2-40B4-BE49-F238E27FC236}">
-                      <a16:creationId xmlns:a16="http://schemas.microsoft.com/office/drawing/2014/main" id="{6992F0BE-85D2-FB44-DDB0-8CCE97AE34DA}"/>
-                    </a:ext>
-                  </a:extLst>
-                </p:cNvPr>
+                <p:cNvPr id="4" name="文本框 3"/>
                 <p:cNvSpPr txBox="1">
                   <a:spLocks noRot="1" noChangeAspect="1" noMove="1" noResize="1" noEditPoints="1" noAdjustHandles="1" noChangeArrowheads="1" noChangeShapeType="1" noTextEdit="1"/>
                 </p:cNvSpPr>
@@ -4429,11 +4163,8 @@
                 <a:prstGeom prst="rect">
                   <a:avLst/>
                 </a:prstGeom>
-                <a:blipFill>
-                  <a:blip r:embed="rId9"/>
-                  <a:stretch>
-                    <a:fillRect r="-71429"/>
-                  </a:stretch>
+                <a:blipFill rotWithShape="1">
+                  <a:blip r:embed="rId8"/>
                 </a:blipFill>
               </p:spPr>
               <p:txBody>
@@ -4455,13 +4186,7 @@
           <mc:Choice Requires="a14">
             <p:sp>
               <p:nvSpPr>
-                <p:cNvPr id="6" name="文本框 5">
-                  <a:extLst>
-                    <a:ext uri="{FF2B5EF4-FFF2-40B4-BE49-F238E27FC236}">
-                      <a16:creationId xmlns:a16="http://schemas.microsoft.com/office/drawing/2014/main" id="{F806CD5A-0FC7-FDEA-6C32-1F9A233DEB4A}"/>
-                    </a:ext>
-                  </a:extLst>
-                </p:cNvPr>
+                <p:cNvPr id="6" name="文本框 5"/>
                 <p:cNvSpPr txBox="1"/>
                 <p:nvPr/>
               </p:nvSpPr>
@@ -4505,13 +4230,7 @@
           <mc:Fallback xmlns="">
             <p:sp>
               <p:nvSpPr>
-                <p:cNvPr id="6" name="文本框 5">
-                  <a:extLst>
-                    <a:ext uri="{FF2B5EF4-FFF2-40B4-BE49-F238E27FC236}">
-                      <a16:creationId xmlns:a16="http://schemas.microsoft.com/office/drawing/2014/main" id="{F806CD5A-0FC7-FDEA-6C32-1F9A233DEB4A}"/>
-                    </a:ext>
-                  </a:extLst>
-                </p:cNvPr>
+                <p:cNvPr id="6" name="文本框 5"/>
                 <p:cNvSpPr txBox="1">
                   <a:spLocks noRot="1" noChangeAspect="1" noMove="1" noResize="1" noEditPoints="1" noAdjustHandles="1" noChangeArrowheads="1" noChangeShapeType="1" noTextEdit="1"/>
                 </p:cNvSpPr>
@@ -4525,11 +4244,8 @@
                 <a:prstGeom prst="rect">
                   <a:avLst/>
                 </a:prstGeom>
-                <a:blipFill>
-                  <a:blip r:embed="rId10"/>
-                  <a:stretch>
-                    <a:fillRect r="-68966"/>
-                  </a:stretch>
+                <a:blipFill rotWithShape="1">
+                  <a:blip r:embed="rId8"/>
                 </a:blipFill>
               </p:spPr>
               <p:txBody>
@@ -4551,13 +4267,7 @@
           <mc:Choice Requires="a14">
             <p:sp>
               <p:nvSpPr>
-                <p:cNvPr id="7" name="文本框 6">
-                  <a:extLst>
-                    <a:ext uri="{FF2B5EF4-FFF2-40B4-BE49-F238E27FC236}">
-                      <a16:creationId xmlns:a16="http://schemas.microsoft.com/office/drawing/2014/main" id="{C76A69C8-41CC-6269-BC02-F40E4548C419}"/>
-                    </a:ext>
-                  </a:extLst>
-                </p:cNvPr>
+                <p:cNvPr id="7" name="文本框 6"/>
                 <p:cNvSpPr txBox="1"/>
                 <p:nvPr/>
               </p:nvSpPr>
@@ -4601,13 +4311,7 @@
           <mc:Fallback xmlns="">
             <p:sp>
               <p:nvSpPr>
-                <p:cNvPr id="7" name="文本框 6">
-                  <a:extLst>
-                    <a:ext uri="{FF2B5EF4-FFF2-40B4-BE49-F238E27FC236}">
-                      <a16:creationId xmlns:a16="http://schemas.microsoft.com/office/drawing/2014/main" id="{C76A69C8-41CC-6269-BC02-F40E4548C419}"/>
-                    </a:ext>
-                  </a:extLst>
-                </p:cNvPr>
+                <p:cNvPr id="7" name="文本框 6"/>
                 <p:cNvSpPr txBox="1">
                   <a:spLocks noRot="1" noChangeAspect="1" noMove="1" noResize="1" noEditPoints="1" noAdjustHandles="1" noChangeArrowheads="1" noChangeShapeType="1" noTextEdit="1"/>
                 </p:cNvSpPr>
@@ -4621,11 +4325,8 @@
                 <a:prstGeom prst="rect">
                   <a:avLst/>
                 </a:prstGeom>
-                <a:blipFill>
-                  <a:blip r:embed="rId11"/>
-                  <a:stretch>
-                    <a:fillRect r="-71429"/>
-                  </a:stretch>
+                <a:blipFill rotWithShape="1">
+                  <a:blip r:embed="rId8"/>
                 </a:blipFill>
               </p:spPr>
               <p:txBody>
@@ -4645,11 +4346,6 @@
         </mc:AlternateContent>
       </p:grpSp>
     </p:spTree>
-    <p:extLst>
-      <p:ext uri="{BB962C8B-B14F-4D97-AF65-F5344CB8AC3E}">
-        <p14:creationId xmlns:p14="http://schemas.microsoft.com/office/powerpoint/2010/main" val="2462735020"/>
-      </p:ext>
-    </p:extLst>
   </p:cSld>
   <p:clrMapOvr>
     <a:masterClrMapping/>
@@ -4676,13 +4372,7 @@
       </p:grpSpPr>
       <p:grpSp>
         <p:nvGrpSpPr>
-          <p:cNvPr id="10" name="组合 9">
-            <a:extLst>
-              <a:ext uri="{FF2B5EF4-FFF2-40B4-BE49-F238E27FC236}">
-                <a16:creationId xmlns:a16="http://schemas.microsoft.com/office/drawing/2014/main" id="{F82D0AAB-5EC1-72C0-E932-B91A34083768}"/>
-              </a:ext>
-            </a:extLst>
-          </p:cNvPr>
+          <p:cNvPr id="10" name="组合 9"/>
           <p:cNvGrpSpPr/>
           <p:nvPr/>
         </p:nvGrpSpPr>
@@ -4696,13 +4386,7 @@
         </p:grpSpPr>
         <p:sp>
           <p:nvSpPr>
-            <p:cNvPr id="4" name="直角三角形 3">
-              <a:extLst>
-                <a:ext uri="{FF2B5EF4-FFF2-40B4-BE49-F238E27FC236}">
-                  <a16:creationId xmlns:a16="http://schemas.microsoft.com/office/drawing/2014/main" id="{85D552F8-F4C8-FA89-D47A-CBFBE587E6A8}"/>
-                </a:ext>
-              </a:extLst>
-            </p:cNvPr>
+            <p:cNvPr id="4" name="直角三角形 3"/>
             <p:cNvSpPr/>
             <p:nvPr/>
           </p:nvSpPr>
@@ -4748,13 +4432,7 @@
         </p:sp>
         <p:sp>
           <p:nvSpPr>
-            <p:cNvPr id="5" name="弧形 4">
-              <a:extLst>
-                <a:ext uri="{FF2B5EF4-FFF2-40B4-BE49-F238E27FC236}">
-                  <a16:creationId xmlns:a16="http://schemas.microsoft.com/office/drawing/2014/main" id="{D7332A8F-11B9-55FF-9A2C-C960B982CFDF}"/>
-                </a:ext>
-              </a:extLst>
-            </p:cNvPr>
+            <p:cNvPr id="5" name="弧形 4"/>
             <p:cNvSpPr/>
             <p:nvPr/>
           </p:nvSpPr>
@@ -4802,13 +4480,7 @@
           <mc:Choice Requires="a14">
             <p:sp>
               <p:nvSpPr>
-                <p:cNvPr id="6" name="文本框 5">
-                  <a:extLst>
-                    <a:ext uri="{FF2B5EF4-FFF2-40B4-BE49-F238E27FC236}">
-                      <a16:creationId xmlns:a16="http://schemas.microsoft.com/office/drawing/2014/main" id="{DBC62684-2063-208B-7A98-D582163349BD}"/>
-                    </a:ext>
-                  </a:extLst>
-                </p:cNvPr>
+                <p:cNvPr id="6" name="文本框 5"/>
                 <p:cNvSpPr txBox="1"/>
                 <p:nvPr/>
               </p:nvSpPr>
@@ -4852,13 +4524,7 @@
           <mc:Fallback xmlns="">
             <p:sp>
               <p:nvSpPr>
-                <p:cNvPr id="6" name="文本框 5">
-                  <a:extLst>
-                    <a:ext uri="{FF2B5EF4-FFF2-40B4-BE49-F238E27FC236}">
-                      <a16:creationId xmlns:a16="http://schemas.microsoft.com/office/drawing/2014/main" id="{DBC62684-2063-208B-7A98-D582163349BD}"/>
-                    </a:ext>
-                  </a:extLst>
-                </p:cNvPr>
+                <p:cNvPr id="6" name="文本框 5"/>
                 <p:cNvSpPr txBox="1">
                   <a:spLocks noRot="1" noChangeAspect="1" noMove="1" noResize="1" noEditPoints="1" noAdjustHandles="1" noChangeArrowheads="1" noChangeShapeType="1" noTextEdit="1"/>
                 </p:cNvSpPr>
@@ -4872,11 +4538,8 @@
                 <a:prstGeom prst="rect">
                   <a:avLst/>
                 </a:prstGeom>
-                <a:blipFill>
+                <a:blipFill rotWithShape="1">
                   <a:blip r:embed="rId2"/>
-                  <a:stretch>
-                    <a:fillRect r="-53571"/>
-                  </a:stretch>
                 </a:blipFill>
               </p:spPr>
               <p:txBody>
@@ -4898,13 +4561,7 @@
           <mc:Choice Requires="a14">
             <p:sp>
               <p:nvSpPr>
-                <p:cNvPr id="7" name="文本框 6">
-                  <a:extLst>
-                    <a:ext uri="{FF2B5EF4-FFF2-40B4-BE49-F238E27FC236}">
-                      <a16:creationId xmlns:a16="http://schemas.microsoft.com/office/drawing/2014/main" id="{14CF7FCD-E754-1F01-0884-0082C3A80F24}"/>
-                    </a:ext>
-                  </a:extLst>
-                </p:cNvPr>
+                <p:cNvPr id="7" name="文本框 6"/>
                 <p:cNvSpPr txBox="1"/>
                 <p:nvPr/>
               </p:nvSpPr>
@@ -4948,13 +4605,7 @@
           <mc:Fallback xmlns="">
             <p:sp>
               <p:nvSpPr>
-                <p:cNvPr id="7" name="文本框 6">
-                  <a:extLst>
-                    <a:ext uri="{FF2B5EF4-FFF2-40B4-BE49-F238E27FC236}">
-                      <a16:creationId xmlns:a16="http://schemas.microsoft.com/office/drawing/2014/main" id="{14CF7FCD-E754-1F01-0884-0082C3A80F24}"/>
-                    </a:ext>
-                  </a:extLst>
-                </p:cNvPr>
+                <p:cNvPr id="7" name="文本框 6"/>
                 <p:cNvSpPr txBox="1">
                   <a:spLocks noRot="1" noChangeAspect="1" noMove="1" noResize="1" noEditPoints="1" noAdjustHandles="1" noChangeArrowheads="1" noChangeShapeType="1" noTextEdit="1"/>
                 </p:cNvSpPr>
@@ -4968,11 +4619,8 @@
                 <a:prstGeom prst="rect">
                   <a:avLst/>
                 </a:prstGeom>
-                <a:blipFill>
+                <a:blipFill rotWithShape="1">
                   <a:blip r:embed="rId3"/>
-                  <a:stretch>
-                    <a:fillRect r="-71429"/>
-                  </a:stretch>
                 </a:blipFill>
               </p:spPr>
               <p:txBody>
@@ -4994,13 +4642,7 @@
           <mc:Choice Requires="a14">
             <p:sp>
               <p:nvSpPr>
-                <p:cNvPr id="8" name="文本框 7">
-                  <a:extLst>
-                    <a:ext uri="{FF2B5EF4-FFF2-40B4-BE49-F238E27FC236}">
-                      <a16:creationId xmlns:a16="http://schemas.microsoft.com/office/drawing/2014/main" id="{D0E99939-2836-C09D-1CC0-10803C148940}"/>
-                    </a:ext>
-                  </a:extLst>
-                </p:cNvPr>
+                <p:cNvPr id="8" name="文本框 7"/>
                 <p:cNvSpPr txBox="1"/>
                 <p:nvPr/>
               </p:nvSpPr>
@@ -5044,13 +4686,7 @@
           <mc:Fallback xmlns="">
             <p:sp>
               <p:nvSpPr>
-                <p:cNvPr id="8" name="文本框 7">
-                  <a:extLst>
-                    <a:ext uri="{FF2B5EF4-FFF2-40B4-BE49-F238E27FC236}">
-                      <a16:creationId xmlns:a16="http://schemas.microsoft.com/office/drawing/2014/main" id="{D0E99939-2836-C09D-1CC0-10803C148940}"/>
-                    </a:ext>
-                  </a:extLst>
-                </p:cNvPr>
+                <p:cNvPr id="8" name="文本框 7"/>
                 <p:cNvSpPr txBox="1">
                   <a:spLocks noRot="1" noChangeAspect="1" noMove="1" noResize="1" noEditPoints="1" noAdjustHandles="1" noChangeArrowheads="1" noChangeShapeType="1" noTextEdit="1"/>
                 </p:cNvSpPr>
@@ -5064,11 +4700,8 @@
                 <a:prstGeom prst="rect">
                   <a:avLst/>
                 </a:prstGeom>
-                <a:blipFill>
+                <a:blipFill rotWithShape="1">
                   <a:blip r:embed="rId4"/>
-                  <a:stretch>
-                    <a:fillRect r="-64286"/>
-                  </a:stretch>
                 </a:blipFill>
               </p:spPr>
               <p:txBody>
@@ -5090,13 +4723,7 @@
           <mc:Choice Requires="a14">
             <p:sp>
               <p:nvSpPr>
-                <p:cNvPr id="9" name="文本框 8">
-                  <a:extLst>
-                    <a:ext uri="{FF2B5EF4-FFF2-40B4-BE49-F238E27FC236}">
-                      <a16:creationId xmlns:a16="http://schemas.microsoft.com/office/drawing/2014/main" id="{12EF7F91-F877-2F4F-CAE7-EE4C3B069AE3}"/>
-                    </a:ext>
-                  </a:extLst>
-                </p:cNvPr>
+                <p:cNvPr id="9" name="文本框 8"/>
                 <p:cNvSpPr txBox="1"/>
                 <p:nvPr/>
               </p:nvSpPr>
@@ -5203,13 +4830,7 @@
           <mc:Fallback xmlns="">
             <p:sp>
               <p:nvSpPr>
-                <p:cNvPr id="9" name="文本框 8">
-                  <a:extLst>
-                    <a:ext uri="{FF2B5EF4-FFF2-40B4-BE49-F238E27FC236}">
-                      <a16:creationId xmlns:a16="http://schemas.microsoft.com/office/drawing/2014/main" id="{12EF7F91-F877-2F4F-CAE7-EE4C3B069AE3}"/>
-                    </a:ext>
-                  </a:extLst>
-                </p:cNvPr>
+                <p:cNvPr id="9" name="文本框 8"/>
                 <p:cNvSpPr txBox="1">
                   <a:spLocks noRot="1" noChangeAspect="1" noMove="1" noResize="1" noEditPoints="1" noAdjustHandles="1" noChangeArrowheads="1" noChangeShapeType="1" noTextEdit="1"/>
                 </p:cNvSpPr>
@@ -5223,11 +4844,8 @@
                 <a:prstGeom prst="rect">
                   <a:avLst/>
                 </a:prstGeom>
-                <a:blipFill>
+                <a:blipFill rotWithShape="1">
                   <a:blip r:embed="rId5"/>
-                  <a:stretch>
-                    <a:fillRect/>
-                  </a:stretch>
                 </a:blipFill>
               </p:spPr>
               <p:txBody>
@@ -5248,13 +4866,7 @@
       </p:grpSp>
       <p:grpSp>
         <p:nvGrpSpPr>
-          <p:cNvPr id="11" name="组合 10">
-            <a:extLst>
-              <a:ext uri="{FF2B5EF4-FFF2-40B4-BE49-F238E27FC236}">
-                <a16:creationId xmlns:a16="http://schemas.microsoft.com/office/drawing/2014/main" id="{91A8361C-3EEF-065D-2944-8AAC26C124D6}"/>
-              </a:ext>
-            </a:extLst>
-          </p:cNvPr>
+          <p:cNvPr id="11" name="组合 10"/>
           <p:cNvGrpSpPr/>
           <p:nvPr/>
         </p:nvGrpSpPr>
@@ -5268,13 +4880,7 @@
         </p:grpSpPr>
         <p:sp>
           <p:nvSpPr>
-            <p:cNvPr id="12" name="直角三角形 11">
-              <a:extLst>
-                <a:ext uri="{FF2B5EF4-FFF2-40B4-BE49-F238E27FC236}">
-                  <a16:creationId xmlns:a16="http://schemas.microsoft.com/office/drawing/2014/main" id="{72ECADD0-B44D-E7DB-FDDD-42A392CE4CC0}"/>
-                </a:ext>
-              </a:extLst>
-            </p:cNvPr>
+            <p:cNvPr id="12" name="直角三角形 11"/>
             <p:cNvSpPr/>
             <p:nvPr/>
           </p:nvSpPr>
@@ -5320,13 +4926,7 @@
         </p:sp>
         <p:sp>
           <p:nvSpPr>
-            <p:cNvPr id="13" name="弧形 12">
-              <a:extLst>
-                <a:ext uri="{FF2B5EF4-FFF2-40B4-BE49-F238E27FC236}">
-                  <a16:creationId xmlns:a16="http://schemas.microsoft.com/office/drawing/2014/main" id="{8D14C9FB-765B-751C-A0B0-5B25C6C81F53}"/>
-                </a:ext>
-              </a:extLst>
-            </p:cNvPr>
+            <p:cNvPr id="13" name="弧形 12"/>
             <p:cNvSpPr/>
             <p:nvPr/>
           </p:nvSpPr>
@@ -5374,13 +4974,7 @@
           <mc:Choice Requires="a14">
             <p:sp>
               <p:nvSpPr>
-                <p:cNvPr id="14" name="文本框 13">
-                  <a:extLst>
-                    <a:ext uri="{FF2B5EF4-FFF2-40B4-BE49-F238E27FC236}">
-                      <a16:creationId xmlns:a16="http://schemas.microsoft.com/office/drawing/2014/main" id="{F807C4C5-ACF9-F6DA-3538-0E52B74D93B1}"/>
-                    </a:ext>
-                  </a:extLst>
-                </p:cNvPr>
+                <p:cNvPr id="14" name="文本框 13"/>
                 <p:cNvSpPr txBox="1"/>
                 <p:nvPr/>
               </p:nvSpPr>
@@ -5424,13 +5018,7 @@
           <mc:Fallback xmlns="">
             <p:sp>
               <p:nvSpPr>
-                <p:cNvPr id="14" name="文本框 13">
-                  <a:extLst>
-                    <a:ext uri="{FF2B5EF4-FFF2-40B4-BE49-F238E27FC236}">
-                      <a16:creationId xmlns:a16="http://schemas.microsoft.com/office/drawing/2014/main" id="{F807C4C5-ACF9-F6DA-3538-0E52B74D93B1}"/>
-                    </a:ext>
-                  </a:extLst>
-                </p:cNvPr>
+                <p:cNvPr id="14" name="文本框 13"/>
                 <p:cNvSpPr txBox="1">
                   <a:spLocks noRot="1" noChangeAspect="1" noMove="1" noResize="1" noEditPoints="1" noAdjustHandles="1" noChangeArrowheads="1" noChangeShapeType="1" noTextEdit="1"/>
                 </p:cNvSpPr>
@@ -5444,11 +5032,8 @@
                 <a:prstGeom prst="rect">
                   <a:avLst/>
                 </a:prstGeom>
-                <a:blipFill>
-                  <a:blip r:embed="rId6"/>
-                  <a:stretch>
-                    <a:fillRect r="-50000"/>
-                  </a:stretch>
+                <a:blipFill rotWithShape="1">
+                  <a:blip r:embed="rId2"/>
                 </a:blipFill>
               </p:spPr>
               <p:txBody>
@@ -5470,13 +5055,7 @@
           <mc:Choice Requires="a14">
             <p:sp>
               <p:nvSpPr>
-                <p:cNvPr id="15" name="文本框 14">
-                  <a:extLst>
-                    <a:ext uri="{FF2B5EF4-FFF2-40B4-BE49-F238E27FC236}">
-                      <a16:creationId xmlns:a16="http://schemas.microsoft.com/office/drawing/2014/main" id="{7E6FD05A-9E31-5868-A919-DBB6D8F9E706}"/>
-                    </a:ext>
-                  </a:extLst>
-                </p:cNvPr>
+                <p:cNvPr id="15" name="文本框 14"/>
                 <p:cNvSpPr txBox="1"/>
                 <p:nvPr/>
               </p:nvSpPr>
@@ -5520,13 +5099,7 @@
           <mc:Fallback xmlns="">
             <p:sp>
               <p:nvSpPr>
-                <p:cNvPr id="15" name="文本框 14">
-                  <a:extLst>
-                    <a:ext uri="{FF2B5EF4-FFF2-40B4-BE49-F238E27FC236}">
-                      <a16:creationId xmlns:a16="http://schemas.microsoft.com/office/drawing/2014/main" id="{7E6FD05A-9E31-5868-A919-DBB6D8F9E706}"/>
-                    </a:ext>
-                  </a:extLst>
-                </p:cNvPr>
+                <p:cNvPr id="15" name="文本框 14"/>
                 <p:cNvSpPr txBox="1">
                   <a:spLocks noRot="1" noChangeAspect="1" noMove="1" noResize="1" noEditPoints="1" noAdjustHandles="1" noChangeArrowheads="1" noChangeShapeType="1" noTextEdit="1"/>
                 </p:cNvSpPr>
@@ -5540,11 +5113,8 @@
                 <a:prstGeom prst="rect">
                   <a:avLst/>
                 </a:prstGeom>
-                <a:blipFill>
-                  <a:blip r:embed="rId7"/>
-                  <a:stretch>
-                    <a:fillRect r="-71429"/>
-                  </a:stretch>
+                <a:blipFill rotWithShape="1">
+                  <a:blip r:embed="rId3"/>
                 </a:blipFill>
               </p:spPr>
               <p:txBody>
@@ -5566,13 +5136,7 @@
           <mc:Choice Requires="a14">
             <p:sp>
               <p:nvSpPr>
-                <p:cNvPr id="16" name="文本框 15">
-                  <a:extLst>
-                    <a:ext uri="{FF2B5EF4-FFF2-40B4-BE49-F238E27FC236}">
-                      <a16:creationId xmlns:a16="http://schemas.microsoft.com/office/drawing/2014/main" id="{C9716BE4-F162-B652-C8B3-698A78639EF2}"/>
-                    </a:ext>
-                  </a:extLst>
-                </p:cNvPr>
+                <p:cNvPr id="16" name="文本框 15"/>
                 <p:cNvSpPr txBox="1"/>
                 <p:nvPr/>
               </p:nvSpPr>
@@ -5616,13 +5180,7 @@
           <mc:Fallback xmlns="">
             <p:sp>
               <p:nvSpPr>
-                <p:cNvPr id="16" name="文本框 15">
-                  <a:extLst>
-                    <a:ext uri="{FF2B5EF4-FFF2-40B4-BE49-F238E27FC236}">
-                      <a16:creationId xmlns:a16="http://schemas.microsoft.com/office/drawing/2014/main" id="{C9716BE4-F162-B652-C8B3-698A78639EF2}"/>
-                    </a:ext>
-                  </a:extLst>
-                </p:cNvPr>
+                <p:cNvPr id="16" name="文本框 15"/>
                 <p:cNvSpPr txBox="1">
                   <a:spLocks noRot="1" noChangeAspect="1" noMove="1" noResize="1" noEditPoints="1" noAdjustHandles="1" noChangeArrowheads="1" noChangeShapeType="1" noTextEdit="1"/>
                 </p:cNvSpPr>
@@ -5636,11 +5194,8 @@
                 <a:prstGeom prst="rect">
                   <a:avLst/>
                 </a:prstGeom>
-                <a:blipFill>
-                  <a:blip r:embed="rId8"/>
-                  <a:stretch>
-                    <a:fillRect r="-64286"/>
-                  </a:stretch>
+                <a:blipFill rotWithShape="1">
+                  <a:blip r:embed="rId4"/>
                 </a:blipFill>
               </p:spPr>
               <p:txBody>
@@ -5662,13 +5217,7 @@
           <mc:Choice Requires="a14">
             <p:sp>
               <p:nvSpPr>
-                <p:cNvPr id="17" name="文本框 16">
-                  <a:extLst>
-                    <a:ext uri="{FF2B5EF4-FFF2-40B4-BE49-F238E27FC236}">
-                      <a16:creationId xmlns:a16="http://schemas.microsoft.com/office/drawing/2014/main" id="{B9BF9120-1DB4-A2E4-4AD7-F6DCBDB69C69}"/>
-                    </a:ext>
-                  </a:extLst>
-                </p:cNvPr>
+                <p:cNvPr id="17" name="文本框 16"/>
                 <p:cNvSpPr txBox="1"/>
                 <p:nvPr/>
               </p:nvSpPr>
@@ -5775,13 +5324,7 @@
           <mc:Fallback xmlns="">
             <p:sp>
               <p:nvSpPr>
-                <p:cNvPr id="17" name="文本框 16">
-                  <a:extLst>
-                    <a:ext uri="{FF2B5EF4-FFF2-40B4-BE49-F238E27FC236}">
-                      <a16:creationId xmlns:a16="http://schemas.microsoft.com/office/drawing/2014/main" id="{B9BF9120-1DB4-A2E4-4AD7-F6DCBDB69C69}"/>
-                    </a:ext>
-                  </a:extLst>
-                </p:cNvPr>
+                <p:cNvPr id="17" name="文本框 16"/>
                 <p:cNvSpPr txBox="1">
                   <a:spLocks noRot="1" noChangeAspect="1" noMove="1" noResize="1" noEditPoints="1" noAdjustHandles="1" noChangeArrowheads="1" noChangeShapeType="1" noTextEdit="1"/>
                 </p:cNvSpPr>
@@ -5795,11 +5338,8 @@
                 <a:prstGeom prst="rect">
                   <a:avLst/>
                 </a:prstGeom>
-                <a:blipFill>
-                  <a:blip r:embed="rId9"/>
-                  <a:stretch>
-                    <a:fillRect/>
-                  </a:stretch>
+                <a:blipFill rotWithShape="1">
+                  <a:blip r:embed="rId6"/>
                 </a:blipFill>
               </p:spPr>
               <p:txBody>
@@ -5820,13 +5360,7 @@
       </p:grpSp>
       <p:grpSp>
         <p:nvGrpSpPr>
-          <p:cNvPr id="44" name="组合 43">
-            <a:extLst>
-              <a:ext uri="{FF2B5EF4-FFF2-40B4-BE49-F238E27FC236}">
-                <a16:creationId xmlns:a16="http://schemas.microsoft.com/office/drawing/2014/main" id="{0AC0D015-86E6-4BB0-9173-AF43C886A576}"/>
-              </a:ext>
-            </a:extLst>
-          </p:cNvPr>
+          <p:cNvPr id="44" name="组合 43"/>
           <p:cNvGrpSpPr/>
           <p:nvPr/>
         </p:nvGrpSpPr>
@@ -5840,13 +5374,7 @@
         </p:grpSpPr>
         <p:grpSp>
           <p:nvGrpSpPr>
-            <p:cNvPr id="43" name="组合 42">
-              <a:extLst>
-                <a:ext uri="{FF2B5EF4-FFF2-40B4-BE49-F238E27FC236}">
-                  <a16:creationId xmlns:a16="http://schemas.microsoft.com/office/drawing/2014/main" id="{89248939-4008-B3E4-E993-BBA5B6311451}"/>
-                </a:ext>
-              </a:extLst>
-            </p:cNvPr>
+            <p:cNvPr id="43" name="组合 42"/>
             <p:cNvGrpSpPr/>
             <p:nvPr/>
           </p:nvGrpSpPr>
@@ -5860,13 +5388,7 @@
           </p:grpSpPr>
           <p:grpSp>
             <p:nvGrpSpPr>
-              <p:cNvPr id="26" name="组合 25">
-                <a:extLst>
-                  <a:ext uri="{FF2B5EF4-FFF2-40B4-BE49-F238E27FC236}">
-                    <a16:creationId xmlns:a16="http://schemas.microsoft.com/office/drawing/2014/main" id="{69F7D8F1-C6D7-18B4-6F26-87B8B8F15895}"/>
-                  </a:ext>
-                </a:extLst>
-              </p:cNvPr>
+              <p:cNvPr id="26" name="组合 25"/>
               <p:cNvGrpSpPr/>
               <p:nvPr/>
             </p:nvGrpSpPr>
@@ -5880,13 +5402,7 @@
             </p:grpSpPr>
             <p:grpSp>
               <p:nvGrpSpPr>
-                <p:cNvPr id="18" name="组合 17">
-                  <a:extLst>
-                    <a:ext uri="{FF2B5EF4-FFF2-40B4-BE49-F238E27FC236}">
-                      <a16:creationId xmlns:a16="http://schemas.microsoft.com/office/drawing/2014/main" id="{296F8E48-40A8-8470-D60A-15A3CF62639F}"/>
-                    </a:ext>
-                  </a:extLst>
-                </p:cNvPr>
+                <p:cNvPr id="18" name="组合 17"/>
                 <p:cNvGrpSpPr/>
                 <p:nvPr/>
               </p:nvGrpSpPr>
@@ -5900,13 +5416,7 @@
               </p:grpSpPr>
               <p:sp>
                 <p:nvSpPr>
-                  <p:cNvPr id="19" name="直角三角形 18">
-                    <a:extLst>
-                      <a:ext uri="{FF2B5EF4-FFF2-40B4-BE49-F238E27FC236}">
-                        <a16:creationId xmlns:a16="http://schemas.microsoft.com/office/drawing/2014/main" id="{667F97F1-C818-3F8E-DA30-B31CBDC805A0}"/>
-                      </a:ext>
-                    </a:extLst>
-                  </p:cNvPr>
+                  <p:cNvPr id="19" name="直角三角形 18"/>
                   <p:cNvSpPr/>
                   <p:nvPr/>
                 </p:nvSpPr>
@@ -5952,13 +5462,7 @@
               </p:sp>
               <p:sp>
                 <p:nvSpPr>
-                  <p:cNvPr id="20" name="弧形 19">
-                    <a:extLst>
-                      <a:ext uri="{FF2B5EF4-FFF2-40B4-BE49-F238E27FC236}">
-                        <a16:creationId xmlns:a16="http://schemas.microsoft.com/office/drawing/2014/main" id="{8F553C7F-42D7-64D5-3FDA-B01169029263}"/>
-                      </a:ext>
-                    </a:extLst>
-                  </p:cNvPr>
+                  <p:cNvPr id="20" name="弧形 19"/>
                   <p:cNvSpPr/>
                   <p:nvPr/>
                 </p:nvSpPr>
@@ -6006,13 +5510,7 @@
                 <mc:Choice Requires="a14">
                   <p:sp>
                     <p:nvSpPr>
-                      <p:cNvPr id="21" name="文本框 20">
-                        <a:extLst>
-                          <a:ext uri="{FF2B5EF4-FFF2-40B4-BE49-F238E27FC236}">
-                            <a16:creationId xmlns:a16="http://schemas.microsoft.com/office/drawing/2014/main" id="{5F9F9AEB-0B68-C0E3-C28D-1D032CEB0193}"/>
-                          </a:ext>
-                        </a:extLst>
-                      </p:cNvPr>
+                      <p:cNvPr id="21" name="文本框 20"/>
                       <p:cNvSpPr txBox="1"/>
                       <p:nvPr/>
                     </p:nvSpPr>
@@ -6056,13 +5554,7 @@
                 <mc:Fallback xmlns="">
                   <p:sp>
                     <p:nvSpPr>
-                      <p:cNvPr id="21" name="文本框 20">
-                        <a:extLst>
-                          <a:ext uri="{FF2B5EF4-FFF2-40B4-BE49-F238E27FC236}">
-                            <a16:creationId xmlns:a16="http://schemas.microsoft.com/office/drawing/2014/main" id="{5F9F9AEB-0B68-C0E3-C28D-1D032CEB0193}"/>
-                          </a:ext>
-                        </a:extLst>
-                      </p:cNvPr>
+                      <p:cNvPr id="21" name="文本框 20"/>
                       <p:cNvSpPr txBox="1">
                         <a:spLocks noRot="1" noChangeAspect="1" noMove="1" noResize="1" noEditPoints="1" noAdjustHandles="1" noChangeArrowheads="1" noChangeShapeType="1" noTextEdit="1"/>
                       </p:cNvSpPr>
@@ -6076,11 +5568,8 @@
                       <a:prstGeom prst="rect">
                         <a:avLst/>
                       </a:prstGeom>
-                      <a:blipFill>
-                        <a:blip r:embed="rId10"/>
-                        <a:stretch>
-                          <a:fillRect r="-48276"/>
-                        </a:stretch>
+                      <a:blipFill rotWithShape="1">
+                        <a:blip r:embed="rId2"/>
                       </a:blipFill>
                     </p:spPr>
                     <p:txBody>
@@ -6102,13 +5591,7 @@
                 <mc:Choice Requires="a14">
                   <p:sp>
                     <p:nvSpPr>
-                      <p:cNvPr id="22" name="文本框 21">
-                        <a:extLst>
-                          <a:ext uri="{FF2B5EF4-FFF2-40B4-BE49-F238E27FC236}">
-                            <a16:creationId xmlns:a16="http://schemas.microsoft.com/office/drawing/2014/main" id="{E0837AC2-04A3-AE28-167A-A0F938E580FA}"/>
-                          </a:ext>
-                        </a:extLst>
-                      </p:cNvPr>
+                      <p:cNvPr id="22" name="文本框 21"/>
                       <p:cNvSpPr txBox="1"/>
                       <p:nvPr/>
                     </p:nvSpPr>
@@ -6152,13 +5635,7 @@
                 <mc:Fallback xmlns="">
                   <p:sp>
                     <p:nvSpPr>
-                      <p:cNvPr id="22" name="文本框 21">
-                        <a:extLst>
-                          <a:ext uri="{FF2B5EF4-FFF2-40B4-BE49-F238E27FC236}">
-                            <a16:creationId xmlns:a16="http://schemas.microsoft.com/office/drawing/2014/main" id="{E0837AC2-04A3-AE28-167A-A0F938E580FA}"/>
-                          </a:ext>
-                        </a:extLst>
-                      </p:cNvPr>
+                      <p:cNvPr id="22" name="文本框 21"/>
                       <p:cNvSpPr txBox="1">
                         <a:spLocks noRot="1" noChangeAspect="1" noMove="1" noResize="1" noEditPoints="1" noAdjustHandles="1" noChangeArrowheads="1" noChangeShapeType="1" noTextEdit="1"/>
                       </p:cNvSpPr>
@@ -6172,11 +5649,8 @@
                       <a:prstGeom prst="rect">
                         <a:avLst/>
                       </a:prstGeom>
-                      <a:blipFill>
-                        <a:blip r:embed="rId11"/>
-                        <a:stretch>
-                          <a:fillRect r="-71429"/>
-                        </a:stretch>
+                      <a:blipFill rotWithShape="1">
+                        <a:blip r:embed="rId3"/>
                       </a:blipFill>
                     </p:spPr>
                     <p:txBody>
@@ -6198,13 +5672,7 @@
                 <mc:Choice Requires="a14">
                   <p:sp>
                     <p:nvSpPr>
-                      <p:cNvPr id="23" name="文本框 22">
-                        <a:extLst>
-                          <a:ext uri="{FF2B5EF4-FFF2-40B4-BE49-F238E27FC236}">
-                            <a16:creationId xmlns:a16="http://schemas.microsoft.com/office/drawing/2014/main" id="{5A6080B4-6C21-6030-5C2C-9150FBBF7792}"/>
-                          </a:ext>
-                        </a:extLst>
-                      </p:cNvPr>
+                      <p:cNvPr id="23" name="文本框 22"/>
                       <p:cNvSpPr txBox="1"/>
                       <p:nvPr/>
                     </p:nvSpPr>
@@ -6248,13 +5716,7 @@
                 <mc:Fallback xmlns="">
                   <p:sp>
                     <p:nvSpPr>
-                      <p:cNvPr id="23" name="文本框 22">
-                        <a:extLst>
-                          <a:ext uri="{FF2B5EF4-FFF2-40B4-BE49-F238E27FC236}">
-                            <a16:creationId xmlns:a16="http://schemas.microsoft.com/office/drawing/2014/main" id="{5A6080B4-6C21-6030-5C2C-9150FBBF7792}"/>
-                          </a:ext>
-                        </a:extLst>
-                      </p:cNvPr>
+                      <p:cNvPr id="23" name="文本框 22"/>
                       <p:cNvSpPr txBox="1">
                         <a:spLocks noRot="1" noChangeAspect="1" noMove="1" noResize="1" noEditPoints="1" noAdjustHandles="1" noChangeArrowheads="1" noChangeShapeType="1" noTextEdit="1"/>
                       </p:cNvSpPr>
@@ -6268,11 +5730,8 @@
                       <a:prstGeom prst="rect">
                         <a:avLst/>
                       </a:prstGeom>
-                      <a:blipFill>
-                        <a:blip r:embed="rId12"/>
-                        <a:stretch>
-                          <a:fillRect r="-64286"/>
-                        </a:stretch>
+                      <a:blipFill rotWithShape="1">
+                        <a:blip r:embed="rId4"/>
                       </a:blipFill>
                     </p:spPr>
                     <p:txBody>
@@ -6294,13 +5753,7 @@
                 <mc:Choice Requires="a14">
                   <p:sp>
                     <p:nvSpPr>
-                      <p:cNvPr id="24" name="文本框 23">
-                        <a:extLst>
-                          <a:ext uri="{FF2B5EF4-FFF2-40B4-BE49-F238E27FC236}">
-                            <a16:creationId xmlns:a16="http://schemas.microsoft.com/office/drawing/2014/main" id="{72246B7B-D03F-93D5-D7B8-E67FDA435BA3}"/>
-                          </a:ext>
-                        </a:extLst>
-                      </p:cNvPr>
+                      <p:cNvPr id="24" name="文本框 23"/>
                       <p:cNvSpPr txBox="1"/>
                       <p:nvPr/>
                     </p:nvSpPr>
@@ -6407,13 +5860,7 @@
                 <mc:Fallback xmlns="">
                   <p:sp>
                     <p:nvSpPr>
-                      <p:cNvPr id="24" name="文本框 23">
-                        <a:extLst>
-                          <a:ext uri="{FF2B5EF4-FFF2-40B4-BE49-F238E27FC236}">
-                            <a16:creationId xmlns:a16="http://schemas.microsoft.com/office/drawing/2014/main" id="{72246B7B-D03F-93D5-D7B8-E67FDA435BA3}"/>
-                          </a:ext>
-                        </a:extLst>
-                      </p:cNvPr>
+                      <p:cNvPr id="24" name="文本框 23"/>
                       <p:cNvSpPr txBox="1">
                         <a:spLocks noRot="1" noChangeAspect="1" noMove="1" noResize="1" noEditPoints="1" noAdjustHandles="1" noChangeArrowheads="1" noChangeShapeType="1" noTextEdit="1"/>
                       </p:cNvSpPr>
@@ -6427,11 +5874,8 @@
                       <a:prstGeom prst="rect">
                         <a:avLst/>
                       </a:prstGeom>
-                      <a:blipFill>
-                        <a:blip r:embed="rId13"/>
-                        <a:stretch>
-                          <a:fillRect/>
-                        </a:stretch>
+                      <a:blipFill rotWithShape="1">
+                        <a:blip r:embed="rId7"/>
                       </a:blipFill>
                     </p:spPr>
                     <p:txBody>
@@ -6454,13 +5898,7 @@
               <mc:Choice Requires="a14">
                 <p:sp>
                   <p:nvSpPr>
-                    <p:cNvPr id="25" name="文本框 24">
-                      <a:extLst>
-                        <a:ext uri="{FF2B5EF4-FFF2-40B4-BE49-F238E27FC236}">
-                          <a16:creationId xmlns:a16="http://schemas.microsoft.com/office/drawing/2014/main" id="{5517EA8B-9830-DD66-C4D1-1B57311F1F04}"/>
-                        </a:ext>
-                      </a:extLst>
-                    </p:cNvPr>
+                    <p:cNvPr id="25" name="文本框 24"/>
                     <p:cNvSpPr txBox="1"/>
                     <p:nvPr/>
                   </p:nvSpPr>
@@ -6528,13 +5966,7 @@
               <mc:Fallback xmlns="">
                 <p:sp>
                   <p:nvSpPr>
-                    <p:cNvPr id="25" name="文本框 24">
-                      <a:extLst>
-                        <a:ext uri="{FF2B5EF4-FFF2-40B4-BE49-F238E27FC236}">
-                          <a16:creationId xmlns:a16="http://schemas.microsoft.com/office/drawing/2014/main" id="{5517EA8B-9830-DD66-C4D1-1B57311F1F04}"/>
-                        </a:ext>
-                      </a:extLst>
-                    </p:cNvPr>
+                    <p:cNvPr id="25" name="文本框 24"/>
                     <p:cNvSpPr txBox="1">
                       <a:spLocks noRot="1" noChangeAspect="1" noMove="1" noResize="1" noEditPoints="1" noAdjustHandles="1" noChangeArrowheads="1" noChangeShapeType="1" noTextEdit="1"/>
                     </p:cNvSpPr>
@@ -6548,11 +5980,8 @@
                     <a:prstGeom prst="rect">
                       <a:avLst/>
                     </a:prstGeom>
-                    <a:blipFill>
-                      <a:blip r:embed="rId14"/>
-                      <a:stretch>
-                        <a:fillRect b="-13333"/>
-                      </a:stretch>
+                    <a:blipFill rotWithShape="1">
+                      <a:blip r:embed="rId8"/>
                     </a:blipFill>
                   </p:spPr>
                   <p:txBody>
@@ -6573,13 +6002,7 @@
           </p:grpSp>
           <p:grpSp>
             <p:nvGrpSpPr>
-              <p:cNvPr id="27" name="组合 26">
-                <a:extLst>
-                  <a:ext uri="{FF2B5EF4-FFF2-40B4-BE49-F238E27FC236}">
-                    <a16:creationId xmlns:a16="http://schemas.microsoft.com/office/drawing/2014/main" id="{BBD4405C-90A1-1DB3-FE57-1C38A322C889}"/>
-                  </a:ext>
-                </a:extLst>
-              </p:cNvPr>
+              <p:cNvPr id="27" name="组合 26"/>
               <p:cNvGrpSpPr/>
               <p:nvPr/>
             </p:nvGrpSpPr>
@@ -6593,13 +6016,7 @@
             </p:grpSpPr>
             <p:grpSp>
               <p:nvGrpSpPr>
-                <p:cNvPr id="28" name="组合 27">
-                  <a:extLst>
-                    <a:ext uri="{FF2B5EF4-FFF2-40B4-BE49-F238E27FC236}">
-                      <a16:creationId xmlns:a16="http://schemas.microsoft.com/office/drawing/2014/main" id="{D33934DE-F25C-CD59-EC14-EC1B0FBD28BA}"/>
-                    </a:ext>
-                  </a:extLst>
-                </p:cNvPr>
+                <p:cNvPr id="28" name="组合 27"/>
                 <p:cNvGrpSpPr/>
                 <p:nvPr/>
               </p:nvGrpSpPr>
@@ -6613,13 +6030,7 @@
               </p:grpSpPr>
               <p:sp>
                 <p:nvSpPr>
-                  <p:cNvPr id="30" name="直角三角形 29">
-                    <a:extLst>
-                      <a:ext uri="{FF2B5EF4-FFF2-40B4-BE49-F238E27FC236}">
-                        <a16:creationId xmlns:a16="http://schemas.microsoft.com/office/drawing/2014/main" id="{5B6652BD-4621-6699-6ABE-6A44397C7F1A}"/>
-                      </a:ext>
-                    </a:extLst>
-                  </p:cNvPr>
+                  <p:cNvPr id="30" name="直角三角形 29"/>
                   <p:cNvSpPr/>
                   <p:nvPr/>
                 </p:nvSpPr>
@@ -6665,13 +6076,7 @@
               </p:sp>
               <p:sp>
                 <p:nvSpPr>
-                  <p:cNvPr id="31" name="弧形 30">
-                    <a:extLst>
-                      <a:ext uri="{FF2B5EF4-FFF2-40B4-BE49-F238E27FC236}">
-                        <a16:creationId xmlns:a16="http://schemas.microsoft.com/office/drawing/2014/main" id="{3B5CBB1A-3E4B-01F7-5A29-08A72F838182}"/>
-                      </a:ext>
-                    </a:extLst>
-                  </p:cNvPr>
+                  <p:cNvPr id="31" name="弧形 30"/>
                   <p:cNvSpPr/>
                   <p:nvPr/>
                 </p:nvSpPr>
@@ -6719,13 +6124,7 @@
                 <mc:Choice Requires="a14">
                   <p:sp>
                     <p:nvSpPr>
-                      <p:cNvPr id="32" name="文本框 31">
-                        <a:extLst>
-                          <a:ext uri="{FF2B5EF4-FFF2-40B4-BE49-F238E27FC236}">
-                            <a16:creationId xmlns:a16="http://schemas.microsoft.com/office/drawing/2014/main" id="{CC410C13-A9C6-162A-C02C-740939890E43}"/>
-                          </a:ext>
-                        </a:extLst>
-                      </p:cNvPr>
+                      <p:cNvPr id="32" name="文本框 31"/>
                       <p:cNvSpPr txBox="1"/>
                       <p:nvPr/>
                     </p:nvSpPr>
@@ -6769,13 +6168,7 @@
                 <mc:Fallback xmlns="">
                   <p:sp>
                     <p:nvSpPr>
-                      <p:cNvPr id="32" name="文本框 31">
-                        <a:extLst>
-                          <a:ext uri="{FF2B5EF4-FFF2-40B4-BE49-F238E27FC236}">
-                            <a16:creationId xmlns:a16="http://schemas.microsoft.com/office/drawing/2014/main" id="{CC410C13-A9C6-162A-C02C-740939890E43}"/>
-                          </a:ext>
-                        </a:extLst>
-                      </p:cNvPr>
+                      <p:cNvPr id="32" name="文本框 31"/>
                       <p:cNvSpPr txBox="1">
                         <a:spLocks noRot="1" noChangeAspect="1" noMove="1" noResize="1" noEditPoints="1" noAdjustHandles="1" noChangeArrowheads="1" noChangeShapeType="1" noTextEdit="1"/>
                       </p:cNvSpPr>
@@ -6789,11 +6182,8 @@
                       <a:prstGeom prst="rect">
                         <a:avLst/>
                       </a:prstGeom>
-                      <a:blipFill>
-                        <a:blip r:embed="rId15"/>
-                        <a:stretch>
-                          <a:fillRect r="-48276"/>
-                        </a:stretch>
+                      <a:blipFill rotWithShape="1">
+                        <a:blip r:embed="rId2"/>
                       </a:blipFill>
                     </p:spPr>
                     <p:txBody>
@@ -6815,13 +6205,7 @@
                 <mc:Choice Requires="a14">
                   <p:sp>
                     <p:nvSpPr>
-                      <p:cNvPr id="33" name="文本框 32">
-                        <a:extLst>
-                          <a:ext uri="{FF2B5EF4-FFF2-40B4-BE49-F238E27FC236}">
-                            <a16:creationId xmlns:a16="http://schemas.microsoft.com/office/drawing/2014/main" id="{3DEF7AE9-C539-A0E0-5A54-04BDD946A236}"/>
-                          </a:ext>
-                        </a:extLst>
-                      </p:cNvPr>
+                      <p:cNvPr id="33" name="文本框 32"/>
                       <p:cNvSpPr txBox="1"/>
                       <p:nvPr/>
                     </p:nvSpPr>
@@ -6871,13 +6255,7 @@
                 <mc:Fallback xmlns="">
                   <p:sp>
                     <p:nvSpPr>
-                      <p:cNvPr id="33" name="文本框 32">
-                        <a:extLst>
-                          <a:ext uri="{FF2B5EF4-FFF2-40B4-BE49-F238E27FC236}">
-                            <a16:creationId xmlns:a16="http://schemas.microsoft.com/office/drawing/2014/main" id="{3DEF7AE9-C539-A0E0-5A54-04BDD946A236}"/>
-                          </a:ext>
-                        </a:extLst>
-                      </p:cNvPr>
+                      <p:cNvPr id="33" name="文本框 32"/>
                       <p:cNvSpPr txBox="1">
                         <a:spLocks noRot="1" noChangeAspect="1" noMove="1" noResize="1" noEditPoints="1" noAdjustHandles="1" noChangeArrowheads="1" noChangeShapeType="1" noTextEdit="1"/>
                       </p:cNvSpPr>
@@ -6891,11 +6269,8 @@
                       <a:prstGeom prst="rect">
                         <a:avLst/>
                       </a:prstGeom>
-                      <a:blipFill>
-                        <a:blip r:embed="rId16"/>
-                        <a:stretch>
-                          <a:fillRect r="-171429"/>
-                        </a:stretch>
+                      <a:blipFill rotWithShape="1">
+                        <a:blip r:embed="rId9"/>
                       </a:blipFill>
                     </p:spPr>
                     <p:txBody>
@@ -6917,13 +6292,7 @@
                 <mc:Choice Requires="a14">
                   <p:sp>
                     <p:nvSpPr>
-                      <p:cNvPr id="34" name="文本框 33">
-                        <a:extLst>
-                          <a:ext uri="{FF2B5EF4-FFF2-40B4-BE49-F238E27FC236}">
-                            <a16:creationId xmlns:a16="http://schemas.microsoft.com/office/drawing/2014/main" id="{A34A0F37-A92B-BB71-0C58-85E8BF1951C5}"/>
-                          </a:ext>
-                        </a:extLst>
-                      </p:cNvPr>
+                      <p:cNvPr id="34" name="文本框 33"/>
                       <p:cNvSpPr txBox="1"/>
                       <p:nvPr/>
                     </p:nvSpPr>
@@ -6973,13 +6342,7 @@
                 <mc:Fallback xmlns="">
                   <p:sp>
                     <p:nvSpPr>
-                      <p:cNvPr id="34" name="文本框 33">
-                        <a:extLst>
-                          <a:ext uri="{FF2B5EF4-FFF2-40B4-BE49-F238E27FC236}">
-                            <a16:creationId xmlns:a16="http://schemas.microsoft.com/office/drawing/2014/main" id="{A34A0F37-A92B-BB71-0C58-85E8BF1951C5}"/>
-                          </a:ext>
-                        </a:extLst>
-                      </p:cNvPr>
+                      <p:cNvPr id="34" name="文本框 33"/>
                       <p:cNvSpPr txBox="1">
                         <a:spLocks noRot="1" noChangeAspect="1" noMove="1" noResize="1" noEditPoints="1" noAdjustHandles="1" noChangeArrowheads="1" noChangeShapeType="1" noTextEdit="1"/>
                       </p:cNvSpPr>
@@ -6993,11 +6356,8 @@
                       <a:prstGeom prst="rect">
                         <a:avLst/>
                       </a:prstGeom>
-                      <a:blipFill>
-                        <a:blip r:embed="rId17"/>
-                        <a:stretch>
-                          <a:fillRect r="-164286"/>
-                        </a:stretch>
+                      <a:blipFill rotWithShape="1">
+                        <a:blip r:embed="rId10"/>
                       </a:blipFill>
                     </p:spPr>
                     <p:txBody>
@@ -7019,13 +6379,7 @@
                 <mc:Choice Requires="a14">
                   <p:sp>
                     <p:nvSpPr>
-                      <p:cNvPr id="35" name="文本框 34">
-                        <a:extLst>
-                          <a:ext uri="{FF2B5EF4-FFF2-40B4-BE49-F238E27FC236}">
-                            <a16:creationId xmlns:a16="http://schemas.microsoft.com/office/drawing/2014/main" id="{48D368F6-4C2D-28C0-8FDC-C2F46A7CA1BD}"/>
-                          </a:ext>
-                        </a:extLst>
-                      </p:cNvPr>
+                      <p:cNvPr id="35" name="文本框 34"/>
                       <p:cNvSpPr txBox="1"/>
                       <p:nvPr/>
                     </p:nvSpPr>
@@ -7132,13 +6486,7 @@
                 <mc:Fallback xmlns="">
                   <p:sp>
                     <p:nvSpPr>
-                      <p:cNvPr id="35" name="文本框 34">
-                        <a:extLst>
-                          <a:ext uri="{FF2B5EF4-FFF2-40B4-BE49-F238E27FC236}">
-                            <a16:creationId xmlns:a16="http://schemas.microsoft.com/office/drawing/2014/main" id="{48D368F6-4C2D-28C0-8FDC-C2F46A7CA1BD}"/>
-                          </a:ext>
-                        </a:extLst>
-                      </p:cNvPr>
+                      <p:cNvPr id="35" name="文本框 34"/>
                       <p:cNvSpPr txBox="1">
                         <a:spLocks noRot="1" noChangeAspect="1" noMove="1" noResize="1" noEditPoints="1" noAdjustHandles="1" noChangeArrowheads="1" noChangeShapeType="1" noTextEdit="1"/>
                       </p:cNvSpPr>
@@ -7152,11 +6500,8 @@
                       <a:prstGeom prst="rect">
                         <a:avLst/>
                       </a:prstGeom>
-                      <a:blipFill>
-                        <a:blip r:embed="rId18"/>
-                        <a:stretch>
-                          <a:fillRect/>
-                        </a:stretch>
+                      <a:blipFill rotWithShape="1">
+                        <a:blip r:embed="rId7"/>
                       </a:blipFill>
                     </p:spPr>
                     <p:txBody>
@@ -7179,13 +6524,7 @@
               <mc:Choice Requires="a14">
                 <p:sp>
                   <p:nvSpPr>
-                    <p:cNvPr id="29" name="文本框 28">
-                      <a:extLst>
-                        <a:ext uri="{FF2B5EF4-FFF2-40B4-BE49-F238E27FC236}">
-                          <a16:creationId xmlns:a16="http://schemas.microsoft.com/office/drawing/2014/main" id="{B3AD4A1A-CFB1-867D-2CDC-1C3D037B11A6}"/>
-                        </a:ext>
-                      </a:extLst>
-                    </p:cNvPr>
+                    <p:cNvPr id="29" name="文本框 28"/>
                     <p:cNvSpPr txBox="1"/>
                     <p:nvPr/>
                   </p:nvSpPr>
@@ -7253,13 +6592,7 @@
               <mc:Fallback xmlns="">
                 <p:sp>
                   <p:nvSpPr>
-                    <p:cNvPr id="29" name="文本框 28">
-                      <a:extLst>
-                        <a:ext uri="{FF2B5EF4-FFF2-40B4-BE49-F238E27FC236}">
-                          <a16:creationId xmlns:a16="http://schemas.microsoft.com/office/drawing/2014/main" id="{B3AD4A1A-CFB1-867D-2CDC-1C3D037B11A6}"/>
-                        </a:ext>
-                      </a:extLst>
-                    </p:cNvPr>
+                    <p:cNvPr id="29" name="文本框 28"/>
                     <p:cNvSpPr txBox="1">
                       <a:spLocks noRot="1" noChangeAspect="1" noMove="1" noResize="1" noEditPoints="1" noAdjustHandles="1" noChangeArrowheads="1" noChangeShapeType="1" noTextEdit="1"/>
                     </p:cNvSpPr>
@@ -7273,11 +6606,8 @@
                     <a:prstGeom prst="rect">
                       <a:avLst/>
                     </a:prstGeom>
-                    <a:blipFill>
-                      <a:blip r:embed="rId19"/>
-                      <a:stretch>
-                        <a:fillRect b="-13115"/>
-                      </a:stretch>
+                    <a:blipFill rotWithShape="1">
+                      <a:blip r:embed="rId11"/>
                     </a:blipFill>
                   </p:spPr>
                   <p:txBody>
@@ -7299,16 +6629,8 @@
         </p:grpSp>
         <p:cxnSp>
           <p:nvCxnSpPr>
-            <p:cNvPr id="38" name="直接连接符 37">
-              <a:extLst>
-                <a:ext uri="{FF2B5EF4-FFF2-40B4-BE49-F238E27FC236}">
-                  <a16:creationId xmlns:a16="http://schemas.microsoft.com/office/drawing/2014/main" id="{26E50A9E-47A9-47C7-2ACC-5A3429C40228}"/>
-                </a:ext>
-              </a:extLst>
-            </p:cNvPr>
-            <p:cNvCxnSpPr>
-              <a:cxnSpLocks/>
-            </p:cNvCxnSpPr>
+            <p:cNvPr id="38" name="直接连接符 37"/>
+            <p:cNvCxnSpPr/>
             <p:nvPr/>
           </p:nvCxnSpPr>
           <p:spPr>
@@ -7343,11 +6665,6 @@
         </p:cxnSp>
       </p:grpSp>
     </p:spTree>
-    <p:extLst>
-      <p:ext uri="{BB962C8B-B14F-4D97-AF65-F5344CB8AC3E}">
-        <p14:creationId xmlns:p14="http://schemas.microsoft.com/office/powerpoint/2010/main" val="3993106136"/>
-      </p:ext>
-    </p:extLst>
   </p:cSld>
   <p:clrMapOvr>
     <a:masterClrMapping/>
@@ -7374,13 +6691,7 @@
       </p:grpSpPr>
       <p:grpSp>
         <p:nvGrpSpPr>
-          <p:cNvPr id="21" name="组合 20">
-            <a:extLst>
-              <a:ext uri="{FF2B5EF4-FFF2-40B4-BE49-F238E27FC236}">
-                <a16:creationId xmlns:a16="http://schemas.microsoft.com/office/drawing/2014/main" id="{48C05B57-7C08-B373-15F2-8FAB90191B75}"/>
-              </a:ext>
-            </a:extLst>
-          </p:cNvPr>
+          <p:cNvPr id="21" name="组合 20"/>
           <p:cNvGrpSpPr/>
           <p:nvPr/>
         </p:nvGrpSpPr>
@@ -7394,13 +6705,7 @@
         </p:grpSpPr>
         <p:cxnSp>
           <p:nvCxnSpPr>
-            <p:cNvPr id="5" name="直接箭头连接符 4">
-              <a:extLst>
-                <a:ext uri="{FF2B5EF4-FFF2-40B4-BE49-F238E27FC236}">
-                  <a16:creationId xmlns:a16="http://schemas.microsoft.com/office/drawing/2014/main" id="{A7B430B8-3931-8039-A177-3271F32E3A97}"/>
-                </a:ext>
-              </a:extLst>
-            </p:cNvPr>
+            <p:cNvPr id="5" name="直接箭头连接符 4"/>
             <p:cNvCxnSpPr/>
             <p:nvPr/>
           </p:nvCxnSpPr>
@@ -7437,13 +6742,7 @@
         </p:cxnSp>
         <p:cxnSp>
           <p:nvCxnSpPr>
-            <p:cNvPr id="7" name="直接箭头连接符 6">
-              <a:extLst>
-                <a:ext uri="{FF2B5EF4-FFF2-40B4-BE49-F238E27FC236}">
-                  <a16:creationId xmlns:a16="http://schemas.microsoft.com/office/drawing/2014/main" id="{A898753B-F62B-4CD2-F95F-75F354722301}"/>
-                </a:ext>
-              </a:extLst>
-            </p:cNvPr>
+            <p:cNvPr id="7" name="直接箭头连接符 6"/>
             <p:cNvCxnSpPr/>
             <p:nvPr/>
           </p:nvCxnSpPr>
@@ -7480,16 +6779,8 @@
         </p:cxnSp>
         <p:cxnSp>
           <p:nvCxnSpPr>
-            <p:cNvPr id="9" name="直接箭头连接符 8">
-              <a:extLst>
-                <a:ext uri="{FF2B5EF4-FFF2-40B4-BE49-F238E27FC236}">
-                  <a16:creationId xmlns:a16="http://schemas.microsoft.com/office/drawing/2014/main" id="{E23F4C20-C16E-2802-1E02-DB5059F94DF5}"/>
-                </a:ext>
-              </a:extLst>
-            </p:cNvPr>
-            <p:cNvCxnSpPr>
-              <a:cxnSpLocks/>
-            </p:cNvCxnSpPr>
+            <p:cNvPr id="9" name="直接箭头连接符 8"/>
+            <p:cNvCxnSpPr/>
             <p:nvPr/>
           </p:nvCxnSpPr>
           <p:spPr>
@@ -7525,13 +6816,7 @@
         </p:cxnSp>
         <p:cxnSp>
           <p:nvCxnSpPr>
-            <p:cNvPr id="11" name="直接箭头连接符 10">
-              <a:extLst>
-                <a:ext uri="{FF2B5EF4-FFF2-40B4-BE49-F238E27FC236}">
-                  <a16:creationId xmlns:a16="http://schemas.microsoft.com/office/drawing/2014/main" id="{5EBE2C98-2012-BC1E-9B66-FFE99001B751}"/>
-                </a:ext>
-              </a:extLst>
-            </p:cNvPr>
+            <p:cNvPr id="11" name="直接箭头连接符 10"/>
             <p:cNvCxnSpPr/>
             <p:nvPr/>
           </p:nvCxnSpPr>
@@ -7569,16 +6854,8 @@
         </p:cxnSp>
         <p:cxnSp>
           <p:nvCxnSpPr>
-            <p:cNvPr id="13" name="直接箭头连接符 12">
-              <a:extLst>
-                <a:ext uri="{FF2B5EF4-FFF2-40B4-BE49-F238E27FC236}">
-                  <a16:creationId xmlns:a16="http://schemas.microsoft.com/office/drawing/2014/main" id="{9BC465E7-F74E-DCB8-E0D0-292F30D5F59D}"/>
-                </a:ext>
-              </a:extLst>
-            </p:cNvPr>
-            <p:cNvCxnSpPr>
-              <a:cxnSpLocks/>
-            </p:cNvCxnSpPr>
+            <p:cNvPr id="13" name="直接箭头连接符 12"/>
+            <p:cNvCxnSpPr/>
             <p:nvPr/>
           </p:nvCxnSpPr>
           <p:spPr>
@@ -7616,13 +6893,7 @@
           <mc:Choice Requires="a14">
             <p:sp>
               <p:nvSpPr>
-                <p:cNvPr id="16" name="文本框 15">
-                  <a:extLst>
-                    <a:ext uri="{FF2B5EF4-FFF2-40B4-BE49-F238E27FC236}">
-                      <a16:creationId xmlns:a16="http://schemas.microsoft.com/office/drawing/2014/main" id="{DC1C3ACF-99D9-47AE-AF31-AA6830266ACC}"/>
-                    </a:ext>
-                  </a:extLst>
-                </p:cNvPr>
+                <p:cNvPr id="16" name="文本框 15"/>
                 <p:cNvSpPr txBox="1"/>
                 <p:nvPr/>
               </p:nvSpPr>
@@ -7666,13 +6937,7 @@
           <mc:Fallback xmlns="">
             <p:sp>
               <p:nvSpPr>
-                <p:cNvPr id="16" name="文本框 15">
-                  <a:extLst>
-                    <a:ext uri="{FF2B5EF4-FFF2-40B4-BE49-F238E27FC236}">
-                      <a16:creationId xmlns:a16="http://schemas.microsoft.com/office/drawing/2014/main" id="{DC1C3ACF-99D9-47AE-AF31-AA6830266ACC}"/>
-                    </a:ext>
-                  </a:extLst>
-                </p:cNvPr>
+                <p:cNvPr id="16" name="文本框 15"/>
                 <p:cNvSpPr txBox="1">
                   <a:spLocks noRot="1" noChangeAspect="1" noMove="1" noResize="1" noEditPoints="1" noAdjustHandles="1" noChangeArrowheads="1" noChangeShapeType="1" noTextEdit="1"/>
                 </p:cNvSpPr>
@@ -7686,11 +6951,8 @@
                 <a:prstGeom prst="rect">
                   <a:avLst/>
                 </a:prstGeom>
-                <a:blipFill>
+                <a:blipFill rotWithShape="1">
                   <a:blip r:embed="rId2"/>
-                  <a:stretch>
-                    <a:fillRect r="-71429"/>
-                  </a:stretch>
                 </a:blipFill>
               </p:spPr>
               <p:txBody>
@@ -7712,13 +6974,7 @@
           <mc:Choice Requires="a14">
             <p:sp>
               <p:nvSpPr>
-                <p:cNvPr id="17" name="文本框 16">
-                  <a:extLst>
-                    <a:ext uri="{FF2B5EF4-FFF2-40B4-BE49-F238E27FC236}">
-                      <a16:creationId xmlns:a16="http://schemas.microsoft.com/office/drawing/2014/main" id="{66F6F019-96C5-FB4E-35E8-BB470B2D5E81}"/>
-                    </a:ext>
-                  </a:extLst>
-                </p:cNvPr>
+                <p:cNvPr id="17" name="文本框 16"/>
                 <p:cNvSpPr txBox="1"/>
                 <p:nvPr/>
               </p:nvSpPr>
@@ -7762,13 +7018,7 @@
           <mc:Fallback xmlns="">
             <p:sp>
               <p:nvSpPr>
-                <p:cNvPr id="17" name="文本框 16">
-                  <a:extLst>
-                    <a:ext uri="{FF2B5EF4-FFF2-40B4-BE49-F238E27FC236}">
-                      <a16:creationId xmlns:a16="http://schemas.microsoft.com/office/drawing/2014/main" id="{66F6F019-96C5-FB4E-35E8-BB470B2D5E81}"/>
-                    </a:ext>
-                  </a:extLst>
-                </p:cNvPr>
+                <p:cNvPr id="17" name="文本框 16"/>
                 <p:cNvSpPr txBox="1">
                   <a:spLocks noRot="1" noChangeAspect="1" noMove="1" noResize="1" noEditPoints="1" noAdjustHandles="1" noChangeArrowheads="1" noChangeShapeType="1" noTextEdit="1"/>
                 </p:cNvSpPr>
@@ -7782,11 +7032,8 @@
                 <a:prstGeom prst="rect">
                   <a:avLst/>
                 </a:prstGeom>
-                <a:blipFill>
+                <a:blipFill rotWithShape="1">
                   <a:blip r:embed="rId3"/>
-                  <a:stretch>
-                    <a:fillRect/>
-                  </a:stretch>
                 </a:blipFill>
               </p:spPr>
               <p:txBody>
@@ -7808,13 +7055,7 @@
           <mc:Choice Requires="a14">
             <p:sp>
               <p:nvSpPr>
-                <p:cNvPr id="18" name="文本框 17">
-                  <a:extLst>
-                    <a:ext uri="{FF2B5EF4-FFF2-40B4-BE49-F238E27FC236}">
-                      <a16:creationId xmlns:a16="http://schemas.microsoft.com/office/drawing/2014/main" id="{7F15F41C-B42E-B64C-1732-657DDEFDCAA2}"/>
-                    </a:ext>
-                  </a:extLst>
-                </p:cNvPr>
+                <p:cNvPr id="18" name="文本框 17"/>
                 <p:cNvSpPr txBox="1"/>
                 <p:nvPr/>
               </p:nvSpPr>
@@ -7870,13 +7111,7 @@
           <mc:Fallback xmlns="">
             <p:sp>
               <p:nvSpPr>
-                <p:cNvPr id="18" name="文本框 17">
-                  <a:extLst>
-                    <a:ext uri="{FF2B5EF4-FFF2-40B4-BE49-F238E27FC236}">
-                      <a16:creationId xmlns:a16="http://schemas.microsoft.com/office/drawing/2014/main" id="{7F15F41C-B42E-B64C-1732-657DDEFDCAA2}"/>
-                    </a:ext>
-                  </a:extLst>
-                </p:cNvPr>
+                <p:cNvPr id="18" name="文本框 17"/>
                 <p:cNvSpPr txBox="1">
                   <a:spLocks noRot="1" noChangeAspect="1" noMove="1" noResize="1" noEditPoints="1" noAdjustHandles="1" noChangeArrowheads="1" noChangeShapeType="1" noTextEdit="1"/>
                 </p:cNvSpPr>
@@ -7890,11 +7125,8 @@
                 <a:prstGeom prst="rect">
                   <a:avLst/>
                 </a:prstGeom>
-                <a:blipFill>
+                <a:blipFill rotWithShape="1">
                   <a:blip r:embed="rId4"/>
-                  <a:stretch>
-                    <a:fillRect/>
-                  </a:stretch>
                 </a:blipFill>
               </p:spPr>
               <p:txBody>
@@ -7916,13 +7148,7 @@
           <mc:Choice Requires="a14">
             <p:sp>
               <p:nvSpPr>
-                <p:cNvPr id="19" name="文本框 18">
-                  <a:extLst>
-                    <a:ext uri="{FF2B5EF4-FFF2-40B4-BE49-F238E27FC236}">
-                      <a16:creationId xmlns:a16="http://schemas.microsoft.com/office/drawing/2014/main" id="{4474C9F2-9DD9-D16B-F661-9E53F289BCD0}"/>
-                    </a:ext>
-                  </a:extLst>
-                </p:cNvPr>
+                <p:cNvPr id="19" name="文本框 18"/>
                 <p:cNvSpPr txBox="1"/>
                 <p:nvPr/>
               </p:nvSpPr>
@@ -7972,13 +7198,7 @@
           <mc:Fallback xmlns="">
             <p:sp>
               <p:nvSpPr>
-                <p:cNvPr id="19" name="文本框 18">
-                  <a:extLst>
-                    <a:ext uri="{FF2B5EF4-FFF2-40B4-BE49-F238E27FC236}">
-                      <a16:creationId xmlns:a16="http://schemas.microsoft.com/office/drawing/2014/main" id="{4474C9F2-9DD9-D16B-F661-9E53F289BCD0}"/>
-                    </a:ext>
-                  </a:extLst>
-                </p:cNvPr>
+                <p:cNvPr id="19" name="文本框 18"/>
                 <p:cNvSpPr txBox="1">
                   <a:spLocks noRot="1" noChangeAspect="1" noMove="1" noResize="1" noEditPoints="1" noAdjustHandles="1" noChangeArrowheads="1" noChangeShapeType="1" noTextEdit="1"/>
                 </p:cNvSpPr>
@@ -7992,11 +7212,8 @@
                 <a:prstGeom prst="rect">
                   <a:avLst/>
                 </a:prstGeom>
-                <a:blipFill>
+                <a:blipFill rotWithShape="1">
                   <a:blip r:embed="rId5"/>
-                  <a:stretch>
-                    <a:fillRect r="-15714"/>
-                  </a:stretch>
                 </a:blipFill>
               </p:spPr>
               <p:txBody>
@@ -8018,13 +7235,7 @@
           <mc:Choice Requires="a14">
             <p:sp>
               <p:nvSpPr>
-                <p:cNvPr id="20" name="文本框 19">
-                  <a:extLst>
-                    <a:ext uri="{FF2B5EF4-FFF2-40B4-BE49-F238E27FC236}">
-                      <a16:creationId xmlns:a16="http://schemas.microsoft.com/office/drawing/2014/main" id="{8C0C2E04-A0DB-AA2A-1C42-3C90D529011D}"/>
-                    </a:ext>
-                  </a:extLst>
-                </p:cNvPr>
+                <p:cNvPr id="20" name="文本框 19"/>
                 <p:cNvSpPr txBox="1"/>
                 <p:nvPr/>
               </p:nvSpPr>
@@ -8080,13 +7291,7 @@
           <mc:Fallback xmlns="">
             <p:sp>
               <p:nvSpPr>
-                <p:cNvPr id="20" name="文本框 19">
-                  <a:extLst>
-                    <a:ext uri="{FF2B5EF4-FFF2-40B4-BE49-F238E27FC236}">
-                      <a16:creationId xmlns:a16="http://schemas.microsoft.com/office/drawing/2014/main" id="{8C0C2E04-A0DB-AA2A-1C42-3C90D529011D}"/>
-                    </a:ext>
-                  </a:extLst>
-                </p:cNvPr>
+                <p:cNvPr id="20" name="文本框 19"/>
                 <p:cNvSpPr txBox="1">
                   <a:spLocks noRot="1" noChangeAspect="1" noMove="1" noResize="1" noEditPoints="1" noAdjustHandles="1" noChangeArrowheads="1" noChangeShapeType="1" noTextEdit="1"/>
                 </p:cNvSpPr>
@@ -8100,11 +7305,8 @@
                 <a:prstGeom prst="rect">
                   <a:avLst/>
                 </a:prstGeom>
-                <a:blipFill>
+                <a:blipFill rotWithShape="1">
                   <a:blip r:embed="rId6"/>
-                  <a:stretch>
-                    <a:fillRect/>
-                  </a:stretch>
                 </a:blipFill>
               </p:spPr>
               <p:txBody>
@@ -8124,11 +7326,6 @@
         </mc:AlternateContent>
       </p:grpSp>
     </p:spTree>
-    <p:extLst>
-      <p:ext uri="{BB962C8B-B14F-4D97-AF65-F5344CB8AC3E}">
-        <p14:creationId xmlns:p14="http://schemas.microsoft.com/office/powerpoint/2010/main" val="3929383455"/>
-      </p:ext>
-    </p:extLst>
   </p:cSld>
   <p:clrMapOvr>
     <a:masterClrMapping/>
@@ -8153,27 +7350,15 @@
           <a:chExt cx="0" cy="0"/>
         </a:xfrm>
       </p:grpSpPr>
-      <mc:AlternateContent xmlns:mc="http://schemas.openxmlformats.org/markup-compatibility/2006">
-        <mc:Choice xmlns:a14="http://schemas.microsoft.com/office/drawing/2010/main" Requires="a14">
+      <mc:AlternateContent xmlns:mc="http://schemas.openxmlformats.org/markup-compatibility/2006" xmlns:a14="http://schemas.microsoft.com/office/drawing/2010/main">
+        <mc:Choice Requires="a14">
           <p:graphicFrame>
             <p:nvGraphicFramePr>
-              <p:cNvPr id="4" name="表格 3">
-                <a:extLst>
-                  <a:ext uri="{FF2B5EF4-FFF2-40B4-BE49-F238E27FC236}">
-                    <a16:creationId xmlns:a16="http://schemas.microsoft.com/office/drawing/2014/main" id="{A31F56A0-D0A4-C774-673F-F8E545ABF4B3}"/>
-                  </a:ext>
-                </a:extLst>
-              </p:cNvPr>
+              <p:cNvPr id="4" name="表格 3"/>
               <p:cNvGraphicFramePr>
                 <a:graphicFrameLocks noGrp="1"/>
               </p:cNvGraphicFramePr>
-              <p:nvPr>
-                <p:extLst>
-                  <p:ext uri="{D42A27DB-BD31-4B8C-83A1-F6EECF244321}">
-                    <p14:modId xmlns:p14="http://schemas.microsoft.com/office/powerpoint/2010/main" val="4007303381"/>
-                  </p:ext>
-                </p:extLst>
-              </p:nvPr>
+              <p:nvPr/>
             </p:nvGraphicFramePr>
             <p:xfrm>
               <a:off x="2032000" y="1471506"/>
@@ -8189,42 +7374,42 @@
                     <a:gridCol w="1354667">
                       <a:extLst>
                         <a:ext uri="{9D8B030D-6E8A-4147-A177-3AD203B41FA5}">
-                          <a16:colId xmlns:a16="http://schemas.microsoft.com/office/drawing/2014/main" val="1722989286"/>
+                          <a16:colId xmlns:a16="http://schemas.microsoft.com/office/drawing/2014/main" val="20000"/>
                         </a:ext>
                       </a:extLst>
                     </a:gridCol>
                     <a:gridCol w="1354667">
                       <a:extLst>
                         <a:ext uri="{9D8B030D-6E8A-4147-A177-3AD203B41FA5}">
-                          <a16:colId xmlns:a16="http://schemas.microsoft.com/office/drawing/2014/main" val="3444716178"/>
+                          <a16:colId xmlns:a16="http://schemas.microsoft.com/office/drawing/2014/main" val="20001"/>
                         </a:ext>
                       </a:extLst>
                     </a:gridCol>
                     <a:gridCol w="1354667">
                       <a:extLst>
                         <a:ext uri="{9D8B030D-6E8A-4147-A177-3AD203B41FA5}">
-                          <a16:colId xmlns:a16="http://schemas.microsoft.com/office/drawing/2014/main" val="2701297741"/>
+                          <a16:colId xmlns:a16="http://schemas.microsoft.com/office/drawing/2014/main" val="20002"/>
                         </a:ext>
                       </a:extLst>
                     </a:gridCol>
                     <a:gridCol w="1354667">
                       <a:extLst>
                         <a:ext uri="{9D8B030D-6E8A-4147-A177-3AD203B41FA5}">
-                          <a16:colId xmlns:a16="http://schemas.microsoft.com/office/drawing/2014/main" val="480790829"/>
+                          <a16:colId xmlns:a16="http://schemas.microsoft.com/office/drawing/2014/main" val="20003"/>
                         </a:ext>
                       </a:extLst>
                     </a:gridCol>
                     <a:gridCol w="1354667">
                       <a:extLst>
                         <a:ext uri="{9D8B030D-6E8A-4147-A177-3AD203B41FA5}">
-                          <a16:colId xmlns:a16="http://schemas.microsoft.com/office/drawing/2014/main" val="3318243028"/>
+                          <a16:colId xmlns:a16="http://schemas.microsoft.com/office/drawing/2014/main" val="20004"/>
                         </a:ext>
                       </a:extLst>
                     </a:gridCol>
                     <a:gridCol w="1354667">
                       <a:extLst>
                         <a:ext uri="{9D8B030D-6E8A-4147-A177-3AD203B41FA5}">
-                          <a16:colId xmlns:a16="http://schemas.microsoft.com/office/drawing/2014/main" val="2209835067"/>
+                          <a16:colId xmlns:a16="http://schemas.microsoft.com/office/drawing/2014/main" val="20005"/>
                         </a:ext>
                       </a:extLst>
                     </a:gridCol>
@@ -8770,7 +7955,7 @@
                     </a:tc>
                     <a:extLst>
                       <a:ext uri="{0D108BD9-81ED-4DB2-BD59-A6C34878D82A}">
-                        <a16:rowId xmlns:a16="http://schemas.microsoft.com/office/drawing/2014/main" val="3511250450"/>
+                        <a16:rowId xmlns:a16="http://schemas.microsoft.com/office/drawing/2014/main" val="10000"/>
                       </a:ext>
                     </a:extLst>
                   </a:tr>
@@ -9315,7 +8500,7 @@
                     </a:tc>
                     <a:extLst>
                       <a:ext uri="{0D108BD9-81ED-4DB2-BD59-A6C34878D82A}">
-                        <a16:rowId xmlns:a16="http://schemas.microsoft.com/office/drawing/2014/main" val="3045326167"/>
+                        <a16:rowId xmlns:a16="http://schemas.microsoft.com/office/drawing/2014/main" val="10001"/>
                       </a:ext>
                     </a:extLst>
                   </a:tr>
@@ -9324,26 +8509,14 @@
             </a:graphic>
           </p:graphicFrame>
         </mc:Choice>
-        <mc:Fallback>
+        <mc:Fallback xmlns="">
           <p:graphicFrame>
             <p:nvGraphicFramePr>
-              <p:cNvPr id="4" name="表格 3">
-                <a:extLst>
-                  <a:ext uri="{FF2B5EF4-FFF2-40B4-BE49-F238E27FC236}">
-                    <a16:creationId xmlns:a16="http://schemas.microsoft.com/office/drawing/2014/main" id="{A31F56A0-D0A4-C774-673F-F8E545ABF4B3}"/>
-                  </a:ext>
-                </a:extLst>
-              </p:cNvPr>
+              <p:cNvPr id="4" name="表格 3"/>
               <p:cNvGraphicFramePr>
                 <a:graphicFrameLocks noGrp="1"/>
               </p:cNvGraphicFramePr>
-              <p:nvPr>
-                <p:extLst>
-                  <p:ext uri="{D42A27DB-BD31-4B8C-83A1-F6EECF244321}">
-                    <p14:modId xmlns:p14="http://schemas.microsoft.com/office/powerpoint/2010/main" val="4007303381"/>
-                  </p:ext>
-                </p:extLst>
-              </p:nvPr>
+              <p:nvPr/>
             </p:nvGraphicFramePr>
             <p:xfrm>
               <a:off x="2032000" y="1471506"/>
@@ -9356,48 +8529,12 @@
                     <a:tableStyleId>{5C22544A-7EE6-4342-B048-85BDC9FD1C3A}</a:tableStyleId>
                   </a:tblPr>
                   <a:tblGrid>
-                    <a:gridCol w="1354667">
-                      <a:extLst>
-                        <a:ext uri="{9D8B030D-6E8A-4147-A177-3AD203B41FA5}">
-                          <a16:colId xmlns:a16="http://schemas.microsoft.com/office/drawing/2014/main" val="1722989286"/>
-                        </a:ext>
-                      </a:extLst>
-                    </a:gridCol>
-                    <a:gridCol w="1354667">
-                      <a:extLst>
-                        <a:ext uri="{9D8B030D-6E8A-4147-A177-3AD203B41FA5}">
-                          <a16:colId xmlns:a16="http://schemas.microsoft.com/office/drawing/2014/main" val="3444716178"/>
-                        </a:ext>
-                      </a:extLst>
-                    </a:gridCol>
-                    <a:gridCol w="1354667">
-                      <a:extLst>
-                        <a:ext uri="{9D8B030D-6E8A-4147-A177-3AD203B41FA5}">
-                          <a16:colId xmlns:a16="http://schemas.microsoft.com/office/drawing/2014/main" val="2701297741"/>
-                        </a:ext>
-                      </a:extLst>
-                    </a:gridCol>
-                    <a:gridCol w="1354667">
-                      <a:extLst>
-                        <a:ext uri="{9D8B030D-6E8A-4147-A177-3AD203B41FA5}">
-                          <a16:colId xmlns:a16="http://schemas.microsoft.com/office/drawing/2014/main" val="480790829"/>
-                        </a:ext>
-                      </a:extLst>
-                    </a:gridCol>
-                    <a:gridCol w="1354667">
-                      <a:extLst>
-                        <a:ext uri="{9D8B030D-6E8A-4147-A177-3AD203B41FA5}">
-                          <a16:colId xmlns:a16="http://schemas.microsoft.com/office/drawing/2014/main" val="3318243028"/>
-                        </a:ext>
-                      </a:extLst>
-                    </a:gridCol>
-                    <a:gridCol w="1354667">
-                      <a:extLst>
-                        <a:ext uri="{9D8B030D-6E8A-4147-A177-3AD203B41FA5}">
-                          <a16:colId xmlns:a16="http://schemas.microsoft.com/office/drawing/2014/main" val="2209835067"/>
-                        </a:ext>
-                      </a:extLst>
-                    </a:gridCol>
+                    <a:gridCol w="1354667"/>
+                    <a:gridCol w="1354667"/>
+                    <a:gridCol w="1354667"/>
+                    <a:gridCol w="1354667"/>
+                    <a:gridCol w="1354667"/>
+                    <a:gridCol w="1354667"/>
                   </a:tblGrid>
                   <a:tr h="365760">
                     <a:tc>
@@ -9526,9 +8663,6 @@
                         </a:lnBlToTr>
                         <a:blipFill>
                           <a:blip r:embed="rId2"/>
-                          <a:stretch>
-                            <a:fillRect l="-99552" t="-8197" r="-399552" b="-122951"/>
-                          </a:stretch>
                         </a:blipFill>
                       </a:tcPr>
                     </a:tc>
@@ -9583,9 +8717,6 @@
                         </a:lnBlToTr>
                         <a:blipFill>
                           <a:blip r:embed="rId2"/>
-                          <a:stretch>
-                            <a:fillRect l="-200450" t="-8197" r="-301351" b="-122951"/>
-                          </a:stretch>
                         </a:blipFill>
                       </a:tcPr>
                     </a:tc>
@@ -9711,9 +8842,6 @@
                         </a:lnBlToTr>
                         <a:blipFill>
                           <a:blip r:embed="rId2"/>
-                          <a:stretch>
-                            <a:fillRect l="-398655" t="-8197" r="-100448" b="-122951"/>
-                          </a:stretch>
                         </a:blipFill>
                       </a:tcPr>
                     </a:tc>
@@ -9788,11 +8916,6 @@
                         </a:solidFill>
                       </a:tcPr>
                     </a:tc>
-                    <a:extLst>
-                      <a:ext uri="{0D108BD9-81ED-4DB2-BD59-A6C34878D82A}">
-                        <a16:rowId xmlns:a16="http://schemas.microsoft.com/office/drawing/2014/main" val="3511250450"/>
-                      </a:ext>
-                    </a:extLst>
                   </a:tr>
                   <a:tr h="370840">
                     <a:tc>
@@ -9921,9 +9044,6 @@
                         </a:lnBlToTr>
                         <a:blipFill>
                           <a:blip r:embed="rId2"/>
-                          <a:stretch>
-                            <a:fillRect l="-99552" t="-108197" r="-399552" b="-22951"/>
-                          </a:stretch>
                         </a:blipFill>
                       </a:tcPr>
                     </a:tc>
@@ -9978,9 +9098,6 @@
                         </a:lnBlToTr>
                         <a:blipFill>
                           <a:blip r:embed="rId2"/>
-                          <a:stretch>
-                            <a:fillRect l="-200450" t="-108197" r="-301351" b="-22951"/>
-                          </a:stretch>
                         </a:blipFill>
                       </a:tcPr>
                     </a:tc>
@@ -10106,9 +9223,6 @@
                         </a:lnBlToTr>
                         <a:blipFill>
                           <a:blip r:embed="rId2"/>
-                          <a:stretch>
-                            <a:fillRect l="-398655" t="-108197" r="-100448" b="-22951"/>
-                          </a:stretch>
                         </a:blipFill>
                       </a:tcPr>
                     </a:tc>
@@ -10183,11 +9297,6 @@
                         </a:solidFill>
                       </a:tcPr>
                     </a:tc>
-                    <a:extLst>
-                      <a:ext uri="{0D108BD9-81ED-4DB2-BD59-A6C34878D82A}">
-                        <a16:rowId xmlns:a16="http://schemas.microsoft.com/office/drawing/2014/main" val="3045326167"/>
-                      </a:ext>
-                    </a:extLst>
                   </a:tr>
                 </a:tbl>
               </a:graphicData>
@@ -10196,9 +9305,4813 @@
         </mc:Fallback>
       </mc:AlternateContent>
     </p:spTree>
+  </p:cSld>
+  <p:clrMapOvr>
+    <a:masterClrMapping/>
+  </p:clrMapOvr>
+</p:sld>
+</file>
+
+<file path=ppt/slides/slide5.xml><?xml version="1.0" encoding="utf-8"?>
+<p:sld xmlns:a="http://schemas.openxmlformats.org/drawingml/2006/main" xmlns:r="http://schemas.openxmlformats.org/officeDocument/2006/relationships" xmlns:p="http://schemas.openxmlformats.org/presentationml/2006/main">
+  <p:cSld>
+    <p:spTree>
+      <p:nvGrpSpPr>
+        <p:cNvPr id="1" name=""/>
+        <p:cNvGrpSpPr/>
+        <p:nvPr/>
+      </p:nvGrpSpPr>
+      <p:grpSpPr>
+        <a:xfrm>
+          <a:off x="0" y="0"/>
+          <a:ext cx="0" cy="0"/>
+          <a:chOff x="0" y="0"/>
+          <a:chExt cx="0" cy="0"/>
+        </a:xfrm>
+      </p:grpSpPr>
+      <p:grpSp>
+        <p:nvGrpSpPr>
+          <p:cNvPr id="17" name="组合 16">
+            <a:extLst>
+              <a:ext uri="{FF2B5EF4-FFF2-40B4-BE49-F238E27FC236}">
+                <a16:creationId xmlns:a16="http://schemas.microsoft.com/office/drawing/2014/main" id="{B3BBECD2-B7D2-58BF-97C6-7973A551E3B5}"/>
+              </a:ext>
+            </a:extLst>
+          </p:cNvPr>
+          <p:cNvGrpSpPr/>
+          <p:nvPr/>
+        </p:nvGrpSpPr>
+        <p:grpSpPr>
+          <a:xfrm>
+            <a:off x="551687" y="483762"/>
+            <a:ext cx="6762877" cy="2052427"/>
+            <a:chOff x="1668218" y="1609917"/>
+            <a:chExt cx="6762877" cy="2052427"/>
+          </a:xfrm>
+        </p:grpSpPr>
+        <mc:AlternateContent xmlns:mc="http://schemas.openxmlformats.org/markup-compatibility/2006" xmlns:a14="http://schemas.microsoft.com/office/drawing/2010/main">
+          <mc:Choice Requires="a14">
+            <p:sp>
+              <p:nvSpPr>
+                <p:cNvPr id="2" name="文本框 1">
+                  <a:extLst>
+                    <a:ext uri="{FF2B5EF4-FFF2-40B4-BE49-F238E27FC236}">
+                      <a16:creationId xmlns:a16="http://schemas.microsoft.com/office/drawing/2014/main" id="{F3BABCF0-BDCC-9EE0-DBEE-37C2D7C9708E}"/>
+                    </a:ext>
+                  </a:extLst>
+                </p:cNvPr>
+                <p:cNvSpPr txBox="1"/>
+                <p:nvPr/>
+              </p:nvSpPr>
+              <p:spPr>
+                <a:xfrm>
+                  <a:off x="3140095" y="3108346"/>
+                  <a:ext cx="3819122" cy="553998"/>
+                </a:xfrm>
+                <a:prstGeom prst="rect">
+                  <a:avLst/>
+                </a:prstGeom>
+                <a:noFill/>
+              </p:spPr>
+              <p:txBody>
+                <a:bodyPr wrap="none" lIns="0" tIns="0" rIns="0" bIns="0" rtlCol="0">
+                  <a:spAutoFit/>
+                </a:bodyPr>
+                <a:lstStyle/>
+                <a:p>
+                  <a:pPr/>
+                  <a14:m>
+                    <m:oMathPara xmlns:m="http://schemas.openxmlformats.org/officeDocument/2006/math">
+                      <m:oMathParaPr>
+                        <m:jc m:val="centerGroup"/>
+                      </m:oMathParaPr>
+                      <m:oMath xmlns:m="http://schemas.openxmlformats.org/officeDocument/2006/math">
+                        <m:d>
+                          <m:dPr>
+                            <m:begChr m:val="["/>
+                            <m:endChr m:val="]"/>
+                            <m:ctrlPr>
+                              <a:rPr lang="en-US" altLang="zh-CN" sz="3600" b="0" i="1" smtClean="0">
+                                <a:latin typeface="Cambria Math" panose="02040503050406030204" pitchFamily="18" charset="0"/>
+                              </a:rPr>
+                            </m:ctrlPr>
+                          </m:dPr>
+                          <m:e>
+                            <m:sSub>
+                              <m:sSubPr>
+                                <m:ctrlPr>
+                                  <a:rPr lang="en-US" altLang="zh-CN" sz="3600" b="0" i="1" smtClean="0">
+                                    <a:latin typeface="Cambria Math" panose="02040503050406030204" pitchFamily="18" charset="0"/>
+                                  </a:rPr>
+                                </m:ctrlPr>
+                              </m:sSubPr>
+                              <m:e>
+                                <m:r>
+                                  <a:rPr lang="en-US" altLang="zh-CN" sz="3600" b="0" i="1" smtClean="0">
+                                    <a:latin typeface="Cambria Math" panose="02040503050406030204" pitchFamily="18" charset="0"/>
+                                  </a:rPr>
+                                  <m:t>𝑥</m:t>
+                                </m:r>
+                              </m:e>
+                              <m:sub>
+                                <m:r>
+                                  <a:rPr lang="en-US" altLang="zh-CN" sz="3600" b="0" i="1" smtClean="0">
+                                    <a:latin typeface="Cambria Math" panose="02040503050406030204" pitchFamily="18" charset="0"/>
+                                  </a:rPr>
+                                  <m:t>1</m:t>
+                                </m:r>
+                              </m:sub>
+                            </m:sSub>
+                            <m:r>
+                              <a:rPr lang="en-US" altLang="zh-CN" sz="3600" b="0" i="1" smtClean="0">
+                                <a:latin typeface="Cambria Math" panose="02040503050406030204" pitchFamily="18" charset="0"/>
+                              </a:rPr>
+                              <m:t>,  </m:t>
+                            </m:r>
+                            <m:sSub>
+                              <m:sSubPr>
+                                <m:ctrlPr>
+                                  <a:rPr lang="en-US" altLang="zh-CN" sz="3600" b="0" i="1" smtClean="0">
+                                    <a:latin typeface="Cambria Math" panose="02040503050406030204" pitchFamily="18" charset="0"/>
+                                  </a:rPr>
+                                </m:ctrlPr>
+                              </m:sSubPr>
+                              <m:e>
+                                <m:r>
+                                  <a:rPr lang="en-US" altLang="zh-CN" sz="3600" b="0" i="1" smtClean="0">
+                                    <a:latin typeface="Cambria Math" panose="02040503050406030204" pitchFamily="18" charset="0"/>
+                                  </a:rPr>
+                                  <m:t>𝑥</m:t>
+                                </m:r>
+                              </m:e>
+                              <m:sub>
+                                <m:r>
+                                  <a:rPr lang="en-US" altLang="zh-CN" sz="3600" b="0" i="1" smtClean="0">
+                                    <a:latin typeface="Cambria Math" panose="02040503050406030204" pitchFamily="18" charset="0"/>
+                                  </a:rPr>
+                                  <m:t>2</m:t>
+                                </m:r>
+                              </m:sub>
+                            </m:sSub>
+                            <m:r>
+                              <a:rPr lang="en-US" altLang="zh-CN" sz="3600" b="0" i="1" smtClean="0">
+                                <a:latin typeface="Cambria Math" panose="02040503050406030204" pitchFamily="18" charset="0"/>
+                              </a:rPr>
+                              <m:t>,  </m:t>
+                            </m:r>
+                            <m:sSub>
+                              <m:sSubPr>
+                                <m:ctrlPr>
+                                  <a:rPr lang="en-US" altLang="zh-CN" sz="3600" b="0" i="1" smtClean="0">
+                                    <a:latin typeface="Cambria Math" panose="02040503050406030204" pitchFamily="18" charset="0"/>
+                                  </a:rPr>
+                                </m:ctrlPr>
+                              </m:sSubPr>
+                              <m:e>
+                                <m:r>
+                                  <a:rPr lang="en-US" altLang="zh-CN" sz="3600" b="0" i="1" smtClean="0">
+                                    <a:latin typeface="Cambria Math" panose="02040503050406030204" pitchFamily="18" charset="0"/>
+                                  </a:rPr>
+                                  <m:t>𝑥</m:t>
+                                </m:r>
+                              </m:e>
+                              <m:sub>
+                                <m:r>
+                                  <a:rPr lang="en-US" altLang="zh-CN" sz="3600" b="0" i="1" smtClean="0">
+                                    <a:latin typeface="Cambria Math" panose="02040503050406030204" pitchFamily="18" charset="0"/>
+                                  </a:rPr>
+                                  <m:t>3</m:t>
+                                </m:r>
+                              </m:sub>
+                            </m:sSub>
+                          </m:e>
+                        </m:d>
+                      </m:oMath>
+                    </m:oMathPara>
+                  </a14:m>
+                  <a:endParaRPr lang="en-US" altLang="zh-CN" sz="3600" b="0" dirty="0"/>
+                </a:p>
+              </p:txBody>
+            </p:sp>
+          </mc:Choice>
+          <mc:Fallback xmlns="">
+            <p:sp>
+              <p:nvSpPr>
+                <p:cNvPr id="2" name="文本框 1">
+                  <a:extLst>
+                    <a:ext uri="{FF2B5EF4-FFF2-40B4-BE49-F238E27FC236}">
+                      <a16:creationId xmlns:a16="http://schemas.microsoft.com/office/drawing/2014/main" id="{F3BABCF0-BDCC-9EE0-DBEE-37C2D7C9708E}"/>
+                    </a:ext>
+                  </a:extLst>
+                </p:cNvPr>
+                <p:cNvSpPr txBox="1">
+                  <a:spLocks noRot="1" noChangeAspect="1" noMove="1" noResize="1" noEditPoints="1" noAdjustHandles="1" noChangeArrowheads="1" noChangeShapeType="1" noTextEdit="1"/>
+                </p:cNvSpPr>
+                <p:nvPr/>
+              </p:nvSpPr>
+              <p:spPr>
+                <a:xfrm>
+                  <a:off x="3140095" y="3108346"/>
+                  <a:ext cx="3819122" cy="553998"/>
+                </a:xfrm>
+                <a:prstGeom prst="rect">
+                  <a:avLst/>
+                </a:prstGeom>
+                <a:blipFill>
+                  <a:blip r:embed="rId2"/>
+                  <a:stretch>
+                    <a:fillRect/>
+                  </a:stretch>
+                </a:blipFill>
+              </p:spPr>
+              <p:txBody>
+                <a:bodyPr/>
+                <a:lstStyle/>
+                <a:p>
+                  <a:r>
+                    <a:rPr lang="zh-CN" altLang="en-US">
+                      <a:noFill/>
+                    </a:rPr>
+                    <a:t> </a:t>
+                  </a:r>
+                </a:p>
+              </p:txBody>
+            </p:sp>
+          </mc:Fallback>
+        </mc:AlternateContent>
+        <mc:AlternateContent xmlns:mc="http://schemas.openxmlformats.org/markup-compatibility/2006" xmlns:a14="http://schemas.microsoft.com/office/drawing/2010/main">
+          <mc:Choice Requires="a14">
+            <p:sp>
+              <p:nvSpPr>
+                <p:cNvPr id="4" name="文本框 3">
+                  <a:extLst>
+                    <a:ext uri="{FF2B5EF4-FFF2-40B4-BE49-F238E27FC236}">
+                      <a16:creationId xmlns:a16="http://schemas.microsoft.com/office/drawing/2014/main" id="{DCD6A493-F8F2-8196-89A5-6C87EA56A451}"/>
+                    </a:ext>
+                  </a:extLst>
+                </p:cNvPr>
+                <p:cNvSpPr txBox="1"/>
+                <p:nvPr/>
+              </p:nvSpPr>
+              <p:spPr>
+                <a:xfrm>
+                  <a:off x="1668218" y="1609917"/>
+                  <a:ext cx="6762877" cy="553998"/>
+                </a:xfrm>
+                <a:prstGeom prst="rect">
+                  <a:avLst/>
+                </a:prstGeom>
+                <a:noFill/>
+              </p:spPr>
+              <p:txBody>
+                <a:bodyPr wrap="none" lIns="0" tIns="0" rIns="0" bIns="0" rtlCol="0">
+                  <a:spAutoFit/>
+                </a:bodyPr>
+                <a:lstStyle/>
+                <a:p>
+                  <a:pPr/>
+                  <a14:m>
+                    <m:oMathPara xmlns:m="http://schemas.openxmlformats.org/officeDocument/2006/math">
+                      <m:oMathParaPr>
+                        <m:jc m:val="centerGroup"/>
+                      </m:oMathParaPr>
+                      <m:oMath xmlns:m="http://schemas.openxmlformats.org/officeDocument/2006/math">
+                        <m:d>
+                          <m:dPr>
+                            <m:begChr m:val="["/>
+                            <m:endChr m:val="]"/>
+                            <m:ctrlPr>
+                              <a:rPr lang="en-US" altLang="zh-CN" sz="3600" b="0" i="1" smtClean="0">
+                                <a:latin typeface="Cambria Math" panose="02040503050406030204" pitchFamily="18" charset="0"/>
+                              </a:rPr>
+                            </m:ctrlPr>
+                          </m:dPr>
+                          <m:e>
+                            <m:sSub>
+                              <m:sSubPr>
+                                <m:ctrlPr>
+                                  <a:rPr lang="en-US" altLang="zh-CN" sz="3600" b="0" i="1" smtClean="0">
+                                    <a:latin typeface="Cambria Math" panose="02040503050406030204" pitchFamily="18" charset="0"/>
+                                  </a:rPr>
+                                </m:ctrlPr>
+                              </m:sSubPr>
+                              <m:e>
+                                <m:r>
+                                  <a:rPr lang="en-US" altLang="zh-CN" sz="3600" b="0" i="1" smtClean="0">
+                                    <a:latin typeface="Cambria Math" panose="02040503050406030204" pitchFamily="18" charset="0"/>
+                                  </a:rPr>
+                                  <m:t>𝑦</m:t>
+                                </m:r>
+                              </m:e>
+                              <m:sub>
+                                <m:r>
+                                  <a:rPr lang="en-US" altLang="zh-CN" sz="3600" b="0" i="1" smtClean="0">
+                                    <a:latin typeface="Cambria Math" panose="02040503050406030204" pitchFamily="18" charset="0"/>
+                                  </a:rPr>
+                                  <m:t>1</m:t>
+                                </m:r>
+                              </m:sub>
+                            </m:sSub>
+                            <m:r>
+                              <a:rPr lang="en-US" altLang="zh-CN" sz="3600" b="0" i="1" smtClean="0">
+                                <a:latin typeface="Cambria Math" panose="02040503050406030204" pitchFamily="18" charset="0"/>
+                              </a:rPr>
+                              <m:t>,  </m:t>
+                            </m:r>
+                            <m:sSub>
+                              <m:sSubPr>
+                                <m:ctrlPr>
+                                  <a:rPr lang="en-US" altLang="zh-CN" sz="3600" b="0" i="1" smtClean="0">
+                                    <a:latin typeface="Cambria Math" panose="02040503050406030204" pitchFamily="18" charset="0"/>
+                                  </a:rPr>
+                                </m:ctrlPr>
+                              </m:sSubPr>
+                              <m:e>
+                                <m:r>
+                                  <a:rPr lang="en-US" altLang="zh-CN" sz="3600" b="0" i="1" smtClean="0">
+                                    <a:latin typeface="Cambria Math" panose="02040503050406030204" pitchFamily="18" charset="0"/>
+                                  </a:rPr>
+                                  <m:t>𝑦</m:t>
+                                </m:r>
+                              </m:e>
+                              <m:sub>
+                                <m:r>
+                                  <a:rPr lang="en-US" altLang="zh-CN" sz="3600" b="0" i="1" smtClean="0">
+                                    <a:latin typeface="Cambria Math" panose="02040503050406030204" pitchFamily="18" charset="0"/>
+                                  </a:rPr>
+                                  <m:t>2</m:t>
+                                </m:r>
+                              </m:sub>
+                            </m:sSub>
+                            <m:r>
+                              <a:rPr lang="en-US" altLang="zh-CN" sz="3600" b="0" i="1" smtClean="0">
+                                <a:latin typeface="Cambria Math" panose="02040503050406030204" pitchFamily="18" charset="0"/>
+                              </a:rPr>
+                              <m:t>,  </m:t>
+                            </m:r>
+                            <m:sSub>
+                              <m:sSubPr>
+                                <m:ctrlPr>
+                                  <a:rPr lang="en-US" altLang="zh-CN" sz="3600" b="0" i="1" smtClean="0">
+                                    <a:latin typeface="Cambria Math" panose="02040503050406030204" pitchFamily="18" charset="0"/>
+                                  </a:rPr>
+                                </m:ctrlPr>
+                              </m:sSubPr>
+                              <m:e>
+                                <m:r>
+                                  <a:rPr lang="en-US" altLang="zh-CN" sz="3600" b="0" i="1" smtClean="0">
+                                    <a:latin typeface="Cambria Math" panose="02040503050406030204" pitchFamily="18" charset="0"/>
+                                  </a:rPr>
+                                  <m:t>𝑦</m:t>
+                                </m:r>
+                              </m:e>
+                              <m:sub>
+                                <m:r>
+                                  <a:rPr lang="en-US" altLang="zh-CN" sz="3600" b="0" i="1" smtClean="0">
+                                    <a:latin typeface="Cambria Math" panose="02040503050406030204" pitchFamily="18" charset="0"/>
+                                  </a:rPr>
+                                  <m:t>3</m:t>
+                                </m:r>
+                              </m:sub>
+                            </m:sSub>
+                            <m:r>
+                              <a:rPr lang="en-US" altLang="zh-CN" sz="3600" b="0" i="1" smtClean="0">
+                                <a:latin typeface="Cambria Math" panose="02040503050406030204" pitchFamily="18" charset="0"/>
+                              </a:rPr>
+                              <m:t>,  </m:t>
+                            </m:r>
+                            <m:sSub>
+                              <m:sSubPr>
+                                <m:ctrlPr>
+                                  <a:rPr lang="en-US" altLang="zh-CN" sz="3600" b="0" i="1" smtClean="0">
+                                    <a:latin typeface="Cambria Math" panose="02040503050406030204" pitchFamily="18" charset="0"/>
+                                  </a:rPr>
+                                </m:ctrlPr>
+                              </m:sSubPr>
+                              <m:e>
+                                <m:r>
+                                  <a:rPr lang="en-US" altLang="zh-CN" sz="3600" b="0" i="1" smtClean="0">
+                                    <a:latin typeface="Cambria Math" panose="02040503050406030204" pitchFamily="18" charset="0"/>
+                                  </a:rPr>
+                                  <m:t>𝑦</m:t>
+                                </m:r>
+                              </m:e>
+                              <m:sub>
+                                <m:r>
+                                  <a:rPr lang="en-US" altLang="zh-CN" sz="3600" b="0" i="1" smtClean="0">
+                                    <a:latin typeface="Cambria Math" panose="02040503050406030204" pitchFamily="18" charset="0"/>
+                                  </a:rPr>
+                                  <m:t>4</m:t>
+                                </m:r>
+                              </m:sub>
+                            </m:sSub>
+                            <m:r>
+                              <a:rPr lang="en-US" altLang="zh-CN" sz="3600" b="0" i="1" smtClean="0">
+                                <a:latin typeface="Cambria Math" panose="02040503050406030204" pitchFamily="18" charset="0"/>
+                              </a:rPr>
+                              <m:t>,  </m:t>
+                            </m:r>
+                            <m:sSub>
+                              <m:sSubPr>
+                                <m:ctrlPr>
+                                  <a:rPr lang="en-US" altLang="zh-CN" sz="3600" b="0" i="1" smtClean="0">
+                                    <a:latin typeface="Cambria Math" panose="02040503050406030204" pitchFamily="18" charset="0"/>
+                                  </a:rPr>
+                                </m:ctrlPr>
+                              </m:sSubPr>
+                              <m:e>
+                                <m:r>
+                                  <a:rPr lang="en-US" altLang="zh-CN" sz="3600" b="0" i="1" smtClean="0">
+                                    <a:latin typeface="Cambria Math" panose="02040503050406030204" pitchFamily="18" charset="0"/>
+                                  </a:rPr>
+                                  <m:t>𝑦</m:t>
+                                </m:r>
+                              </m:e>
+                              <m:sub>
+                                <m:r>
+                                  <a:rPr lang="en-US" altLang="zh-CN" sz="3600" b="0" i="1" smtClean="0">
+                                    <a:latin typeface="Cambria Math" panose="02040503050406030204" pitchFamily="18" charset="0"/>
+                                  </a:rPr>
+                                  <m:t>5</m:t>
+                                </m:r>
+                              </m:sub>
+                            </m:sSub>
+                          </m:e>
+                        </m:d>
+                      </m:oMath>
+                    </m:oMathPara>
+                  </a14:m>
+                  <a:endParaRPr lang="en-US" altLang="zh-CN" sz="3600" b="0" dirty="0"/>
+                </a:p>
+              </p:txBody>
+            </p:sp>
+          </mc:Choice>
+          <mc:Fallback xmlns="">
+            <p:sp>
+              <p:nvSpPr>
+                <p:cNvPr id="4" name="文本框 3">
+                  <a:extLst>
+                    <a:ext uri="{FF2B5EF4-FFF2-40B4-BE49-F238E27FC236}">
+                      <a16:creationId xmlns:a16="http://schemas.microsoft.com/office/drawing/2014/main" id="{DCD6A493-F8F2-8196-89A5-6C87EA56A451}"/>
+                    </a:ext>
+                  </a:extLst>
+                </p:cNvPr>
+                <p:cNvSpPr txBox="1">
+                  <a:spLocks noRot="1" noChangeAspect="1" noMove="1" noResize="1" noEditPoints="1" noAdjustHandles="1" noChangeArrowheads="1" noChangeShapeType="1" noTextEdit="1"/>
+                </p:cNvSpPr>
+                <p:nvPr/>
+              </p:nvSpPr>
+              <p:spPr>
+                <a:xfrm>
+                  <a:off x="1668218" y="1609917"/>
+                  <a:ext cx="6762877" cy="553998"/>
+                </a:xfrm>
+                <a:prstGeom prst="rect">
+                  <a:avLst/>
+                </a:prstGeom>
+                <a:blipFill>
+                  <a:blip r:embed="rId3"/>
+                  <a:stretch>
+                    <a:fillRect/>
+                  </a:stretch>
+                </a:blipFill>
+              </p:spPr>
+              <p:txBody>
+                <a:bodyPr/>
+                <a:lstStyle/>
+                <a:p>
+                  <a:r>
+                    <a:rPr lang="zh-CN" altLang="en-US">
+                      <a:noFill/>
+                    </a:rPr>
+                    <a:t> </a:t>
+                  </a:r>
+                </a:p>
+              </p:txBody>
+            </p:sp>
+          </mc:Fallback>
+        </mc:AlternateContent>
+        <p:cxnSp>
+          <p:nvCxnSpPr>
+            <p:cNvPr id="6" name="直接箭头连接符 5">
+              <a:extLst>
+                <a:ext uri="{FF2B5EF4-FFF2-40B4-BE49-F238E27FC236}">
+                  <a16:creationId xmlns:a16="http://schemas.microsoft.com/office/drawing/2014/main" id="{17940B2B-55EE-43B5-3B06-A5ACE9DB4DA2}"/>
+                </a:ext>
+              </a:extLst>
+            </p:cNvPr>
+            <p:cNvCxnSpPr>
+              <a:cxnSpLocks/>
+            </p:cNvCxnSpPr>
+            <p:nvPr/>
+          </p:nvCxnSpPr>
+          <p:spPr>
+            <a:xfrm flipH="1" flipV="1">
+              <a:off x="2336800" y="2202732"/>
+              <a:ext cx="1161176" cy="905614"/>
+            </a:xfrm>
+            <a:prstGeom prst="straightConnector1">
+              <a:avLst/>
+            </a:prstGeom>
+            <a:ln w="25400">
+              <a:tailEnd type="stealth"/>
+            </a:ln>
+          </p:spPr>
+          <p:style>
+            <a:lnRef idx="1">
+              <a:schemeClr val="dk1"/>
+            </a:lnRef>
+            <a:fillRef idx="0">
+              <a:schemeClr val="dk1"/>
+            </a:fillRef>
+            <a:effectRef idx="0">
+              <a:schemeClr val="dk1"/>
+            </a:effectRef>
+            <a:fontRef idx="minor">
+              <a:schemeClr val="tx1"/>
+            </a:fontRef>
+          </p:style>
+        </p:cxnSp>
+        <p:cxnSp>
+          <p:nvCxnSpPr>
+            <p:cNvPr id="7" name="直接箭头连接符 6">
+              <a:extLst>
+                <a:ext uri="{FF2B5EF4-FFF2-40B4-BE49-F238E27FC236}">
+                  <a16:creationId xmlns:a16="http://schemas.microsoft.com/office/drawing/2014/main" id="{E52A3418-7FA8-5078-2187-09F0B0F3F655}"/>
+                </a:ext>
+              </a:extLst>
+            </p:cNvPr>
+            <p:cNvCxnSpPr>
+              <a:cxnSpLocks/>
+              <a:stCxn id="2" idx="0"/>
+              <a:endCxn id="4" idx="2"/>
+            </p:cNvCxnSpPr>
+            <p:nvPr/>
+          </p:nvCxnSpPr>
+          <p:spPr>
+            <a:xfrm flipV="1">
+              <a:off x="5049656" y="2163915"/>
+              <a:ext cx="1" cy="944431"/>
+            </a:xfrm>
+            <a:prstGeom prst="straightConnector1">
+              <a:avLst/>
+            </a:prstGeom>
+            <a:ln w="25400">
+              <a:tailEnd type="stealth"/>
+            </a:ln>
+          </p:spPr>
+          <p:style>
+            <a:lnRef idx="1">
+              <a:schemeClr val="dk1"/>
+            </a:lnRef>
+            <a:fillRef idx="0">
+              <a:schemeClr val="dk1"/>
+            </a:fillRef>
+            <a:effectRef idx="0">
+              <a:schemeClr val="dk1"/>
+            </a:effectRef>
+            <a:fontRef idx="minor">
+              <a:schemeClr val="tx1"/>
+            </a:fontRef>
+          </p:style>
+        </p:cxnSp>
+        <p:cxnSp>
+          <p:nvCxnSpPr>
+            <p:cNvPr id="13" name="直接箭头连接符 12">
+              <a:extLst>
+                <a:ext uri="{FF2B5EF4-FFF2-40B4-BE49-F238E27FC236}">
+                  <a16:creationId xmlns:a16="http://schemas.microsoft.com/office/drawing/2014/main" id="{7EC759EB-04CD-811B-E5F1-8AC91C6DB5ED}"/>
+                </a:ext>
+              </a:extLst>
+            </p:cNvPr>
+            <p:cNvCxnSpPr>
+              <a:cxnSpLocks/>
+            </p:cNvCxnSpPr>
+            <p:nvPr/>
+          </p:nvCxnSpPr>
+          <p:spPr>
+            <a:xfrm flipV="1">
+              <a:off x="6461760" y="2202732"/>
+              <a:ext cx="1253570" cy="905614"/>
+            </a:xfrm>
+            <a:prstGeom prst="straightConnector1">
+              <a:avLst/>
+            </a:prstGeom>
+            <a:ln w="25400">
+              <a:tailEnd type="stealth"/>
+            </a:ln>
+          </p:spPr>
+          <p:style>
+            <a:lnRef idx="1">
+              <a:schemeClr val="dk1"/>
+            </a:lnRef>
+            <a:fillRef idx="0">
+              <a:schemeClr val="dk1"/>
+            </a:fillRef>
+            <a:effectRef idx="0">
+              <a:schemeClr val="dk1"/>
+            </a:effectRef>
+            <a:fontRef idx="minor">
+              <a:schemeClr val="tx1"/>
+            </a:fontRef>
+          </p:style>
+        </p:cxnSp>
+      </p:grpSp>
+      <p:grpSp>
+        <p:nvGrpSpPr>
+          <p:cNvPr id="42" name="组合 41">
+            <a:extLst>
+              <a:ext uri="{FF2B5EF4-FFF2-40B4-BE49-F238E27FC236}">
+                <a16:creationId xmlns:a16="http://schemas.microsoft.com/office/drawing/2014/main" id="{EE8A8250-C443-A82A-9D2B-14B01445BE40}"/>
+              </a:ext>
+            </a:extLst>
+          </p:cNvPr>
+          <p:cNvGrpSpPr/>
+          <p:nvPr/>
+        </p:nvGrpSpPr>
+        <p:grpSpPr>
+          <a:xfrm>
+            <a:off x="1344118" y="4414492"/>
+            <a:ext cx="3829125" cy="2052427"/>
+            <a:chOff x="1369318" y="3991159"/>
+            <a:chExt cx="3829125" cy="2052427"/>
+          </a:xfrm>
+        </p:grpSpPr>
+        <mc:AlternateContent xmlns:mc="http://schemas.openxmlformats.org/markup-compatibility/2006" xmlns:a14="http://schemas.microsoft.com/office/drawing/2010/main">
+          <mc:Choice Requires="a14">
+            <p:sp>
+              <p:nvSpPr>
+                <p:cNvPr id="31" name="文本框 30">
+                  <a:extLst>
+                    <a:ext uri="{FF2B5EF4-FFF2-40B4-BE49-F238E27FC236}">
+                      <a16:creationId xmlns:a16="http://schemas.microsoft.com/office/drawing/2014/main" id="{926AB38C-720C-ABBC-5814-02FD9A30D55F}"/>
+                    </a:ext>
+                  </a:extLst>
+                </p:cNvPr>
+                <p:cNvSpPr txBox="1"/>
+                <p:nvPr/>
+              </p:nvSpPr>
+              <p:spPr>
+                <a:xfrm>
+                  <a:off x="1374319" y="5489588"/>
+                  <a:ext cx="3819122" cy="553998"/>
+                </a:xfrm>
+                <a:prstGeom prst="rect">
+                  <a:avLst/>
+                </a:prstGeom>
+                <a:noFill/>
+              </p:spPr>
+              <p:txBody>
+                <a:bodyPr wrap="none" lIns="0" tIns="0" rIns="0" bIns="0" rtlCol="0">
+                  <a:spAutoFit/>
+                </a:bodyPr>
+                <a:lstStyle/>
+                <a:p>
+                  <a:pPr/>
+                  <a14:m>
+                    <m:oMathPara xmlns:m="http://schemas.openxmlformats.org/officeDocument/2006/math">
+                      <m:oMathParaPr>
+                        <m:jc m:val="centerGroup"/>
+                      </m:oMathParaPr>
+                      <m:oMath xmlns:m="http://schemas.openxmlformats.org/officeDocument/2006/math">
+                        <m:d>
+                          <m:dPr>
+                            <m:begChr m:val="["/>
+                            <m:endChr m:val="]"/>
+                            <m:ctrlPr>
+                              <a:rPr lang="en-US" altLang="zh-CN" sz="3600" b="0" i="1" smtClean="0">
+                                <a:latin typeface="Cambria Math" panose="02040503050406030204" pitchFamily="18" charset="0"/>
+                              </a:rPr>
+                            </m:ctrlPr>
+                          </m:dPr>
+                          <m:e>
+                            <m:sSub>
+                              <m:sSubPr>
+                                <m:ctrlPr>
+                                  <a:rPr lang="en-US" altLang="zh-CN" sz="3600" b="0" i="1" smtClean="0">
+                                    <a:latin typeface="Cambria Math" panose="02040503050406030204" pitchFamily="18" charset="0"/>
+                                  </a:rPr>
+                                </m:ctrlPr>
+                              </m:sSubPr>
+                              <m:e>
+                                <m:r>
+                                  <a:rPr lang="en-US" altLang="zh-CN" sz="3600" b="0" i="1" smtClean="0">
+                                    <a:latin typeface="Cambria Math" panose="02040503050406030204" pitchFamily="18" charset="0"/>
+                                  </a:rPr>
+                                  <m:t>𝑥</m:t>
+                                </m:r>
+                              </m:e>
+                              <m:sub>
+                                <m:r>
+                                  <a:rPr lang="en-US" altLang="zh-CN" sz="3600" b="0" i="1" smtClean="0">
+                                    <a:latin typeface="Cambria Math" panose="02040503050406030204" pitchFamily="18" charset="0"/>
+                                  </a:rPr>
+                                  <m:t>1</m:t>
+                                </m:r>
+                              </m:sub>
+                            </m:sSub>
+                            <m:r>
+                              <a:rPr lang="en-US" altLang="zh-CN" sz="3600" b="0" i="1" smtClean="0">
+                                <a:latin typeface="Cambria Math" panose="02040503050406030204" pitchFamily="18" charset="0"/>
+                              </a:rPr>
+                              <m:t>,  </m:t>
+                            </m:r>
+                            <m:sSub>
+                              <m:sSubPr>
+                                <m:ctrlPr>
+                                  <a:rPr lang="en-US" altLang="zh-CN" sz="3600" b="0" i="1" smtClean="0">
+                                    <a:latin typeface="Cambria Math" panose="02040503050406030204" pitchFamily="18" charset="0"/>
+                                  </a:rPr>
+                                </m:ctrlPr>
+                              </m:sSubPr>
+                              <m:e>
+                                <m:r>
+                                  <a:rPr lang="en-US" altLang="zh-CN" sz="3600" b="0" i="1" smtClean="0">
+                                    <a:latin typeface="Cambria Math" panose="02040503050406030204" pitchFamily="18" charset="0"/>
+                                  </a:rPr>
+                                  <m:t>𝑥</m:t>
+                                </m:r>
+                              </m:e>
+                              <m:sub>
+                                <m:r>
+                                  <a:rPr lang="en-US" altLang="zh-CN" sz="3600" b="0" i="1" smtClean="0">
+                                    <a:latin typeface="Cambria Math" panose="02040503050406030204" pitchFamily="18" charset="0"/>
+                                  </a:rPr>
+                                  <m:t>2</m:t>
+                                </m:r>
+                              </m:sub>
+                            </m:sSub>
+                            <m:r>
+                              <a:rPr lang="en-US" altLang="zh-CN" sz="3600" b="0" i="1" smtClean="0">
+                                <a:latin typeface="Cambria Math" panose="02040503050406030204" pitchFamily="18" charset="0"/>
+                              </a:rPr>
+                              <m:t>,  </m:t>
+                            </m:r>
+                            <m:sSub>
+                              <m:sSubPr>
+                                <m:ctrlPr>
+                                  <a:rPr lang="en-US" altLang="zh-CN" sz="3600" b="0" i="1" smtClean="0">
+                                    <a:latin typeface="Cambria Math" panose="02040503050406030204" pitchFamily="18" charset="0"/>
+                                  </a:rPr>
+                                </m:ctrlPr>
+                              </m:sSubPr>
+                              <m:e>
+                                <m:r>
+                                  <a:rPr lang="en-US" altLang="zh-CN" sz="3600" b="0" i="1" smtClean="0">
+                                    <a:latin typeface="Cambria Math" panose="02040503050406030204" pitchFamily="18" charset="0"/>
+                                  </a:rPr>
+                                  <m:t>𝑥</m:t>
+                                </m:r>
+                              </m:e>
+                              <m:sub>
+                                <m:r>
+                                  <a:rPr lang="en-US" altLang="zh-CN" sz="3600" b="0" i="1" smtClean="0">
+                                    <a:latin typeface="Cambria Math" panose="02040503050406030204" pitchFamily="18" charset="0"/>
+                                  </a:rPr>
+                                  <m:t>3</m:t>
+                                </m:r>
+                              </m:sub>
+                            </m:sSub>
+                          </m:e>
+                        </m:d>
+                      </m:oMath>
+                    </m:oMathPara>
+                  </a14:m>
+                  <a:endParaRPr lang="en-US" altLang="zh-CN" sz="3600" b="0" dirty="0"/>
+                </a:p>
+              </p:txBody>
+            </p:sp>
+          </mc:Choice>
+          <mc:Fallback xmlns="">
+            <p:sp>
+              <p:nvSpPr>
+                <p:cNvPr id="31" name="文本框 30">
+                  <a:extLst>
+                    <a:ext uri="{FF2B5EF4-FFF2-40B4-BE49-F238E27FC236}">
+                      <a16:creationId xmlns:a16="http://schemas.microsoft.com/office/drawing/2014/main" id="{926AB38C-720C-ABBC-5814-02FD9A30D55F}"/>
+                    </a:ext>
+                  </a:extLst>
+                </p:cNvPr>
+                <p:cNvSpPr txBox="1">
+                  <a:spLocks noRot="1" noChangeAspect="1" noMove="1" noResize="1" noEditPoints="1" noAdjustHandles="1" noChangeArrowheads="1" noChangeShapeType="1" noTextEdit="1"/>
+                </p:cNvSpPr>
+                <p:nvPr/>
+              </p:nvSpPr>
+              <p:spPr>
+                <a:xfrm>
+                  <a:off x="1374319" y="5489588"/>
+                  <a:ext cx="3819122" cy="553998"/>
+                </a:xfrm>
+                <a:prstGeom prst="rect">
+                  <a:avLst/>
+                </a:prstGeom>
+                <a:blipFill>
+                  <a:blip r:embed="rId4"/>
+                  <a:stretch>
+                    <a:fillRect/>
+                  </a:stretch>
+                </a:blipFill>
+              </p:spPr>
+              <p:txBody>
+                <a:bodyPr/>
+                <a:lstStyle/>
+                <a:p>
+                  <a:r>
+                    <a:rPr lang="zh-CN" altLang="en-US">
+                      <a:noFill/>
+                    </a:rPr>
+                    <a:t> </a:t>
+                  </a:r>
+                </a:p>
+              </p:txBody>
+            </p:sp>
+          </mc:Fallback>
+        </mc:AlternateContent>
+        <mc:AlternateContent xmlns:mc="http://schemas.openxmlformats.org/markup-compatibility/2006" xmlns:a14="http://schemas.microsoft.com/office/drawing/2010/main">
+          <mc:Choice Requires="a14">
+            <p:sp>
+              <p:nvSpPr>
+                <p:cNvPr id="32" name="文本框 31">
+                  <a:extLst>
+                    <a:ext uri="{FF2B5EF4-FFF2-40B4-BE49-F238E27FC236}">
+                      <a16:creationId xmlns:a16="http://schemas.microsoft.com/office/drawing/2014/main" id="{6CFDD165-0015-CB59-A500-76BF52385A5B}"/>
+                    </a:ext>
+                  </a:extLst>
+                </p:cNvPr>
+                <p:cNvSpPr txBox="1"/>
+                <p:nvPr/>
+              </p:nvSpPr>
+              <p:spPr>
+                <a:xfrm>
+                  <a:off x="1369318" y="3991159"/>
+                  <a:ext cx="3829125" cy="553998"/>
+                </a:xfrm>
+                <a:prstGeom prst="rect">
+                  <a:avLst/>
+                </a:prstGeom>
+                <a:noFill/>
+              </p:spPr>
+              <p:txBody>
+                <a:bodyPr wrap="none" lIns="0" tIns="0" rIns="0" bIns="0" rtlCol="0">
+                  <a:spAutoFit/>
+                </a:bodyPr>
+                <a:lstStyle/>
+                <a:p>
+                  <a:pPr/>
+                  <a14:m>
+                    <m:oMathPara xmlns:m="http://schemas.openxmlformats.org/officeDocument/2006/math">
+                      <m:oMathParaPr>
+                        <m:jc m:val="centerGroup"/>
+                      </m:oMathParaPr>
+                      <m:oMath xmlns:m="http://schemas.openxmlformats.org/officeDocument/2006/math">
+                        <m:d>
+                          <m:dPr>
+                            <m:begChr m:val="["/>
+                            <m:endChr m:val="]"/>
+                            <m:ctrlPr>
+                              <a:rPr lang="en-US" altLang="zh-CN" sz="3600" b="0" i="1" smtClean="0">
+                                <a:latin typeface="Cambria Math" panose="02040503050406030204" pitchFamily="18" charset="0"/>
+                              </a:rPr>
+                            </m:ctrlPr>
+                          </m:dPr>
+                          <m:e>
+                            <m:sSub>
+                              <m:sSubPr>
+                                <m:ctrlPr>
+                                  <a:rPr lang="en-US" altLang="zh-CN" sz="3600" b="0" i="1" smtClean="0">
+                                    <a:latin typeface="Cambria Math" panose="02040503050406030204" pitchFamily="18" charset="0"/>
+                                  </a:rPr>
+                                </m:ctrlPr>
+                              </m:sSubPr>
+                              <m:e>
+                                <m:r>
+                                  <a:rPr lang="en-US" altLang="zh-CN" sz="3600" b="0" i="1" smtClean="0">
+                                    <a:latin typeface="Cambria Math" panose="02040503050406030204" pitchFamily="18" charset="0"/>
+                                  </a:rPr>
+                                  <m:t>𝑦</m:t>
+                                </m:r>
+                              </m:e>
+                              <m:sub>
+                                <m:r>
+                                  <a:rPr lang="en-US" altLang="zh-CN" sz="3600" b="0" i="1" smtClean="0">
+                                    <a:latin typeface="Cambria Math" panose="02040503050406030204" pitchFamily="18" charset="0"/>
+                                  </a:rPr>
+                                  <m:t>1</m:t>
+                                </m:r>
+                              </m:sub>
+                            </m:sSub>
+                            <m:r>
+                              <a:rPr lang="en-US" altLang="zh-CN" sz="3600" b="0" i="1" smtClean="0">
+                                <a:latin typeface="Cambria Math" panose="02040503050406030204" pitchFamily="18" charset="0"/>
+                              </a:rPr>
+                              <m:t>,  </m:t>
+                            </m:r>
+                            <m:sSub>
+                              <m:sSubPr>
+                                <m:ctrlPr>
+                                  <a:rPr lang="en-US" altLang="zh-CN" sz="3600" b="0" i="1" smtClean="0">
+                                    <a:latin typeface="Cambria Math" panose="02040503050406030204" pitchFamily="18" charset="0"/>
+                                  </a:rPr>
+                                </m:ctrlPr>
+                              </m:sSubPr>
+                              <m:e>
+                                <m:r>
+                                  <a:rPr lang="en-US" altLang="zh-CN" sz="3600" b="0" i="1" smtClean="0">
+                                    <a:latin typeface="Cambria Math" panose="02040503050406030204" pitchFamily="18" charset="0"/>
+                                  </a:rPr>
+                                  <m:t>𝑦</m:t>
+                                </m:r>
+                              </m:e>
+                              <m:sub>
+                                <m:r>
+                                  <a:rPr lang="en-US" altLang="zh-CN" sz="3600" b="0" i="1" smtClean="0">
+                                    <a:latin typeface="Cambria Math" panose="02040503050406030204" pitchFamily="18" charset="0"/>
+                                  </a:rPr>
+                                  <m:t>2</m:t>
+                                </m:r>
+                              </m:sub>
+                            </m:sSub>
+                            <m:r>
+                              <a:rPr lang="en-US" altLang="zh-CN" sz="3600" b="0" i="1" smtClean="0">
+                                <a:latin typeface="Cambria Math" panose="02040503050406030204" pitchFamily="18" charset="0"/>
+                              </a:rPr>
+                              <m:t>,  </m:t>
+                            </m:r>
+                            <m:sSub>
+                              <m:sSubPr>
+                                <m:ctrlPr>
+                                  <a:rPr lang="en-US" altLang="zh-CN" sz="3600" b="0" i="1" smtClean="0">
+                                    <a:latin typeface="Cambria Math" panose="02040503050406030204" pitchFamily="18" charset="0"/>
+                                  </a:rPr>
+                                </m:ctrlPr>
+                              </m:sSubPr>
+                              <m:e>
+                                <m:r>
+                                  <a:rPr lang="en-US" altLang="zh-CN" sz="3600" b="0" i="1" smtClean="0">
+                                    <a:latin typeface="Cambria Math" panose="02040503050406030204" pitchFamily="18" charset="0"/>
+                                  </a:rPr>
+                                  <m:t>𝑦</m:t>
+                                </m:r>
+                              </m:e>
+                              <m:sub>
+                                <m:r>
+                                  <a:rPr lang="en-US" altLang="zh-CN" sz="3600" b="0" i="1" smtClean="0">
+                                    <a:latin typeface="Cambria Math" panose="02040503050406030204" pitchFamily="18" charset="0"/>
+                                  </a:rPr>
+                                  <m:t>3</m:t>
+                                </m:r>
+                              </m:sub>
+                            </m:sSub>
+                          </m:e>
+                        </m:d>
+                      </m:oMath>
+                    </m:oMathPara>
+                  </a14:m>
+                  <a:endParaRPr lang="en-US" altLang="zh-CN" sz="3600" b="0" dirty="0"/>
+                </a:p>
+              </p:txBody>
+            </p:sp>
+          </mc:Choice>
+          <mc:Fallback xmlns="">
+            <p:sp>
+              <p:nvSpPr>
+                <p:cNvPr id="32" name="文本框 31">
+                  <a:extLst>
+                    <a:ext uri="{FF2B5EF4-FFF2-40B4-BE49-F238E27FC236}">
+                      <a16:creationId xmlns:a16="http://schemas.microsoft.com/office/drawing/2014/main" id="{6CFDD165-0015-CB59-A500-76BF52385A5B}"/>
+                    </a:ext>
+                  </a:extLst>
+                </p:cNvPr>
+                <p:cNvSpPr txBox="1">
+                  <a:spLocks noRot="1" noChangeAspect="1" noMove="1" noResize="1" noEditPoints="1" noAdjustHandles="1" noChangeArrowheads="1" noChangeShapeType="1" noTextEdit="1"/>
+                </p:cNvSpPr>
+                <p:nvPr/>
+              </p:nvSpPr>
+              <p:spPr>
+                <a:xfrm>
+                  <a:off x="1369318" y="3991159"/>
+                  <a:ext cx="3829125" cy="553998"/>
+                </a:xfrm>
+                <a:prstGeom prst="rect">
+                  <a:avLst/>
+                </a:prstGeom>
+                <a:blipFill>
+                  <a:blip r:embed="rId5"/>
+                  <a:stretch>
+                    <a:fillRect/>
+                  </a:stretch>
+                </a:blipFill>
+              </p:spPr>
+              <p:txBody>
+                <a:bodyPr/>
+                <a:lstStyle/>
+                <a:p>
+                  <a:r>
+                    <a:rPr lang="zh-CN" altLang="en-US">
+                      <a:noFill/>
+                    </a:rPr>
+                    <a:t> </a:t>
+                  </a:r>
+                </a:p>
+              </p:txBody>
+            </p:sp>
+          </mc:Fallback>
+        </mc:AlternateContent>
+        <p:cxnSp>
+          <p:nvCxnSpPr>
+            <p:cNvPr id="37" name="直接箭头连接符 36">
+              <a:extLst>
+                <a:ext uri="{FF2B5EF4-FFF2-40B4-BE49-F238E27FC236}">
+                  <a16:creationId xmlns:a16="http://schemas.microsoft.com/office/drawing/2014/main" id="{5DC91D59-6772-FF00-95EC-A50EC6012AC5}"/>
+                </a:ext>
+              </a:extLst>
+            </p:cNvPr>
+            <p:cNvCxnSpPr>
+              <a:cxnSpLocks/>
+            </p:cNvCxnSpPr>
+            <p:nvPr/>
+          </p:nvCxnSpPr>
+          <p:spPr>
+            <a:xfrm flipV="1">
+              <a:off x="4713079" y="4545157"/>
+              <a:ext cx="1" cy="944431"/>
+            </a:xfrm>
+            <a:prstGeom prst="straightConnector1">
+              <a:avLst/>
+            </a:prstGeom>
+            <a:ln w="25400">
+              <a:tailEnd type="stealth"/>
+            </a:ln>
+          </p:spPr>
+          <p:style>
+            <a:lnRef idx="1">
+              <a:schemeClr val="dk1"/>
+            </a:lnRef>
+            <a:fillRef idx="0">
+              <a:schemeClr val="dk1"/>
+            </a:fillRef>
+            <a:effectRef idx="0">
+              <a:schemeClr val="dk1"/>
+            </a:effectRef>
+            <a:fontRef idx="minor">
+              <a:schemeClr val="tx1"/>
+            </a:fontRef>
+          </p:style>
+        </p:cxnSp>
+        <p:cxnSp>
+          <p:nvCxnSpPr>
+            <p:cNvPr id="38" name="直接箭头连接符 37">
+              <a:extLst>
+                <a:ext uri="{FF2B5EF4-FFF2-40B4-BE49-F238E27FC236}">
+                  <a16:creationId xmlns:a16="http://schemas.microsoft.com/office/drawing/2014/main" id="{43B52B86-F8F5-73C6-55A4-0F8A990FA93F}"/>
+                </a:ext>
+              </a:extLst>
+            </p:cNvPr>
+            <p:cNvCxnSpPr>
+              <a:cxnSpLocks/>
+            </p:cNvCxnSpPr>
+            <p:nvPr/>
+          </p:nvCxnSpPr>
+          <p:spPr>
+            <a:xfrm flipH="1" flipV="1">
+              <a:off x="1800857" y="4583974"/>
+              <a:ext cx="1396689" cy="944431"/>
+            </a:xfrm>
+            <a:prstGeom prst="straightConnector1">
+              <a:avLst/>
+            </a:prstGeom>
+            <a:ln w="25400">
+              <a:tailEnd type="stealth"/>
+            </a:ln>
+          </p:spPr>
+          <p:style>
+            <a:lnRef idx="1">
+              <a:schemeClr val="dk1"/>
+            </a:lnRef>
+            <a:fillRef idx="0">
+              <a:schemeClr val="dk1"/>
+            </a:fillRef>
+            <a:effectRef idx="0">
+              <a:schemeClr val="dk1"/>
+            </a:effectRef>
+            <a:fontRef idx="minor">
+              <a:schemeClr val="tx1"/>
+            </a:fontRef>
+          </p:style>
+        </p:cxnSp>
+        <p:cxnSp>
+          <p:nvCxnSpPr>
+            <p:cNvPr id="40" name="直接箭头连接符 39">
+              <a:extLst>
+                <a:ext uri="{FF2B5EF4-FFF2-40B4-BE49-F238E27FC236}">
+                  <a16:creationId xmlns:a16="http://schemas.microsoft.com/office/drawing/2014/main" id="{7FF624F0-56AD-FCC7-0299-9C87AB7D9D6A}"/>
+                </a:ext>
+              </a:extLst>
+            </p:cNvPr>
+            <p:cNvCxnSpPr>
+              <a:cxnSpLocks/>
+              <a:endCxn id="32" idx="2"/>
+            </p:cNvCxnSpPr>
+            <p:nvPr/>
+          </p:nvCxnSpPr>
+          <p:spPr>
+            <a:xfrm flipV="1">
+              <a:off x="1800857" y="4545157"/>
+              <a:ext cx="1483024" cy="983248"/>
+            </a:xfrm>
+            <a:prstGeom prst="straightConnector1">
+              <a:avLst/>
+            </a:prstGeom>
+            <a:ln w="25400">
+              <a:tailEnd type="stealth"/>
+            </a:ln>
+          </p:spPr>
+          <p:style>
+            <a:lnRef idx="1">
+              <a:schemeClr val="dk1"/>
+            </a:lnRef>
+            <a:fillRef idx="0">
+              <a:schemeClr val="dk1"/>
+            </a:fillRef>
+            <a:effectRef idx="0">
+              <a:schemeClr val="dk1"/>
+            </a:effectRef>
+            <a:fontRef idx="minor">
+              <a:schemeClr val="tx1"/>
+            </a:fontRef>
+          </p:style>
+        </p:cxnSp>
+      </p:grpSp>
+      <p:grpSp>
+        <p:nvGrpSpPr>
+          <p:cNvPr id="46" name="组合 45">
+            <a:extLst>
+              <a:ext uri="{FF2B5EF4-FFF2-40B4-BE49-F238E27FC236}">
+                <a16:creationId xmlns:a16="http://schemas.microsoft.com/office/drawing/2014/main" id="{9BE618AD-E1E0-EC21-515E-94575BE02A79}"/>
+              </a:ext>
+            </a:extLst>
+          </p:cNvPr>
+          <p:cNvGrpSpPr/>
+          <p:nvPr/>
+        </p:nvGrpSpPr>
+        <p:grpSpPr>
+          <a:xfrm>
+            <a:off x="5426045" y="2415589"/>
+            <a:ext cx="6765955" cy="2052427"/>
+            <a:chOff x="5173243" y="1899915"/>
+            <a:chExt cx="6765955" cy="2052427"/>
+          </a:xfrm>
+        </p:grpSpPr>
+        <mc:AlternateContent xmlns:mc="http://schemas.openxmlformats.org/markup-compatibility/2006" xmlns:a14="http://schemas.microsoft.com/office/drawing/2010/main">
+          <mc:Choice Requires="a14">
+            <p:sp>
+              <p:nvSpPr>
+                <p:cNvPr id="19" name="文本框 18">
+                  <a:extLst>
+                    <a:ext uri="{FF2B5EF4-FFF2-40B4-BE49-F238E27FC236}">
+                      <a16:creationId xmlns:a16="http://schemas.microsoft.com/office/drawing/2014/main" id="{4D47D8B0-8F96-3E35-7123-21033F3C2CCD}"/>
+                    </a:ext>
+                  </a:extLst>
+                </p:cNvPr>
+                <p:cNvSpPr txBox="1"/>
+                <p:nvPr/>
+              </p:nvSpPr>
+              <p:spPr>
+                <a:xfrm>
+                  <a:off x="5173243" y="3398344"/>
+                  <a:ext cx="6765955" cy="553998"/>
+                </a:xfrm>
+                <a:prstGeom prst="rect">
+                  <a:avLst/>
+                </a:prstGeom>
+                <a:noFill/>
+              </p:spPr>
+              <p:txBody>
+                <a:bodyPr wrap="none" lIns="0" tIns="0" rIns="0" bIns="0" rtlCol="0">
+                  <a:spAutoFit/>
+                </a:bodyPr>
+                <a:lstStyle/>
+                <a:p>
+                  <a:pPr/>
+                  <a14:m>
+                    <m:oMathPara xmlns:m="http://schemas.openxmlformats.org/officeDocument/2006/math">
+                      <m:oMathParaPr>
+                        <m:jc m:val="centerGroup"/>
+                      </m:oMathParaPr>
+                      <m:oMath xmlns:m="http://schemas.openxmlformats.org/officeDocument/2006/math">
+                        <m:d>
+                          <m:dPr>
+                            <m:begChr m:val="["/>
+                            <m:endChr m:val="]"/>
+                            <m:ctrlPr>
+                              <a:rPr lang="en-US" altLang="zh-CN" sz="3600" b="0" i="1" smtClean="0">
+                                <a:latin typeface="Cambria Math" panose="02040503050406030204" pitchFamily="18" charset="0"/>
+                              </a:rPr>
+                            </m:ctrlPr>
+                          </m:dPr>
+                          <m:e>
+                            <m:sSub>
+                              <m:sSubPr>
+                                <m:ctrlPr>
+                                  <a:rPr lang="en-US" altLang="zh-CN" sz="3600" b="0" i="1" smtClean="0">
+                                    <a:latin typeface="Cambria Math" panose="02040503050406030204" pitchFamily="18" charset="0"/>
+                                  </a:rPr>
+                                </m:ctrlPr>
+                              </m:sSubPr>
+                              <m:e>
+                                <m:r>
+                                  <a:rPr lang="en-US" altLang="zh-CN" sz="3600" b="0" i="1" smtClean="0">
+                                    <a:latin typeface="Cambria Math" panose="02040503050406030204" pitchFamily="18" charset="0"/>
+                                  </a:rPr>
+                                  <m:t>𝑥</m:t>
+                                </m:r>
+                              </m:e>
+                              <m:sub>
+                                <m:r>
+                                  <a:rPr lang="en-US" altLang="zh-CN" sz="3600" b="0" i="1" smtClean="0">
+                                    <a:latin typeface="Cambria Math" panose="02040503050406030204" pitchFamily="18" charset="0"/>
+                                  </a:rPr>
+                                  <m:t>1</m:t>
+                                </m:r>
+                              </m:sub>
+                            </m:sSub>
+                            <m:r>
+                              <a:rPr lang="en-US" altLang="zh-CN" sz="3600" b="0" i="1" smtClean="0">
+                                <a:latin typeface="Cambria Math" panose="02040503050406030204" pitchFamily="18" charset="0"/>
+                              </a:rPr>
+                              <m:t>,  </m:t>
+                            </m:r>
+                            <m:sSub>
+                              <m:sSubPr>
+                                <m:ctrlPr>
+                                  <a:rPr lang="en-US" altLang="zh-CN" sz="3600" b="0" i="1" smtClean="0">
+                                    <a:latin typeface="Cambria Math" panose="02040503050406030204" pitchFamily="18" charset="0"/>
+                                  </a:rPr>
+                                </m:ctrlPr>
+                              </m:sSubPr>
+                              <m:e>
+                                <m:r>
+                                  <a:rPr lang="en-US" altLang="zh-CN" sz="3600" b="0" i="1" smtClean="0">
+                                    <a:latin typeface="Cambria Math" panose="02040503050406030204" pitchFamily="18" charset="0"/>
+                                  </a:rPr>
+                                  <m:t>𝑥</m:t>
+                                </m:r>
+                              </m:e>
+                              <m:sub>
+                                <m:r>
+                                  <a:rPr lang="en-US" altLang="zh-CN" sz="3600" b="0" i="1" smtClean="0">
+                                    <a:latin typeface="Cambria Math" panose="02040503050406030204" pitchFamily="18" charset="0"/>
+                                  </a:rPr>
+                                  <m:t>2</m:t>
+                                </m:r>
+                              </m:sub>
+                            </m:sSub>
+                            <m:r>
+                              <a:rPr lang="en-US" altLang="zh-CN" sz="3600" b="0" i="1" smtClean="0">
+                                <a:latin typeface="Cambria Math" panose="02040503050406030204" pitchFamily="18" charset="0"/>
+                              </a:rPr>
+                              <m:t>,  </m:t>
+                            </m:r>
+                            <m:sSub>
+                              <m:sSubPr>
+                                <m:ctrlPr>
+                                  <a:rPr lang="en-US" altLang="zh-CN" sz="3600" b="0" i="1" smtClean="0">
+                                    <a:latin typeface="Cambria Math" panose="02040503050406030204" pitchFamily="18" charset="0"/>
+                                  </a:rPr>
+                                </m:ctrlPr>
+                              </m:sSubPr>
+                              <m:e>
+                                <m:r>
+                                  <a:rPr lang="en-US" altLang="zh-CN" sz="3600" b="0" i="1" smtClean="0">
+                                    <a:latin typeface="Cambria Math" panose="02040503050406030204" pitchFamily="18" charset="0"/>
+                                  </a:rPr>
+                                  <m:t>𝑥</m:t>
+                                </m:r>
+                              </m:e>
+                              <m:sub>
+                                <m:r>
+                                  <a:rPr lang="en-US" altLang="zh-CN" sz="3600" b="0" i="1" smtClean="0">
+                                    <a:latin typeface="Cambria Math" panose="02040503050406030204" pitchFamily="18" charset="0"/>
+                                  </a:rPr>
+                                  <m:t>3</m:t>
+                                </m:r>
+                              </m:sub>
+                            </m:sSub>
+                            <m:r>
+                              <a:rPr lang="en-US" altLang="zh-CN" sz="3600" b="0" i="1" smtClean="0">
+                                <a:latin typeface="Cambria Math" panose="02040503050406030204" pitchFamily="18" charset="0"/>
+                              </a:rPr>
+                              <m:t>,  </m:t>
+                            </m:r>
+                            <m:sSub>
+                              <m:sSubPr>
+                                <m:ctrlPr>
+                                  <a:rPr lang="en-US" altLang="zh-CN" sz="3600" b="0" i="1" smtClean="0">
+                                    <a:latin typeface="Cambria Math" panose="02040503050406030204" pitchFamily="18" charset="0"/>
+                                  </a:rPr>
+                                </m:ctrlPr>
+                              </m:sSubPr>
+                              <m:e>
+                                <m:r>
+                                  <a:rPr lang="en-US" altLang="zh-CN" sz="3600" b="0" i="1" smtClean="0">
+                                    <a:latin typeface="Cambria Math" panose="02040503050406030204" pitchFamily="18" charset="0"/>
+                                  </a:rPr>
+                                  <m:t>𝑥</m:t>
+                                </m:r>
+                              </m:e>
+                              <m:sub>
+                                <m:r>
+                                  <a:rPr lang="en-US" altLang="zh-CN" sz="3600" b="0" i="1" smtClean="0">
+                                    <a:latin typeface="Cambria Math" panose="02040503050406030204" pitchFamily="18" charset="0"/>
+                                  </a:rPr>
+                                  <m:t>4</m:t>
+                                </m:r>
+                              </m:sub>
+                            </m:sSub>
+                            <m:r>
+                              <a:rPr lang="en-US" altLang="zh-CN" sz="3600" b="0" i="1" smtClean="0">
+                                <a:latin typeface="Cambria Math" panose="02040503050406030204" pitchFamily="18" charset="0"/>
+                              </a:rPr>
+                              <m:t>,  </m:t>
+                            </m:r>
+                            <m:sSub>
+                              <m:sSubPr>
+                                <m:ctrlPr>
+                                  <a:rPr lang="en-US" altLang="zh-CN" sz="3600" b="0" i="1" smtClean="0">
+                                    <a:latin typeface="Cambria Math" panose="02040503050406030204" pitchFamily="18" charset="0"/>
+                                  </a:rPr>
+                                </m:ctrlPr>
+                              </m:sSubPr>
+                              <m:e>
+                                <m:r>
+                                  <a:rPr lang="en-US" altLang="zh-CN" sz="3600" b="0" i="1" smtClean="0">
+                                    <a:latin typeface="Cambria Math" panose="02040503050406030204" pitchFamily="18" charset="0"/>
+                                  </a:rPr>
+                                  <m:t>𝑥</m:t>
+                                </m:r>
+                              </m:e>
+                              <m:sub>
+                                <m:r>
+                                  <a:rPr lang="en-US" altLang="zh-CN" sz="3600" b="0" i="1" smtClean="0">
+                                    <a:latin typeface="Cambria Math" panose="02040503050406030204" pitchFamily="18" charset="0"/>
+                                  </a:rPr>
+                                  <m:t>5</m:t>
+                                </m:r>
+                              </m:sub>
+                            </m:sSub>
+                          </m:e>
+                        </m:d>
+                      </m:oMath>
+                    </m:oMathPara>
+                  </a14:m>
+                  <a:endParaRPr lang="en-US" altLang="zh-CN" sz="3600" b="0" dirty="0"/>
+                </a:p>
+              </p:txBody>
+            </p:sp>
+          </mc:Choice>
+          <mc:Fallback xmlns="">
+            <p:sp>
+              <p:nvSpPr>
+                <p:cNvPr id="19" name="文本框 18">
+                  <a:extLst>
+                    <a:ext uri="{FF2B5EF4-FFF2-40B4-BE49-F238E27FC236}">
+                      <a16:creationId xmlns:a16="http://schemas.microsoft.com/office/drawing/2014/main" id="{4D47D8B0-8F96-3E35-7123-21033F3C2CCD}"/>
+                    </a:ext>
+                  </a:extLst>
+                </p:cNvPr>
+                <p:cNvSpPr txBox="1">
+                  <a:spLocks noRot="1" noChangeAspect="1" noMove="1" noResize="1" noEditPoints="1" noAdjustHandles="1" noChangeArrowheads="1" noChangeShapeType="1" noTextEdit="1"/>
+                </p:cNvSpPr>
+                <p:nvPr/>
+              </p:nvSpPr>
+              <p:spPr>
+                <a:xfrm>
+                  <a:off x="5173243" y="3398344"/>
+                  <a:ext cx="6765955" cy="553998"/>
+                </a:xfrm>
+                <a:prstGeom prst="rect">
+                  <a:avLst/>
+                </a:prstGeom>
+                <a:blipFill>
+                  <a:blip r:embed="rId6"/>
+                  <a:stretch>
+                    <a:fillRect/>
+                  </a:stretch>
+                </a:blipFill>
+              </p:spPr>
+              <p:txBody>
+                <a:bodyPr/>
+                <a:lstStyle/>
+                <a:p>
+                  <a:r>
+                    <a:rPr lang="zh-CN" altLang="en-US">
+                      <a:noFill/>
+                    </a:rPr>
+                    <a:t> </a:t>
+                  </a:r>
+                </a:p>
+              </p:txBody>
+            </p:sp>
+          </mc:Fallback>
+        </mc:AlternateContent>
+        <mc:AlternateContent xmlns:mc="http://schemas.openxmlformats.org/markup-compatibility/2006" xmlns:a14="http://schemas.microsoft.com/office/drawing/2010/main">
+          <mc:Choice Requires="a14">
+            <p:sp>
+              <p:nvSpPr>
+                <p:cNvPr id="20" name="文本框 19">
+                  <a:extLst>
+                    <a:ext uri="{FF2B5EF4-FFF2-40B4-BE49-F238E27FC236}">
+                      <a16:creationId xmlns:a16="http://schemas.microsoft.com/office/drawing/2014/main" id="{EEE794AB-31B0-A9F3-53EE-F11CE32FFBB0}"/>
+                    </a:ext>
+                  </a:extLst>
+                </p:cNvPr>
+                <p:cNvSpPr txBox="1"/>
+                <p:nvPr/>
+              </p:nvSpPr>
+              <p:spPr>
+                <a:xfrm>
+                  <a:off x="6641658" y="1899915"/>
+                  <a:ext cx="3829125" cy="553998"/>
+                </a:xfrm>
+                <a:prstGeom prst="rect">
+                  <a:avLst/>
+                </a:prstGeom>
+                <a:noFill/>
+              </p:spPr>
+              <p:txBody>
+                <a:bodyPr wrap="none" lIns="0" tIns="0" rIns="0" bIns="0" rtlCol="0">
+                  <a:spAutoFit/>
+                </a:bodyPr>
+                <a:lstStyle/>
+                <a:p>
+                  <a:pPr/>
+                  <a14:m>
+                    <m:oMathPara xmlns:m="http://schemas.openxmlformats.org/officeDocument/2006/math">
+                      <m:oMathParaPr>
+                        <m:jc m:val="centerGroup"/>
+                      </m:oMathParaPr>
+                      <m:oMath xmlns:m="http://schemas.openxmlformats.org/officeDocument/2006/math">
+                        <m:d>
+                          <m:dPr>
+                            <m:begChr m:val="["/>
+                            <m:endChr m:val="]"/>
+                            <m:ctrlPr>
+                              <a:rPr lang="en-US" altLang="zh-CN" sz="3600" b="0" i="1" smtClean="0">
+                                <a:latin typeface="Cambria Math" panose="02040503050406030204" pitchFamily="18" charset="0"/>
+                              </a:rPr>
+                            </m:ctrlPr>
+                          </m:dPr>
+                          <m:e>
+                            <m:sSub>
+                              <m:sSubPr>
+                                <m:ctrlPr>
+                                  <a:rPr lang="en-US" altLang="zh-CN" sz="3600" b="0" i="1" smtClean="0">
+                                    <a:latin typeface="Cambria Math" panose="02040503050406030204" pitchFamily="18" charset="0"/>
+                                  </a:rPr>
+                                </m:ctrlPr>
+                              </m:sSubPr>
+                              <m:e>
+                                <m:r>
+                                  <a:rPr lang="en-US" altLang="zh-CN" sz="3600" b="0" i="1" smtClean="0">
+                                    <a:latin typeface="Cambria Math" panose="02040503050406030204" pitchFamily="18" charset="0"/>
+                                  </a:rPr>
+                                  <m:t>𝑦</m:t>
+                                </m:r>
+                              </m:e>
+                              <m:sub>
+                                <m:r>
+                                  <a:rPr lang="en-US" altLang="zh-CN" sz="3600" b="0" i="1" smtClean="0">
+                                    <a:latin typeface="Cambria Math" panose="02040503050406030204" pitchFamily="18" charset="0"/>
+                                  </a:rPr>
+                                  <m:t>1</m:t>
+                                </m:r>
+                              </m:sub>
+                            </m:sSub>
+                            <m:r>
+                              <a:rPr lang="en-US" altLang="zh-CN" sz="3600" b="0" i="1" smtClean="0">
+                                <a:latin typeface="Cambria Math" panose="02040503050406030204" pitchFamily="18" charset="0"/>
+                              </a:rPr>
+                              <m:t>,  </m:t>
+                            </m:r>
+                            <m:sSub>
+                              <m:sSubPr>
+                                <m:ctrlPr>
+                                  <a:rPr lang="en-US" altLang="zh-CN" sz="3600" b="0" i="1" smtClean="0">
+                                    <a:latin typeface="Cambria Math" panose="02040503050406030204" pitchFamily="18" charset="0"/>
+                                  </a:rPr>
+                                </m:ctrlPr>
+                              </m:sSubPr>
+                              <m:e>
+                                <m:r>
+                                  <a:rPr lang="en-US" altLang="zh-CN" sz="3600" b="0" i="1" smtClean="0">
+                                    <a:latin typeface="Cambria Math" panose="02040503050406030204" pitchFamily="18" charset="0"/>
+                                  </a:rPr>
+                                  <m:t>𝑦</m:t>
+                                </m:r>
+                              </m:e>
+                              <m:sub>
+                                <m:r>
+                                  <a:rPr lang="en-US" altLang="zh-CN" sz="3600" b="0" i="1" smtClean="0">
+                                    <a:latin typeface="Cambria Math" panose="02040503050406030204" pitchFamily="18" charset="0"/>
+                                  </a:rPr>
+                                  <m:t>2</m:t>
+                                </m:r>
+                              </m:sub>
+                            </m:sSub>
+                            <m:r>
+                              <a:rPr lang="en-US" altLang="zh-CN" sz="3600" b="0" i="1" smtClean="0">
+                                <a:latin typeface="Cambria Math" panose="02040503050406030204" pitchFamily="18" charset="0"/>
+                              </a:rPr>
+                              <m:t>,  </m:t>
+                            </m:r>
+                            <m:sSub>
+                              <m:sSubPr>
+                                <m:ctrlPr>
+                                  <a:rPr lang="en-US" altLang="zh-CN" sz="3600" b="0" i="1" smtClean="0">
+                                    <a:latin typeface="Cambria Math" panose="02040503050406030204" pitchFamily="18" charset="0"/>
+                                  </a:rPr>
+                                </m:ctrlPr>
+                              </m:sSubPr>
+                              <m:e>
+                                <m:r>
+                                  <a:rPr lang="en-US" altLang="zh-CN" sz="3600" b="0" i="1" smtClean="0">
+                                    <a:latin typeface="Cambria Math" panose="02040503050406030204" pitchFamily="18" charset="0"/>
+                                  </a:rPr>
+                                  <m:t>𝑦</m:t>
+                                </m:r>
+                              </m:e>
+                              <m:sub>
+                                <m:r>
+                                  <a:rPr lang="en-US" altLang="zh-CN" sz="3600" b="0" i="1" smtClean="0">
+                                    <a:latin typeface="Cambria Math" panose="02040503050406030204" pitchFamily="18" charset="0"/>
+                                  </a:rPr>
+                                  <m:t>3</m:t>
+                                </m:r>
+                              </m:sub>
+                            </m:sSub>
+                          </m:e>
+                        </m:d>
+                      </m:oMath>
+                    </m:oMathPara>
+                  </a14:m>
+                  <a:endParaRPr lang="en-US" altLang="zh-CN" sz="3600" b="0" dirty="0"/>
+                </a:p>
+              </p:txBody>
+            </p:sp>
+          </mc:Choice>
+          <mc:Fallback xmlns="">
+            <p:sp>
+              <p:nvSpPr>
+                <p:cNvPr id="20" name="文本框 19">
+                  <a:extLst>
+                    <a:ext uri="{FF2B5EF4-FFF2-40B4-BE49-F238E27FC236}">
+                      <a16:creationId xmlns:a16="http://schemas.microsoft.com/office/drawing/2014/main" id="{EEE794AB-31B0-A9F3-53EE-F11CE32FFBB0}"/>
+                    </a:ext>
+                  </a:extLst>
+                </p:cNvPr>
+                <p:cNvSpPr txBox="1">
+                  <a:spLocks noRot="1" noChangeAspect="1" noMove="1" noResize="1" noEditPoints="1" noAdjustHandles="1" noChangeArrowheads="1" noChangeShapeType="1" noTextEdit="1"/>
+                </p:cNvSpPr>
+                <p:nvPr/>
+              </p:nvSpPr>
+              <p:spPr>
+                <a:xfrm>
+                  <a:off x="6641658" y="1899915"/>
+                  <a:ext cx="3829125" cy="553998"/>
+                </a:xfrm>
+                <a:prstGeom prst="rect">
+                  <a:avLst/>
+                </a:prstGeom>
+                <a:blipFill>
+                  <a:blip r:embed="rId7"/>
+                  <a:stretch>
+                    <a:fillRect/>
+                  </a:stretch>
+                </a:blipFill>
+              </p:spPr>
+              <p:txBody>
+                <a:bodyPr/>
+                <a:lstStyle/>
+                <a:p>
+                  <a:r>
+                    <a:rPr lang="zh-CN" altLang="en-US">
+                      <a:noFill/>
+                    </a:rPr>
+                    <a:t> </a:t>
+                  </a:r>
+                </a:p>
+              </p:txBody>
+            </p:sp>
+          </mc:Fallback>
+        </mc:AlternateContent>
+        <p:cxnSp>
+          <p:nvCxnSpPr>
+            <p:cNvPr id="24" name="直接箭头连接符 23">
+              <a:extLst>
+                <a:ext uri="{FF2B5EF4-FFF2-40B4-BE49-F238E27FC236}">
+                  <a16:creationId xmlns:a16="http://schemas.microsoft.com/office/drawing/2014/main" id="{93B8B8C7-D1D2-A581-65B4-4E03C800539A}"/>
+                </a:ext>
+              </a:extLst>
+            </p:cNvPr>
+            <p:cNvCxnSpPr>
+              <a:cxnSpLocks/>
+            </p:cNvCxnSpPr>
+            <p:nvPr/>
+          </p:nvCxnSpPr>
+          <p:spPr>
+            <a:xfrm flipV="1">
+              <a:off x="5700663" y="2492730"/>
+              <a:ext cx="1253570" cy="905614"/>
+            </a:xfrm>
+            <a:prstGeom prst="straightConnector1">
+              <a:avLst/>
+            </a:prstGeom>
+            <a:ln w="25400">
+              <a:tailEnd type="stealth"/>
+            </a:ln>
+          </p:spPr>
+          <p:style>
+            <a:lnRef idx="1">
+              <a:schemeClr val="dk1"/>
+            </a:lnRef>
+            <a:fillRef idx="0">
+              <a:schemeClr val="dk1"/>
+            </a:fillRef>
+            <a:effectRef idx="0">
+              <a:schemeClr val="dk1"/>
+            </a:effectRef>
+            <a:fontRef idx="minor">
+              <a:schemeClr val="tx1"/>
+            </a:fontRef>
+          </p:style>
+        </p:cxnSp>
+        <p:cxnSp>
+          <p:nvCxnSpPr>
+            <p:cNvPr id="25" name="直接箭头连接符 24">
+              <a:extLst>
+                <a:ext uri="{FF2B5EF4-FFF2-40B4-BE49-F238E27FC236}">
+                  <a16:creationId xmlns:a16="http://schemas.microsoft.com/office/drawing/2014/main" id="{60305B98-817F-0A4B-0195-B72F895A3181}"/>
+                </a:ext>
+              </a:extLst>
+            </p:cNvPr>
+            <p:cNvCxnSpPr>
+              <a:cxnSpLocks/>
+            </p:cNvCxnSpPr>
+            <p:nvPr/>
+          </p:nvCxnSpPr>
+          <p:spPr>
+            <a:xfrm flipV="1">
+              <a:off x="8523079" y="2492730"/>
+              <a:ext cx="1" cy="944431"/>
+            </a:xfrm>
+            <a:prstGeom prst="straightConnector1">
+              <a:avLst/>
+            </a:prstGeom>
+            <a:ln w="25400">
+              <a:tailEnd type="stealth"/>
+            </a:ln>
+          </p:spPr>
+          <p:style>
+            <a:lnRef idx="1">
+              <a:schemeClr val="dk1"/>
+            </a:lnRef>
+            <a:fillRef idx="0">
+              <a:schemeClr val="dk1"/>
+            </a:fillRef>
+            <a:effectRef idx="0">
+              <a:schemeClr val="dk1"/>
+            </a:effectRef>
+            <a:fontRef idx="minor">
+              <a:schemeClr val="tx1"/>
+            </a:fontRef>
+          </p:style>
+        </p:cxnSp>
+        <p:cxnSp>
+          <p:nvCxnSpPr>
+            <p:cNvPr id="26" name="直接箭头连接符 25">
+              <a:extLst>
+                <a:ext uri="{FF2B5EF4-FFF2-40B4-BE49-F238E27FC236}">
+                  <a16:creationId xmlns:a16="http://schemas.microsoft.com/office/drawing/2014/main" id="{33D34A0A-5F66-5533-36B5-248C21E502A7}"/>
+                </a:ext>
+              </a:extLst>
+            </p:cNvPr>
+            <p:cNvCxnSpPr>
+              <a:cxnSpLocks/>
+            </p:cNvCxnSpPr>
+            <p:nvPr/>
+          </p:nvCxnSpPr>
+          <p:spPr>
+            <a:xfrm flipH="1" flipV="1">
+              <a:off x="7143983" y="2492730"/>
+              <a:ext cx="2758193" cy="944431"/>
+            </a:xfrm>
+            <a:prstGeom prst="straightConnector1">
+              <a:avLst/>
+            </a:prstGeom>
+            <a:ln w="25400">
+              <a:tailEnd type="stealth"/>
+            </a:ln>
+          </p:spPr>
+          <p:style>
+            <a:lnRef idx="1">
+              <a:schemeClr val="dk1"/>
+            </a:lnRef>
+            <a:fillRef idx="0">
+              <a:schemeClr val="dk1"/>
+            </a:fillRef>
+            <a:effectRef idx="0">
+              <a:schemeClr val="dk1"/>
+            </a:effectRef>
+            <a:fontRef idx="minor">
+              <a:schemeClr val="tx1"/>
+            </a:fontRef>
+          </p:style>
+        </p:cxnSp>
+        <p:cxnSp>
+          <p:nvCxnSpPr>
+            <p:cNvPr id="27" name="直接箭头连接符 26">
+              <a:extLst>
+                <a:ext uri="{FF2B5EF4-FFF2-40B4-BE49-F238E27FC236}">
+                  <a16:creationId xmlns:a16="http://schemas.microsoft.com/office/drawing/2014/main" id="{40E7B3DC-E9C1-9123-EE0A-5414A54D8092}"/>
+                </a:ext>
+              </a:extLst>
+            </p:cNvPr>
+            <p:cNvCxnSpPr>
+              <a:cxnSpLocks/>
+            </p:cNvCxnSpPr>
+            <p:nvPr/>
+          </p:nvCxnSpPr>
+          <p:spPr>
+            <a:xfrm flipH="1" flipV="1">
+              <a:off x="10120096" y="2492730"/>
+              <a:ext cx="1161176" cy="905614"/>
+            </a:xfrm>
+            <a:prstGeom prst="straightConnector1">
+              <a:avLst/>
+            </a:prstGeom>
+            <a:ln w="25400">
+              <a:tailEnd type="stealth"/>
+            </a:ln>
+          </p:spPr>
+          <p:style>
+            <a:lnRef idx="1">
+              <a:schemeClr val="dk1"/>
+            </a:lnRef>
+            <a:fillRef idx="0">
+              <a:schemeClr val="dk1"/>
+            </a:fillRef>
+            <a:effectRef idx="0">
+              <a:schemeClr val="dk1"/>
+            </a:effectRef>
+            <a:fontRef idx="minor">
+              <a:schemeClr val="tx1"/>
+            </a:fontRef>
+          </p:style>
+        </p:cxnSp>
+        <p:cxnSp>
+          <p:nvCxnSpPr>
+            <p:cNvPr id="43" name="直接箭头连接符 42">
+              <a:extLst>
+                <a:ext uri="{FF2B5EF4-FFF2-40B4-BE49-F238E27FC236}">
+                  <a16:creationId xmlns:a16="http://schemas.microsoft.com/office/drawing/2014/main" id="{D98B8775-FFC9-1ADC-A2E8-85DA82DA339B}"/>
+                </a:ext>
+              </a:extLst>
+            </p:cNvPr>
+            <p:cNvCxnSpPr>
+              <a:cxnSpLocks/>
+            </p:cNvCxnSpPr>
+            <p:nvPr/>
+          </p:nvCxnSpPr>
+          <p:spPr>
+            <a:xfrm flipV="1">
+              <a:off x="6988092" y="2453913"/>
+              <a:ext cx="2914084" cy="1087562"/>
+            </a:xfrm>
+            <a:prstGeom prst="straightConnector1">
+              <a:avLst/>
+            </a:prstGeom>
+            <a:ln w="25400">
+              <a:tailEnd type="stealth"/>
+            </a:ln>
+          </p:spPr>
+          <p:style>
+            <a:lnRef idx="1">
+              <a:schemeClr val="dk1"/>
+            </a:lnRef>
+            <a:fillRef idx="0">
+              <a:schemeClr val="dk1"/>
+            </a:fillRef>
+            <a:effectRef idx="0">
+              <a:schemeClr val="dk1"/>
+            </a:effectRef>
+            <a:fontRef idx="minor">
+              <a:schemeClr val="tx1"/>
+            </a:fontRef>
+          </p:style>
+        </p:cxnSp>
+      </p:grpSp>
+    </p:spTree>
+  </p:cSld>
+  <p:clrMapOvr>
+    <a:masterClrMapping/>
+  </p:clrMapOvr>
+</p:sld>
+</file>
+
+<file path=ppt/slides/slide6.xml><?xml version="1.0" encoding="utf-8"?>
+<p:sld xmlns:a="http://schemas.openxmlformats.org/drawingml/2006/main" xmlns:r="http://schemas.openxmlformats.org/officeDocument/2006/relationships" xmlns:p="http://schemas.openxmlformats.org/presentationml/2006/main">
+  <p:cSld>
+    <p:spTree>
+      <p:nvGrpSpPr>
+        <p:cNvPr id="1" name="">
+          <a:extLst>
+            <a:ext uri="{FF2B5EF4-FFF2-40B4-BE49-F238E27FC236}">
+              <a16:creationId xmlns:a16="http://schemas.microsoft.com/office/drawing/2014/main" id="{E3B1F9E6-C0C6-151B-1D21-F406E5A394BF}"/>
+            </a:ext>
+          </a:extLst>
+        </p:cNvPr>
+        <p:cNvGrpSpPr/>
+        <p:nvPr/>
+      </p:nvGrpSpPr>
+      <p:grpSpPr>
+        <a:xfrm>
+          <a:off x="0" y="0"/>
+          <a:ext cx="0" cy="0"/>
+          <a:chOff x="0" y="0"/>
+          <a:chExt cx="0" cy="0"/>
+        </a:xfrm>
+      </p:grpSpPr>
+      <p:grpSp>
+        <p:nvGrpSpPr>
+          <p:cNvPr id="156" name="组合 155">
+            <a:extLst>
+              <a:ext uri="{FF2B5EF4-FFF2-40B4-BE49-F238E27FC236}">
+                <a16:creationId xmlns:a16="http://schemas.microsoft.com/office/drawing/2014/main" id="{4A695B2F-5630-56DC-0C44-67CCA6F2A6A6}"/>
+              </a:ext>
+            </a:extLst>
+          </p:cNvPr>
+          <p:cNvGrpSpPr/>
+          <p:nvPr/>
+        </p:nvGrpSpPr>
+        <p:grpSpPr>
+          <a:xfrm>
+            <a:off x="820135" y="3283206"/>
+            <a:ext cx="8650364" cy="2127847"/>
+            <a:chOff x="820135" y="3283206"/>
+            <a:chExt cx="8650364" cy="2127847"/>
+          </a:xfrm>
+        </p:grpSpPr>
+        <p:grpSp>
+          <p:nvGrpSpPr>
+            <p:cNvPr id="110" name="组合 109">
+              <a:extLst>
+                <a:ext uri="{FF2B5EF4-FFF2-40B4-BE49-F238E27FC236}">
+                  <a16:creationId xmlns:a16="http://schemas.microsoft.com/office/drawing/2014/main" id="{33709EA6-80F2-13AC-B751-377ED9BD4C66}"/>
+                </a:ext>
+              </a:extLst>
+            </p:cNvPr>
+            <p:cNvGrpSpPr/>
+            <p:nvPr/>
+          </p:nvGrpSpPr>
+          <p:grpSpPr>
+            <a:xfrm>
+              <a:off x="820135" y="4357162"/>
+              <a:ext cx="8640000" cy="1053891"/>
+              <a:chOff x="650801" y="1663827"/>
+              <a:chExt cx="8640000" cy="1053891"/>
+            </a:xfrm>
+          </p:grpSpPr>
+          <p:grpSp>
+            <p:nvGrpSpPr>
+              <p:cNvPr id="111" name="组合 110">
+                <a:extLst>
+                  <a:ext uri="{FF2B5EF4-FFF2-40B4-BE49-F238E27FC236}">
+                    <a16:creationId xmlns:a16="http://schemas.microsoft.com/office/drawing/2014/main" id="{38753272-B274-F1EC-3834-EB66332DF5B9}"/>
+                  </a:ext>
+                </a:extLst>
+              </p:cNvPr>
+              <p:cNvGrpSpPr/>
+              <p:nvPr/>
+            </p:nvGrpSpPr>
+            <p:grpSpPr>
+              <a:xfrm>
+                <a:off x="650801" y="1663827"/>
+                <a:ext cx="1800000" cy="1053888"/>
+                <a:chOff x="1315844" y="1397151"/>
+                <a:chExt cx="1800000" cy="1053888"/>
+              </a:xfrm>
+            </p:grpSpPr>
+            <p:sp>
+              <p:nvSpPr>
+                <p:cNvPr id="130" name="矩形 129">
+                  <a:extLst>
+                    <a:ext uri="{FF2B5EF4-FFF2-40B4-BE49-F238E27FC236}">
+                      <a16:creationId xmlns:a16="http://schemas.microsoft.com/office/drawing/2014/main" id="{6A9D17D5-AD7E-1727-1CE3-0FFF709A2A8A}"/>
+                    </a:ext>
+                  </a:extLst>
+                </p:cNvPr>
+                <p:cNvSpPr/>
+                <p:nvPr/>
+              </p:nvSpPr>
+              <p:spPr>
+                <a:xfrm>
+                  <a:off x="2215844" y="1937150"/>
+                  <a:ext cx="720000" cy="360000"/>
+                </a:xfrm>
+                <a:prstGeom prst="rect">
+                  <a:avLst/>
+                </a:prstGeom>
+                <a:noFill/>
+                <a:ln>
+                  <a:solidFill>
+                    <a:srgbClr val="92D050"/>
+                  </a:solidFill>
+                </a:ln>
+              </p:spPr>
+              <p:style>
+                <a:lnRef idx="2">
+                  <a:schemeClr val="accent1">
+                    <a:shade val="15000"/>
+                  </a:schemeClr>
+                </a:lnRef>
+                <a:fillRef idx="1">
+                  <a:schemeClr val="accent1"/>
+                </a:fillRef>
+                <a:effectRef idx="0">
+                  <a:schemeClr val="accent1"/>
+                </a:effectRef>
+                <a:fontRef idx="minor">
+                  <a:schemeClr val="lt1"/>
+                </a:fontRef>
+              </p:style>
+              <p:txBody>
+                <a:bodyPr rtlCol="0" anchor="ctr"/>
+                <a:lstStyle/>
+                <a:p>
+                  <a:pPr algn="ctr"/>
+                  <a:endParaRPr lang="zh-CN" altLang="en-US" dirty="0"/>
+                </a:p>
+              </p:txBody>
+            </p:sp>
+            <p:cxnSp>
+              <p:nvCxnSpPr>
+                <p:cNvPr id="131" name="直接箭头连接符 130">
+                  <a:extLst>
+                    <a:ext uri="{FF2B5EF4-FFF2-40B4-BE49-F238E27FC236}">
+                      <a16:creationId xmlns:a16="http://schemas.microsoft.com/office/drawing/2014/main" id="{71085E81-4360-EF70-1D07-91A43911008B}"/>
+                    </a:ext>
+                  </a:extLst>
+                </p:cNvPr>
+                <p:cNvCxnSpPr/>
+                <p:nvPr/>
+              </p:nvCxnSpPr>
+              <p:spPr>
+                <a:xfrm>
+                  <a:off x="1315844" y="2297151"/>
+                  <a:ext cx="1800000" cy="0"/>
+                </a:xfrm>
+                <a:prstGeom prst="straightConnector1">
+                  <a:avLst/>
+                </a:prstGeom>
+                <a:ln w="12700">
+                  <a:tailEnd type="stealth"/>
+                </a:ln>
+              </p:spPr>
+              <p:style>
+                <a:lnRef idx="1">
+                  <a:schemeClr val="dk1"/>
+                </a:lnRef>
+                <a:fillRef idx="0">
+                  <a:schemeClr val="dk1"/>
+                </a:fillRef>
+                <a:effectRef idx="0">
+                  <a:schemeClr val="dk1"/>
+                </a:effectRef>
+                <a:fontRef idx="minor">
+                  <a:schemeClr val="tx1"/>
+                </a:fontRef>
+              </p:style>
+            </p:cxnSp>
+            <p:cxnSp>
+              <p:nvCxnSpPr>
+                <p:cNvPr id="132" name="直接箭头连接符 131">
+                  <a:extLst>
+                    <a:ext uri="{FF2B5EF4-FFF2-40B4-BE49-F238E27FC236}">
+                      <a16:creationId xmlns:a16="http://schemas.microsoft.com/office/drawing/2014/main" id="{5C616E55-FAD5-A669-2A48-602B80F6C4EF}"/>
+                    </a:ext>
+                  </a:extLst>
+                </p:cNvPr>
+                <p:cNvCxnSpPr>
+                  <a:cxnSpLocks/>
+                </p:cNvCxnSpPr>
+                <p:nvPr/>
+              </p:nvCxnSpPr>
+              <p:spPr>
+                <a:xfrm rot="16200000">
+                  <a:off x="1765844" y="1847151"/>
+                  <a:ext cx="900000" cy="0"/>
+                </a:xfrm>
+                <a:prstGeom prst="straightConnector1">
+                  <a:avLst/>
+                </a:prstGeom>
+                <a:ln w="12700">
+                  <a:tailEnd type="stealth"/>
+                </a:ln>
+              </p:spPr>
+              <p:style>
+                <a:lnRef idx="1">
+                  <a:schemeClr val="dk1"/>
+                </a:lnRef>
+                <a:fillRef idx="0">
+                  <a:schemeClr val="dk1"/>
+                </a:fillRef>
+                <a:effectRef idx="0">
+                  <a:schemeClr val="dk1"/>
+                </a:effectRef>
+                <a:fontRef idx="minor">
+                  <a:schemeClr val="tx1"/>
+                </a:fontRef>
+              </p:style>
+            </p:cxnSp>
+            <mc:AlternateContent xmlns:mc="http://schemas.openxmlformats.org/markup-compatibility/2006" xmlns:a14="http://schemas.microsoft.com/office/drawing/2010/main">
+              <mc:Choice Requires="a14">
+                <p:sp>
+                  <p:nvSpPr>
+                    <p:cNvPr id="133" name="文本框 132">
+                      <a:extLst>
+                        <a:ext uri="{FF2B5EF4-FFF2-40B4-BE49-F238E27FC236}">
+                          <a16:creationId xmlns:a16="http://schemas.microsoft.com/office/drawing/2014/main" id="{610FA439-A40F-7726-07FB-81DB7635D8E2}"/>
+                        </a:ext>
+                      </a:extLst>
+                    </p:cNvPr>
+                    <p:cNvSpPr txBox="1"/>
+                    <p:nvPr/>
+                  </p:nvSpPr>
+                  <p:spPr>
+                    <a:xfrm>
+                      <a:off x="1935479" y="1397151"/>
+                      <a:ext cx="270459" cy="153888"/>
+                    </a:xfrm>
+                    <a:prstGeom prst="rect">
+                      <a:avLst/>
+                    </a:prstGeom>
+                    <a:noFill/>
+                  </p:spPr>
+                  <p:txBody>
+                    <a:bodyPr wrap="none" lIns="0" tIns="0" rIns="0" bIns="0" rtlCol="0">
+                      <a:spAutoFit/>
+                    </a:bodyPr>
+                    <a:lstStyle/>
+                    <a:p>
+                      <a:pPr/>
+                      <a14:m>
+                        <m:oMathPara xmlns:m="http://schemas.openxmlformats.org/officeDocument/2006/math">
+                          <m:oMathParaPr>
+                            <m:jc m:val="centerGroup"/>
+                          </m:oMathParaPr>
+                          <m:oMath xmlns:m="http://schemas.openxmlformats.org/officeDocument/2006/math">
+                            <m:r>
+                              <a:rPr lang="en-US" altLang="zh-CN" sz="1000" b="0" i="1" smtClean="0">
+                                <a:latin typeface="Cambria Math" panose="02040503050406030204" pitchFamily="18" charset="0"/>
+                              </a:rPr>
+                              <m:t>𝑔</m:t>
+                            </m:r>
+                            <m:d>
+                              <m:dPr>
+                                <m:ctrlPr>
+                                  <a:rPr lang="en-US" altLang="zh-CN" sz="1000" b="0" i="1" smtClean="0">
+                                    <a:latin typeface="Cambria Math" panose="02040503050406030204" pitchFamily="18" charset="0"/>
+                                  </a:rPr>
+                                </m:ctrlPr>
+                              </m:dPr>
+                              <m:e>
+                                <m:r>
+                                  <a:rPr lang="en-US" altLang="zh-CN" sz="1000" b="0" i="1" smtClean="0">
+                                    <a:latin typeface="Cambria Math" panose="02040503050406030204" pitchFamily="18" charset="0"/>
+                                  </a:rPr>
+                                  <m:t>𝑡</m:t>
+                                </m:r>
+                              </m:e>
+                            </m:d>
+                          </m:oMath>
+                        </m:oMathPara>
+                      </a14:m>
+                      <a:endParaRPr lang="en-US" altLang="zh-CN" sz="1000" b="0" dirty="0"/>
+                    </a:p>
+                  </p:txBody>
+                </p:sp>
+              </mc:Choice>
+              <mc:Fallback xmlns="">
+                <p:sp>
+                  <p:nvSpPr>
+                    <p:cNvPr id="36" name="文本框 35">
+                      <a:extLst>
+                        <a:ext uri="{FF2B5EF4-FFF2-40B4-BE49-F238E27FC236}">
+                          <a16:creationId xmlns:a16="http://schemas.microsoft.com/office/drawing/2014/main" id="{D335A6F5-1D27-69C5-B723-06F80AB1565E}"/>
+                        </a:ext>
+                      </a:extLst>
+                    </p:cNvPr>
+                    <p:cNvSpPr txBox="1">
+                      <a:spLocks noRot="1" noChangeAspect="1" noMove="1" noResize="1" noEditPoints="1" noAdjustHandles="1" noChangeArrowheads="1" noChangeShapeType="1" noTextEdit="1"/>
+                    </p:cNvSpPr>
+                    <p:nvPr/>
+                  </p:nvSpPr>
+                  <p:spPr>
+                    <a:xfrm>
+                      <a:off x="1935479" y="1397151"/>
+                      <a:ext cx="270459" cy="153888"/>
+                    </a:xfrm>
+                    <a:prstGeom prst="rect">
+                      <a:avLst/>
+                    </a:prstGeom>
+                    <a:blipFill>
+                      <a:blip r:embed="rId6"/>
+                      <a:stretch>
+                        <a:fillRect l="-11364" b="-28000"/>
+                      </a:stretch>
+                    </a:blipFill>
+                  </p:spPr>
+                  <p:txBody>
+                    <a:bodyPr/>
+                    <a:lstStyle/>
+                    <a:p>
+                      <a:r>
+                        <a:rPr lang="zh-CN" altLang="en-US">
+                          <a:noFill/>
+                        </a:rPr>
+                        <a:t> </a:t>
+                      </a:r>
+                    </a:p>
+                  </p:txBody>
+                </p:sp>
+              </mc:Fallback>
+            </mc:AlternateContent>
+            <mc:AlternateContent xmlns:mc="http://schemas.openxmlformats.org/markup-compatibility/2006" xmlns:a14="http://schemas.microsoft.com/office/drawing/2010/main">
+              <mc:Choice Requires="a14">
+                <p:sp>
+                  <p:nvSpPr>
+                    <p:cNvPr id="134" name="文本框 133">
+                      <a:extLst>
+                        <a:ext uri="{FF2B5EF4-FFF2-40B4-BE49-F238E27FC236}">
+                          <a16:creationId xmlns:a16="http://schemas.microsoft.com/office/drawing/2014/main" id="{3C348CD4-63CD-1CB8-D134-DB5067BFAD42}"/>
+                        </a:ext>
+                      </a:extLst>
+                    </p:cNvPr>
+                    <p:cNvSpPr txBox="1"/>
+                    <p:nvPr/>
+                  </p:nvSpPr>
+                  <p:spPr>
+                    <a:xfrm>
+                      <a:off x="3032551" y="2297151"/>
+                      <a:ext cx="83293" cy="153888"/>
+                    </a:xfrm>
+                    <a:prstGeom prst="rect">
+                      <a:avLst/>
+                    </a:prstGeom>
+                    <a:noFill/>
+                  </p:spPr>
+                  <p:txBody>
+                    <a:bodyPr wrap="none" lIns="0" tIns="0" rIns="0" bIns="0" rtlCol="0">
+                      <a:spAutoFit/>
+                    </a:bodyPr>
+                    <a:lstStyle/>
+                    <a:p>
+                      <a:pPr/>
+                      <a14:m>
+                        <m:oMathPara xmlns:m="http://schemas.openxmlformats.org/officeDocument/2006/math">
+                          <m:oMathParaPr>
+                            <m:jc m:val="centerGroup"/>
+                          </m:oMathParaPr>
+                          <m:oMath xmlns:m="http://schemas.openxmlformats.org/officeDocument/2006/math">
+                            <m:r>
+                              <a:rPr lang="en-US" altLang="zh-CN" sz="1000" b="0" i="1" smtClean="0">
+                                <a:latin typeface="Cambria Math" panose="02040503050406030204" pitchFamily="18" charset="0"/>
+                              </a:rPr>
+                              <m:t>𝑡</m:t>
+                            </m:r>
+                          </m:oMath>
+                        </m:oMathPara>
+                      </a14:m>
+                      <a:endParaRPr lang="en-US" altLang="zh-CN" sz="1000" b="0" dirty="0"/>
+                    </a:p>
+                  </p:txBody>
+                </p:sp>
+              </mc:Choice>
+              <mc:Fallback xmlns="">
+                <p:sp>
+                  <p:nvSpPr>
+                    <p:cNvPr id="39" name="文本框 38">
+                      <a:extLst>
+                        <a:ext uri="{FF2B5EF4-FFF2-40B4-BE49-F238E27FC236}">
+                          <a16:creationId xmlns:a16="http://schemas.microsoft.com/office/drawing/2014/main" id="{14EAD4AE-F695-ABFF-DF27-7D3717AF4037}"/>
+                        </a:ext>
+                      </a:extLst>
+                    </p:cNvPr>
+                    <p:cNvSpPr txBox="1">
+                      <a:spLocks noRot="1" noChangeAspect="1" noMove="1" noResize="1" noEditPoints="1" noAdjustHandles="1" noChangeArrowheads="1" noChangeShapeType="1" noTextEdit="1"/>
+                    </p:cNvSpPr>
+                    <p:nvPr/>
+                  </p:nvSpPr>
+                  <p:spPr>
+                    <a:xfrm>
+                      <a:off x="3032551" y="2297151"/>
+                      <a:ext cx="83293" cy="153888"/>
+                    </a:xfrm>
+                    <a:prstGeom prst="rect">
+                      <a:avLst/>
+                    </a:prstGeom>
+                    <a:blipFill>
+                      <a:blip r:embed="rId3"/>
+                      <a:stretch>
+                        <a:fillRect l="-38462" r="-30769" b="-8000"/>
+                      </a:stretch>
+                    </a:blipFill>
+                  </p:spPr>
+                  <p:txBody>
+                    <a:bodyPr/>
+                    <a:lstStyle/>
+                    <a:p>
+                      <a:r>
+                        <a:rPr lang="zh-CN" altLang="en-US">
+                          <a:noFill/>
+                        </a:rPr>
+                        <a:t> </a:t>
+                      </a:r>
+                    </a:p>
+                  </p:txBody>
+                </p:sp>
+              </mc:Fallback>
+            </mc:AlternateContent>
+          </p:grpSp>
+          <p:grpSp>
+            <p:nvGrpSpPr>
+              <p:cNvPr id="112" name="组合 111">
+                <a:extLst>
+                  <a:ext uri="{FF2B5EF4-FFF2-40B4-BE49-F238E27FC236}">
+                    <a16:creationId xmlns:a16="http://schemas.microsoft.com/office/drawing/2014/main" id="{06E81211-38E8-A371-5214-D1441734E847}"/>
+                  </a:ext>
+                </a:extLst>
+              </p:cNvPr>
+              <p:cNvGrpSpPr/>
+              <p:nvPr/>
+            </p:nvGrpSpPr>
+            <p:grpSpPr>
+              <a:xfrm>
+                <a:off x="7483172" y="1663827"/>
+                <a:ext cx="1807629" cy="1053891"/>
+                <a:chOff x="5333471" y="3202036"/>
+                <a:chExt cx="1807629" cy="1053891"/>
+              </a:xfrm>
+            </p:grpSpPr>
+            <p:cxnSp>
+              <p:nvCxnSpPr>
+                <p:cNvPr id="125" name="直接箭头连接符 124">
+                  <a:extLst>
+                    <a:ext uri="{FF2B5EF4-FFF2-40B4-BE49-F238E27FC236}">
+                      <a16:creationId xmlns:a16="http://schemas.microsoft.com/office/drawing/2014/main" id="{3235C4B0-729B-1BDE-F11F-09AB16E3E50E}"/>
+                    </a:ext>
+                  </a:extLst>
+                </p:cNvPr>
+                <p:cNvCxnSpPr/>
+                <p:nvPr/>
+              </p:nvCxnSpPr>
+              <p:spPr>
+                <a:xfrm>
+                  <a:off x="5333471" y="4102039"/>
+                  <a:ext cx="1800000" cy="0"/>
+                </a:xfrm>
+                <a:prstGeom prst="straightConnector1">
+                  <a:avLst/>
+                </a:prstGeom>
+                <a:ln w="12700">
+                  <a:tailEnd type="stealth"/>
+                </a:ln>
+              </p:spPr>
+              <p:style>
+                <a:lnRef idx="1">
+                  <a:schemeClr val="dk1"/>
+                </a:lnRef>
+                <a:fillRef idx="0">
+                  <a:schemeClr val="dk1"/>
+                </a:fillRef>
+                <a:effectRef idx="0">
+                  <a:schemeClr val="dk1"/>
+                </a:effectRef>
+                <a:fontRef idx="minor">
+                  <a:schemeClr val="tx1"/>
+                </a:fontRef>
+              </p:style>
+            </p:cxnSp>
+            <p:cxnSp>
+              <p:nvCxnSpPr>
+                <p:cNvPr id="126" name="直接箭头连接符 125">
+                  <a:extLst>
+                    <a:ext uri="{FF2B5EF4-FFF2-40B4-BE49-F238E27FC236}">
+                      <a16:creationId xmlns:a16="http://schemas.microsoft.com/office/drawing/2014/main" id="{661BFF59-BEB5-6C42-EE8F-4A2FF19622CC}"/>
+                    </a:ext>
+                  </a:extLst>
+                </p:cNvPr>
+                <p:cNvCxnSpPr>
+                  <a:cxnSpLocks/>
+                </p:cNvCxnSpPr>
+                <p:nvPr/>
+              </p:nvCxnSpPr>
+              <p:spPr>
+                <a:xfrm rot="16200000">
+                  <a:off x="5783471" y="3652039"/>
+                  <a:ext cx="900000" cy="0"/>
+                </a:xfrm>
+                <a:prstGeom prst="straightConnector1">
+                  <a:avLst/>
+                </a:prstGeom>
+                <a:ln w="12700">
+                  <a:tailEnd type="stealth"/>
+                </a:ln>
+              </p:spPr>
+              <p:style>
+                <a:lnRef idx="1">
+                  <a:schemeClr val="dk1"/>
+                </a:lnRef>
+                <a:fillRef idx="0">
+                  <a:schemeClr val="dk1"/>
+                </a:fillRef>
+                <a:effectRef idx="0">
+                  <a:schemeClr val="dk1"/>
+                </a:effectRef>
+                <a:fontRef idx="minor">
+                  <a:schemeClr val="tx1"/>
+                </a:fontRef>
+              </p:style>
+            </p:cxnSp>
+            <mc:AlternateContent xmlns:mc="http://schemas.openxmlformats.org/markup-compatibility/2006" xmlns:a14="http://schemas.microsoft.com/office/drawing/2010/main">
+              <mc:Choice Requires="a14">
+                <p:sp>
+                  <p:nvSpPr>
+                    <p:cNvPr id="127" name="文本框 126">
+                      <a:extLst>
+                        <a:ext uri="{FF2B5EF4-FFF2-40B4-BE49-F238E27FC236}">
+                          <a16:creationId xmlns:a16="http://schemas.microsoft.com/office/drawing/2014/main" id="{7C5C316C-4D47-F4B8-6D86-EE395D2B022C}"/>
+                        </a:ext>
+                      </a:extLst>
+                    </p:cNvPr>
+                    <p:cNvSpPr txBox="1"/>
+                    <p:nvPr/>
+                  </p:nvSpPr>
+                  <p:spPr>
+                    <a:xfrm>
+                      <a:off x="5450180" y="3202036"/>
+                      <a:ext cx="783291" cy="153888"/>
+                    </a:xfrm>
+                    <a:prstGeom prst="rect">
+                      <a:avLst/>
+                    </a:prstGeom>
+                    <a:noFill/>
+                  </p:spPr>
+                  <p:txBody>
+                    <a:bodyPr wrap="none" lIns="0" tIns="0" rIns="0" bIns="0" rtlCol="0">
+                      <a:spAutoFit/>
+                    </a:bodyPr>
+                    <a:lstStyle/>
+                    <a:p>
+                      <a:pPr/>
+                      <a14:m>
+                        <m:oMathPara xmlns:m="http://schemas.openxmlformats.org/officeDocument/2006/math">
+                          <m:oMathParaPr>
+                            <m:jc m:val="centerGroup"/>
+                          </m:oMathParaPr>
+                          <m:oMath xmlns:m="http://schemas.openxmlformats.org/officeDocument/2006/math">
+                            <m:r>
+                              <a:rPr lang="en-US" altLang="zh-CN" sz="1000" b="0" i="1" smtClean="0">
+                                <a:latin typeface="Cambria Math" panose="02040503050406030204" pitchFamily="18" charset="0"/>
+                              </a:rPr>
+                              <m:t>𝑓</m:t>
+                            </m:r>
+                            <m:d>
+                              <m:dPr>
+                                <m:ctrlPr>
+                                  <a:rPr lang="en-US" altLang="zh-CN" sz="1000" b="0" i="1" smtClean="0">
+                                    <a:latin typeface="Cambria Math" panose="02040503050406030204" pitchFamily="18" charset="0"/>
+                                  </a:rPr>
+                                </m:ctrlPr>
+                              </m:dPr>
+                              <m:e>
+                                <m:r>
+                                  <a:rPr lang="en-US" altLang="zh-CN" sz="1000" b="0" i="1" smtClean="0">
+                                    <a:latin typeface="Cambria Math" panose="02040503050406030204" pitchFamily="18" charset="0"/>
+                                  </a:rPr>
+                                  <m:t>𝜏</m:t>
+                                </m:r>
+                              </m:e>
+                            </m:d>
+                            <m:r>
+                              <a:rPr lang="en-US" altLang="zh-CN" sz="1000" b="0" i="1" smtClean="0">
+                                <a:latin typeface="Cambria Math" panose="02040503050406030204" pitchFamily="18" charset="0"/>
+                              </a:rPr>
+                              <m:t>𝑔</m:t>
+                            </m:r>
+                            <m:d>
+                              <m:dPr>
+                                <m:ctrlPr>
+                                  <a:rPr lang="en-US" altLang="zh-CN" sz="1000" b="0" i="1" smtClean="0">
+                                    <a:latin typeface="Cambria Math" panose="02040503050406030204" pitchFamily="18" charset="0"/>
+                                  </a:rPr>
+                                </m:ctrlPr>
+                              </m:dPr>
+                              <m:e>
+                                <m:sSub>
+                                  <m:sSubPr>
+                                    <m:ctrlPr>
+                                      <a:rPr lang="en-US" altLang="zh-CN" sz="1000" b="0" i="1" smtClean="0">
+                                        <a:latin typeface="Cambria Math" panose="02040503050406030204" pitchFamily="18" charset="0"/>
+                                      </a:rPr>
+                                    </m:ctrlPr>
+                                  </m:sSubPr>
+                                  <m:e>
+                                    <m:r>
+                                      <a:rPr lang="en-US" altLang="zh-CN" sz="1000" b="0" i="1" smtClean="0">
+                                        <a:latin typeface="Cambria Math" panose="02040503050406030204" pitchFamily="18" charset="0"/>
+                                      </a:rPr>
+                                      <m:t>𝑡</m:t>
+                                    </m:r>
+                                  </m:e>
+                                  <m:sub>
+                                    <m:r>
+                                      <a:rPr lang="en-US" altLang="zh-CN" sz="1000" b="0" i="1" smtClean="0">
+                                        <a:latin typeface="Cambria Math" panose="02040503050406030204" pitchFamily="18" charset="0"/>
+                                      </a:rPr>
+                                      <m:t>0</m:t>
+                                    </m:r>
+                                  </m:sub>
+                                </m:sSub>
+                                <m:r>
+                                  <a:rPr lang="en-US" altLang="zh-CN" sz="1000" b="0" i="1" smtClean="0">
+                                    <a:latin typeface="Cambria Math" panose="02040503050406030204" pitchFamily="18" charset="0"/>
+                                  </a:rPr>
+                                  <m:t>−</m:t>
+                                </m:r>
+                                <m:r>
+                                  <a:rPr lang="en-US" altLang="zh-CN" sz="1000" b="0" i="1" smtClean="0">
+                                    <a:latin typeface="Cambria Math" panose="02040503050406030204" pitchFamily="18" charset="0"/>
+                                  </a:rPr>
+                                  <m:t>𝜏</m:t>
+                                </m:r>
+                              </m:e>
+                            </m:d>
+                          </m:oMath>
+                        </m:oMathPara>
+                      </a14:m>
+                      <a:endParaRPr lang="en-US" altLang="zh-CN" sz="1000" b="0" dirty="0"/>
+                    </a:p>
+                  </p:txBody>
+                </p:sp>
+              </mc:Choice>
+              <mc:Fallback xmlns="">
+                <p:sp>
+                  <p:nvSpPr>
+                    <p:cNvPr id="72" name="文本框 71">
+                      <a:extLst>
+                        <a:ext uri="{FF2B5EF4-FFF2-40B4-BE49-F238E27FC236}">
+                          <a16:creationId xmlns:a16="http://schemas.microsoft.com/office/drawing/2014/main" id="{AEE8161A-BD5B-084D-5C0A-82D0C0EDFCDE}"/>
+                        </a:ext>
+                      </a:extLst>
+                    </p:cNvPr>
+                    <p:cNvSpPr txBox="1">
+                      <a:spLocks noRot="1" noChangeAspect="1" noMove="1" noResize="1" noEditPoints="1" noAdjustHandles="1" noChangeArrowheads="1" noChangeShapeType="1" noTextEdit="1"/>
+                    </p:cNvSpPr>
+                    <p:nvPr/>
+                  </p:nvSpPr>
+                  <p:spPr>
+                    <a:xfrm>
+                      <a:off x="5450180" y="3202036"/>
+                      <a:ext cx="783291" cy="153888"/>
+                    </a:xfrm>
+                    <a:prstGeom prst="rect">
+                      <a:avLst/>
+                    </a:prstGeom>
+                    <a:blipFill>
+                      <a:blip r:embed="rId10"/>
+                      <a:stretch>
+                        <a:fillRect l="-5469" t="-4000" b="-36000"/>
+                      </a:stretch>
+                    </a:blipFill>
+                  </p:spPr>
+                  <p:txBody>
+                    <a:bodyPr/>
+                    <a:lstStyle/>
+                    <a:p>
+                      <a:r>
+                        <a:rPr lang="zh-CN" altLang="en-US">
+                          <a:noFill/>
+                        </a:rPr>
+                        <a:t> </a:t>
+                      </a:r>
+                    </a:p>
+                  </p:txBody>
+                </p:sp>
+              </mc:Fallback>
+            </mc:AlternateContent>
+            <mc:AlternateContent xmlns:mc="http://schemas.openxmlformats.org/markup-compatibility/2006" xmlns:a14="http://schemas.microsoft.com/office/drawing/2010/main">
+              <mc:Choice Requires="a14">
+                <p:sp>
+                  <p:nvSpPr>
+                    <p:cNvPr id="128" name="文本框 127">
+                      <a:extLst>
+                        <a:ext uri="{FF2B5EF4-FFF2-40B4-BE49-F238E27FC236}">
+                          <a16:creationId xmlns:a16="http://schemas.microsoft.com/office/drawing/2014/main" id="{8C83B043-0844-68A5-96F1-13795A11E19B}"/>
+                        </a:ext>
+                      </a:extLst>
+                    </p:cNvPr>
+                    <p:cNvSpPr txBox="1"/>
+                    <p:nvPr/>
+                  </p:nvSpPr>
+                  <p:spPr>
+                    <a:xfrm>
+                      <a:off x="7050178" y="4102039"/>
+                      <a:ext cx="90922" cy="153888"/>
+                    </a:xfrm>
+                    <a:prstGeom prst="rect">
+                      <a:avLst/>
+                    </a:prstGeom>
+                    <a:noFill/>
+                  </p:spPr>
+                  <p:txBody>
+                    <a:bodyPr wrap="none" lIns="0" tIns="0" rIns="0" bIns="0" rtlCol="0">
+                      <a:spAutoFit/>
+                    </a:bodyPr>
+                    <a:lstStyle/>
+                    <a:p>
+                      <a:pPr/>
+                      <a14:m>
+                        <m:oMathPara xmlns:m="http://schemas.openxmlformats.org/officeDocument/2006/math">
+                          <m:oMathParaPr>
+                            <m:jc m:val="centerGroup"/>
+                          </m:oMathParaPr>
+                          <m:oMath xmlns:m="http://schemas.openxmlformats.org/officeDocument/2006/math">
+                            <m:r>
+                              <a:rPr lang="en-US" altLang="zh-CN" sz="1000" b="0" i="1" smtClean="0">
+                                <a:latin typeface="Cambria Math" panose="02040503050406030204" pitchFamily="18" charset="0"/>
+                              </a:rPr>
+                              <m:t>𝜏</m:t>
+                            </m:r>
+                          </m:oMath>
+                        </m:oMathPara>
+                      </a14:m>
+                      <a:endParaRPr lang="en-US" altLang="zh-CN" sz="1000" b="0" dirty="0"/>
+                    </a:p>
+                  </p:txBody>
+                </p:sp>
+              </mc:Choice>
+              <mc:Fallback xmlns="">
+                <p:sp>
+                  <p:nvSpPr>
+                    <p:cNvPr id="73" name="文本框 72">
+                      <a:extLst>
+                        <a:ext uri="{FF2B5EF4-FFF2-40B4-BE49-F238E27FC236}">
+                          <a16:creationId xmlns:a16="http://schemas.microsoft.com/office/drawing/2014/main" id="{43743E5A-89C7-2DB0-37FC-1B173F1A4673}"/>
+                        </a:ext>
+                      </a:extLst>
+                    </p:cNvPr>
+                    <p:cNvSpPr txBox="1">
+                      <a:spLocks noRot="1" noChangeAspect="1" noMove="1" noResize="1" noEditPoints="1" noAdjustHandles="1" noChangeArrowheads="1" noChangeShapeType="1" noTextEdit="1"/>
+                    </p:cNvSpPr>
+                    <p:nvPr/>
+                  </p:nvSpPr>
+                  <p:spPr>
+                    <a:xfrm>
+                      <a:off x="7050178" y="4102039"/>
+                      <a:ext cx="90922" cy="153888"/>
+                    </a:xfrm>
+                    <a:prstGeom prst="rect">
+                      <a:avLst/>
+                    </a:prstGeom>
+                    <a:blipFill>
+                      <a:blip r:embed="rId11"/>
+                      <a:stretch>
+                        <a:fillRect l="-20000" r="-20000" b="-4000"/>
+                      </a:stretch>
+                    </a:blipFill>
+                  </p:spPr>
+                  <p:txBody>
+                    <a:bodyPr/>
+                    <a:lstStyle/>
+                    <a:p>
+                      <a:r>
+                        <a:rPr lang="zh-CN" altLang="en-US">
+                          <a:noFill/>
+                        </a:rPr>
+                        <a:t> </a:t>
+                      </a:r>
+                    </a:p>
+                  </p:txBody>
+                </p:sp>
+              </mc:Fallback>
+            </mc:AlternateContent>
+            <p:sp>
+              <p:nvSpPr>
+                <p:cNvPr id="129" name="任意多边形: 形状 128">
+                  <a:extLst>
+                    <a:ext uri="{FF2B5EF4-FFF2-40B4-BE49-F238E27FC236}">
+                      <a16:creationId xmlns:a16="http://schemas.microsoft.com/office/drawing/2014/main" id="{A9924407-602B-750B-9ED1-77A8EF018173}"/>
+                    </a:ext>
+                  </a:extLst>
+                </p:cNvPr>
+                <p:cNvSpPr/>
+                <p:nvPr/>
+              </p:nvSpPr>
+              <p:spPr>
+                <a:xfrm>
+                  <a:off x="6233499" y="3742037"/>
+                  <a:ext cx="207573" cy="359290"/>
+                </a:xfrm>
+                <a:custGeom>
+                  <a:avLst/>
+                  <a:gdLst>
+                    <a:gd name="csX0" fmla="*/ 0 w 207573"/>
+                    <a:gd name="csY0" fmla="*/ 0 h 359290"/>
+                    <a:gd name="csX1" fmla="*/ 207573 w 207573"/>
+                    <a:gd name="csY1" fmla="*/ 0 h 359290"/>
+                    <a:gd name="csX2" fmla="*/ 207573 w 207573"/>
+                    <a:gd name="csY2" fmla="*/ 359290 h 359290"/>
+                    <a:gd name="csX3" fmla="*/ 0 w 207573"/>
+                    <a:gd name="csY3" fmla="*/ 359290 h 359290"/>
+                  </a:gdLst>
+                  <a:ahLst/>
+                  <a:cxnLst>
+                    <a:cxn ang="0">
+                      <a:pos x="csX0" y="csY0"/>
+                    </a:cxn>
+                    <a:cxn ang="0">
+                      <a:pos x="csX1" y="csY1"/>
+                    </a:cxn>
+                    <a:cxn ang="0">
+                      <a:pos x="csX2" y="csY2"/>
+                    </a:cxn>
+                    <a:cxn ang="0">
+                      <a:pos x="csX3" y="csY3"/>
+                    </a:cxn>
+                  </a:cxnLst>
+                  <a:rect l="l" t="t" r="r" b="b"/>
+                  <a:pathLst>
+                    <a:path w="207573" h="359290">
+                      <a:moveTo>
+                        <a:pt x="0" y="0"/>
+                      </a:moveTo>
+                      <a:lnTo>
+                        <a:pt x="207573" y="0"/>
+                      </a:lnTo>
+                      <a:lnTo>
+                        <a:pt x="207573" y="359290"/>
+                      </a:lnTo>
+                      <a:lnTo>
+                        <a:pt x="0" y="359290"/>
+                      </a:lnTo>
+                      <a:close/>
+                    </a:path>
+                  </a:pathLst>
+                </a:custGeom>
+                <a:pattFill prst="wdUpDiag">
+                  <a:fgClr>
+                    <a:srgbClr val="FF0000"/>
+                  </a:fgClr>
+                  <a:bgClr>
+                    <a:schemeClr val="bg1"/>
+                  </a:bgClr>
+                </a:pattFill>
+              </p:spPr>
+              <p:style>
+                <a:lnRef idx="2">
+                  <a:schemeClr val="accent1">
+                    <a:shade val="15000"/>
+                  </a:schemeClr>
+                </a:lnRef>
+                <a:fillRef idx="1">
+                  <a:schemeClr val="accent1"/>
+                </a:fillRef>
+                <a:effectRef idx="0">
+                  <a:schemeClr val="accent1"/>
+                </a:effectRef>
+                <a:fontRef idx="minor">
+                  <a:schemeClr val="lt1"/>
+                </a:fontRef>
+              </p:style>
+              <p:txBody>
+                <a:bodyPr wrap="square" rtlCol="0" anchor="ctr">
+                  <a:noAutofit/>
+                </a:bodyPr>
+                <a:lstStyle/>
+                <a:p>
+                  <a:pPr algn="ctr"/>
+                  <a:endParaRPr lang="zh-CN" altLang="en-US" dirty="0"/>
+                </a:p>
+              </p:txBody>
+            </p:sp>
+          </p:grpSp>
+          <p:grpSp>
+            <p:nvGrpSpPr>
+              <p:cNvPr id="113" name="组合 112">
+                <a:extLst>
+                  <a:ext uri="{FF2B5EF4-FFF2-40B4-BE49-F238E27FC236}">
+                    <a16:creationId xmlns:a16="http://schemas.microsoft.com/office/drawing/2014/main" id="{20138A87-7940-1848-9684-BB864CE1DD1D}"/>
+                  </a:ext>
+                </a:extLst>
+              </p:cNvPr>
+              <p:cNvGrpSpPr/>
+              <p:nvPr/>
+            </p:nvGrpSpPr>
+            <p:grpSpPr>
+              <a:xfrm>
+                <a:off x="2923172" y="1663827"/>
+                <a:ext cx="1807629" cy="1053890"/>
+                <a:chOff x="1315844" y="1397149"/>
+                <a:chExt cx="1807629" cy="1053890"/>
+              </a:xfrm>
+            </p:grpSpPr>
+            <p:sp>
+              <p:nvSpPr>
+                <p:cNvPr id="120" name="矩形 119">
+                  <a:extLst>
+                    <a:ext uri="{FF2B5EF4-FFF2-40B4-BE49-F238E27FC236}">
+                      <a16:creationId xmlns:a16="http://schemas.microsoft.com/office/drawing/2014/main" id="{76908152-A4A8-0F3A-FD1C-CED9781407B8}"/>
+                    </a:ext>
+                  </a:extLst>
+                </p:cNvPr>
+                <p:cNvSpPr/>
+                <p:nvPr/>
+              </p:nvSpPr>
+              <p:spPr>
+                <a:xfrm>
+                  <a:off x="1495845" y="1937150"/>
+                  <a:ext cx="720000" cy="360000"/>
+                </a:xfrm>
+                <a:prstGeom prst="rect">
+                  <a:avLst/>
+                </a:prstGeom>
+                <a:noFill/>
+                <a:ln>
+                  <a:solidFill>
+                    <a:srgbClr val="92D050"/>
+                  </a:solidFill>
+                </a:ln>
+              </p:spPr>
+              <p:style>
+                <a:lnRef idx="2">
+                  <a:schemeClr val="accent1">
+                    <a:shade val="15000"/>
+                  </a:schemeClr>
+                </a:lnRef>
+                <a:fillRef idx="1">
+                  <a:schemeClr val="accent1"/>
+                </a:fillRef>
+                <a:effectRef idx="0">
+                  <a:schemeClr val="accent1"/>
+                </a:effectRef>
+                <a:fontRef idx="minor">
+                  <a:schemeClr val="lt1"/>
+                </a:fontRef>
+              </p:style>
+              <p:txBody>
+                <a:bodyPr rtlCol="0" anchor="ctr"/>
+                <a:lstStyle/>
+                <a:p>
+                  <a:pPr algn="ctr"/>
+                  <a:endParaRPr lang="zh-CN" altLang="en-US" dirty="0"/>
+                </a:p>
+              </p:txBody>
+            </p:sp>
+            <p:cxnSp>
+              <p:nvCxnSpPr>
+                <p:cNvPr id="121" name="直接箭头连接符 120">
+                  <a:extLst>
+                    <a:ext uri="{FF2B5EF4-FFF2-40B4-BE49-F238E27FC236}">
+                      <a16:creationId xmlns:a16="http://schemas.microsoft.com/office/drawing/2014/main" id="{27BF5545-424D-553E-9504-7D3A78D2C510}"/>
+                    </a:ext>
+                  </a:extLst>
+                </p:cNvPr>
+                <p:cNvCxnSpPr/>
+                <p:nvPr/>
+              </p:nvCxnSpPr>
+              <p:spPr>
+                <a:xfrm>
+                  <a:off x="1315844" y="2297151"/>
+                  <a:ext cx="1800000" cy="0"/>
+                </a:xfrm>
+                <a:prstGeom prst="straightConnector1">
+                  <a:avLst/>
+                </a:prstGeom>
+                <a:ln w="12700">
+                  <a:tailEnd type="stealth"/>
+                </a:ln>
+              </p:spPr>
+              <p:style>
+                <a:lnRef idx="1">
+                  <a:schemeClr val="dk1"/>
+                </a:lnRef>
+                <a:fillRef idx="0">
+                  <a:schemeClr val="dk1"/>
+                </a:fillRef>
+                <a:effectRef idx="0">
+                  <a:schemeClr val="dk1"/>
+                </a:effectRef>
+                <a:fontRef idx="minor">
+                  <a:schemeClr val="tx1"/>
+                </a:fontRef>
+              </p:style>
+            </p:cxnSp>
+            <p:cxnSp>
+              <p:nvCxnSpPr>
+                <p:cNvPr id="122" name="直接箭头连接符 121">
+                  <a:extLst>
+                    <a:ext uri="{FF2B5EF4-FFF2-40B4-BE49-F238E27FC236}">
+                      <a16:creationId xmlns:a16="http://schemas.microsoft.com/office/drawing/2014/main" id="{E34607FB-0916-8784-AD8C-3C504C814085}"/>
+                    </a:ext>
+                  </a:extLst>
+                </p:cNvPr>
+                <p:cNvCxnSpPr>
+                  <a:cxnSpLocks/>
+                </p:cNvCxnSpPr>
+                <p:nvPr/>
+              </p:nvCxnSpPr>
+              <p:spPr>
+                <a:xfrm rot="16200000">
+                  <a:off x="1765844" y="1847151"/>
+                  <a:ext cx="900000" cy="0"/>
+                </a:xfrm>
+                <a:prstGeom prst="straightConnector1">
+                  <a:avLst/>
+                </a:prstGeom>
+                <a:ln w="12700">
+                  <a:tailEnd type="stealth"/>
+                </a:ln>
+              </p:spPr>
+              <p:style>
+                <a:lnRef idx="1">
+                  <a:schemeClr val="dk1"/>
+                </a:lnRef>
+                <a:fillRef idx="0">
+                  <a:schemeClr val="dk1"/>
+                </a:fillRef>
+                <a:effectRef idx="0">
+                  <a:schemeClr val="dk1"/>
+                </a:effectRef>
+                <a:fontRef idx="minor">
+                  <a:schemeClr val="tx1"/>
+                </a:fontRef>
+              </p:style>
+            </p:cxnSp>
+            <mc:AlternateContent xmlns:mc="http://schemas.openxmlformats.org/markup-compatibility/2006" xmlns:a14="http://schemas.microsoft.com/office/drawing/2010/main">
+              <mc:Choice Requires="a14">
+                <p:sp>
+                  <p:nvSpPr>
+                    <p:cNvPr id="123" name="文本框 122">
+                      <a:extLst>
+                        <a:ext uri="{FF2B5EF4-FFF2-40B4-BE49-F238E27FC236}">
+                          <a16:creationId xmlns:a16="http://schemas.microsoft.com/office/drawing/2014/main" id="{13577B38-B193-44B1-EB32-3C42FF42BFB2}"/>
+                        </a:ext>
+                      </a:extLst>
+                    </p:cNvPr>
+                    <p:cNvSpPr txBox="1"/>
+                    <p:nvPr/>
+                  </p:nvSpPr>
+                  <p:spPr>
+                    <a:xfrm>
+                      <a:off x="1894474" y="1397149"/>
+                      <a:ext cx="321370" cy="153888"/>
+                    </a:xfrm>
+                    <a:prstGeom prst="rect">
+                      <a:avLst/>
+                    </a:prstGeom>
+                    <a:noFill/>
+                  </p:spPr>
+                  <p:txBody>
+                    <a:bodyPr wrap="none" lIns="0" tIns="0" rIns="0" bIns="0" rtlCol="0">
+                      <a:spAutoFit/>
+                    </a:bodyPr>
+                    <a:lstStyle/>
+                    <a:p>
+                      <a:pPr/>
+                      <a14:m>
+                        <m:oMathPara xmlns:m="http://schemas.openxmlformats.org/officeDocument/2006/math">
+                          <m:oMathParaPr>
+                            <m:jc m:val="centerGroup"/>
+                          </m:oMathParaPr>
+                          <m:oMath xmlns:m="http://schemas.openxmlformats.org/officeDocument/2006/math">
+                            <m:r>
+                              <a:rPr lang="en-US" altLang="zh-CN" sz="1000" b="0" i="1" smtClean="0">
+                                <a:latin typeface="Cambria Math" panose="02040503050406030204" pitchFamily="18" charset="0"/>
+                              </a:rPr>
+                              <m:t>𝑔</m:t>
+                            </m:r>
+                            <m:d>
+                              <m:dPr>
+                                <m:ctrlPr>
+                                  <a:rPr lang="en-US" altLang="zh-CN" sz="1000" b="0" i="1" smtClean="0">
+                                    <a:latin typeface="Cambria Math" panose="02040503050406030204" pitchFamily="18" charset="0"/>
+                                  </a:rPr>
+                                </m:ctrlPr>
+                              </m:dPr>
+                              <m:e>
+                                <m:r>
+                                  <a:rPr lang="en-US" altLang="zh-CN" sz="1000" b="0" i="1" smtClean="0">
+                                    <a:latin typeface="Cambria Math" panose="02040503050406030204" pitchFamily="18" charset="0"/>
+                                  </a:rPr>
+                                  <m:t>−</m:t>
+                                </m:r>
+                                <m:r>
+                                  <a:rPr lang="en-US" altLang="zh-CN" sz="1000" b="0" i="1" smtClean="0">
+                                    <a:latin typeface="Cambria Math" panose="02040503050406030204" pitchFamily="18" charset="0"/>
+                                  </a:rPr>
+                                  <m:t>𝜏</m:t>
+                                </m:r>
+                              </m:e>
+                            </m:d>
+                          </m:oMath>
+                        </m:oMathPara>
+                      </a14:m>
+                      <a:endParaRPr lang="en-US" altLang="zh-CN" sz="1000" b="0" dirty="0"/>
+                    </a:p>
+                  </p:txBody>
+                </p:sp>
+              </mc:Choice>
+              <mc:Fallback xmlns="">
+                <p:sp>
+                  <p:nvSpPr>
+                    <p:cNvPr id="60" name="文本框 59">
+                      <a:extLst>
+                        <a:ext uri="{FF2B5EF4-FFF2-40B4-BE49-F238E27FC236}">
+                          <a16:creationId xmlns:a16="http://schemas.microsoft.com/office/drawing/2014/main" id="{0EBC1A63-969C-D82F-4E90-8E5A96509668}"/>
+                        </a:ext>
+                      </a:extLst>
+                    </p:cNvPr>
+                    <p:cNvSpPr txBox="1">
+                      <a:spLocks noRot="1" noChangeAspect="1" noMove="1" noResize="1" noEditPoints="1" noAdjustHandles="1" noChangeArrowheads="1" noChangeShapeType="1" noTextEdit="1"/>
+                    </p:cNvSpPr>
+                    <p:nvPr/>
+                  </p:nvSpPr>
+                  <p:spPr>
+                    <a:xfrm>
+                      <a:off x="1894474" y="1397149"/>
+                      <a:ext cx="321370" cy="153888"/>
+                    </a:xfrm>
+                    <a:prstGeom prst="rect">
+                      <a:avLst/>
+                    </a:prstGeom>
+                    <a:blipFill>
+                      <a:blip r:embed="rId7"/>
+                      <a:stretch>
+                        <a:fillRect l="-9434" b="-28000"/>
+                      </a:stretch>
+                    </a:blipFill>
+                  </p:spPr>
+                  <p:txBody>
+                    <a:bodyPr/>
+                    <a:lstStyle/>
+                    <a:p>
+                      <a:r>
+                        <a:rPr lang="zh-CN" altLang="en-US">
+                          <a:noFill/>
+                        </a:rPr>
+                        <a:t> </a:t>
+                      </a:r>
+                    </a:p>
+                  </p:txBody>
+                </p:sp>
+              </mc:Fallback>
+            </mc:AlternateContent>
+            <mc:AlternateContent xmlns:mc="http://schemas.openxmlformats.org/markup-compatibility/2006" xmlns:a14="http://schemas.microsoft.com/office/drawing/2010/main">
+              <mc:Choice Requires="a14">
+                <p:sp>
+                  <p:nvSpPr>
+                    <p:cNvPr id="124" name="文本框 123">
+                      <a:extLst>
+                        <a:ext uri="{FF2B5EF4-FFF2-40B4-BE49-F238E27FC236}">
+                          <a16:creationId xmlns:a16="http://schemas.microsoft.com/office/drawing/2014/main" id="{10C7D408-E9A8-4437-B08C-9B6FB3AAC189}"/>
+                        </a:ext>
+                      </a:extLst>
+                    </p:cNvPr>
+                    <p:cNvSpPr txBox="1"/>
+                    <p:nvPr/>
+                  </p:nvSpPr>
+                  <p:spPr>
+                    <a:xfrm>
+                      <a:off x="3032551" y="2297151"/>
+                      <a:ext cx="90922" cy="153888"/>
+                    </a:xfrm>
+                    <a:prstGeom prst="rect">
+                      <a:avLst/>
+                    </a:prstGeom>
+                    <a:noFill/>
+                  </p:spPr>
+                  <p:txBody>
+                    <a:bodyPr wrap="none" lIns="0" tIns="0" rIns="0" bIns="0" rtlCol="0">
+                      <a:spAutoFit/>
+                    </a:bodyPr>
+                    <a:lstStyle/>
+                    <a:p>
+                      <a:pPr/>
+                      <a14:m>
+                        <m:oMathPara xmlns:m="http://schemas.openxmlformats.org/officeDocument/2006/math">
+                          <m:oMathParaPr>
+                            <m:jc m:val="centerGroup"/>
+                          </m:oMathParaPr>
+                          <m:oMath xmlns:m="http://schemas.openxmlformats.org/officeDocument/2006/math">
+                            <m:r>
+                              <a:rPr lang="en-US" altLang="zh-CN" sz="1000" b="0" i="1" smtClean="0">
+                                <a:latin typeface="Cambria Math" panose="02040503050406030204" pitchFamily="18" charset="0"/>
+                              </a:rPr>
+                              <m:t>𝜏</m:t>
+                            </m:r>
+                          </m:oMath>
+                        </m:oMathPara>
+                      </a14:m>
+                      <a:endParaRPr lang="en-US" altLang="zh-CN" sz="1000" b="0" dirty="0"/>
+                    </a:p>
+                  </p:txBody>
+                </p:sp>
+              </mc:Choice>
+              <mc:Fallback xmlns="">
+                <p:sp>
+                  <p:nvSpPr>
+                    <p:cNvPr id="61" name="文本框 60">
+                      <a:extLst>
+                        <a:ext uri="{FF2B5EF4-FFF2-40B4-BE49-F238E27FC236}">
+                          <a16:creationId xmlns:a16="http://schemas.microsoft.com/office/drawing/2014/main" id="{CA8B911A-DF00-E457-48D1-9CD4DB1FCE44}"/>
+                        </a:ext>
+                      </a:extLst>
+                    </p:cNvPr>
+                    <p:cNvSpPr txBox="1">
+                      <a:spLocks noRot="1" noChangeAspect="1" noMove="1" noResize="1" noEditPoints="1" noAdjustHandles="1" noChangeArrowheads="1" noChangeShapeType="1" noTextEdit="1"/>
+                    </p:cNvSpPr>
+                    <p:nvPr/>
+                  </p:nvSpPr>
+                  <p:spPr>
+                    <a:xfrm>
+                      <a:off x="3032551" y="2297151"/>
+                      <a:ext cx="90922" cy="153888"/>
+                    </a:xfrm>
+                    <a:prstGeom prst="rect">
+                      <a:avLst/>
+                    </a:prstGeom>
+                    <a:blipFill>
+                      <a:blip r:embed="rId8"/>
+                      <a:stretch>
+                        <a:fillRect l="-26667" r="-13333"/>
+                      </a:stretch>
+                    </a:blipFill>
+                  </p:spPr>
+                  <p:txBody>
+                    <a:bodyPr/>
+                    <a:lstStyle/>
+                    <a:p>
+                      <a:r>
+                        <a:rPr lang="zh-CN" altLang="en-US">
+                          <a:noFill/>
+                        </a:rPr>
+                        <a:t> </a:t>
+                      </a:r>
+                    </a:p>
+                  </p:txBody>
+                </p:sp>
+              </mc:Fallback>
+            </mc:AlternateContent>
+          </p:grpSp>
+          <p:grpSp>
+            <p:nvGrpSpPr>
+              <p:cNvPr id="114" name="组合 113">
+                <a:extLst>
+                  <a:ext uri="{FF2B5EF4-FFF2-40B4-BE49-F238E27FC236}">
+                    <a16:creationId xmlns:a16="http://schemas.microsoft.com/office/drawing/2014/main" id="{BE60C641-AB7D-CB5A-CD5E-56492FF9301A}"/>
+                  </a:ext>
+                </a:extLst>
+              </p:cNvPr>
+              <p:cNvGrpSpPr/>
+              <p:nvPr/>
+            </p:nvGrpSpPr>
+            <p:grpSpPr>
+              <a:xfrm>
+                <a:off x="5203172" y="1663827"/>
+                <a:ext cx="1807629" cy="1053891"/>
+                <a:chOff x="1315844" y="1397148"/>
+                <a:chExt cx="1807629" cy="1053891"/>
+              </a:xfrm>
+            </p:grpSpPr>
+            <p:sp>
+              <p:nvSpPr>
+                <p:cNvPr id="115" name="矩形 114">
+                  <a:extLst>
+                    <a:ext uri="{FF2B5EF4-FFF2-40B4-BE49-F238E27FC236}">
+                      <a16:creationId xmlns:a16="http://schemas.microsoft.com/office/drawing/2014/main" id="{890324DA-70F1-98F7-917C-5A87299511D3}"/>
+                    </a:ext>
+                  </a:extLst>
+                </p:cNvPr>
+                <p:cNvSpPr/>
+                <p:nvPr/>
+              </p:nvSpPr>
+              <p:spPr>
+                <a:xfrm>
+                  <a:off x="1703444" y="1937149"/>
+                  <a:ext cx="720000" cy="360000"/>
+                </a:xfrm>
+                <a:prstGeom prst="rect">
+                  <a:avLst/>
+                </a:prstGeom>
+                <a:noFill/>
+                <a:ln>
+                  <a:solidFill>
+                    <a:srgbClr val="92D050"/>
+                  </a:solidFill>
+                </a:ln>
+              </p:spPr>
+              <p:style>
+                <a:lnRef idx="2">
+                  <a:schemeClr val="accent1">
+                    <a:shade val="15000"/>
+                  </a:schemeClr>
+                </a:lnRef>
+                <a:fillRef idx="1">
+                  <a:schemeClr val="accent1"/>
+                </a:fillRef>
+                <a:effectRef idx="0">
+                  <a:schemeClr val="accent1"/>
+                </a:effectRef>
+                <a:fontRef idx="minor">
+                  <a:schemeClr val="lt1"/>
+                </a:fontRef>
+              </p:style>
+              <p:txBody>
+                <a:bodyPr rtlCol="0" anchor="ctr"/>
+                <a:lstStyle/>
+                <a:p>
+                  <a:pPr algn="ctr"/>
+                  <a:endParaRPr lang="zh-CN" altLang="en-US" dirty="0"/>
+                </a:p>
+              </p:txBody>
+            </p:sp>
+            <p:cxnSp>
+              <p:nvCxnSpPr>
+                <p:cNvPr id="116" name="直接箭头连接符 115">
+                  <a:extLst>
+                    <a:ext uri="{FF2B5EF4-FFF2-40B4-BE49-F238E27FC236}">
+                      <a16:creationId xmlns:a16="http://schemas.microsoft.com/office/drawing/2014/main" id="{023CE079-C7CA-8E84-CCD5-28A6577652A3}"/>
+                    </a:ext>
+                  </a:extLst>
+                </p:cNvPr>
+                <p:cNvCxnSpPr/>
+                <p:nvPr/>
+              </p:nvCxnSpPr>
+              <p:spPr>
+                <a:xfrm>
+                  <a:off x="1315844" y="2297151"/>
+                  <a:ext cx="1800000" cy="0"/>
+                </a:xfrm>
+                <a:prstGeom prst="straightConnector1">
+                  <a:avLst/>
+                </a:prstGeom>
+                <a:ln w="12700">
+                  <a:tailEnd type="stealth"/>
+                </a:ln>
+              </p:spPr>
+              <p:style>
+                <a:lnRef idx="1">
+                  <a:schemeClr val="dk1"/>
+                </a:lnRef>
+                <a:fillRef idx="0">
+                  <a:schemeClr val="dk1"/>
+                </a:fillRef>
+                <a:effectRef idx="0">
+                  <a:schemeClr val="dk1"/>
+                </a:effectRef>
+                <a:fontRef idx="minor">
+                  <a:schemeClr val="tx1"/>
+                </a:fontRef>
+              </p:style>
+            </p:cxnSp>
+            <p:cxnSp>
+              <p:nvCxnSpPr>
+                <p:cNvPr id="117" name="直接箭头连接符 116">
+                  <a:extLst>
+                    <a:ext uri="{FF2B5EF4-FFF2-40B4-BE49-F238E27FC236}">
+                      <a16:creationId xmlns:a16="http://schemas.microsoft.com/office/drawing/2014/main" id="{8D5E95E3-E38C-344C-3A4D-B09468AEE22D}"/>
+                    </a:ext>
+                  </a:extLst>
+                </p:cNvPr>
+                <p:cNvCxnSpPr>
+                  <a:cxnSpLocks/>
+                </p:cNvCxnSpPr>
+                <p:nvPr/>
+              </p:nvCxnSpPr>
+              <p:spPr>
+                <a:xfrm rot="16200000">
+                  <a:off x="1765844" y="1847151"/>
+                  <a:ext cx="900000" cy="0"/>
+                </a:xfrm>
+                <a:prstGeom prst="straightConnector1">
+                  <a:avLst/>
+                </a:prstGeom>
+                <a:ln w="12700">
+                  <a:tailEnd type="stealth"/>
+                </a:ln>
+              </p:spPr>
+              <p:style>
+                <a:lnRef idx="1">
+                  <a:schemeClr val="dk1"/>
+                </a:lnRef>
+                <a:fillRef idx="0">
+                  <a:schemeClr val="dk1"/>
+                </a:fillRef>
+                <a:effectRef idx="0">
+                  <a:schemeClr val="dk1"/>
+                </a:effectRef>
+                <a:fontRef idx="minor">
+                  <a:schemeClr val="tx1"/>
+                </a:fontRef>
+              </p:style>
+            </p:cxnSp>
+            <mc:AlternateContent xmlns:mc="http://schemas.openxmlformats.org/markup-compatibility/2006" xmlns:a14="http://schemas.microsoft.com/office/drawing/2010/main">
+              <mc:Choice Requires="a14">
+                <p:sp>
+                  <p:nvSpPr>
+                    <p:cNvPr id="118" name="文本框 117">
+                      <a:extLst>
+                        <a:ext uri="{FF2B5EF4-FFF2-40B4-BE49-F238E27FC236}">
+                          <a16:creationId xmlns:a16="http://schemas.microsoft.com/office/drawing/2014/main" id="{AB21741A-2B87-16A1-0E68-36A07396C8A0}"/>
+                        </a:ext>
+                      </a:extLst>
+                    </p:cNvPr>
+                    <p:cNvSpPr txBox="1"/>
+                    <p:nvPr/>
+                  </p:nvSpPr>
+                  <p:spPr>
+                    <a:xfrm>
+                      <a:off x="1677989" y="1397148"/>
+                      <a:ext cx="540469" cy="153888"/>
+                    </a:xfrm>
+                    <a:prstGeom prst="rect">
+                      <a:avLst/>
+                    </a:prstGeom>
+                    <a:noFill/>
+                  </p:spPr>
+                  <p:txBody>
+                    <a:bodyPr wrap="none" lIns="0" tIns="0" rIns="0" bIns="0" rtlCol="0">
+                      <a:spAutoFit/>
+                    </a:bodyPr>
+                    <a:lstStyle/>
+                    <a:p>
+                      <a:pPr/>
+                      <a14:m>
+                        <m:oMathPara xmlns:m="http://schemas.openxmlformats.org/officeDocument/2006/math">
+                          <m:oMathParaPr>
+                            <m:jc m:val="centerGroup"/>
+                          </m:oMathParaPr>
+                          <m:oMath xmlns:m="http://schemas.openxmlformats.org/officeDocument/2006/math">
+                            <m:r>
+                              <a:rPr lang="en-US" altLang="zh-CN" sz="1000" b="0" i="1" smtClean="0">
+                                <a:latin typeface="Cambria Math" panose="02040503050406030204" pitchFamily="18" charset="0"/>
+                              </a:rPr>
+                              <m:t>𝑔</m:t>
+                            </m:r>
+                            <m:d>
+                              <m:dPr>
+                                <m:ctrlPr>
+                                  <a:rPr lang="en-US" altLang="zh-CN" sz="1000" b="0" i="1" smtClean="0">
+                                    <a:latin typeface="Cambria Math" panose="02040503050406030204" pitchFamily="18" charset="0"/>
+                                  </a:rPr>
+                                </m:ctrlPr>
+                              </m:dPr>
+                              <m:e>
+                                <m:sSub>
+                                  <m:sSubPr>
+                                    <m:ctrlPr>
+                                      <a:rPr lang="en-US" altLang="zh-CN" sz="1000" b="0" i="1" smtClean="0">
+                                        <a:latin typeface="Cambria Math" panose="02040503050406030204" pitchFamily="18" charset="0"/>
+                                      </a:rPr>
+                                    </m:ctrlPr>
+                                  </m:sSubPr>
+                                  <m:e>
+                                    <m:r>
+                                      <a:rPr lang="en-US" altLang="zh-CN" sz="1000" b="0" i="1" smtClean="0">
+                                        <a:latin typeface="Cambria Math" panose="02040503050406030204" pitchFamily="18" charset="0"/>
+                                      </a:rPr>
+                                      <m:t>𝑡</m:t>
+                                    </m:r>
+                                  </m:e>
+                                  <m:sub>
+                                    <m:r>
+                                      <a:rPr lang="en-US" altLang="zh-CN" sz="1000" b="0" i="1" smtClean="0">
+                                        <a:latin typeface="Cambria Math" panose="02040503050406030204" pitchFamily="18" charset="0"/>
+                                      </a:rPr>
+                                      <m:t>0</m:t>
+                                    </m:r>
+                                  </m:sub>
+                                </m:sSub>
+                                <m:r>
+                                  <a:rPr lang="en-US" altLang="zh-CN" sz="1000" b="0" i="1" smtClean="0">
+                                    <a:latin typeface="Cambria Math" panose="02040503050406030204" pitchFamily="18" charset="0"/>
+                                  </a:rPr>
+                                  <m:t>−</m:t>
+                                </m:r>
+                                <m:r>
+                                  <a:rPr lang="en-US" altLang="zh-CN" sz="1000" b="0" i="1" smtClean="0">
+                                    <a:latin typeface="Cambria Math" panose="02040503050406030204" pitchFamily="18" charset="0"/>
+                                  </a:rPr>
+                                  <m:t>𝜏</m:t>
+                                </m:r>
+                              </m:e>
+                            </m:d>
+                          </m:oMath>
+                        </m:oMathPara>
+                      </a14:m>
+                      <a:endParaRPr lang="en-US" altLang="zh-CN" sz="1000" b="0" dirty="0"/>
+                    </a:p>
+                  </p:txBody>
+                </p:sp>
+              </mc:Choice>
+              <mc:Fallback xmlns="">
+                <p:sp>
+                  <p:nvSpPr>
+                    <p:cNvPr id="66" name="文本框 65">
+                      <a:extLst>
+                        <a:ext uri="{FF2B5EF4-FFF2-40B4-BE49-F238E27FC236}">
+                          <a16:creationId xmlns:a16="http://schemas.microsoft.com/office/drawing/2014/main" id="{18EEB8E8-1DCC-8D7B-74B3-7B102D194C00}"/>
+                        </a:ext>
+                      </a:extLst>
+                    </p:cNvPr>
+                    <p:cNvSpPr txBox="1">
+                      <a:spLocks noRot="1" noChangeAspect="1" noMove="1" noResize="1" noEditPoints="1" noAdjustHandles="1" noChangeArrowheads="1" noChangeShapeType="1" noTextEdit="1"/>
+                    </p:cNvSpPr>
+                    <p:nvPr/>
+                  </p:nvSpPr>
+                  <p:spPr>
+                    <a:xfrm>
+                      <a:off x="1677989" y="1397148"/>
+                      <a:ext cx="540469" cy="153888"/>
+                    </a:xfrm>
+                    <a:prstGeom prst="rect">
+                      <a:avLst/>
+                    </a:prstGeom>
+                    <a:blipFill>
+                      <a:blip r:embed="rId9"/>
+                      <a:stretch>
+                        <a:fillRect l="-5682" b="-28000"/>
+                      </a:stretch>
+                    </a:blipFill>
+                  </p:spPr>
+                  <p:txBody>
+                    <a:bodyPr/>
+                    <a:lstStyle/>
+                    <a:p>
+                      <a:r>
+                        <a:rPr lang="zh-CN" altLang="en-US">
+                          <a:noFill/>
+                        </a:rPr>
+                        <a:t> </a:t>
+                      </a:r>
+                    </a:p>
+                  </p:txBody>
+                </p:sp>
+              </mc:Fallback>
+            </mc:AlternateContent>
+            <mc:AlternateContent xmlns:mc="http://schemas.openxmlformats.org/markup-compatibility/2006" xmlns:a14="http://schemas.microsoft.com/office/drawing/2010/main">
+              <mc:Choice Requires="a14">
+                <p:sp>
+                  <p:nvSpPr>
+                    <p:cNvPr id="119" name="文本框 118">
+                      <a:extLst>
+                        <a:ext uri="{FF2B5EF4-FFF2-40B4-BE49-F238E27FC236}">
+                          <a16:creationId xmlns:a16="http://schemas.microsoft.com/office/drawing/2014/main" id="{3CF06057-1309-E392-56E0-BA87E6C858F7}"/>
+                        </a:ext>
+                      </a:extLst>
+                    </p:cNvPr>
+                    <p:cNvSpPr txBox="1"/>
+                    <p:nvPr/>
+                  </p:nvSpPr>
+                  <p:spPr>
+                    <a:xfrm>
+                      <a:off x="3032551" y="2297151"/>
+                      <a:ext cx="90922" cy="153888"/>
+                    </a:xfrm>
+                    <a:prstGeom prst="rect">
+                      <a:avLst/>
+                    </a:prstGeom>
+                    <a:noFill/>
+                  </p:spPr>
+                  <p:txBody>
+                    <a:bodyPr wrap="none" lIns="0" tIns="0" rIns="0" bIns="0" rtlCol="0">
+                      <a:spAutoFit/>
+                    </a:bodyPr>
+                    <a:lstStyle/>
+                    <a:p>
+                      <a:pPr/>
+                      <a14:m>
+                        <m:oMathPara xmlns:m="http://schemas.openxmlformats.org/officeDocument/2006/math">
+                          <m:oMathParaPr>
+                            <m:jc m:val="centerGroup"/>
+                          </m:oMathParaPr>
+                          <m:oMath xmlns:m="http://schemas.openxmlformats.org/officeDocument/2006/math">
+                            <m:r>
+                              <a:rPr lang="en-US" altLang="zh-CN" sz="1000" b="0" i="1" smtClean="0">
+                                <a:latin typeface="Cambria Math" panose="02040503050406030204" pitchFamily="18" charset="0"/>
+                              </a:rPr>
+                              <m:t>𝜏</m:t>
+                            </m:r>
+                          </m:oMath>
+                        </m:oMathPara>
+                      </a14:m>
+                      <a:endParaRPr lang="en-US" altLang="zh-CN" sz="1000" b="0" dirty="0"/>
+                    </a:p>
+                  </p:txBody>
+                </p:sp>
+              </mc:Choice>
+              <mc:Fallback xmlns="">
+                <p:sp>
+                  <p:nvSpPr>
+                    <p:cNvPr id="67" name="文本框 66">
+                      <a:extLst>
+                        <a:ext uri="{FF2B5EF4-FFF2-40B4-BE49-F238E27FC236}">
+                          <a16:creationId xmlns:a16="http://schemas.microsoft.com/office/drawing/2014/main" id="{8C8D50BF-A2F1-C369-446F-F8D873400F16}"/>
+                        </a:ext>
+                      </a:extLst>
+                    </p:cNvPr>
+                    <p:cNvSpPr txBox="1">
+                      <a:spLocks noRot="1" noChangeAspect="1" noMove="1" noResize="1" noEditPoints="1" noAdjustHandles="1" noChangeArrowheads="1" noChangeShapeType="1" noTextEdit="1"/>
+                    </p:cNvSpPr>
+                    <p:nvPr/>
+                  </p:nvSpPr>
+                  <p:spPr>
+                    <a:xfrm>
+                      <a:off x="3032551" y="2297151"/>
+                      <a:ext cx="90922" cy="153888"/>
+                    </a:xfrm>
+                    <a:prstGeom prst="rect">
+                      <a:avLst/>
+                    </a:prstGeom>
+                    <a:blipFill>
+                      <a:blip r:embed="rId5"/>
+                      <a:stretch>
+                        <a:fillRect l="-20000" r="-20000"/>
+                      </a:stretch>
+                    </a:blipFill>
+                  </p:spPr>
+                  <p:txBody>
+                    <a:bodyPr/>
+                    <a:lstStyle/>
+                    <a:p>
+                      <a:r>
+                        <a:rPr lang="zh-CN" altLang="en-US">
+                          <a:noFill/>
+                        </a:rPr>
+                        <a:t> </a:t>
+                      </a:r>
+                    </a:p>
+                  </p:txBody>
+                </p:sp>
+              </mc:Fallback>
+            </mc:AlternateContent>
+          </p:grpSp>
+        </p:grpSp>
+        <p:grpSp>
+          <p:nvGrpSpPr>
+            <p:cNvPr id="135" name="组合 134">
+              <a:extLst>
+                <a:ext uri="{FF2B5EF4-FFF2-40B4-BE49-F238E27FC236}">
+                  <a16:creationId xmlns:a16="http://schemas.microsoft.com/office/drawing/2014/main" id="{2A890E75-7C44-CBE7-783B-4880884A33EC}"/>
+                </a:ext>
+              </a:extLst>
+            </p:cNvPr>
+            <p:cNvGrpSpPr/>
+            <p:nvPr/>
+          </p:nvGrpSpPr>
+          <p:grpSpPr>
+            <a:xfrm>
+              <a:off x="820135" y="3283206"/>
+              <a:ext cx="8650364" cy="1073956"/>
+              <a:chOff x="752401" y="4142245"/>
+              <a:chExt cx="8650364" cy="1073956"/>
+            </a:xfrm>
+          </p:grpSpPr>
+          <p:grpSp>
+            <p:nvGrpSpPr>
+              <p:cNvPr id="136" name="组合 135">
+                <a:extLst>
+                  <a:ext uri="{FF2B5EF4-FFF2-40B4-BE49-F238E27FC236}">
+                    <a16:creationId xmlns:a16="http://schemas.microsoft.com/office/drawing/2014/main" id="{DB07838A-CCC2-693F-0C7F-0A2429EBC6E5}"/>
+                  </a:ext>
+                </a:extLst>
+              </p:cNvPr>
+              <p:cNvGrpSpPr/>
+              <p:nvPr/>
+            </p:nvGrpSpPr>
+            <p:grpSpPr>
+              <a:xfrm>
+                <a:off x="752401" y="4162313"/>
+                <a:ext cx="1800000" cy="1053888"/>
+                <a:chOff x="1315844" y="1397151"/>
+                <a:chExt cx="1800000" cy="1053888"/>
+              </a:xfrm>
+            </p:grpSpPr>
+            <p:sp>
+              <p:nvSpPr>
+                <p:cNvPr id="151" name="矩形 150">
+                  <a:extLst>
+                    <a:ext uri="{FF2B5EF4-FFF2-40B4-BE49-F238E27FC236}">
+                      <a16:creationId xmlns:a16="http://schemas.microsoft.com/office/drawing/2014/main" id="{12B1F213-8A24-915F-C16B-7E6CBC4CED7A}"/>
+                    </a:ext>
+                  </a:extLst>
+                </p:cNvPr>
+                <p:cNvSpPr/>
+                <p:nvPr/>
+              </p:nvSpPr>
+              <p:spPr>
+                <a:xfrm>
+                  <a:off x="2215844" y="1577152"/>
+                  <a:ext cx="720000" cy="720000"/>
+                </a:xfrm>
+                <a:prstGeom prst="rect">
+                  <a:avLst/>
+                </a:prstGeom>
+                <a:noFill/>
+                <a:ln>
+                  <a:solidFill>
+                    <a:srgbClr val="00B0F0"/>
+                  </a:solidFill>
+                </a:ln>
+              </p:spPr>
+              <p:style>
+                <a:lnRef idx="2">
+                  <a:schemeClr val="accent1">
+                    <a:shade val="15000"/>
+                  </a:schemeClr>
+                </a:lnRef>
+                <a:fillRef idx="1">
+                  <a:schemeClr val="accent1"/>
+                </a:fillRef>
+                <a:effectRef idx="0">
+                  <a:schemeClr val="accent1"/>
+                </a:effectRef>
+                <a:fontRef idx="minor">
+                  <a:schemeClr val="lt1"/>
+                </a:fontRef>
+              </p:style>
+              <p:txBody>
+                <a:bodyPr rtlCol="0" anchor="ctr"/>
+                <a:lstStyle/>
+                <a:p>
+                  <a:pPr algn="ctr"/>
+                  <a:endParaRPr lang="zh-CN" altLang="en-US" dirty="0"/>
+                </a:p>
+              </p:txBody>
+            </p:sp>
+            <p:cxnSp>
+              <p:nvCxnSpPr>
+                <p:cNvPr id="152" name="直接箭头连接符 151">
+                  <a:extLst>
+                    <a:ext uri="{FF2B5EF4-FFF2-40B4-BE49-F238E27FC236}">
+                      <a16:creationId xmlns:a16="http://schemas.microsoft.com/office/drawing/2014/main" id="{7F744E57-C09A-E4AE-5E38-69D113012ED2}"/>
+                    </a:ext>
+                  </a:extLst>
+                </p:cNvPr>
+                <p:cNvCxnSpPr/>
+                <p:nvPr/>
+              </p:nvCxnSpPr>
+              <p:spPr>
+                <a:xfrm>
+                  <a:off x="1315844" y="2297151"/>
+                  <a:ext cx="1800000" cy="0"/>
+                </a:xfrm>
+                <a:prstGeom prst="straightConnector1">
+                  <a:avLst/>
+                </a:prstGeom>
+                <a:ln w="12700">
+                  <a:tailEnd type="stealth"/>
+                </a:ln>
+              </p:spPr>
+              <p:style>
+                <a:lnRef idx="1">
+                  <a:schemeClr val="dk1"/>
+                </a:lnRef>
+                <a:fillRef idx="0">
+                  <a:schemeClr val="dk1"/>
+                </a:fillRef>
+                <a:effectRef idx="0">
+                  <a:schemeClr val="dk1"/>
+                </a:effectRef>
+                <a:fontRef idx="minor">
+                  <a:schemeClr val="tx1"/>
+                </a:fontRef>
+              </p:style>
+            </p:cxnSp>
+            <p:cxnSp>
+              <p:nvCxnSpPr>
+                <p:cNvPr id="153" name="直接箭头连接符 152">
+                  <a:extLst>
+                    <a:ext uri="{FF2B5EF4-FFF2-40B4-BE49-F238E27FC236}">
+                      <a16:creationId xmlns:a16="http://schemas.microsoft.com/office/drawing/2014/main" id="{9697ADAF-E653-57FB-789F-BDD60C1AE2C3}"/>
+                    </a:ext>
+                  </a:extLst>
+                </p:cNvPr>
+                <p:cNvCxnSpPr>
+                  <a:cxnSpLocks/>
+                </p:cNvCxnSpPr>
+                <p:nvPr/>
+              </p:nvCxnSpPr>
+              <p:spPr>
+                <a:xfrm rot="16200000">
+                  <a:off x="1765844" y="1847151"/>
+                  <a:ext cx="900000" cy="0"/>
+                </a:xfrm>
+                <a:prstGeom prst="straightConnector1">
+                  <a:avLst/>
+                </a:prstGeom>
+                <a:ln w="12700">
+                  <a:tailEnd type="stealth"/>
+                </a:ln>
+              </p:spPr>
+              <p:style>
+                <a:lnRef idx="1">
+                  <a:schemeClr val="dk1"/>
+                </a:lnRef>
+                <a:fillRef idx="0">
+                  <a:schemeClr val="dk1"/>
+                </a:fillRef>
+                <a:effectRef idx="0">
+                  <a:schemeClr val="dk1"/>
+                </a:effectRef>
+                <a:fontRef idx="minor">
+                  <a:schemeClr val="tx1"/>
+                </a:fontRef>
+              </p:style>
+            </p:cxnSp>
+            <mc:AlternateContent xmlns:mc="http://schemas.openxmlformats.org/markup-compatibility/2006" xmlns:a14="http://schemas.microsoft.com/office/drawing/2010/main">
+              <mc:Choice Requires="a14">
+                <p:sp>
+                  <p:nvSpPr>
+                    <p:cNvPr id="154" name="文本框 153">
+                      <a:extLst>
+                        <a:ext uri="{FF2B5EF4-FFF2-40B4-BE49-F238E27FC236}">
+                          <a16:creationId xmlns:a16="http://schemas.microsoft.com/office/drawing/2014/main" id="{7B8DE23A-B83E-9EF9-6395-88D33198C37F}"/>
+                        </a:ext>
+                      </a:extLst>
+                    </p:cNvPr>
+                    <p:cNvSpPr txBox="1"/>
+                    <p:nvPr/>
+                  </p:nvSpPr>
+                  <p:spPr>
+                    <a:xfrm>
+                      <a:off x="1935479" y="1397151"/>
+                      <a:ext cx="264047" cy="153888"/>
+                    </a:xfrm>
+                    <a:prstGeom prst="rect">
+                      <a:avLst/>
+                    </a:prstGeom>
+                    <a:noFill/>
+                  </p:spPr>
+                  <p:txBody>
+                    <a:bodyPr wrap="none" lIns="0" tIns="0" rIns="0" bIns="0" rtlCol="0">
+                      <a:spAutoFit/>
+                    </a:bodyPr>
+                    <a:lstStyle/>
+                    <a:p>
+                      <a:pPr/>
+                      <a14:m>
+                        <m:oMathPara xmlns:m="http://schemas.openxmlformats.org/officeDocument/2006/math">
+                          <m:oMathParaPr>
+                            <m:jc m:val="centerGroup"/>
+                          </m:oMathParaPr>
+                          <m:oMath xmlns:m="http://schemas.openxmlformats.org/officeDocument/2006/math">
+                            <m:r>
+                              <a:rPr lang="en-US" altLang="zh-CN" sz="1000" b="0" i="1" smtClean="0">
+                                <a:latin typeface="Cambria Math" panose="02040503050406030204" pitchFamily="18" charset="0"/>
+                              </a:rPr>
+                              <m:t>𝑓</m:t>
+                            </m:r>
+                            <m:d>
+                              <m:dPr>
+                                <m:ctrlPr>
+                                  <a:rPr lang="en-US" altLang="zh-CN" sz="1000" b="0" i="1" smtClean="0">
+                                    <a:latin typeface="Cambria Math" panose="02040503050406030204" pitchFamily="18" charset="0"/>
+                                  </a:rPr>
+                                </m:ctrlPr>
+                              </m:dPr>
+                              <m:e>
+                                <m:r>
+                                  <a:rPr lang="en-US" altLang="zh-CN" sz="1000" b="0" i="1" smtClean="0">
+                                    <a:latin typeface="Cambria Math" panose="02040503050406030204" pitchFamily="18" charset="0"/>
+                                  </a:rPr>
+                                  <m:t>𝑡</m:t>
+                                </m:r>
+                              </m:e>
+                            </m:d>
+                          </m:oMath>
+                        </m:oMathPara>
+                      </a14:m>
+                      <a:endParaRPr lang="en-US" altLang="zh-CN" sz="1000" b="0" dirty="0"/>
+                    </a:p>
+                  </p:txBody>
+                </p:sp>
+              </mc:Choice>
+              <mc:Fallback xmlns="">
+                <p:sp>
+                  <p:nvSpPr>
+                    <p:cNvPr id="11" name="文本框 10">
+                      <a:extLst>
+                        <a:ext uri="{FF2B5EF4-FFF2-40B4-BE49-F238E27FC236}">
+                          <a16:creationId xmlns:a16="http://schemas.microsoft.com/office/drawing/2014/main" id="{804DF833-F1EE-0FEA-18B1-8D92038C5957}"/>
+                        </a:ext>
+                      </a:extLst>
+                    </p:cNvPr>
+                    <p:cNvSpPr txBox="1">
+                      <a:spLocks noRot="1" noChangeAspect="1" noMove="1" noResize="1" noEditPoints="1" noAdjustHandles="1" noChangeArrowheads="1" noChangeShapeType="1" noTextEdit="1"/>
+                    </p:cNvSpPr>
+                    <p:nvPr/>
+                  </p:nvSpPr>
+                  <p:spPr>
+                    <a:xfrm>
+                      <a:off x="1935479" y="1397151"/>
+                      <a:ext cx="264047" cy="153888"/>
+                    </a:xfrm>
+                    <a:prstGeom prst="rect">
+                      <a:avLst/>
+                    </a:prstGeom>
+                    <a:blipFill>
+                      <a:blip r:embed="rId2"/>
+                      <a:stretch>
+                        <a:fillRect l="-16279" b="-36000"/>
+                      </a:stretch>
+                    </a:blipFill>
+                  </p:spPr>
+                  <p:txBody>
+                    <a:bodyPr/>
+                    <a:lstStyle/>
+                    <a:p>
+                      <a:r>
+                        <a:rPr lang="zh-CN" altLang="en-US">
+                          <a:noFill/>
+                        </a:rPr>
+                        <a:t> </a:t>
+                      </a:r>
+                    </a:p>
+                  </p:txBody>
+                </p:sp>
+              </mc:Fallback>
+            </mc:AlternateContent>
+            <mc:AlternateContent xmlns:mc="http://schemas.openxmlformats.org/markup-compatibility/2006" xmlns:a14="http://schemas.microsoft.com/office/drawing/2010/main">
+              <mc:Choice Requires="a14">
+                <p:sp>
+                  <p:nvSpPr>
+                    <p:cNvPr id="155" name="文本框 154">
+                      <a:extLst>
+                        <a:ext uri="{FF2B5EF4-FFF2-40B4-BE49-F238E27FC236}">
+                          <a16:creationId xmlns:a16="http://schemas.microsoft.com/office/drawing/2014/main" id="{BA42576D-2FDD-2FDA-4750-7D6317622F00}"/>
+                        </a:ext>
+                      </a:extLst>
+                    </p:cNvPr>
+                    <p:cNvSpPr txBox="1"/>
+                    <p:nvPr/>
+                  </p:nvSpPr>
+                  <p:spPr>
+                    <a:xfrm>
+                      <a:off x="3032551" y="2297151"/>
+                      <a:ext cx="83293" cy="153888"/>
+                    </a:xfrm>
+                    <a:prstGeom prst="rect">
+                      <a:avLst/>
+                    </a:prstGeom>
+                    <a:noFill/>
+                  </p:spPr>
+                  <p:txBody>
+                    <a:bodyPr wrap="none" lIns="0" tIns="0" rIns="0" bIns="0" rtlCol="0">
+                      <a:spAutoFit/>
+                    </a:bodyPr>
+                    <a:lstStyle/>
+                    <a:p>
+                      <a:pPr/>
+                      <a14:m>
+                        <m:oMathPara xmlns:m="http://schemas.openxmlformats.org/officeDocument/2006/math">
+                          <m:oMathParaPr>
+                            <m:jc m:val="centerGroup"/>
+                          </m:oMathParaPr>
+                          <m:oMath xmlns:m="http://schemas.openxmlformats.org/officeDocument/2006/math">
+                            <m:r>
+                              <a:rPr lang="en-US" altLang="zh-CN" sz="1000" b="0" i="1" smtClean="0">
+                                <a:latin typeface="Cambria Math" panose="02040503050406030204" pitchFamily="18" charset="0"/>
+                              </a:rPr>
+                              <m:t>𝑡</m:t>
+                            </m:r>
+                          </m:oMath>
+                        </m:oMathPara>
+                      </a14:m>
+                      <a:endParaRPr lang="en-US" altLang="zh-CN" sz="1000" b="0" dirty="0"/>
+                    </a:p>
+                  </p:txBody>
+                </p:sp>
+              </mc:Choice>
+              <mc:Fallback xmlns="">
+                <p:sp>
+                  <p:nvSpPr>
+                    <p:cNvPr id="15" name="文本框 14">
+                      <a:extLst>
+                        <a:ext uri="{FF2B5EF4-FFF2-40B4-BE49-F238E27FC236}">
+                          <a16:creationId xmlns:a16="http://schemas.microsoft.com/office/drawing/2014/main" id="{6FA58B64-DC17-4921-1A17-22A36AD74177}"/>
+                        </a:ext>
+                      </a:extLst>
+                    </p:cNvPr>
+                    <p:cNvSpPr txBox="1">
+                      <a:spLocks noRot="1" noChangeAspect="1" noMove="1" noResize="1" noEditPoints="1" noAdjustHandles="1" noChangeArrowheads="1" noChangeShapeType="1" noTextEdit="1"/>
+                    </p:cNvSpPr>
+                    <p:nvPr/>
+                  </p:nvSpPr>
+                  <p:spPr>
+                    <a:xfrm>
+                      <a:off x="3032551" y="2297151"/>
+                      <a:ext cx="83293" cy="153888"/>
+                    </a:xfrm>
+                    <a:prstGeom prst="rect">
+                      <a:avLst/>
+                    </a:prstGeom>
+                    <a:blipFill>
+                      <a:blip r:embed="rId3"/>
+                      <a:stretch>
+                        <a:fillRect l="-38462" r="-30769" b="-8000"/>
+                      </a:stretch>
+                    </a:blipFill>
+                  </p:spPr>
+                  <p:txBody>
+                    <a:bodyPr/>
+                    <a:lstStyle/>
+                    <a:p>
+                      <a:r>
+                        <a:rPr lang="zh-CN" altLang="en-US">
+                          <a:noFill/>
+                        </a:rPr>
+                        <a:t> </a:t>
+                      </a:r>
+                    </a:p>
+                  </p:txBody>
+                </p:sp>
+              </mc:Fallback>
+            </mc:AlternateContent>
+          </p:grpSp>
+          <p:grpSp>
+            <p:nvGrpSpPr>
+              <p:cNvPr id="137" name="组合 136">
+                <a:extLst>
+                  <a:ext uri="{FF2B5EF4-FFF2-40B4-BE49-F238E27FC236}">
+                    <a16:creationId xmlns:a16="http://schemas.microsoft.com/office/drawing/2014/main" id="{EDF10739-9879-D0DF-0E30-F40894DE656D}"/>
+                  </a:ext>
+                </a:extLst>
+              </p:cNvPr>
+              <p:cNvGrpSpPr/>
+              <p:nvPr/>
+            </p:nvGrpSpPr>
+            <p:grpSpPr>
+              <a:xfrm>
+                <a:off x="7595136" y="4142245"/>
+                <a:ext cx="1807629" cy="1073956"/>
+                <a:chOff x="5561993" y="1835895"/>
+                <a:chExt cx="1807629" cy="1073956"/>
+              </a:xfrm>
+            </p:grpSpPr>
+            <p:sp>
+              <p:nvSpPr>
+                <p:cNvPr id="144" name="矩形 143">
+                  <a:extLst>
+                    <a:ext uri="{FF2B5EF4-FFF2-40B4-BE49-F238E27FC236}">
+                      <a16:creationId xmlns:a16="http://schemas.microsoft.com/office/drawing/2014/main" id="{642707F5-3CC9-F3E2-6FE0-14084D071814}"/>
+                    </a:ext>
+                  </a:extLst>
+                </p:cNvPr>
+                <p:cNvSpPr/>
+                <p:nvPr/>
+              </p:nvSpPr>
+              <p:spPr>
+                <a:xfrm>
+                  <a:off x="5949593" y="2395961"/>
+                  <a:ext cx="720000" cy="360000"/>
+                </a:xfrm>
+                <a:prstGeom prst="rect">
+                  <a:avLst/>
+                </a:prstGeom>
+                <a:noFill/>
+                <a:ln>
+                  <a:solidFill>
+                    <a:srgbClr val="92D050"/>
+                  </a:solidFill>
+                </a:ln>
+              </p:spPr>
+              <p:style>
+                <a:lnRef idx="2">
+                  <a:schemeClr val="accent1">
+                    <a:shade val="15000"/>
+                  </a:schemeClr>
+                </a:lnRef>
+                <a:fillRef idx="1">
+                  <a:schemeClr val="accent1"/>
+                </a:fillRef>
+                <a:effectRef idx="0">
+                  <a:schemeClr val="accent1"/>
+                </a:effectRef>
+                <a:fontRef idx="minor">
+                  <a:schemeClr val="lt1"/>
+                </a:fontRef>
+              </p:style>
+              <p:txBody>
+                <a:bodyPr rtlCol="0" anchor="ctr"/>
+                <a:lstStyle/>
+                <a:p>
+                  <a:pPr algn="ctr"/>
+                  <a:endParaRPr lang="zh-CN" altLang="en-US" dirty="0"/>
+                </a:p>
+              </p:txBody>
+            </p:sp>
+            <p:sp>
+              <p:nvSpPr>
+                <p:cNvPr id="145" name="矩形 144">
+                  <a:extLst>
+                    <a:ext uri="{FF2B5EF4-FFF2-40B4-BE49-F238E27FC236}">
+                      <a16:creationId xmlns:a16="http://schemas.microsoft.com/office/drawing/2014/main" id="{E26E6107-ED92-0675-C34D-1E7D6FC4121A}"/>
+                    </a:ext>
+                  </a:extLst>
+                </p:cNvPr>
+                <p:cNvSpPr/>
+                <p:nvPr/>
+              </p:nvSpPr>
+              <p:spPr>
+                <a:xfrm>
+                  <a:off x="6462020" y="2035251"/>
+                  <a:ext cx="720000" cy="720000"/>
+                </a:xfrm>
+                <a:prstGeom prst="rect">
+                  <a:avLst/>
+                </a:prstGeom>
+                <a:noFill/>
+                <a:ln>
+                  <a:solidFill>
+                    <a:srgbClr val="00B0F0"/>
+                  </a:solidFill>
+                </a:ln>
+              </p:spPr>
+              <p:style>
+                <a:lnRef idx="2">
+                  <a:schemeClr val="accent1">
+                    <a:shade val="15000"/>
+                  </a:schemeClr>
+                </a:lnRef>
+                <a:fillRef idx="1">
+                  <a:schemeClr val="accent1"/>
+                </a:fillRef>
+                <a:effectRef idx="0">
+                  <a:schemeClr val="accent1"/>
+                </a:effectRef>
+                <a:fontRef idx="minor">
+                  <a:schemeClr val="lt1"/>
+                </a:fontRef>
+              </p:style>
+              <p:txBody>
+                <a:bodyPr rtlCol="0" anchor="ctr"/>
+                <a:lstStyle/>
+                <a:p>
+                  <a:pPr algn="ctr"/>
+                  <a:endParaRPr lang="zh-CN" altLang="en-US" dirty="0"/>
+                </a:p>
+              </p:txBody>
+            </p:sp>
+            <p:cxnSp>
+              <p:nvCxnSpPr>
+                <p:cNvPr id="146" name="直接箭头连接符 145">
+                  <a:extLst>
+                    <a:ext uri="{FF2B5EF4-FFF2-40B4-BE49-F238E27FC236}">
+                      <a16:creationId xmlns:a16="http://schemas.microsoft.com/office/drawing/2014/main" id="{81C52195-E217-9562-CD7E-E23F15AFB47A}"/>
+                    </a:ext>
+                  </a:extLst>
+                </p:cNvPr>
+                <p:cNvCxnSpPr/>
+                <p:nvPr/>
+              </p:nvCxnSpPr>
+              <p:spPr>
+                <a:xfrm>
+                  <a:off x="5561993" y="2755963"/>
+                  <a:ext cx="1800000" cy="0"/>
+                </a:xfrm>
+                <a:prstGeom prst="straightConnector1">
+                  <a:avLst/>
+                </a:prstGeom>
+                <a:ln w="12700">
+                  <a:tailEnd type="stealth"/>
+                </a:ln>
+              </p:spPr>
+              <p:style>
+                <a:lnRef idx="1">
+                  <a:schemeClr val="dk1"/>
+                </a:lnRef>
+                <a:fillRef idx="0">
+                  <a:schemeClr val="dk1"/>
+                </a:fillRef>
+                <a:effectRef idx="0">
+                  <a:schemeClr val="dk1"/>
+                </a:effectRef>
+                <a:fontRef idx="minor">
+                  <a:schemeClr val="tx1"/>
+                </a:fontRef>
+              </p:style>
+            </p:cxnSp>
+            <p:cxnSp>
+              <p:nvCxnSpPr>
+                <p:cNvPr id="147" name="直接箭头连接符 146">
+                  <a:extLst>
+                    <a:ext uri="{FF2B5EF4-FFF2-40B4-BE49-F238E27FC236}">
+                      <a16:creationId xmlns:a16="http://schemas.microsoft.com/office/drawing/2014/main" id="{16784284-52F5-21E6-20E3-66EAF2EFC745}"/>
+                    </a:ext>
+                  </a:extLst>
+                </p:cNvPr>
+                <p:cNvCxnSpPr>
+                  <a:cxnSpLocks/>
+                </p:cNvCxnSpPr>
+                <p:nvPr/>
+              </p:nvCxnSpPr>
+              <p:spPr>
+                <a:xfrm rot="16200000">
+                  <a:off x="6011993" y="2305963"/>
+                  <a:ext cx="900000" cy="0"/>
+                </a:xfrm>
+                <a:prstGeom prst="straightConnector1">
+                  <a:avLst/>
+                </a:prstGeom>
+                <a:ln w="12700">
+                  <a:tailEnd type="stealth"/>
+                </a:ln>
+              </p:spPr>
+              <p:style>
+                <a:lnRef idx="1">
+                  <a:schemeClr val="dk1"/>
+                </a:lnRef>
+                <a:fillRef idx="0">
+                  <a:schemeClr val="dk1"/>
+                </a:fillRef>
+                <a:effectRef idx="0">
+                  <a:schemeClr val="dk1"/>
+                </a:effectRef>
+                <a:fontRef idx="minor">
+                  <a:schemeClr val="tx1"/>
+                </a:fontRef>
+              </p:style>
+            </p:cxnSp>
+            <mc:AlternateContent xmlns:mc="http://schemas.openxmlformats.org/markup-compatibility/2006" xmlns:a14="http://schemas.microsoft.com/office/drawing/2010/main">
+              <mc:Choice Requires="a14">
+                <p:sp>
+                  <p:nvSpPr>
+                    <p:cNvPr id="148" name="文本框 147">
+                      <a:extLst>
+                        <a:ext uri="{FF2B5EF4-FFF2-40B4-BE49-F238E27FC236}">
+                          <a16:creationId xmlns:a16="http://schemas.microsoft.com/office/drawing/2014/main" id="{C577455E-AD42-CBC1-8C92-2875827E382A}"/>
+                        </a:ext>
+                      </a:extLst>
+                    </p:cNvPr>
+                    <p:cNvSpPr txBox="1"/>
+                    <p:nvPr/>
+                  </p:nvSpPr>
+                  <p:spPr>
+                    <a:xfrm>
+                      <a:off x="5665324" y="2197038"/>
+                      <a:ext cx="540469" cy="153888"/>
+                    </a:xfrm>
+                    <a:prstGeom prst="rect">
+                      <a:avLst/>
+                    </a:prstGeom>
+                    <a:noFill/>
+                  </p:spPr>
+                  <p:txBody>
+                    <a:bodyPr wrap="none" lIns="0" tIns="0" rIns="0" bIns="0" rtlCol="0">
+                      <a:spAutoFit/>
+                    </a:bodyPr>
+                    <a:lstStyle/>
+                    <a:p>
+                      <a:pPr/>
+                      <a14:m>
+                        <m:oMathPara xmlns:m="http://schemas.openxmlformats.org/officeDocument/2006/math">
+                          <m:oMathParaPr>
+                            <m:jc m:val="centerGroup"/>
+                          </m:oMathParaPr>
+                          <m:oMath xmlns:m="http://schemas.openxmlformats.org/officeDocument/2006/math">
+                            <m:r>
+                              <a:rPr lang="en-US" altLang="zh-CN" sz="1000" b="0" i="1" smtClean="0">
+                                <a:latin typeface="Cambria Math" panose="02040503050406030204" pitchFamily="18" charset="0"/>
+                              </a:rPr>
+                              <m:t>𝑔</m:t>
+                            </m:r>
+                            <m:d>
+                              <m:dPr>
+                                <m:ctrlPr>
+                                  <a:rPr lang="en-US" altLang="zh-CN" sz="1000" b="0" i="1" smtClean="0">
+                                    <a:latin typeface="Cambria Math" panose="02040503050406030204" pitchFamily="18" charset="0"/>
+                                  </a:rPr>
+                                </m:ctrlPr>
+                              </m:dPr>
+                              <m:e>
+                                <m:sSub>
+                                  <m:sSubPr>
+                                    <m:ctrlPr>
+                                      <a:rPr lang="en-US" altLang="zh-CN" sz="1000" b="0" i="1" smtClean="0">
+                                        <a:latin typeface="Cambria Math" panose="02040503050406030204" pitchFamily="18" charset="0"/>
+                                      </a:rPr>
+                                    </m:ctrlPr>
+                                  </m:sSubPr>
+                                  <m:e>
+                                    <m:r>
+                                      <a:rPr lang="en-US" altLang="zh-CN" sz="1000" b="0" i="1" smtClean="0">
+                                        <a:latin typeface="Cambria Math" panose="02040503050406030204" pitchFamily="18" charset="0"/>
+                                      </a:rPr>
+                                      <m:t>𝑡</m:t>
+                                    </m:r>
+                                  </m:e>
+                                  <m:sub>
+                                    <m:r>
+                                      <a:rPr lang="en-US" altLang="zh-CN" sz="1000" b="0" i="1" smtClean="0">
+                                        <a:latin typeface="Cambria Math" panose="02040503050406030204" pitchFamily="18" charset="0"/>
+                                      </a:rPr>
+                                      <m:t>0</m:t>
+                                    </m:r>
+                                  </m:sub>
+                                </m:sSub>
+                                <m:r>
+                                  <a:rPr lang="en-US" altLang="zh-CN" sz="1000" b="0" i="1" smtClean="0">
+                                    <a:latin typeface="Cambria Math" panose="02040503050406030204" pitchFamily="18" charset="0"/>
+                                  </a:rPr>
+                                  <m:t>−</m:t>
+                                </m:r>
+                                <m:r>
+                                  <a:rPr lang="en-US" altLang="zh-CN" sz="1000" b="0" i="1" smtClean="0">
+                                    <a:latin typeface="Cambria Math" panose="02040503050406030204" pitchFamily="18" charset="0"/>
+                                  </a:rPr>
+                                  <m:t>𝜏</m:t>
+                                </m:r>
+                              </m:e>
+                            </m:d>
+                          </m:oMath>
+                        </m:oMathPara>
+                      </a14:m>
+                      <a:endParaRPr lang="en-US" altLang="zh-CN" sz="1000" b="0" dirty="0"/>
+                    </a:p>
+                  </p:txBody>
+                </p:sp>
+              </mc:Choice>
+              <mc:Fallback xmlns="">
+                <p:sp>
+                  <p:nvSpPr>
+                    <p:cNvPr id="80" name="文本框 79">
+                      <a:extLst>
+                        <a:ext uri="{FF2B5EF4-FFF2-40B4-BE49-F238E27FC236}">
+                          <a16:creationId xmlns:a16="http://schemas.microsoft.com/office/drawing/2014/main" id="{2D07EC2F-4BF9-EBCC-392E-D50DEC74E9C3}"/>
+                        </a:ext>
+                      </a:extLst>
+                    </p:cNvPr>
+                    <p:cNvSpPr txBox="1">
+                      <a:spLocks noRot="1" noChangeAspect="1" noMove="1" noResize="1" noEditPoints="1" noAdjustHandles="1" noChangeArrowheads="1" noChangeShapeType="1" noTextEdit="1"/>
+                    </p:cNvSpPr>
+                    <p:nvPr/>
+                  </p:nvSpPr>
+                  <p:spPr>
+                    <a:xfrm>
+                      <a:off x="5665324" y="2197038"/>
+                      <a:ext cx="540469" cy="153888"/>
+                    </a:xfrm>
+                    <a:prstGeom prst="rect">
+                      <a:avLst/>
+                    </a:prstGeom>
+                    <a:blipFill>
+                      <a:blip r:embed="rId12"/>
+                      <a:stretch>
+                        <a:fillRect l="-4494" b="-24000"/>
+                      </a:stretch>
+                    </a:blipFill>
+                  </p:spPr>
+                  <p:txBody>
+                    <a:bodyPr/>
+                    <a:lstStyle/>
+                    <a:p>
+                      <a:r>
+                        <a:rPr lang="zh-CN" altLang="en-US">
+                          <a:noFill/>
+                        </a:rPr>
+                        <a:t> </a:t>
+                      </a:r>
+                    </a:p>
+                  </p:txBody>
+                </p:sp>
+              </mc:Fallback>
+            </mc:AlternateContent>
+            <mc:AlternateContent xmlns:mc="http://schemas.openxmlformats.org/markup-compatibility/2006" xmlns:a14="http://schemas.microsoft.com/office/drawing/2010/main">
+              <mc:Choice Requires="a14">
+                <p:sp>
+                  <p:nvSpPr>
+                    <p:cNvPr id="149" name="文本框 148">
+                      <a:extLst>
+                        <a:ext uri="{FF2B5EF4-FFF2-40B4-BE49-F238E27FC236}">
+                          <a16:creationId xmlns:a16="http://schemas.microsoft.com/office/drawing/2014/main" id="{96B70BD8-F910-17FC-EB5C-8C83299B6C78}"/>
+                        </a:ext>
+                      </a:extLst>
+                    </p:cNvPr>
+                    <p:cNvSpPr txBox="1"/>
+                    <p:nvPr/>
+                  </p:nvSpPr>
+                  <p:spPr>
+                    <a:xfrm>
+                      <a:off x="7278700" y="2755963"/>
+                      <a:ext cx="90922" cy="153888"/>
+                    </a:xfrm>
+                    <a:prstGeom prst="rect">
+                      <a:avLst/>
+                    </a:prstGeom>
+                    <a:noFill/>
+                  </p:spPr>
+                  <p:txBody>
+                    <a:bodyPr wrap="none" lIns="0" tIns="0" rIns="0" bIns="0" rtlCol="0">
+                      <a:spAutoFit/>
+                    </a:bodyPr>
+                    <a:lstStyle/>
+                    <a:p>
+                      <a:pPr/>
+                      <a14:m>
+                        <m:oMathPara xmlns:m="http://schemas.openxmlformats.org/officeDocument/2006/math">
+                          <m:oMathParaPr>
+                            <m:jc m:val="centerGroup"/>
+                          </m:oMathParaPr>
+                          <m:oMath xmlns:m="http://schemas.openxmlformats.org/officeDocument/2006/math">
+                            <m:r>
+                              <a:rPr lang="en-US" altLang="zh-CN" sz="1000" b="0" i="1" smtClean="0">
+                                <a:latin typeface="Cambria Math" panose="02040503050406030204" pitchFamily="18" charset="0"/>
+                              </a:rPr>
+                              <m:t>𝜏</m:t>
+                            </m:r>
+                          </m:oMath>
+                        </m:oMathPara>
+                      </a14:m>
+                      <a:endParaRPr lang="en-US" altLang="zh-CN" sz="1000" b="0" dirty="0"/>
+                    </a:p>
+                  </p:txBody>
+                </p:sp>
+              </mc:Choice>
+              <mc:Fallback xmlns="">
+                <p:sp>
+                  <p:nvSpPr>
+                    <p:cNvPr id="81" name="文本框 80">
+                      <a:extLst>
+                        <a:ext uri="{FF2B5EF4-FFF2-40B4-BE49-F238E27FC236}">
+                          <a16:creationId xmlns:a16="http://schemas.microsoft.com/office/drawing/2014/main" id="{B38DF5ED-AC72-207E-EA98-D23A60925908}"/>
+                        </a:ext>
+                      </a:extLst>
+                    </p:cNvPr>
+                    <p:cNvSpPr txBox="1">
+                      <a:spLocks noRot="1" noChangeAspect="1" noMove="1" noResize="1" noEditPoints="1" noAdjustHandles="1" noChangeArrowheads="1" noChangeShapeType="1" noTextEdit="1"/>
+                    </p:cNvSpPr>
+                    <p:nvPr/>
+                  </p:nvSpPr>
+                  <p:spPr>
+                    <a:xfrm>
+                      <a:off x="7278700" y="2755963"/>
+                      <a:ext cx="90922" cy="153888"/>
+                    </a:xfrm>
+                    <a:prstGeom prst="rect">
+                      <a:avLst/>
+                    </a:prstGeom>
+                    <a:blipFill>
+                      <a:blip r:embed="rId11"/>
+                      <a:stretch>
+                        <a:fillRect l="-20000" r="-20000" b="-4000"/>
+                      </a:stretch>
+                    </a:blipFill>
+                  </p:spPr>
+                  <p:txBody>
+                    <a:bodyPr/>
+                    <a:lstStyle/>
+                    <a:p>
+                      <a:r>
+                        <a:rPr lang="zh-CN" altLang="en-US">
+                          <a:noFill/>
+                        </a:rPr>
+                        <a:t> </a:t>
+                      </a:r>
+                    </a:p>
+                  </p:txBody>
+                </p:sp>
+              </mc:Fallback>
+            </mc:AlternateContent>
+            <mc:AlternateContent xmlns:mc="http://schemas.openxmlformats.org/markup-compatibility/2006">
+              <mc:Choice xmlns:a14="http://schemas.microsoft.com/office/drawing/2010/main" Requires="a14">
+                <p:sp>
+                  <p:nvSpPr>
+                    <p:cNvPr id="150" name="文本框 149">
+                      <a:extLst>
+                        <a:ext uri="{FF2B5EF4-FFF2-40B4-BE49-F238E27FC236}">
+                          <a16:creationId xmlns:a16="http://schemas.microsoft.com/office/drawing/2014/main" id="{D91D66F2-FC9B-3978-1FB9-583B3B23F64B}"/>
+                        </a:ext>
+                      </a:extLst>
+                    </p:cNvPr>
+                    <p:cNvSpPr txBox="1"/>
+                    <p:nvPr/>
+                  </p:nvSpPr>
+                  <p:spPr>
+                    <a:xfrm>
+                      <a:off x="6924210" y="1835895"/>
+                      <a:ext cx="271676" cy="153888"/>
+                    </a:xfrm>
+                    <a:prstGeom prst="rect">
+                      <a:avLst/>
+                    </a:prstGeom>
+                    <a:noFill/>
+                  </p:spPr>
+                  <p:txBody>
+                    <a:bodyPr wrap="none" lIns="0" tIns="0" rIns="0" bIns="0" rtlCol="0">
+                      <a:spAutoFit/>
+                    </a:bodyPr>
+                    <a:lstStyle/>
+                    <a:p>
+                      <a:pPr/>
+                      <a14:m>
+                        <m:oMathPara xmlns:m="http://schemas.openxmlformats.org/officeDocument/2006/math">
+                          <m:oMathParaPr>
+                            <m:jc m:val="centerGroup"/>
+                          </m:oMathParaPr>
+                          <m:oMath xmlns:m="http://schemas.openxmlformats.org/officeDocument/2006/math">
+                            <m:r>
+                              <a:rPr lang="en-US" altLang="zh-CN" sz="1000" b="0" i="1" smtClean="0">
+                                <a:latin typeface="Cambria Math" panose="02040503050406030204" pitchFamily="18" charset="0"/>
+                              </a:rPr>
+                              <m:t>𝑓</m:t>
+                            </m:r>
+                            <m:d>
+                              <m:dPr>
+                                <m:ctrlPr>
+                                  <a:rPr lang="en-US" altLang="zh-CN" sz="1000" b="0" i="1" smtClean="0">
+                                    <a:latin typeface="Cambria Math" panose="02040503050406030204" pitchFamily="18" charset="0"/>
+                                  </a:rPr>
+                                </m:ctrlPr>
+                              </m:dPr>
+                              <m:e>
+                                <m:r>
+                                  <a:rPr lang="en-US" altLang="zh-CN" sz="1000" b="0" i="1" smtClean="0">
+                                    <a:latin typeface="Cambria Math" panose="02040503050406030204" pitchFamily="18" charset="0"/>
+                                  </a:rPr>
+                                  <m:t>𝜏</m:t>
+                                </m:r>
+                              </m:e>
+                            </m:d>
+                          </m:oMath>
+                        </m:oMathPara>
+                      </a14:m>
+                      <a:endParaRPr lang="en-US" altLang="zh-CN" sz="1000" b="0" dirty="0"/>
+                    </a:p>
+                  </p:txBody>
+                </p:sp>
+              </mc:Choice>
+              <mc:Fallback>
+                <p:sp>
+                  <p:nvSpPr>
+                    <p:cNvPr id="150" name="文本框 149">
+                      <a:extLst>
+                        <a:ext uri="{FF2B5EF4-FFF2-40B4-BE49-F238E27FC236}">
+                          <a16:creationId xmlns:a16="http://schemas.microsoft.com/office/drawing/2014/main" id="{D91D66F2-FC9B-3978-1FB9-583B3B23F64B}"/>
+                        </a:ext>
+                      </a:extLst>
+                    </p:cNvPr>
+                    <p:cNvSpPr txBox="1">
+                      <a:spLocks noRot="1" noChangeAspect="1" noMove="1" noResize="1" noEditPoints="1" noAdjustHandles="1" noChangeArrowheads="1" noChangeShapeType="1" noTextEdit="1"/>
+                    </p:cNvSpPr>
+                    <p:nvPr/>
+                  </p:nvSpPr>
+                  <p:spPr>
+                    <a:xfrm>
+                      <a:off x="6924210" y="1835895"/>
+                      <a:ext cx="271676" cy="153888"/>
+                    </a:xfrm>
+                    <a:prstGeom prst="rect">
+                      <a:avLst/>
+                    </a:prstGeom>
+                    <a:blipFill>
+                      <a:blip r:embed="rId13"/>
+                      <a:stretch>
+                        <a:fillRect l="-15556" t="-4000" b="-36000"/>
+                      </a:stretch>
+                    </a:blipFill>
+                  </p:spPr>
+                  <p:txBody>
+                    <a:bodyPr/>
+                    <a:lstStyle/>
+                    <a:p>
+                      <a:r>
+                        <a:rPr lang="zh-CN" altLang="en-US">
+                          <a:noFill/>
+                        </a:rPr>
+                        <a:t> </a:t>
+                      </a:r>
+                    </a:p>
+                  </p:txBody>
+                </p:sp>
+              </mc:Fallback>
+            </mc:AlternateContent>
+          </p:grpSp>
+          <p:grpSp>
+            <p:nvGrpSpPr>
+              <p:cNvPr id="138" name="组合 137">
+                <a:extLst>
+                  <a:ext uri="{FF2B5EF4-FFF2-40B4-BE49-F238E27FC236}">
+                    <a16:creationId xmlns:a16="http://schemas.microsoft.com/office/drawing/2014/main" id="{9811BCA1-567E-6F87-AAA6-845BC3361318}"/>
+                  </a:ext>
+                </a:extLst>
+              </p:cNvPr>
+              <p:cNvGrpSpPr/>
+              <p:nvPr/>
+            </p:nvGrpSpPr>
+            <p:grpSpPr>
+              <a:xfrm>
+                <a:off x="5311682" y="4162313"/>
+                <a:ext cx="1807629" cy="1053888"/>
+                <a:chOff x="1315844" y="1397151"/>
+                <a:chExt cx="1807629" cy="1053888"/>
+              </a:xfrm>
+            </p:grpSpPr>
+            <p:sp>
+              <p:nvSpPr>
+                <p:cNvPr id="139" name="矩形 138">
+                  <a:extLst>
+                    <a:ext uri="{FF2B5EF4-FFF2-40B4-BE49-F238E27FC236}">
+                      <a16:creationId xmlns:a16="http://schemas.microsoft.com/office/drawing/2014/main" id="{D8DEBCF1-58EB-D0FC-E3E8-E380639A9FCA}"/>
+                    </a:ext>
+                  </a:extLst>
+                </p:cNvPr>
+                <p:cNvSpPr/>
+                <p:nvPr/>
+              </p:nvSpPr>
+              <p:spPr>
+                <a:xfrm>
+                  <a:off x="2215844" y="1577152"/>
+                  <a:ext cx="720000" cy="720000"/>
+                </a:xfrm>
+                <a:prstGeom prst="rect">
+                  <a:avLst/>
+                </a:prstGeom>
+                <a:noFill/>
+                <a:ln>
+                  <a:solidFill>
+                    <a:srgbClr val="00B0F0"/>
+                  </a:solidFill>
+                </a:ln>
+              </p:spPr>
+              <p:style>
+                <a:lnRef idx="2">
+                  <a:schemeClr val="accent1">
+                    <a:shade val="15000"/>
+                  </a:schemeClr>
+                </a:lnRef>
+                <a:fillRef idx="1">
+                  <a:schemeClr val="accent1"/>
+                </a:fillRef>
+                <a:effectRef idx="0">
+                  <a:schemeClr val="accent1"/>
+                </a:effectRef>
+                <a:fontRef idx="minor">
+                  <a:schemeClr val="lt1"/>
+                </a:fontRef>
+              </p:style>
+              <p:txBody>
+                <a:bodyPr rtlCol="0" anchor="ctr"/>
+                <a:lstStyle/>
+                <a:p>
+                  <a:pPr algn="ctr"/>
+                  <a:endParaRPr lang="zh-CN" altLang="en-US" dirty="0"/>
+                </a:p>
+              </p:txBody>
+            </p:sp>
+            <p:cxnSp>
+              <p:nvCxnSpPr>
+                <p:cNvPr id="140" name="直接箭头连接符 139">
+                  <a:extLst>
+                    <a:ext uri="{FF2B5EF4-FFF2-40B4-BE49-F238E27FC236}">
+                      <a16:creationId xmlns:a16="http://schemas.microsoft.com/office/drawing/2014/main" id="{F9806E69-68CE-E974-42D3-95297688F553}"/>
+                    </a:ext>
+                  </a:extLst>
+                </p:cNvPr>
+                <p:cNvCxnSpPr/>
+                <p:nvPr/>
+              </p:nvCxnSpPr>
+              <p:spPr>
+                <a:xfrm>
+                  <a:off x="1315844" y="2297151"/>
+                  <a:ext cx="1800000" cy="0"/>
+                </a:xfrm>
+                <a:prstGeom prst="straightConnector1">
+                  <a:avLst/>
+                </a:prstGeom>
+                <a:ln w="12700">
+                  <a:tailEnd type="stealth"/>
+                </a:ln>
+              </p:spPr>
+              <p:style>
+                <a:lnRef idx="1">
+                  <a:schemeClr val="dk1"/>
+                </a:lnRef>
+                <a:fillRef idx="0">
+                  <a:schemeClr val="dk1"/>
+                </a:fillRef>
+                <a:effectRef idx="0">
+                  <a:schemeClr val="dk1"/>
+                </a:effectRef>
+                <a:fontRef idx="minor">
+                  <a:schemeClr val="tx1"/>
+                </a:fontRef>
+              </p:style>
+            </p:cxnSp>
+            <p:cxnSp>
+              <p:nvCxnSpPr>
+                <p:cNvPr id="141" name="直接箭头连接符 140">
+                  <a:extLst>
+                    <a:ext uri="{FF2B5EF4-FFF2-40B4-BE49-F238E27FC236}">
+                      <a16:creationId xmlns:a16="http://schemas.microsoft.com/office/drawing/2014/main" id="{D335B51A-C470-ADC9-E3B1-46626D84091E}"/>
+                    </a:ext>
+                  </a:extLst>
+                </p:cNvPr>
+                <p:cNvCxnSpPr>
+                  <a:cxnSpLocks/>
+                </p:cNvCxnSpPr>
+                <p:nvPr/>
+              </p:nvCxnSpPr>
+              <p:spPr>
+                <a:xfrm rot="16200000">
+                  <a:off x="1765844" y="1847151"/>
+                  <a:ext cx="900000" cy="0"/>
+                </a:xfrm>
+                <a:prstGeom prst="straightConnector1">
+                  <a:avLst/>
+                </a:prstGeom>
+                <a:ln w="12700">
+                  <a:tailEnd type="stealth"/>
+                </a:ln>
+              </p:spPr>
+              <p:style>
+                <a:lnRef idx="1">
+                  <a:schemeClr val="dk1"/>
+                </a:lnRef>
+                <a:fillRef idx="0">
+                  <a:schemeClr val="dk1"/>
+                </a:fillRef>
+                <a:effectRef idx="0">
+                  <a:schemeClr val="dk1"/>
+                </a:effectRef>
+                <a:fontRef idx="minor">
+                  <a:schemeClr val="tx1"/>
+                </a:fontRef>
+              </p:style>
+            </p:cxnSp>
+            <mc:AlternateContent xmlns:mc="http://schemas.openxmlformats.org/markup-compatibility/2006" xmlns:a14="http://schemas.microsoft.com/office/drawing/2010/main">
+              <mc:Choice Requires="a14">
+                <p:sp>
+                  <p:nvSpPr>
+                    <p:cNvPr id="142" name="文本框 141">
+                      <a:extLst>
+                        <a:ext uri="{FF2B5EF4-FFF2-40B4-BE49-F238E27FC236}">
+                          <a16:creationId xmlns:a16="http://schemas.microsoft.com/office/drawing/2014/main" id="{6BA04661-4BA2-F998-F0B3-5A5C2757A339}"/>
+                        </a:ext>
+                      </a:extLst>
+                    </p:cNvPr>
+                    <p:cNvSpPr txBox="1"/>
+                    <p:nvPr/>
+                  </p:nvSpPr>
+                  <p:spPr>
+                    <a:xfrm>
+                      <a:off x="1935479" y="1397151"/>
+                      <a:ext cx="271676" cy="153888"/>
+                    </a:xfrm>
+                    <a:prstGeom prst="rect">
+                      <a:avLst/>
+                    </a:prstGeom>
+                    <a:noFill/>
+                  </p:spPr>
+                  <p:txBody>
+                    <a:bodyPr wrap="none" lIns="0" tIns="0" rIns="0" bIns="0" rtlCol="0">
+                      <a:spAutoFit/>
+                    </a:bodyPr>
+                    <a:lstStyle/>
+                    <a:p>
+                      <a:pPr/>
+                      <a14:m>
+                        <m:oMathPara xmlns:m="http://schemas.openxmlformats.org/officeDocument/2006/math">
+                          <m:oMathParaPr>
+                            <m:jc m:val="centerGroup"/>
+                          </m:oMathParaPr>
+                          <m:oMath xmlns:m="http://schemas.openxmlformats.org/officeDocument/2006/math">
+                            <m:r>
+                              <a:rPr lang="en-US" altLang="zh-CN" sz="1000" b="0" i="1" smtClean="0">
+                                <a:latin typeface="Cambria Math" panose="02040503050406030204" pitchFamily="18" charset="0"/>
+                              </a:rPr>
+                              <m:t>𝑓</m:t>
+                            </m:r>
+                            <m:d>
+                              <m:dPr>
+                                <m:ctrlPr>
+                                  <a:rPr lang="en-US" altLang="zh-CN" sz="1000" b="0" i="1" smtClean="0">
+                                    <a:latin typeface="Cambria Math" panose="02040503050406030204" pitchFamily="18" charset="0"/>
+                                  </a:rPr>
+                                </m:ctrlPr>
+                              </m:dPr>
+                              <m:e>
+                                <m:r>
+                                  <a:rPr lang="en-US" altLang="zh-CN" sz="1000" b="0" i="1" smtClean="0">
+                                    <a:latin typeface="Cambria Math" panose="02040503050406030204" pitchFamily="18" charset="0"/>
+                                  </a:rPr>
+                                  <m:t>𝜏</m:t>
+                                </m:r>
+                              </m:e>
+                            </m:d>
+                          </m:oMath>
+                        </m:oMathPara>
+                      </a14:m>
+                      <a:endParaRPr lang="en-US" altLang="zh-CN" sz="1000" b="0" dirty="0"/>
+                    </a:p>
+                  </p:txBody>
+                </p:sp>
+              </mc:Choice>
+              <mc:Fallback xmlns="">
+                <p:sp>
+                  <p:nvSpPr>
+                    <p:cNvPr id="28" name="文本框 27">
+                      <a:extLst>
+                        <a:ext uri="{FF2B5EF4-FFF2-40B4-BE49-F238E27FC236}">
+                          <a16:creationId xmlns:a16="http://schemas.microsoft.com/office/drawing/2014/main" id="{FA139C45-A6A4-3224-A8C7-616701357772}"/>
+                        </a:ext>
+                      </a:extLst>
+                    </p:cNvPr>
+                    <p:cNvSpPr txBox="1">
+                      <a:spLocks noRot="1" noChangeAspect="1" noMove="1" noResize="1" noEditPoints="1" noAdjustHandles="1" noChangeArrowheads="1" noChangeShapeType="1" noTextEdit="1"/>
+                    </p:cNvSpPr>
+                    <p:nvPr/>
+                  </p:nvSpPr>
+                  <p:spPr>
+                    <a:xfrm>
+                      <a:off x="1935479" y="1397151"/>
+                      <a:ext cx="271676" cy="153888"/>
+                    </a:xfrm>
+                    <a:prstGeom prst="rect">
+                      <a:avLst/>
+                    </a:prstGeom>
+                    <a:blipFill>
+                      <a:blip r:embed="rId4"/>
+                      <a:stretch>
+                        <a:fillRect l="-15556" b="-36000"/>
+                      </a:stretch>
+                    </a:blipFill>
+                  </p:spPr>
+                  <p:txBody>
+                    <a:bodyPr/>
+                    <a:lstStyle/>
+                    <a:p>
+                      <a:r>
+                        <a:rPr lang="zh-CN" altLang="en-US">
+                          <a:noFill/>
+                        </a:rPr>
+                        <a:t> </a:t>
+                      </a:r>
+                    </a:p>
+                  </p:txBody>
+                </p:sp>
+              </mc:Fallback>
+            </mc:AlternateContent>
+            <mc:AlternateContent xmlns:mc="http://schemas.openxmlformats.org/markup-compatibility/2006" xmlns:a14="http://schemas.microsoft.com/office/drawing/2010/main">
+              <mc:Choice Requires="a14">
+                <p:sp>
+                  <p:nvSpPr>
+                    <p:cNvPr id="143" name="文本框 142">
+                      <a:extLst>
+                        <a:ext uri="{FF2B5EF4-FFF2-40B4-BE49-F238E27FC236}">
+                          <a16:creationId xmlns:a16="http://schemas.microsoft.com/office/drawing/2014/main" id="{186F4C33-608D-5D41-416B-4FAC6B6D91F9}"/>
+                        </a:ext>
+                      </a:extLst>
+                    </p:cNvPr>
+                    <p:cNvSpPr txBox="1"/>
+                    <p:nvPr/>
+                  </p:nvSpPr>
+                  <p:spPr>
+                    <a:xfrm>
+                      <a:off x="3032551" y="2297151"/>
+                      <a:ext cx="90922" cy="153888"/>
+                    </a:xfrm>
+                    <a:prstGeom prst="rect">
+                      <a:avLst/>
+                    </a:prstGeom>
+                    <a:noFill/>
+                  </p:spPr>
+                  <p:txBody>
+                    <a:bodyPr wrap="none" lIns="0" tIns="0" rIns="0" bIns="0" rtlCol="0">
+                      <a:spAutoFit/>
+                    </a:bodyPr>
+                    <a:lstStyle/>
+                    <a:p>
+                      <a:pPr/>
+                      <a14:m>
+                        <m:oMathPara xmlns:m="http://schemas.openxmlformats.org/officeDocument/2006/math">
+                          <m:oMathParaPr>
+                            <m:jc m:val="centerGroup"/>
+                          </m:oMathParaPr>
+                          <m:oMath xmlns:m="http://schemas.openxmlformats.org/officeDocument/2006/math">
+                            <m:r>
+                              <a:rPr lang="en-US" altLang="zh-CN" sz="1000" b="0" i="1" smtClean="0">
+                                <a:latin typeface="Cambria Math" panose="02040503050406030204" pitchFamily="18" charset="0"/>
+                              </a:rPr>
+                              <m:t>𝜏</m:t>
+                            </m:r>
+                          </m:oMath>
+                        </m:oMathPara>
+                      </a14:m>
+                      <a:endParaRPr lang="en-US" altLang="zh-CN" sz="1000" b="0" dirty="0"/>
+                    </a:p>
+                  </p:txBody>
+                </p:sp>
+              </mc:Choice>
+              <mc:Fallback xmlns="">
+                <p:sp>
+                  <p:nvSpPr>
+                    <p:cNvPr id="29" name="文本框 28">
+                      <a:extLst>
+                        <a:ext uri="{FF2B5EF4-FFF2-40B4-BE49-F238E27FC236}">
+                          <a16:creationId xmlns:a16="http://schemas.microsoft.com/office/drawing/2014/main" id="{359C3F00-E16E-1CC8-DD89-933DCBBB608B}"/>
+                        </a:ext>
+                      </a:extLst>
+                    </p:cNvPr>
+                    <p:cNvSpPr txBox="1">
+                      <a:spLocks noRot="1" noChangeAspect="1" noMove="1" noResize="1" noEditPoints="1" noAdjustHandles="1" noChangeArrowheads="1" noChangeShapeType="1" noTextEdit="1"/>
+                    </p:cNvSpPr>
+                    <p:nvPr/>
+                  </p:nvSpPr>
+                  <p:spPr>
+                    <a:xfrm>
+                      <a:off x="3032551" y="2297151"/>
+                      <a:ext cx="90922" cy="153888"/>
+                    </a:xfrm>
+                    <a:prstGeom prst="rect">
+                      <a:avLst/>
+                    </a:prstGeom>
+                    <a:blipFill>
+                      <a:blip r:embed="rId5"/>
+                      <a:stretch>
+                        <a:fillRect l="-20000" r="-20000"/>
+                      </a:stretch>
+                    </a:blipFill>
+                  </p:spPr>
+                  <p:txBody>
+                    <a:bodyPr/>
+                    <a:lstStyle/>
+                    <a:p>
+                      <a:r>
+                        <a:rPr lang="zh-CN" altLang="en-US">
+                          <a:noFill/>
+                        </a:rPr>
+                        <a:t> </a:t>
+                      </a:r>
+                    </a:p>
+                  </p:txBody>
+                </p:sp>
+              </mc:Fallback>
+            </mc:AlternateContent>
+          </p:grpSp>
+        </p:grpSp>
+      </p:grpSp>
+    </p:spTree>
     <p:extLst>
       <p:ext uri="{BB962C8B-B14F-4D97-AF65-F5344CB8AC3E}">
-        <p14:creationId xmlns:p14="http://schemas.microsoft.com/office/powerpoint/2010/main" val="795161677"/>
+        <p14:creationId xmlns:p14="http://schemas.microsoft.com/office/powerpoint/2010/main" val="3822145904"/>
+      </p:ext>
+    </p:extLst>
+  </p:cSld>
+  <p:clrMapOvr>
+    <a:masterClrMapping/>
+  </p:clrMapOvr>
+</p:sld>
+</file>
+
+<file path=ppt/slides/slide7.xml><?xml version="1.0" encoding="utf-8"?>
+<p:sld xmlns:a="http://schemas.openxmlformats.org/drawingml/2006/main" xmlns:r="http://schemas.openxmlformats.org/officeDocument/2006/relationships" xmlns:p="http://schemas.openxmlformats.org/presentationml/2006/main">
+  <p:cSld>
+    <p:spTree>
+      <p:nvGrpSpPr>
+        <p:cNvPr id="1" name="">
+          <a:extLst>
+            <a:ext uri="{FF2B5EF4-FFF2-40B4-BE49-F238E27FC236}">
+              <a16:creationId xmlns:a16="http://schemas.microsoft.com/office/drawing/2014/main" id="{1432D9B1-CF62-3D24-910F-62604B80B78F}"/>
+            </a:ext>
+          </a:extLst>
+        </p:cNvPr>
+        <p:cNvGrpSpPr/>
+        <p:nvPr/>
+      </p:nvGrpSpPr>
+      <p:grpSpPr>
+        <a:xfrm>
+          <a:off x="0" y="0"/>
+          <a:ext cx="0" cy="0"/>
+          <a:chOff x="0" y="0"/>
+          <a:chExt cx="0" cy="0"/>
+        </a:xfrm>
+      </p:grpSpPr>
+    </p:spTree>
+    <p:extLst>
+      <p:ext uri="{BB962C8B-B14F-4D97-AF65-F5344CB8AC3E}">
+        <p14:creationId xmlns:p14="http://schemas.microsoft.com/office/powerpoint/2010/main" val="2438249274"/>
       </p:ext>
     </p:extLst>
   </p:cSld>

--- a/PPT/math.pptx
+++ b/PPT/math.pptx
@@ -247,7 +247,7 @@
           <a:p>
             <a:fld id="{D997B5FA-0921-464F-AAE1-844C04324D75}" type="datetimeFigureOut">
               <a:rPr lang="zh-CN" altLang="en-US" smtClean="0"/>
-              <a:t>2026-07-29</a:t>
+              <a:t>2026-09-28</a:t>
             </a:fld>
             <a:endParaRPr lang="zh-CN" altLang="en-US"/>
           </a:p>
@@ -410,7 +410,7 @@
           <a:p>
             <a:fld id="{D997B5FA-0921-464F-AAE1-844C04324D75}" type="datetimeFigureOut">
               <a:rPr lang="zh-CN" altLang="en-US" smtClean="0"/>
-              <a:t>2026-07-29</a:t>
+              <a:t>2026-09-28</a:t>
             </a:fld>
             <a:endParaRPr lang="zh-CN" altLang="en-US"/>
           </a:p>
@@ -583,7 +583,7 @@
           <a:p>
             <a:fld id="{D997B5FA-0921-464F-AAE1-844C04324D75}" type="datetimeFigureOut">
               <a:rPr lang="zh-CN" altLang="en-US" smtClean="0"/>
-              <a:t>2026-07-29</a:t>
+              <a:t>2026-09-28</a:t>
             </a:fld>
             <a:endParaRPr lang="zh-CN" altLang="en-US"/>
           </a:p>
@@ -746,7 +746,7 @@
           <a:p>
             <a:fld id="{D997B5FA-0921-464F-AAE1-844C04324D75}" type="datetimeFigureOut">
               <a:rPr lang="zh-CN" altLang="en-US" smtClean="0"/>
-              <a:t>2026-07-29</a:t>
+              <a:t>2026-09-28</a:t>
             </a:fld>
             <a:endParaRPr lang="zh-CN" altLang="en-US"/>
           </a:p>
@@ -986,7 +986,7 @@
           <a:p>
             <a:fld id="{D997B5FA-0921-464F-AAE1-844C04324D75}" type="datetimeFigureOut">
               <a:rPr lang="zh-CN" altLang="en-US" smtClean="0"/>
-              <a:t>2026-07-29</a:t>
+              <a:t>2026-09-28</a:t>
             </a:fld>
             <a:endParaRPr lang="zh-CN" altLang="en-US"/>
           </a:p>
@@ -1210,7 +1210,7 @@
           <a:p>
             <a:fld id="{D997B5FA-0921-464F-AAE1-844C04324D75}" type="datetimeFigureOut">
               <a:rPr lang="zh-CN" altLang="en-US" smtClean="0"/>
-              <a:t>2026-07-29</a:t>
+              <a:t>2026-09-28</a:t>
             </a:fld>
             <a:endParaRPr lang="zh-CN" altLang="en-US"/>
           </a:p>
@@ -1569,7 +1569,7 @@
           <a:p>
             <a:fld id="{D997B5FA-0921-464F-AAE1-844C04324D75}" type="datetimeFigureOut">
               <a:rPr lang="zh-CN" altLang="en-US" smtClean="0"/>
-              <a:t>2026-07-29</a:t>
+              <a:t>2026-09-28</a:t>
             </a:fld>
             <a:endParaRPr lang="zh-CN" altLang="en-US"/>
           </a:p>
@@ -1681,7 +1681,7 @@
           <a:p>
             <a:fld id="{D997B5FA-0921-464F-AAE1-844C04324D75}" type="datetimeFigureOut">
               <a:rPr lang="zh-CN" altLang="en-US" smtClean="0"/>
-              <a:t>2026-07-29</a:t>
+              <a:t>2026-09-28</a:t>
             </a:fld>
             <a:endParaRPr lang="zh-CN" altLang="en-US"/>
           </a:p>
@@ -1771,7 +1771,7 @@
           <a:p>
             <a:fld id="{D997B5FA-0921-464F-AAE1-844C04324D75}" type="datetimeFigureOut">
               <a:rPr lang="zh-CN" altLang="en-US" smtClean="0"/>
-              <a:t>2026-07-29</a:t>
+              <a:t>2026-09-28</a:t>
             </a:fld>
             <a:endParaRPr lang="zh-CN" altLang="en-US"/>
           </a:p>
@@ -2041,7 +2041,7 @@
           <a:p>
             <a:fld id="{D997B5FA-0921-464F-AAE1-844C04324D75}" type="datetimeFigureOut">
               <a:rPr lang="zh-CN" altLang="en-US" smtClean="0"/>
-              <a:t>2026-07-29</a:t>
+              <a:t>2026-09-28</a:t>
             </a:fld>
             <a:endParaRPr lang="zh-CN" altLang="en-US"/>
           </a:p>
@@ -2288,7 +2288,7 @@
           <a:p>
             <a:fld id="{D997B5FA-0921-464F-AAE1-844C04324D75}" type="datetimeFigureOut">
               <a:rPr lang="zh-CN" altLang="en-US" smtClean="0"/>
-              <a:t>2026-07-29</a:t>
+              <a:t>2026-09-28</a:t>
             </a:fld>
             <a:endParaRPr lang="zh-CN" altLang="en-US"/>
           </a:p>
@@ -2494,7 +2494,7 @@
           <a:p>
             <a:fld id="{D997B5FA-0921-464F-AAE1-844C04324D75}" type="datetimeFigureOut">
               <a:rPr lang="zh-CN" altLang="en-US" smtClean="0"/>
-              <a:t>2026-07-29</a:t>
+              <a:t>2026-09-28</a:t>
             </a:fld>
             <a:endParaRPr lang="zh-CN" altLang="en-US"/>
           </a:p>
@@ -3369,10 +3369,7 @@
                     <a:pPr/>
                     <a14:m>
                       <m:oMathPara xmlns:m="http://schemas.openxmlformats.org/officeDocument/2006/math">
-                        <m:oMathParaPr>
-                          <m:jc m:val="centerGroup"/>
-                        </m:oMathParaPr>
-                        <m:oMath xmlns:m="http://schemas.openxmlformats.org/officeDocument/2006/math">
+                        <m:oMath>
                           <m:r>
                             <a:rPr lang="en-US" altLang="zh-CN" b="1" i="1" smtClean="0">
                               <a:latin typeface="Cambria Math" panose="02040503050406030204" pitchFamily="18" charset="0"/>
@@ -3450,10 +3447,7 @@
                     <a:pPr/>
                     <a14:m>
                       <m:oMathPara xmlns:m="http://schemas.openxmlformats.org/officeDocument/2006/math">
-                        <m:oMathParaPr>
-                          <m:jc m:val="centerGroup"/>
-                        </m:oMathParaPr>
-                        <m:oMath xmlns:m="http://schemas.openxmlformats.org/officeDocument/2006/math">
+                        <m:oMath>
                           <m:r>
                             <m:rPr>
                               <m:sty m:val="p"/>
@@ -3540,10 +3534,7 @@
                     <a:pPr/>
                     <a14:m>
                       <m:oMathPara xmlns:m="http://schemas.openxmlformats.org/officeDocument/2006/math">
-                        <m:oMathParaPr>
-                          <m:jc m:val="centerGroup"/>
-                        </m:oMathParaPr>
-                        <m:oMath xmlns:m="http://schemas.openxmlformats.org/officeDocument/2006/math">
+                        <m:oMath>
                           <m:r>
                             <m:rPr>
                               <m:sty m:val="p"/>
@@ -3630,10 +3621,7 @@
                     <a:pPr/>
                     <a14:m>
                       <m:oMathPara xmlns:m="http://schemas.openxmlformats.org/officeDocument/2006/math">
-                        <m:oMathParaPr>
-                          <m:jc m:val="centerGroup"/>
-                        </m:oMathParaPr>
-                        <m:oMath xmlns:m="http://schemas.openxmlformats.org/officeDocument/2006/math">
+                        <m:oMath>
                           <m:r>
                             <m:rPr>
                               <m:sty m:val="p"/>
@@ -3720,10 +3708,7 @@
                     <a:pPr/>
                     <a14:m>
                       <m:oMathPara xmlns:m="http://schemas.openxmlformats.org/officeDocument/2006/math">
-                        <m:oMathParaPr>
-                          <m:jc m:val="centerGroup"/>
-                        </m:oMathParaPr>
-                        <m:oMath xmlns:m="http://schemas.openxmlformats.org/officeDocument/2006/math">
+                        <m:oMath>
                           <m:r>
                             <m:rPr>
                               <m:sty m:val="p"/>
@@ -3915,10 +3900,7 @@
                     <a:pPr/>
                     <a14:m>
                       <m:oMathPara xmlns:m="http://schemas.openxmlformats.org/officeDocument/2006/math">
-                        <m:oMathParaPr>
-                          <m:jc m:val="centerGroup"/>
-                        </m:oMathParaPr>
-                        <m:oMath xmlns:m="http://schemas.openxmlformats.org/officeDocument/2006/math">
+                        <m:oMath>
                           <m:r>
                             <a:rPr lang="en-US" altLang="zh-CN" b="1" i="1" smtClean="0">
                               <a:latin typeface="Cambria Math" panose="02040503050406030204" pitchFamily="18" charset="0"/>
@@ -3928,7 +3910,7 @@
                           <m:f>
                             <m:fPr>
                               <m:ctrlPr>
-                                <a:rPr lang="en-US" altLang="zh-CN" i="1" smtClean="0">
+                                <a:rPr lang="en-US" altLang="zh-CN" b="0" i="1" smtClean="0">
                                   <a:latin typeface="Cambria Math" panose="02040503050406030204" pitchFamily="18" charset="0"/>
                                 </a:rPr>
                               </m:ctrlPr>
@@ -3953,7 +3935,7 @@
                           <m:sSup>
                             <m:sSupPr>
                               <m:ctrlPr>
-                                <a:rPr lang="en-US" altLang="zh-CN" i="1" smtClean="0">
+                                <a:rPr lang="en-US" altLang="zh-CN" b="0" i="1" smtClean="0">
                                   <a:latin typeface="Cambria Math" panose="02040503050406030204" pitchFamily="18" charset="0"/>
                                 </a:rPr>
                               </m:ctrlPr>
@@ -4047,10 +4029,7 @@
                   <a:pPr/>
                   <a14:m>
                     <m:oMathPara xmlns:m="http://schemas.openxmlformats.org/officeDocument/2006/math">
-                      <m:oMathParaPr>
-                        <m:jc m:val="centerGroup"/>
-                      </m:oMathParaPr>
-                      <m:oMath xmlns:m="http://schemas.openxmlformats.org/officeDocument/2006/math">
+                      <m:oMath>
                         <m:r>
                           <a:rPr lang="en-US" altLang="zh-CN" b="1" i="1" smtClean="0">
                             <a:latin typeface="Cambria Math" panose="02040503050406030204" pitchFamily="18" charset="0"/>
@@ -4128,10 +4107,7 @@
                   <a:pPr/>
                   <a14:m>
                     <m:oMathPara xmlns:m="http://schemas.openxmlformats.org/officeDocument/2006/math">
-                      <m:oMathParaPr>
-                        <m:jc m:val="centerGroup"/>
-                      </m:oMathParaPr>
-                      <m:oMath xmlns:m="http://schemas.openxmlformats.org/officeDocument/2006/math">
+                      <m:oMath>
                         <m:r>
                           <a:rPr lang="en-US" altLang="zh-CN" b="1" i="1" smtClean="0">
                             <a:latin typeface="Cambria Math" panose="02040503050406030204" pitchFamily="18" charset="0"/>
@@ -4209,10 +4185,7 @@
                   <a:pPr/>
                   <a14:m>
                     <m:oMathPara xmlns:m="http://schemas.openxmlformats.org/officeDocument/2006/math">
-                      <m:oMathParaPr>
-                        <m:jc m:val="centerGroup"/>
-                      </m:oMathParaPr>
-                      <m:oMath xmlns:m="http://schemas.openxmlformats.org/officeDocument/2006/math">
+                      <m:oMath>
                         <m:r>
                           <a:rPr lang="en-US" altLang="zh-CN" b="1" i="1" smtClean="0">
                             <a:latin typeface="Cambria Math" panose="02040503050406030204" pitchFamily="18" charset="0"/>
@@ -4290,10 +4263,7 @@
                   <a:pPr/>
                   <a14:m>
                     <m:oMathPara xmlns:m="http://schemas.openxmlformats.org/officeDocument/2006/math">
-                      <m:oMathParaPr>
-                        <m:jc m:val="centerGroup"/>
-                      </m:oMathParaPr>
-                      <m:oMath xmlns:m="http://schemas.openxmlformats.org/officeDocument/2006/math">
+                      <m:oMath>
                         <m:r>
                           <a:rPr lang="en-US" altLang="zh-CN" b="1" i="1" smtClean="0">
                             <a:latin typeface="Cambria Math" panose="02040503050406030204" pitchFamily="18" charset="0"/>
@@ -4503,10 +4473,7 @@
                   <a:pPr/>
                   <a14:m>
                     <m:oMathPara xmlns:m="http://schemas.openxmlformats.org/officeDocument/2006/math">
-                      <m:oMathParaPr>
-                        <m:jc m:val="centerGroup"/>
-                      </m:oMathParaPr>
-                      <m:oMath xmlns:m="http://schemas.openxmlformats.org/officeDocument/2006/math">
+                      <m:oMath>
                         <m:r>
                           <a:rPr lang="en-US" altLang="zh-CN" b="1" i="1" smtClean="0">
                             <a:latin typeface="Cambria Math" panose="02040503050406030204" pitchFamily="18" charset="0"/>
@@ -4584,10 +4551,7 @@
                   <a:pPr/>
                   <a14:m>
                     <m:oMathPara xmlns:m="http://schemas.openxmlformats.org/officeDocument/2006/math">
-                      <m:oMathParaPr>
-                        <m:jc m:val="centerGroup"/>
-                      </m:oMathParaPr>
-                      <m:oMath xmlns:m="http://schemas.openxmlformats.org/officeDocument/2006/math">
+                      <m:oMath>
                         <m:r>
                           <a:rPr lang="en-US" altLang="zh-CN" b="1" i="1" smtClean="0">
                             <a:latin typeface="Cambria Math" panose="02040503050406030204" pitchFamily="18" charset="0"/>
@@ -4665,10 +4629,7 @@
                   <a:pPr/>
                   <a14:m>
                     <m:oMathPara xmlns:m="http://schemas.openxmlformats.org/officeDocument/2006/math">
-                      <m:oMathParaPr>
-                        <m:jc m:val="centerGroup"/>
-                      </m:oMathParaPr>
-                      <m:oMath xmlns:m="http://schemas.openxmlformats.org/officeDocument/2006/math">
+                      <m:oMath>
                         <m:r>
                           <a:rPr lang="en-US" altLang="zh-CN" b="1" i="1" smtClean="0">
                             <a:latin typeface="Cambria Math" panose="02040503050406030204" pitchFamily="18" charset="0"/>
@@ -4746,10 +4707,7 @@
                   <a:pPr/>
                   <a14:m>
                     <m:oMathPara xmlns:m="http://schemas.openxmlformats.org/officeDocument/2006/math">
-                      <m:oMathParaPr>
-                        <m:jc m:val="centerGroup"/>
-                      </m:oMathParaPr>
-                      <m:oMath xmlns:m="http://schemas.openxmlformats.org/officeDocument/2006/math">
+                      <m:oMath>
                         <m:rad>
                           <m:radPr>
                             <m:degHide m:val="on"/>
@@ -4997,10 +4955,7 @@
                   <a:pPr/>
                   <a14:m>
                     <m:oMathPara xmlns:m="http://schemas.openxmlformats.org/officeDocument/2006/math">
-                      <m:oMathParaPr>
-                        <m:jc m:val="centerGroup"/>
-                      </m:oMathParaPr>
-                      <m:oMath xmlns:m="http://schemas.openxmlformats.org/officeDocument/2006/math">
+                      <m:oMath>
                         <m:r>
                           <a:rPr lang="en-US" altLang="zh-CN" b="1" i="1" smtClean="0">
                             <a:latin typeface="Cambria Math" panose="02040503050406030204" pitchFamily="18" charset="0"/>
@@ -5078,10 +5033,7 @@
                   <a:pPr/>
                   <a14:m>
                     <m:oMathPara xmlns:m="http://schemas.openxmlformats.org/officeDocument/2006/math">
-                      <m:oMathParaPr>
-                        <m:jc m:val="centerGroup"/>
-                      </m:oMathParaPr>
-                      <m:oMath xmlns:m="http://schemas.openxmlformats.org/officeDocument/2006/math">
+                      <m:oMath>
                         <m:r>
                           <a:rPr lang="en-US" altLang="zh-CN" b="1" i="1" smtClean="0">
                             <a:latin typeface="Cambria Math" panose="02040503050406030204" pitchFamily="18" charset="0"/>
@@ -5159,10 +5111,7 @@
                   <a:pPr/>
                   <a14:m>
                     <m:oMathPara xmlns:m="http://schemas.openxmlformats.org/officeDocument/2006/math">
-                      <m:oMathParaPr>
-                        <m:jc m:val="centerGroup"/>
-                      </m:oMathParaPr>
-                      <m:oMath xmlns:m="http://schemas.openxmlformats.org/officeDocument/2006/math">
+                      <m:oMath>
                         <m:r>
                           <a:rPr lang="en-US" altLang="zh-CN" b="1" i="1" smtClean="0">
                             <a:latin typeface="Cambria Math" panose="02040503050406030204" pitchFamily="18" charset="0"/>
@@ -5240,10 +5189,7 @@
                   <a:pPr/>
                   <a14:m>
                     <m:oMathPara xmlns:m="http://schemas.openxmlformats.org/officeDocument/2006/math">
-                      <m:oMathParaPr>
-                        <m:jc m:val="centerGroup"/>
-                      </m:oMathParaPr>
-                      <m:oMath xmlns:m="http://schemas.openxmlformats.org/officeDocument/2006/math">
+                      <m:oMath>
                         <m:rad>
                           <m:radPr>
                             <m:degHide m:val="on"/>
@@ -5533,10 +5479,7 @@
                         <a:pPr/>
                         <a14:m>
                           <m:oMathPara xmlns:m="http://schemas.openxmlformats.org/officeDocument/2006/math">
-                            <m:oMathParaPr>
-                              <m:jc m:val="centerGroup"/>
-                            </m:oMathParaPr>
-                            <m:oMath xmlns:m="http://schemas.openxmlformats.org/officeDocument/2006/math">
+                            <m:oMath>
                               <m:r>
                                 <a:rPr lang="en-US" altLang="zh-CN" b="1" i="1" smtClean="0">
                                   <a:latin typeface="Cambria Math" panose="02040503050406030204" pitchFamily="18" charset="0"/>
@@ -5614,10 +5557,7 @@
                         <a:pPr/>
                         <a14:m>
                           <m:oMathPara xmlns:m="http://schemas.openxmlformats.org/officeDocument/2006/math">
-                            <m:oMathParaPr>
-                              <m:jc m:val="centerGroup"/>
-                            </m:oMathParaPr>
-                            <m:oMath xmlns:m="http://schemas.openxmlformats.org/officeDocument/2006/math">
+                            <m:oMath>
                               <m:r>
                                 <a:rPr lang="en-US" altLang="zh-CN" b="1" i="1" smtClean="0">
                                   <a:latin typeface="Cambria Math" panose="02040503050406030204" pitchFamily="18" charset="0"/>
@@ -5695,10 +5635,7 @@
                         <a:pPr/>
                         <a14:m>
                           <m:oMathPara xmlns:m="http://schemas.openxmlformats.org/officeDocument/2006/math">
-                            <m:oMathParaPr>
-                              <m:jc m:val="centerGroup"/>
-                            </m:oMathParaPr>
-                            <m:oMath xmlns:m="http://schemas.openxmlformats.org/officeDocument/2006/math">
+                            <m:oMath>
                               <m:r>
                                 <a:rPr lang="en-US" altLang="zh-CN" b="1" i="1" smtClean="0">
                                   <a:latin typeface="Cambria Math" panose="02040503050406030204" pitchFamily="18" charset="0"/>
@@ -5776,10 +5713,7 @@
                         <a:pPr/>
                         <a14:m>
                           <m:oMathPara xmlns:m="http://schemas.openxmlformats.org/officeDocument/2006/math">
-                            <m:oMathParaPr>
-                              <m:jc m:val="centerGroup"/>
-                            </m:oMathParaPr>
-                            <m:oMath xmlns:m="http://schemas.openxmlformats.org/officeDocument/2006/math">
+                            <m:oMath>
                               <m:rad>
                                 <m:radPr>
                                   <m:degHide m:val="on"/>
@@ -5921,10 +5855,7 @@
                       <a:pPr/>
                       <a14:m>
                         <m:oMathPara xmlns:m="http://schemas.openxmlformats.org/officeDocument/2006/math">
-                          <m:oMathParaPr>
-                            <m:jc m:val="centerGroup"/>
-                          </m:oMathParaPr>
-                          <m:oMath xmlns:m="http://schemas.openxmlformats.org/officeDocument/2006/math">
+                          <m:oMath>
                             <m:r>
                               <a:rPr lang="en-US" altLang="zh-CN" b="1" i="1" smtClean="0">
                                 <a:latin typeface="Cambria Math" panose="02040503050406030204" pitchFamily="18" charset="0"/>
@@ -6147,10 +6078,7 @@
                         <a:pPr/>
                         <a14:m>
                           <m:oMathPara xmlns:m="http://schemas.openxmlformats.org/officeDocument/2006/math">
-                            <m:oMathParaPr>
-                              <m:jc m:val="centerGroup"/>
-                            </m:oMathParaPr>
-                            <m:oMath xmlns:m="http://schemas.openxmlformats.org/officeDocument/2006/math">
+                            <m:oMath>
                               <m:r>
                                 <a:rPr lang="en-US" altLang="zh-CN" b="1" i="1" smtClean="0">
                                   <a:latin typeface="Cambria Math" panose="02040503050406030204" pitchFamily="18" charset="0"/>
@@ -6228,10 +6156,7 @@
                         <a:pPr/>
                         <a14:m>
                           <m:oMathPara xmlns:m="http://schemas.openxmlformats.org/officeDocument/2006/math">
-                            <m:oMathParaPr>
-                              <m:jc m:val="centerGroup"/>
-                            </m:oMathParaPr>
-                            <m:oMath xmlns:m="http://schemas.openxmlformats.org/officeDocument/2006/math">
+                            <m:oMath>
                               <m:r>
                                 <a:rPr lang="en-US" altLang="zh-CN" b="1" i="1" smtClean="0">
                                   <a:latin typeface="Cambria Math" panose="02040503050406030204" pitchFamily="18" charset="0"/>
@@ -6315,10 +6240,7 @@
                         <a:pPr/>
                         <a14:m>
                           <m:oMathPara xmlns:m="http://schemas.openxmlformats.org/officeDocument/2006/math">
-                            <m:oMathParaPr>
-                              <m:jc m:val="centerGroup"/>
-                            </m:oMathParaPr>
-                            <m:oMath xmlns:m="http://schemas.openxmlformats.org/officeDocument/2006/math">
+                            <m:oMath>
                               <m:r>
                                 <a:rPr lang="en-US" altLang="zh-CN" b="1" i="1" smtClean="0">
                                   <a:latin typeface="Cambria Math" panose="02040503050406030204" pitchFamily="18" charset="0"/>
@@ -6402,10 +6324,7 @@
                         <a:pPr/>
                         <a14:m>
                           <m:oMathPara xmlns:m="http://schemas.openxmlformats.org/officeDocument/2006/math">
-                            <m:oMathParaPr>
-                              <m:jc m:val="centerGroup"/>
-                            </m:oMathParaPr>
-                            <m:oMath xmlns:m="http://schemas.openxmlformats.org/officeDocument/2006/math">
+                            <m:oMath>
                               <m:rad>
                                 <m:radPr>
                                   <m:degHide m:val="on"/>
@@ -6547,10 +6466,7 @@
                       <a:pPr/>
                       <a14:m>
                         <m:oMathPara xmlns:m="http://schemas.openxmlformats.org/officeDocument/2006/math">
-                          <m:oMathParaPr>
-                            <m:jc m:val="centerGroup"/>
-                          </m:oMathParaPr>
-                          <m:oMath xmlns:m="http://schemas.openxmlformats.org/officeDocument/2006/math">
+                          <m:oMath>
                             <m:r>
                               <a:rPr lang="en-US" altLang="zh-CN" b="1" i="1" smtClean="0">
                                 <a:latin typeface="Cambria Math" panose="02040503050406030204" pitchFamily="18" charset="0"/>
@@ -6916,10 +6832,7 @@
                   <a:pPr/>
                   <a14:m>
                     <m:oMathPara xmlns:m="http://schemas.openxmlformats.org/officeDocument/2006/math">
-                      <m:oMathParaPr>
-                        <m:jc m:val="centerGroup"/>
-                      </m:oMathParaPr>
-                      <m:oMath xmlns:m="http://schemas.openxmlformats.org/officeDocument/2006/math">
+                      <m:oMath>
                         <m:r>
                           <a:rPr lang="en-US" altLang="zh-CN" b="1" i="1" smtClean="0">
                             <a:latin typeface="Cambria Math" panose="02040503050406030204" pitchFamily="18" charset="0"/>
@@ -6997,10 +6910,7 @@
                   <a:pPr/>
                   <a14:m>
                     <m:oMathPara xmlns:m="http://schemas.openxmlformats.org/officeDocument/2006/math">
-                      <m:oMathParaPr>
-                        <m:jc m:val="centerGroup"/>
-                      </m:oMathParaPr>
-                      <m:oMath xmlns:m="http://schemas.openxmlformats.org/officeDocument/2006/math">
+                      <m:oMath>
                         <m:r>
                           <a:rPr lang="en-US" altLang="zh-CN" b="1" i="1" smtClean="0">
                             <a:latin typeface="Cambria Math" panose="02040503050406030204" pitchFamily="18" charset="0"/>
@@ -7078,10 +6988,7 @@
                   <a:pPr/>
                   <a14:m>
                     <m:oMathPara xmlns:m="http://schemas.openxmlformats.org/officeDocument/2006/math">
-                      <m:oMathParaPr>
-                        <m:jc m:val="centerGroup"/>
-                      </m:oMathParaPr>
-                      <m:oMath xmlns:m="http://schemas.openxmlformats.org/officeDocument/2006/math">
+                      <m:oMath>
                         <m:r>
                           <a:rPr lang="en-US" altLang="zh-CN" b="1" i="1" smtClean="0">
                             <a:latin typeface="Cambria Math" panose="02040503050406030204" pitchFamily="18" charset="0"/>
@@ -7171,10 +7078,7 @@
                   <a:pPr/>
                   <a14:m>
                     <m:oMathPara xmlns:m="http://schemas.openxmlformats.org/officeDocument/2006/math">
-                      <m:oMathParaPr>
-                        <m:jc m:val="centerGroup"/>
-                      </m:oMathParaPr>
-                      <m:oMath xmlns:m="http://schemas.openxmlformats.org/officeDocument/2006/math">
+                      <m:oMath>
                         <m:r>
                           <a:rPr lang="en-US" altLang="zh-CN" b="1" i="1" smtClean="0">
                             <a:latin typeface="Cambria Math" panose="02040503050406030204" pitchFamily="18" charset="0"/>
@@ -7258,10 +7162,7 @@
                   <a:pPr/>
                   <a14:m>
                     <m:oMathPara xmlns:m="http://schemas.openxmlformats.org/officeDocument/2006/math">
-                      <m:oMathParaPr>
-                        <m:jc m:val="centerGroup"/>
-                      </m:oMathParaPr>
-                      <m:oMath xmlns:m="http://schemas.openxmlformats.org/officeDocument/2006/math">
+                      <m:oMath>
                         <m:r>
                           <a:rPr lang="en-US" altLang="zh-CN" b="1" i="1" smtClean="0">
                             <a:latin typeface="Cambria Math" panose="02040503050406030204" pitchFamily="18" charset="0"/>
@@ -7496,10 +7397,7 @@
                           <a:pPr algn="ctr"/>
                           <a14:m>
                             <m:oMathPara xmlns:m="http://schemas.openxmlformats.org/officeDocument/2006/math">
-                              <m:oMathParaPr>
-                                <m:jc m:val="centerGroup"/>
-                              </m:oMathParaPr>
-                              <m:oMath xmlns:m="http://schemas.openxmlformats.org/officeDocument/2006/math">
+                              <m:oMath>
                                 <m:sSub>
                                   <m:sSubPr>
                                     <m:ctrlPr>
@@ -7605,10 +7503,7 @@
                           <a:pPr algn="ctr"/>
                           <a14:m>
                             <m:oMathPara xmlns:m="http://schemas.openxmlformats.org/officeDocument/2006/math">
-                              <m:oMathParaPr>
-                                <m:jc m:val="centerGroup"/>
-                              </m:oMathParaPr>
-                              <m:oMath xmlns:m="http://schemas.openxmlformats.org/officeDocument/2006/math">
+                              <m:oMath>
                                 <m:sSub>
                                   <m:sSubPr>
                                     <m:ctrlPr>
@@ -7783,10 +7678,7 @@
                           <a:pPr algn="ctr"/>
                           <a14:m>
                             <m:oMathPara xmlns:m="http://schemas.openxmlformats.org/officeDocument/2006/math">
-                              <m:oMathParaPr>
-                                <m:jc m:val="centerGroup"/>
-                              </m:oMathParaPr>
-                              <m:oMath xmlns:m="http://schemas.openxmlformats.org/officeDocument/2006/math">
+                              <m:oMath>
                                 <m:sSub>
                                   <m:sSubPr>
                                     <m:ctrlPr>
@@ -8041,10 +7933,7 @@
                           <a:pPr algn="ctr"/>
                           <a14:m>
                             <m:oMathPara xmlns:m="http://schemas.openxmlformats.org/officeDocument/2006/math">
-                              <m:oMathParaPr>
-                                <m:jc m:val="centerGroup"/>
-                              </m:oMathParaPr>
-                              <m:oMath xmlns:m="http://schemas.openxmlformats.org/officeDocument/2006/math">
+                              <m:oMath>
                                 <m:sSub>
                                   <m:sSubPr>
                                     <m:ctrlPr>
@@ -8150,10 +8039,7 @@
                           <a:pPr algn="ctr"/>
                           <a14:m>
                             <m:oMathPara xmlns:m="http://schemas.openxmlformats.org/officeDocument/2006/math">
-                              <m:oMathParaPr>
-                                <m:jc m:val="centerGroup"/>
-                              </m:oMathParaPr>
-                              <m:oMath xmlns:m="http://schemas.openxmlformats.org/officeDocument/2006/math">
+                              <m:oMath>
                                 <m:sSub>
                                   <m:sSubPr>
                                     <m:ctrlPr>
@@ -8328,10 +8214,7 @@
                           <a:pPr algn="ctr"/>
                           <a14:m>
                             <m:oMathPara xmlns:m="http://schemas.openxmlformats.org/officeDocument/2006/math">
-                              <m:oMathParaPr>
-                                <m:jc m:val="centerGroup"/>
-                              </m:oMathParaPr>
-                              <m:oMath xmlns:m="http://schemas.openxmlformats.org/officeDocument/2006/math">
+                              <m:oMath>
                                 <m:sSub>
                                   <m:sSubPr>
                                     <m:ctrlPr>
@@ -9382,10 +9265,7 @@
                   <a:pPr/>
                   <a14:m>
                     <m:oMathPara xmlns:m="http://schemas.openxmlformats.org/officeDocument/2006/math">
-                      <m:oMathParaPr>
-                        <m:jc m:val="centerGroup"/>
-                      </m:oMathParaPr>
-                      <m:oMath xmlns:m="http://schemas.openxmlformats.org/officeDocument/2006/math">
+                      <m:oMath>
                         <m:d>
                           <m:dPr>
                             <m:begChr m:val="["/>
@@ -9572,10 +9452,7 @@
                   <a:pPr/>
                   <a14:m>
                     <m:oMathPara xmlns:m="http://schemas.openxmlformats.org/officeDocument/2006/math">
-                      <m:oMathParaPr>
-                        <m:jc m:val="centerGroup"/>
-                      </m:oMathParaPr>
-                      <m:oMath xmlns:m="http://schemas.openxmlformats.org/officeDocument/2006/math">
+                      <m:oMath>
                         <m:d>
                           <m:dPr>
                             <m:begChr m:val="["/>
@@ -9970,10 +9847,7 @@
                   <a:pPr/>
                   <a14:m>
                     <m:oMathPara xmlns:m="http://schemas.openxmlformats.org/officeDocument/2006/math">
-                      <m:oMathParaPr>
-                        <m:jc m:val="centerGroup"/>
-                      </m:oMathParaPr>
-                      <m:oMath xmlns:m="http://schemas.openxmlformats.org/officeDocument/2006/math">
+                      <m:oMath>
                         <m:d>
                           <m:dPr>
                             <m:begChr m:val="["/>
@@ -10160,10 +10034,7 @@
                   <a:pPr/>
                   <a14:m>
                     <m:oMathPara xmlns:m="http://schemas.openxmlformats.org/officeDocument/2006/math">
-                      <m:oMathParaPr>
-                        <m:jc m:val="centerGroup"/>
-                      </m:oMathParaPr>
-                      <m:oMath xmlns:m="http://schemas.openxmlformats.org/officeDocument/2006/math">
+                      <m:oMath>
                         <m:d>
                           <m:dPr>
                             <m:begChr m:val="["/>
@@ -10495,10 +10366,7 @@
                   <a:pPr/>
                   <a14:m>
                     <m:oMathPara xmlns:m="http://schemas.openxmlformats.org/officeDocument/2006/math">
-                      <m:oMathParaPr>
-                        <m:jc m:val="centerGroup"/>
-                      </m:oMathParaPr>
-                      <m:oMath xmlns:m="http://schemas.openxmlformats.org/officeDocument/2006/math">
+                      <m:oMath>
                         <m:d>
                           <m:dPr>
                             <m:begChr m:val="["/>
@@ -10747,10 +10615,7 @@
                   <a:pPr/>
                   <a14:m>
                     <m:oMathPara xmlns:m="http://schemas.openxmlformats.org/officeDocument/2006/math">
-                      <m:oMathParaPr>
-                        <m:jc m:val="centerGroup"/>
-                      </m:oMathParaPr>
-                      <m:oMath xmlns:m="http://schemas.openxmlformats.org/officeDocument/2006/math">
+                      <m:oMath>
                         <m:d>
                           <m:dPr>
                             <m:begChr m:val="["/>
@@ -11366,10 +11231,7 @@
                       <a:pPr/>
                       <a14:m>
                         <m:oMathPara xmlns:m="http://schemas.openxmlformats.org/officeDocument/2006/math">
-                          <m:oMathParaPr>
-                            <m:jc m:val="centerGroup"/>
-                          </m:oMathParaPr>
-                          <m:oMath xmlns:m="http://schemas.openxmlformats.org/officeDocument/2006/math">
+                          <m:oMath>
                             <m:r>
                               <a:rPr lang="en-US" altLang="zh-CN" sz="1000" b="0" i="1" smtClean="0">
                                 <a:latin typeface="Cambria Math" panose="02040503050406030204" pitchFamily="18" charset="0"/>
@@ -11479,10 +11341,7 @@
                       <a:pPr/>
                       <a14:m>
                         <m:oMathPara xmlns:m="http://schemas.openxmlformats.org/officeDocument/2006/math">
-                          <m:oMathParaPr>
-                            <m:jc m:val="centerGroup"/>
-                          </m:oMathParaPr>
-                          <m:oMath xmlns:m="http://schemas.openxmlformats.org/officeDocument/2006/math">
+                          <m:oMath>
                             <m:r>
                               <a:rPr lang="en-US" altLang="zh-CN" sz="1000" b="0" i="1" smtClean="0">
                                 <a:latin typeface="Cambria Math" panose="02040503050406030204" pitchFamily="18" charset="0"/>
@@ -11676,10 +11535,7 @@
                       <a:pPr/>
                       <a14:m>
                         <m:oMathPara xmlns:m="http://schemas.openxmlformats.org/officeDocument/2006/math">
-                          <m:oMathParaPr>
-                            <m:jc m:val="centerGroup"/>
-                          </m:oMathParaPr>
-                          <m:oMath xmlns:m="http://schemas.openxmlformats.org/officeDocument/2006/math">
+                          <m:oMath>
                             <m:r>
                               <a:rPr lang="en-US" altLang="zh-CN" sz="1000" b="0" i="1" smtClean="0">
                                 <a:latin typeface="Cambria Math" panose="02040503050406030204" pitchFamily="18" charset="0"/>
@@ -11843,10 +11699,7 @@
                       <a:pPr/>
                       <a14:m>
                         <m:oMathPara xmlns:m="http://schemas.openxmlformats.org/officeDocument/2006/math">
-                          <m:oMathParaPr>
-                            <m:jc m:val="centerGroup"/>
-                          </m:oMathParaPr>
-                          <m:oMath xmlns:m="http://schemas.openxmlformats.org/officeDocument/2006/math">
+                          <m:oMath>
                             <m:r>
                               <a:rPr lang="en-US" altLang="zh-CN" sz="1000" b="0" i="1" smtClean="0">
                                 <a:latin typeface="Cambria Math" panose="02040503050406030204" pitchFamily="18" charset="0"/>
@@ -12191,10 +12044,7 @@
                       <a:pPr/>
                       <a14:m>
                         <m:oMathPara xmlns:m="http://schemas.openxmlformats.org/officeDocument/2006/math">
-                          <m:oMathParaPr>
-                            <m:jc m:val="centerGroup"/>
-                          </m:oMathParaPr>
-                          <m:oMath xmlns:m="http://schemas.openxmlformats.org/officeDocument/2006/math">
+                          <m:oMath>
                             <m:r>
                               <a:rPr lang="en-US" altLang="zh-CN" sz="1000" b="0" i="1" smtClean="0">
                                 <a:latin typeface="Cambria Math" panose="02040503050406030204" pitchFamily="18" charset="0"/>
@@ -12310,10 +12160,7 @@
                       <a:pPr/>
                       <a14:m>
                         <m:oMathPara xmlns:m="http://schemas.openxmlformats.org/officeDocument/2006/math">
-                          <m:oMathParaPr>
-                            <m:jc m:val="centerGroup"/>
-                          </m:oMathParaPr>
-                          <m:oMath xmlns:m="http://schemas.openxmlformats.org/officeDocument/2006/math">
+                          <m:oMath>
                             <m:r>
                               <a:rPr lang="en-US" altLang="zh-CN" sz="1000" b="0" i="1" smtClean="0">
                                 <a:latin typeface="Cambria Math" panose="02040503050406030204" pitchFamily="18" charset="0"/>
@@ -12559,10 +12406,7 @@
                       <a:pPr/>
                       <a14:m>
                         <m:oMathPara xmlns:m="http://schemas.openxmlformats.org/officeDocument/2006/math">
-                          <m:oMathParaPr>
-                            <m:jc m:val="centerGroup"/>
-                          </m:oMathParaPr>
-                          <m:oMath xmlns:m="http://schemas.openxmlformats.org/officeDocument/2006/math">
+                          <m:oMath>
                             <m:r>
                               <a:rPr lang="en-US" altLang="zh-CN" sz="1000" b="0" i="1" smtClean="0">
                                 <a:latin typeface="Cambria Math" panose="02040503050406030204" pitchFamily="18" charset="0"/>
@@ -12703,10 +12547,7 @@
                       <a:pPr/>
                       <a14:m>
                         <m:oMathPara xmlns:m="http://schemas.openxmlformats.org/officeDocument/2006/math">
-                          <m:oMathParaPr>
-                            <m:jc m:val="centerGroup"/>
-                          </m:oMathParaPr>
-                          <m:oMath xmlns:m="http://schemas.openxmlformats.org/officeDocument/2006/math">
+                          <m:oMath>
                             <m:r>
                               <a:rPr lang="en-US" altLang="zh-CN" sz="1000" b="0" i="1" smtClean="0">
                                 <a:latin typeface="Cambria Math" panose="02040503050406030204" pitchFamily="18" charset="0"/>
@@ -12973,10 +12814,7 @@
                       <a:pPr/>
                       <a14:m>
                         <m:oMathPara xmlns:m="http://schemas.openxmlformats.org/officeDocument/2006/math">
-                          <m:oMathParaPr>
-                            <m:jc m:val="centerGroup"/>
-                          </m:oMathParaPr>
-                          <m:oMath xmlns:m="http://schemas.openxmlformats.org/officeDocument/2006/math">
+                          <m:oMath>
                             <m:r>
                               <a:rPr lang="en-US" altLang="zh-CN" sz="1000" b="0" i="1" smtClean="0">
                                 <a:latin typeface="Cambria Math" panose="02040503050406030204" pitchFamily="18" charset="0"/>
@@ -13086,10 +12924,7 @@
                       <a:pPr/>
                       <a14:m>
                         <m:oMathPara xmlns:m="http://schemas.openxmlformats.org/officeDocument/2006/math">
-                          <m:oMathParaPr>
-                            <m:jc m:val="centerGroup"/>
-                          </m:oMathParaPr>
-                          <m:oMath xmlns:m="http://schemas.openxmlformats.org/officeDocument/2006/math">
+                          <m:oMath>
                             <m:r>
                               <a:rPr lang="en-US" altLang="zh-CN" sz="1000" b="0" i="1" smtClean="0">
                                 <a:latin typeface="Cambria Math" panose="02040503050406030204" pitchFamily="18" charset="0"/>
@@ -13387,10 +13222,7 @@
                       <a:pPr/>
                       <a14:m>
                         <m:oMathPara xmlns:m="http://schemas.openxmlformats.org/officeDocument/2006/math">
-                          <m:oMathParaPr>
-                            <m:jc m:val="centerGroup"/>
-                          </m:oMathParaPr>
-                          <m:oMath xmlns:m="http://schemas.openxmlformats.org/officeDocument/2006/math">
+                          <m:oMath>
                             <m:r>
                               <a:rPr lang="en-US" altLang="zh-CN" sz="1000" b="0" i="1" smtClean="0">
                                 <a:latin typeface="Cambria Math" panose="02040503050406030204" pitchFamily="18" charset="0"/>
@@ -13531,10 +13363,7 @@
                       <a:pPr/>
                       <a14:m>
                         <m:oMathPara xmlns:m="http://schemas.openxmlformats.org/officeDocument/2006/math">
-                          <m:oMathParaPr>
-                            <m:jc m:val="centerGroup"/>
-                          </m:oMathParaPr>
-                          <m:oMath xmlns:m="http://schemas.openxmlformats.org/officeDocument/2006/math">
+                          <m:oMath>
                             <m:r>
                               <a:rPr lang="en-US" altLang="zh-CN" sz="1000" b="0" i="1" smtClean="0">
                                 <a:latin typeface="Cambria Math" panose="02040503050406030204" pitchFamily="18" charset="0"/>
@@ -13594,8 +13423,8 @@
                 </p:sp>
               </mc:Fallback>
             </mc:AlternateContent>
-            <mc:AlternateContent xmlns:mc="http://schemas.openxmlformats.org/markup-compatibility/2006">
-              <mc:Choice xmlns:a14="http://schemas.microsoft.com/office/drawing/2010/main" Requires="a14">
+            <mc:AlternateContent xmlns:mc="http://schemas.openxmlformats.org/markup-compatibility/2006" xmlns:a14="http://schemas.microsoft.com/office/drawing/2010/main">
+              <mc:Choice Requires="a14">
                 <p:sp>
                   <p:nvSpPr>
                     <p:cNvPr id="150" name="文本框 149">
@@ -13627,10 +13456,7 @@
                       <a:pPr/>
                       <a14:m>
                         <m:oMathPara xmlns:m="http://schemas.openxmlformats.org/officeDocument/2006/math">
-                          <m:oMathParaPr>
-                            <m:jc m:val="centerGroup"/>
-                          </m:oMathParaPr>
-                          <m:oMath xmlns:m="http://schemas.openxmlformats.org/officeDocument/2006/math">
+                          <m:oMath>
                             <m:r>
                               <a:rPr lang="en-US" altLang="zh-CN" sz="1000" b="0" i="1" smtClean="0">
                                 <a:latin typeface="Cambria Math" panose="02040503050406030204" pitchFamily="18" charset="0"/>
@@ -13662,7 +13488,7 @@
                   </p:txBody>
                 </p:sp>
               </mc:Choice>
-              <mc:Fallback>
+              <mc:Fallback xmlns="">
                 <p:sp>
                   <p:nvSpPr>
                     <p:cNvPr id="150" name="文本框 149">
@@ -13893,10 +13719,7 @@
                       <a:pPr/>
                       <a14:m>
                         <m:oMathPara xmlns:m="http://schemas.openxmlformats.org/officeDocument/2006/math">
-                          <m:oMathParaPr>
-                            <m:jc m:val="centerGroup"/>
-                          </m:oMathParaPr>
-                          <m:oMath xmlns:m="http://schemas.openxmlformats.org/officeDocument/2006/math">
+                          <m:oMath>
                             <m:r>
                               <a:rPr lang="en-US" altLang="zh-CN" sz="1000" b="0" i="1" smtClean="0">
                                 <a:latin typeface="Cambria Math" panose="02040503050406030204" pitchFamily="18" charset="0"/>
@@ -14006,10 +13829,7 @@
                       <a:pPr/>
                       <a14:m>
                         <m:oMathPara xmlns:m="http://schemas.openxmlformats.org/officeDocument/2006/math">
-                          <m:oMathParaPr>
-                            <m:jc m:val="centerGroup"/>
-                          </m:oMathParaPr>
-                          <m:oMath xmlns:m="http://schemas.openxmlformats.org/officeDocument/2006/math">
+                          <m:oMath>
                             <m:r>
                               <a:rPr lang="en-US" altLang="zh-CN" sz="1000" b="0" i="1" smtClean="0">
                                 <a:latin typeface="Cambria Math" panose="02040503050406030204" pitchFamily="18" charset="0"/>
@@ -14108,6 +13928,881 @@
           <a:chExt cx="0" cy="0"/>
         </a:xfrm>
       </p:grpSpPr>
+      <p:grpSp>
+        <p:nvGrpSpPr>
+          <p:cNvPr id="26" name="组合 25">
+            <a:extLst>
+              <a:ext uri="{FF2B5EF4-FFF2-40B4-BE49-F238E27FC236}">
+                <a16:creationId xmlns:a16="http://schemas.microsoft.com/office/drawing/2014/main" id="{48BD99E1-AE40-2744-D2E6-8B6238ED239E}"/>
+              </a:ext>
+            </a:extLst>
+          </p:cNvPr>
+          <p:cNvGrpSpPr/>
+          <p:nvPr/>
+        </p:nvGrpSpPr>
+        <p:grpSpPr>
+          <a:xfrm>
+            <a:off x="2772579" y="1497209"/>
+            <a:ext cx="2721842" cy="2311627"/>
+            <a:chOff x="2772579" y="1497209"/>
+            <a:chExt cx="2721842" cy="2311627"/>
+          </a:xfrm>
+        </p:grpSpPr>
+        <p:cxnSp>
+          <p:nvCxnSpPr>
+            <p:cNvPr id="3" name="直接箭头连接符 2">
+              <a:extLst>
+                <a:ext uri="{FF2B5EF4-FFF2-40B4-BE49-F238E27FC236}">
+                  <a16:creationId xmlns:a16="http://schemas.microsoft.com/office/drawing/2014/main" id="{F5282977-ED15-219C-AF3B-A40C8BB3A381}"/>
+                </a:ext>
+              </a:extLst>
+            </p:cNvPr>
+            <p:cNvCxnSpPr/>
+            <p:nvPr/>
+          </p:nvCxnSpPr>
+          <p:spPr>
+            <a:xfrm flipV="1">
+              <a:off x="3694421" y="1497209"/>
+              <a:ext cx="0" cy="1440000"/>
+            </a:xfrm>
+            <a:prstGeom prst="straightConnector1">
+              <a:avLst/>
+            </a:prstGeom>
+            <a:ln>
+              <a:tailEnd type="stealth"/>
+            </a:ln>
+          </p:spPr>
+          <p:style>
+            <a:lnRef idx="1">
+              <a:schemeClr val="dk1"/>
+            </a:lnRef>
+            <a:fillRef idx="0">
+              <a:schemeClr val="dk1"/>
+            </a:fillRef>
+            <a:effectRef idx="0">
+              <a:schemeClr val="dk1"/>
+            </a:effectRef>
+            <a:fontRef idx="minor">
+              <a:schemeClr val="tx1"/>
+            </a:fontRef>
+          </p:style>
+        </p:cxnSp>
+        <p:cxnSp>
+          <p:nvCxnSpPr>
+            <p:cNvPr id="4" name="直接箭头连接符 3">
+              <a:extLst>
+                <a:ext uri="{FF2B5EF4-FFF2-40B4-BE49-F238E27FC236}">
+                  <a16:creationId xmlns:a16="http://schemas.microsoft.com/office/drawing/2014/main" id="{10A43FD7-CF28-D1D5-6A4C-8CD38D804424}"/>
+                </a:ext>
+              </a:extLst>
+            </p:cNvPr>
+            <p:cNvCxnSpPr>
+              <a:cxnSpLocks/>
+            </p:cNvCxnSpPr>
+            <p:nvPr/>
+          </p:nvCxnSpPr>
+          <p:spPr>
+            <a:xfrm rot="5400000" flipV="1">
+              <a:off x="4594421" y="2037210"/>
+              <a:ext cx="0" cy="1800000"/>
+            </a:xfrm>
+            <a:prstGeom prst="straightConnector1">
+              <a:avLst/>
+            </a:prstGeom>
+            <a:ln>
+              <a:tailEnd type="stealth"/>
+            </a:ln>
+          </p:spPr>
+          <p:style>
+            <a:lnRef idx="1">
+              <a:schemeClr val="dk1"/>
+            </a:lnRef>
+            <a:fillRef idx="0">
+              <a:schemeClr val="dk1"/>
+            </a:fillRef>
+            <a:effectRef idx="0">
+              <a:schemeClr val="dk1"/>
+            </a:effectRef>
+            <a:fontRef idx="minor">
+              <a:schemeClr val="tx1"/>
+            </a:fontRef>
+          </p:style>
+        </p:cxnSp>
+        <p:cxnSp>
+          <p:nvCxnSpPr>
+            <p:cNvPr id="5" name="直接箭头连接符 4">
+              <a:extLst>
+                <a:ext uri="{FF2B5EF4-FFF2-40B4-BE49-F238E27FC236}">
+                  <a16:creationId xmlns:a16="http://schemas.microsoft.com/office/drawing/2014/main" id="{7A733C37-CDC1-E8FA-BA7E-D6ABF33C3966}"/>
+                </a:ext>
+              </a:extLst>
+            </p:cNvPr>
+            <p:cNvCxnSpPr>
+              <a:cxnSpLocks/>
+            </p:cNvCxnSpPr>
+            <p:nvPr/>
+          </p:nvCxnSpPr>
+          <p:spPr>
+            <a:xfrm rot="-8100000" flipV="1">
+              <a:off x="3312579" y="2779047"/>
+              <a:ext cx="0" cy="1080000"/>
+            </a:xfrm>
+            <a:prstGeom prst="straightConnector1">
+              <a:avLst/>
+            </a:prstGeom>
+            <a:ln>
+              <a:tailEnd type="stealth"/>
+            </a:ln>
+          </p:spPr>
+          <p:style>
+            <a:lnRef idx="1">
+              <a:schemeClr val="dk1"/>
+            </a:lnRef>
+            <a:fillRef idx="0">
+              <a:schemeClr val="dk1"/>
+            </a:fillRef>
+            <a:effectRef idx="0">
+              <a:schemeClr val="dk1"/>
+            </a:effectRef>
+            <a:fontRef idx="minor">
+              <a:schemeClr val="tx1"/>
+            </a:fontRef>
+          </p:style>
+        </p:cxnSp>
+        <p:cxnSp>
+          <p:nvCxnSpPr>
+            <p:cNvPr id="10" name="直接箭头连接符 9">
+              <a:extLst>
+                <a:ext uri="{FF2B5EF4-FFF2-40B4-BE49-F238E27FC236}">
+                  <a16:creationId xmlns:a16="http://schemas.microsoft.com/office/drawing/2014/main" id="{F0F8BC8E-5F84-75E1-37A8-2C9BC5F4946F}"/>
+                </a:ext>
+              </a:extLst>
+            </p:cNvPr>
+            <p:cNvCxnSpPr>
+              <a:cxnSpLocks/>
+            </p:cNvCxnSpPr>
+            <p:nvPr/>
+          </p:nvCxnSpPr>
+          <p:spPr>
+            <a:xfrm rot="3600000" flipV="1">
+              <a:off x="4317957" y="1857209"/>
+              <a:ext cx="0" cy="1440000"/>
+            </a:xfrm>
+            <a:prstGeom prst="straightConnector1">
+              <a:avLst/>
+            </a:prstGeom>
+            <a:ln>
+              <a:tailEnd type="stealth"/>
+            </a:ln>
+          </p:spPr>
+          <p:style>
+            <a:lnRef idx="1">
+              <a:schemeClr val="dk1"/>
+            </a:lnRef>
+            <a:fillRef idx="0">
+              <a:schemeClr val="dk1"/>
+            </a:fillRef>
+            <a:effectRef idx="0">
+              <a:schemeClr val="dk1"/>
+            </a:effectRef>
+            <a:fontRef idx="minor">
+              <a:schemeClr val="tx1"/>
+            </a:fontRef>
+          </p:style>
+        </p:cxnSp>
+        <p:cxnSp>
+          <p:nvCxnSpPr>
+            <p:cNvPr id="13" name="直接连接符 12">
+              <a:extLst>
+                <a:ext uri="{FF2B5EF4-FFF2-40B4-BE49-F238E27FC236}">
+                  <a16:creationId xmlns:a16="http://schemas.microsoft.com/office/drawing/2014/main" id="{EF3A0186-59CA-9F19-582B-2402F8694945}"/>
+                </a:ext>
+              </a:extLst>
+            </p:cNvPr>
+            <p:cNvCxnSpPr>
+              <a:cxnSpLocks/>
+            </p:cNvCxnSpPr>
+            <p:nvPr/>
+          </p:nvCxnSpPr>
+          <p:spPr>
+            <a:xfrm>
+              <a:off x="4941496" y="2217209"/>
+              <a:ext cx="0" cy="1343871"/>
+            </a:xfrm>
+            <a:prstGeom prst="line">
+              <a:avLst/>
+            </a:prstGeom>
+            <a:ln>
+              <a:solidFill>
+                <a:schemeClr val="tx1"/>
+              </a:solidFill>
+              <a:prstDash val="dash"/>
+            </a:ln>
+          </p:spPr>
+          <p:style>
+            <a:lnRef idx="1">
+              <a:schemeClr val="accent1"/>
+            </a:lnRef>
+            <a:fillRef idx="0">
+              <a:schemeClr val="accent1"/>
+            </a:fillRef>
+            <a:effectRef idx="0">
+              <a:schemeClr val="accent1"/>
+            </a:effectRef>
+            <a:fontRef idx="minor">
+              <a:schemeClr val="tx1"/>
+            </a:fontRef>
+          </p:style>
+        </p:cxnSp>
+        <p:cxnSp>
+          <p:nvCxnSpPr>
+            <p:cNvPr id="15" name="直接连接符 14">
+              <a:extLst>
+                <a:ext uri="{FF2B5EF4-FFF2-40B4-BE49-F238E27FC236}">
+                  <a16:creationId xmlns:a16="http://schemas.microsoft.com/office/drawing/2014/main" id="{7B448254-EA17-1571-7F6E-B57C10E4FF6E}"/>
+                </a:ext>
+              </a:extLst>
+            </p:cNvPr>
+            <p:cNvCxnSpPr>
+              <a:cxnSpLocks/>
+            </p:cNvCxnSpPr>
+            <p:nvPr/>
+          </p:nvCxnSpPr>
+          <p:spPr>
+            <a:xfrm>
+              <a:off x="3694418" y="2937209"/>
+              <a:ext cx="1247078" cy="623871"/>
+            </a:xfrm>
+            <a:prstGeom prst="line">
+              <a:avLst/>
+            </a:prstGeom>
+            <a:ln>
+              <a:solidFill>
+                <a:schemeClr val="tx1"/>
+              </a:solidFill>
+              <a:prstDash val="dash"/>
+            </a:ln>
+          </p:spPr>
+          <p:style>
+            <a:lnRef idx="1">
+              <a:schemeClr val="accent1"/>
+            </a:lnRef>
+            <a:fillRef idx="0">
+              <a:schemeClr val="accent1"/>
+            </a:fillRef>
+            <a:effectRef idx="0">
+              <a:schemeClr val="accent1"/>
+            </a:effectRef>
+            <a:fontRef idx="minor">
+              <a:schemeClr val="tx1"/>
+            </a:fontRef>
+          </p:style>
+        </p:cxnSp>
+        <p:sp>
+          <p:nvSpPr>
+            <p:cNvPr id="17" name="弧形 16">
+              <a:extLst>
+                <a:ext uri="{FF2B5EF4-FFF2-40B4-BE49-F238E27FC236}">
+                  <a16:creationId xmlns:a16="http://schemas.microsoft.com/office/drawing/2014/main" id="{714C2AAA-F18D-E975-BD87-4DB506B175FE}"/>
+                </a:ext>
+              </a:extLst>
+            </p:cNvPr>
+            <p:cNvSpPr/>
+            <p:nvPr/>
+          </p:nvSpPr>
+          <p:spPr>
+            <a:xfrm>
+              <a:off x="3586467" y="2829259"/>
+              <a:ext cx="215900" cy="215900"/>
+            </a:xfrm>
+            <a:prstGeom prst="arc">
+              <a:avLst>
+                <a:gd name="adj1" fmla="val 1675703"/>
+                <a:gd name="adj2" fmla="val 8136952"/>
+              </a:avLst>
+            </a:prstGeom>
+            <a:ln>
+              <a:solidFill>
+                <a:schemeClr val="tx1"/>
+              </a:solidFill>
+            </a:ln>
+          </p:spPr>
+          <p:style>
+            <a:lnRef idx="1">
+              <a:schemeClr val="accent1"/>
+            </a:lnRef>
+            <a:fillRef idx="0">
+              <a:schemeClr val="accent1"/>
+            </a:fillRef>
+            <a:effectRef idx="0">
+              <a:schemeClr val="accent1"/>
+            </a:effectRef>
+            <a:fontRef idx="minor">
+              <a:schemeClr val="tx1"/>
+            </a:fontRef>
+          </p:style>
+          <p:txBody>
+            <a:bodyPr rtlCol="0" anchor="ctr"/>
+            <a:lstStyle/>
+            <a:p>
+              <a:pPr algn="ctr"/>
+              <a:endParaRPr lang="zh-CN" altLang="en-US"/>
+            </a:p>
+          </p:txBody>
+        </p:sp>
+        <mc:AlternateContent xmlns:mc="http://schemas.openxmlformats.org/markup-compatibility/2006">
+          <mc:Choice xmlns:a14="http://schemas.microsoft.com/office/drawing/2010/main" Requires="a14">
+            <p:sp>
+              <p:nvSpPr>
+                <p:cNvPr id="20" name="文本框 19">
+                  <a:extLst>
+                    <a:ext uri="{FF2B5EF4-FFF2-40B4-BE49-F238E27FC236}">
+                      <a16:creationId xmlns:a16="http://schemas.microsoft.com/office/drawing/2014/main" id="{45933B46-1CF3-5E46-B3B2-DD1A437E47B1}"/>
+                    </a:ext>
+                  </a:extLst>
+                </p:cNvPr>
+                <p:cNvSpPr txBox="1"/>
+                <p:nvPr/>
+              </p:nvSpPr>
+              <p:spPr>
+                <a:xfrm>
+                  <a:off x="3587436" y="3046510"/>
+                  <a:ext cx="214931" cy="276999"/>
+                </a:xfrm>
+                <a:prstGeom prst="rect">
+                  <a:avLst/>
+                </a:prstGeom>
+                <a:noFill/>
+              </p:spPr>
+              <p:txBody>
+                <a:bodyPr wrap="none" lIns="0" tIns="0" rIns="0" bIns="0" rtlCol="0">
+                  <a:spAutoFit/>
+                </a:bodyPr>
+                <a:lstStyle/>
+                <a:p>
+                  <a14:m>
+                    <m:oMathPara xmlns:m="http://schemas.openxmlformats.org/officeDocument/2006/math">
+                      <m:oMath>
+                        <m:r>
+                          <a:rPr lang="en-US" altLang="zh-CN" b="0" i="1" smtClean="0">
+                            <a:latin typeface="Cambria Math" panose="02040503050406030204" pitchFamily="18" charset="0"/>
+                          </a:rPr>
+                          <m:t>𝜙</m:t>
+                        </m:r>
+                      </m:oMath>
+                    </m:oMathPara>
+                  </a14:m>
+                  <a:endParaRPr lang="en-US" altLang="zh-CN" b="0" dirty="0"/>
+                </a:p>
+              </p:txBody>
+            </p:sp>
+          </mc:Choice>
+          <mc:Fallback>
+            <p:sp>
+              <p:nvSpPr>
+                <p:cNvPr id="20" name="文本框 19">
+                  <a:extLst>
+                    <a:ext uri="{FF2B5EF4-FFF2-40B4-BE49-F238E27FC236}">
+                      <a16:creationId xmlns:a16="http://schemas.microsoft.com/office/drawing/2014/main" id="{45933B46-1CF3-5E46-B3B2-DD1A437E47B1}"/>
+                    </a:ext>
+                  </a:extLst>
+                </p:cNvPr>
+                <p:cNvSpPr txBox="1">
+                  <a:spLocks noRot="1" noChangeAspect="1" noMove="1" noResize="1" noEditPoints="1" noAdjustHandles="1" noChangeArrowheads="1" noChangeShapeType="1" noTextEdit="1"/>
+                </p:cNvSpPr>
+                <p:nvPr/>
+              </p:nvSpPr>
+              <p:spPr>
+                <a:xfrm>
+                  <a:off x="3587436" y="3046510"/>
+                  <a:ext cx="214931" cy="276999"/>
+                </a:xfrm>
+                <a:prstGeom prst="rect">
+                  <a:avLst/>
+                </a:prstGeom>
+                <a:blipFill>
+                  <a:blip r:embed="rId2"/>
+                  <a:stretch>
+                    <a:fillRect l="-36111" r="-33333" b="-33333"/>
+                  </a:stretch>
+                </a:blipFill>
+              </p:spPr>
+              <p:txBody>
+                <a:bodyPr/>
+                <a:lstStyle/>
+                <a:p>
+                  <a:r>
+                    <a:rPr lang="zh-CN" altLang="en-US">
+                      <a:noFill/>
+                    </a:rPr>
+                    <a:t> </a:t>
+                  </a:r>
+                </a:p>
+              </p:txBody>
+            </p:sp>
+          </mc:Fallback>
+        </mc:AlternateContent>
+        <mc:AlternateContent xmlns:mc="http://schemas.openxmlformats.org/markup-compatibility/2006">
+          <mc:Choice xmlns:a14="http://schemas.microsoft.com/office/drawing/2010/main" Requires="a14">
+            <p:sp>
+              <p:nvSpPr>
+                <p:cNvPr id="21" name="文本框 20">
+                  <a:extLst>
+                    <a:ext uri="{FF2B5EF4-FFF2-40B4-BE49-F238E27FC236}">
+                      <a16:creationId xmlns:a16="http://schemas.microsoft.com/office/drawing/2014/main" id="{E8AC7716-59F8-69C3-5B93-3E013F917F72}"/>
+                    </a:ext>
+                  </a:extLst>
+                </p:cNvPr>
+                <p:cNvSpPr txBox="1"/>
+                <p:nvPr/>
+              </p:nvSpPr>
+              <p:spPr>
+                <a:xfrm>
+                  <a:off x="4388572" y="3045159"/>
+                  <a:ext cx="166969" cy="276999"/>
+                </a:xfrm>
+                <a:prstGeom prst="rect">
+                  <a:avLst/>
+                </a:prstGeom>
+                <a:noFill/>
+              </p:spPr>
+              <p:txBody>
+                <a:bodyPr wrap="none" lIns="0" tIns="0" rIns="0" bIns="0" rtlCol="0">
+                  <a:spAutoFit/>
+                </a:bodyPr>
+                <a:lstStyle/>
+                <a:p>
+                  <a14:m>
+                    <m:oMathPara xmlns:m="http://schemas.openxmlformats.org/officeDocument/2006/math">
+                      <m:oMath>
+                        <m:r>
+                          <a:rPr lang="en-US" altLang="zh-CN" b="0" i="1" smtClean="0">
+                            <a:latin typeface="Cambria Math" panose="02040503050406030204" pitchFamily="18" charset="0"/>
+                          </a:rPr>
+                          <m:t>𝑟</m:t>
+                        </m:r>
+                      </m:oMath>
+                    </m:oMathPara>
+                  </a14:m>
+                  <a:endParaRPr lang="en-US" altLang="zh-CN" b="0" dirty="0"/>
+                </a:p>
+              </p:txBody>
+            </p:sp>
+          </mc:Choice>
+          <mc:Fallback>
+            <p:sp>
+              <p:nvSpPr>
+                <p:cNvPr id="21" name="文本框 20">
+                  <a:extLst>
+                    <a:ext uri="{FF2B5EF4-FFF2-40B4-BE49-F238E27FC236}">
+                      <a16:creationId xmlns:a16="http://schemas.microsoft.com/office/drawing/2014/main" id="{E8AC7716-59F8-69C3-5B93-3E013F917F72}"/>
+                    </a:ext>
+                  </a:extLst>
+                </p:cNvPr>
+                <p:cNvSpPr txBox="1">
+                  <a:spLocks noRot="1" noChangeAspect="1" noMove="1" noResize="1" noEditPoints="1" noAdjustHandles="1" noChangeArrowheads="1" noChangeShapeType="1" noTextEdit="1"/>
+                </p:cNvSpPr>
+                <p:nvPr/>
+              </p:nvSpPr>
+              <p:spPr>
+                <a:xfrm>
+                  <a:off x="4388572" y="3045159"/>
+                  <a:ext cx="166969" cy="276999"/>
+                </a:xfrm>
+                <a:prstGeom prst="rect">
+                  <a:avLst/>
+                </a:prstGeom>
+                <a:blipFill>
+                  <a:blip r:embed="rId3"/>
+                  <a:stretch>
+                    <a:fillRect l="-22222" r="-18519"/>
+                  </a:stretch>
+                </a:blipFill>
+              </p:spPr>
+              <p:txBody>
+                <a:bodyPr/>
+                <a:lstStyle/>
+                <a:p>
+                  <a:r>
+                    <a:rPr lang="zh-CN" altLang="en-US">
+                      <a:noFill/>
+                    </a:rPr>
+                    <a:t> </a:t>
+                  </a:r>
+                </a:p>
+              </p:txBody>
+            </p:sp>
+          </mc:Fallback>
+        </mc:AlternateContent>
+        <mc:AlternateContent xmlns:mc="http://schemas.openxmlformats.org/markup-compatibility/2006">
+          <mc:Choice xmlns:a14="http://schemas.microsoft.com/office/drawing/2010/main" Requires="a14">
+            <p:sp>
+              <p:nvSpPr>
+                <p:cNvPr id="22" name="文本框 21">
+                  <a:extLst>
+                    <a:ext uri="{FF2B5EF4-FFF2-40B4-BE49-F238E27FC236}">
+                      <a16:creationId xmlns:a16="http://schemas.microsoft.com/office/drawing/2014/main" id="{1D7F56C1-2BBC-F43D-0B1D-B89CA2E48EC4}"/>
+                    </a:ext>
+                  </a:extLst>
+                </p:cNvPr>
+                <p:cNvSpPr txBox="1"/>
+                <p:nvPr/>
+              </p:nvSpPr>
+              <p:spPr>
+                <a:xfrm>
+                  <a:off x="4741843" y="2636177"/>
+                  <a:ext cx="169084" cy="276999"/>
+                </a:xfrm>
+                <a:prstGeom prst="rect">
+                  <a:avLst/>
+                </a:prstGeom>
+                <a:noFill/>
+              </p:spPr>
+              <p:txBody>
+                <a:bodyPr wrap="none" lIns="0" tIns="0" rIns="0" bIns="0" rtlCol="0">
+                  <a:spAutoFit/>
+                </a:bodyPr>
+                <a:lstStyle/>
+                <a:p>
+                  <a14:m>
+                    <m:oMathPara xmlns:m="http://schemas.openxmlformats.org/officeDocument/2006/math">
+                      <m:oMath>
+                        <m:r>
+                          <a:rPr lang="en-US" altLang="zh-CN" b="0" i="1" smtClean="0">
+                            <a:latin typeface="Cambria Math" panose="02040503050406030204" pitchFamily="18" charset="0"/>
+                          </a:rPr>
+                          <m:t>𝑧</m:t>
+                        </m:r>
+                      </m:oMath>
+                    </m:oMathPara>
+                  </a14:m>
+                  <a:endParaRPr lang="en-US" altLang="zh-CN" b="0" dirty="0"/>
+                </a:p>
+              </p:txBody>
+            </p:sp>
+          </mc:Choice>
+          <mc:Fallback>
+            <p:sp>
+              <p:nvSpPr>
+                <p:cNvPr id="22" name="文本框 21">
+                  <a:extLst>
+                    <a:ext uri="{FF2B5EF4-FFF2-40B4-BE49-F238E27FC236}">
+                      <a16:creationId xmlns:a16="http://schemas.microsoft.com/office/drawing/2014/main" id="{1D7F56C1-2BBC-F43D-0B1D-B89CA2E48EC4}"/>
+                    </a:ext>
+                  </a:extLst>
+                </p:cNvPr>
+                <p:cNvSpPr txBox="1">
+                  <a:spLocks noRot="1" noChangeAspect="1" noMove="1" noResize="1" noEditPoints="1" noAdjustHandles="1" noChangeArrowheads="1" noChangeShapeType="1" noTextEdit="1"/>
+                </p:cNvSpPr>
+                <p:nvPr/>
+              </p:nvSpPr>
+              <p:spPr>
+                <a:xfrm>
+                  <a:off x="4741843" y="2636177"/>
+                  <a:ext cx="169084" cy="276999"/>
+                </a:xfrm>
+                <a:prstGeom prst="rect">
+                  <a:avLst/>
+                </a:prstGeom>
+                <a:blipFill>
+                  <a:blip r:embed="rId4"/>
+                  <a:stretch>
+                    <a:fillRect l="-21429" r="-14286"/>
+                  </a:stretch>
+                </a:blipFill>
+              </p:spPr>
+              <p:txBody>
+                <a:bodyPr/>
+                <a:lstStyle/>
+                <a:p>
+                  <a:r>
+                    <a:rPr lang="zh-CN" altLang="en-US">
+                      <a:noFill/>
+                    </a:rPr>
+                    <a:t> </a:t>
+                  </a:r>
+                </a:p>
+              </p:txBody>
+            </p:sp>
+          </mc:Fallback>
+        </mc:AlternateContent>
+        <mc:AlternateContent xmlns:mc="http://schemas.openxmlformats.org/markup-compatibility/2006">
+          <mc:Choice xmlns:a14="http://schemas.microsoft.com/office/drawing/2010/main" Requires="a14">
+            <p:sp>
+              <p:nvSpPr>
+                <p:cNvPr id="23" name="文本框 22">
+                  <a:extLst>
+                    <a:ext uri="{FF2B5EF4-FFF2-40B4-BE49-F238E27FC236}">
+                      <a16:creationId xmlns:a16="http://schemas.microsoft.com/office/drawing/2014/main" id="{433E7A93-E43B-6242-3D71-94406C549C04}"/>
+                    </a:ext>
+                  </a:extLst>
+                </p:cNvPr>
+                <p:cNvSpPr txBox="1"/>
+                <p:nvPr/>
+              </p:nvSpPr>
+              <p:spPr>
+                <a:xfrm>
+                  <a:off x="3033313" y="3531837"/>
+                  <a:ext cx="183320" cy="276999"/>
+                </a:xfrm>
+                <a:prstGeom prst="rect">
+                  <a:avLst/>
+                </a:prstGeom>
+                <a:noFill/>
+              </p:spPr>
+              <p:txBody>
+                <a:bodyPr wrap="none" lIns="0" tIns="0" rIns="0" bIns="0" rtlCol="0">
+                  <a:spAutoFit/>
+                </a:bodyPr>
+                <a:lstStyle/>
+                <a:p>
+                  <a14:m>
+                    <m:oMathPara xmlns:m="http://schemas.openxmlformats.org/officeDocument/2006/math">
+                      <m:oMath>
+                        <m:r>
+                          <a:rPr lang="en-US" altLang="zh-CN" b="0" i="1" smtClean="0">
+                            <a:latin typeface="Cambria Math" panose="02040503050406030204" pitchFamily="18" charset="0"/>
+                          </a:rPr>
+                          <m:t>𝑥</m:t>
+                        </m:r>
+                      </m:oMath>
+                    </m:oMathPara>
+                  </a14:m>
+                  <a:endParaRPr lang="en-US" altLang="zh-CN" b="0" dirty="0"/>
+                </a:p>
+              </p:txBody>
+            </p:sp>
+          </mc:Choice>
+          <mc:Fallback>
+            <p:sp>
+              <p:nvSpPr>
+                <p:cNvPr id="23" name="文本框 22">
+                  <a:extLst>
+                    <a:ext uri="{FF2B5EF4-FFF2-40B4-BE49-F238E27FC236}">
+                      <a16:creationId xmlns:a16="http://schemas.microsoft.com/office/drawing/2014/main" id="{433E7A93-E43B-6242-3D71-94406C549C04}"/>
+                    </a:ext>
+                  </a:extLst>
+                </p:cNvPr>
+                <p:cNvSpPr txBox="1">
+                  <a:spLocks noRot="1" noChangeAspect="1" noMove="1" noResize="1" noEditPoints="1" noAdjustHandles="1" noChangeArrowheads="1" noChangeShapeType="1" noTextEdit="1"/>
+                </p:cNvSpPr>
+                <p:nvPr/>
+              </p:nvSpPr>
+              <p:spPr>
+                <a:xfrm>
+                  <a:off x="3033313" y="3531837"/>
+                  <a:ext cx="183320" cy="276999"/>
+                </a:xfrm>
+                <a:prstGeom prst="rect">
+                  <a:avLst/>
+                </a:prstGeom>
+                <a:blipFill>
+                  <a:blip r:embed="rId5"/>
+                  <a:stretch>
+                    <a:fillRect l="-20000" r="-13333"/>
+                  </a:stretch>
+                </a:blipFill>
+              </p:spPr>
+              <p:txBody>
+                <a:bodyPr/>
+                <a:lstStyle/>
+                <a:p>
+                  <a:r>
+                    <a:rPr lang="zh-CN" altLang="en-US">
+                      <a:noFill/>
+                    </a:rPr>
+                    <a:t> </a:t>
+                  </a:r>
+                </a:p>
+              </p:txBody>
+            </p:sp>
+          </mc:Fallback>
+        </mc:AlternateContent>
+        <mc:AlternateContent xmlns:mc="http://schemas.openxmlformats.org/markup-compatibility/2006">
+          <mc:Choice xmlns:a14="http://schemas.microsoft.com/office/drawing/2010/main" Requires="a14">
+            <p:sp>
+              <p:nvSpPr>
+                <p:cNvPr id="24" name="文本框 23">
+                  <a:extLst>
+                    <a:ext uri="{FF2B5EF4-FFF2-40B4-BE49-F238E27FC236}">
+                      <a16:creationId xmlns:a16="http://schemas.microsoft.com/office/drawing/2014/main" id="{864E54B0-CF78-AB54-E729-DDE31417025A}"/>
+                    </a:ext>
+                  </a:extLst>
+                </p:cNvPr>
+                <p:cNvSpPr txBox="1"/>
+                <p:nvPr/>
+              </p:nvSpPr>
+              <p:spPr>
+                <a:xfrm>
+                  <a:off x="5284956" y="2889144"/>
+                  <a:ext cx="186718" cy="276999"/>
+                </a:xfrm>
+                <a:prstGeom prst="rect">
+                  <a:avLst/>
+                </a:prstGeom>
+                <a:noFill/>
+              </p:spPr>
+              <p:txBody>
+                <a:bodyPr wrap="none" lIns="0" tIns="0" rIns="0" bIns="0" rtlCol="0">
+                  <a:spAutoFit/>
+                </a:bodyPr>
+                <a:lstStyle/>
+                <a:p>
+                  <a14:m>
+                    <m:oMathPara xmlns:m="http://schemas.openxmlformats.org/officeDocument/2006/math">
+                      <m:oMath>
+                        <m:r>
+                          <a:rPr lang="en-US" altLang="zh-CN" b="0" i="1" smtClean="0">
+                            <a:latin typeface="Cambria Math" panose="02040503050406030204" pitchFamily="18" charset="0"/>
+                          </a:rPr>
+                          <m:t>𝑦</m:t>
+                        </m:r>
+                      </m:oMath>
+                    </m:oMathPara>
+                  </a14:m>
+                  <a:endParaRPr lang="en-US" altLang="zh-CN" b="0" dirty="0"/>
+                </a:p>
+              </p:txBody>
+            </p:sp>
+          </mc:Choice>
+          <mc:Fallback>
+            <p:sp>
+              <p:nvSpPr>
+                <p:cNvPr id="24" name="文本框 23">
+                  <a:extLst>
+                    <a:ext uri="{FF2B5EF4-FFF2-40B4-BE49-F238E27FC236}">
+                      <a16:creationId xmlns:a16="http://schemas.microsoft.com/office/drawing/2014/main" id="{864E54B0-CF78-AB54-E729-DDE31417025A}"/>
+                    </a:ext>
+                  </a:extLst>
+                </p:cNvPr>
+                <p:cNvSpPr txBox="1">
+                  <a:spLocks noRot="1" noChangeAspect="1" noMove="1" noResize="1" noEditPoints="1" noAdjustHandles="1" noChangeArrowheads="1" noChangeShapeType="1" noTextEdit="1"/>
+                </p:cNvSpPr>
+                <p:nvPr/>
+              </p:nvSpPr>
+              <p:spPr>
+                <a:xfrm>
+                  <a:off x="5284956" y="2889144"/>
+                  <a:ext cx="186718" cy="276999"/>
+                </a:xfrm>
+                <a:prstGeom prst="rect">
+                  <a:avLst/>
+                </a:prstGeom>
+                <a:blipFill>
+                  <a:blip r:embed="rId6"/>
+                  <a:stretch>
+                    <a:fillRect l="-32258" r="-25806" b="-26667"/>
+                  </a:stretch>
+                </a:blipFill>
+              </p:spPr>
+              <p:txBody>
+                <a:bodyPr/>
+                <a:lstStyle/>
+                <a:p>
+                  <a:r>
+                    <a:rPr lang="zh-CN" altLang="en-US">
+                      <a:noFill/>
+                    </a:rPr>
+                    <a:t> </a:t>
+                  </a:r>
+                </a:p>
+              </p:txBody>
+            </p:sp>
+          </mc:Fallback>
+        </mc:AlternateContent>
+        <mc:AlternateContent xmlns:mc="http://schemas.openxmlformats.org/markup-compatibility/2006">
+          <mc:Choice xmlns:a14="http://schemas.microsoft.com/office/drawing/2010/main" Requires="a14">
+            <p:sp>
+              <p:nvSpPr>
+                <p:cNvPr id="25" name="文本框 24">
+                  <a:extLst>
+                    <a:ext uri="{FF2B5EF4-FFF2-40B4-BE49-F238E27FC236}">
+                      <a16:creationId xmlns:a16="http://schemas.microsoft.com/office/drawing/2014/main" id="{C35A6BB2-C455-3029-8A26-862EB541C39F}"/>
+                    </a:ext>
+                  </a:extLst>
+                </p:cNvPr>
+                <p:cNvSpPr txBox="1"/>
+                <p:nvPr/>
+              </p:nvSpPr>
+              <p:spPr>
+                <a:xfrm>
+                  <a:off x="3717825" y="1497209"/>
+                  <a:ext cx="169084" cy="276999"/>
+                </a:xfrm>
+                <a:prstGeom prst="rect">
+                  <a:avLst/>
+                </a:prstGeom>
+                <a:noFill/>
+              </p:spPr>
+              <p:txBody>
+                <a:bodyPr wrap="none" lIns="0" tIns="0" rIns="0" bIns="0" rtlCol="0">
+                  <a:spAutoFit/>
+                </a:bodyPr>
+                <a:lstStyle/>
+                <a:p>
+                  <a14:m>
+                    <m:oMathPara xmlns:m="http://schemas.openxmlformats.org/officeDocument/2006/math">
+                      <m:oMath>
+                        <m:r>
+                          <a:rPr lang="en-US" altLang="zh-CN" b="0" i="1" smtClean="0">
+                            <a:latin typeface="Cambria Math" panose="02040503050406030204" pitchFamily="18" charset="0"/>
+                          </a:rPr>
+                          <m:t>𝑧</m:t>
+                        </m:r>
+                      </m:oMath>
+                    </m:oMathPara>
+                  </a14:m>
+                  <a:endParaRPr lang="en-US" altLang="zh-CN" b="0" dirty="0"/>
+                </a:p>
+              </p:txBody>
+            </p:sp>
+          </mc:Choice>
+          <mc:Fallback>
+            <p:sp>
+              <p:nvSpPr>
+                <p:cNvPr id="25" name="文本框 24">
+                  <a:extLst>
+                    <a:ext uri="{FF2B5EF4-FFF2-40B4-BE49-F238E27FC236}">
+                      <a16:creationId xmlns:a16="http://schemas.microsoft.com/office/drawing/2014/main" id="{C35A6BB2-C455-3029-8A26-862EB541C39F}"/>
+                    </a:ext>
+                  </a:extLst>
+                </p:cNvPr>
+                <p:cNvSpPr txBox="1">
+                  <a:spLocks noRot="1" noChangeAspect="1" noMove="1" noResize="1" noEditPoints="1" noAdjustHandles="1" noChangeArrowheads="1" noChangeShapeType="1" noTextEdit="1"/>
+                </p:cNvSpPr>
+                <p:nvPr/>
+              </p:nvSpPr>
+              <p:spPr>
+                <a:xfrm>
+                  <a:off x="3717825" y="1497209"/>
+                  <a:ext cx="169084" cy="276999"/>
+                </a:xfrm>
+                <a:prstGeom prst="rect">
+                  <a:avLst/>
+                </a:prstGeom>
+                <a:blipFill>
+                  <a:blip r:embed="rId7"/>
+                  <a:stretch>
+                    <a:fillRect l="-21429" r="-14286"/>
+                  </a:stretch>
+                </a:blipFill>
+              </p:spPr>
+              <p:txBody>
+                <a:bodyPr/>
+                <a:lstStyle/>
+                <a:p>
+                  <a:r>
+                    <a:rPr lang="zh-CN" altLang="en-US">
+                      <a:noFill/>
+                    </a:rPr>
+                    <a:t> </a:t>
+                  </a:r>
+                </a:p>
+              </p:txBody>
+            </p:sp>
+          </mc:Fallback>
+        </mc:AlternateContent>
+      </p:grpSp>
     </p:spTree>
     <p:extLst>
       <p:ext uri="{BB962C8B-B14F-4D97-AF65-F5344CB8AC3E}">

--- a/PPT/math.pptx
+++ b/PPT/math.pptx
@@ -247,7 +247,7 @@
           <a:p>
             <a:fld id="{D997B5FA-0921-464F-AAE1-844C04324D75}" type="datetimeFigureOut">
               <a:rPr lang="zh-CN" altLang="en-US" smtClean="0"/>
-              <a:t>2026-09-28</a:t>
+              <a:t>2026-10-01</a:t>
             </a:fld>
             <a:endParaRPr lang="zh-CN" altLang="en-US"/>
           </a:p>
@@ -410,7 +410,7 @@
           <a:p>
             <a:fld id="{D997B5FA-0921-464F-AAE1-844C04324D75}" type="datetimeFigureOut">
               <a:rPr lang="zh-CN" altLang="en-US" smtClean="0"/>
-              <a:t>2026-09-28</a:t>
+              <a:t>2026-10-01</a:t>
             </a:fld>
             <a:endParaRPr lang="zh-CN" altLang="en-US"/>
           </a:p>
@@ -583,7 +583,7 @@
           <a:p>
             <a:fld id="{D997B5FA-0921-464F-AAE1-844C04324D75}" type="datetimeFigureOut">
               <a:rPr lang="zh-CN" altLang="en-US" smtClean="0"/>
-              <a:t>2026-09-28</a:t>
+              <a:t>2026-10-01</a:t>
             </a:fld>
             <a:endParaRPr lang="zh-CN" altLang="en-US"/>
           </a:p>
@@ -746,7 +746,7 @@
           <a:p>
             <a:fld id="{D997B5FA-0921-464F-AAE1-844C04324D75}" type="datetimeFigureOut">
               <a:rPr lang="zh-CN" altLang="en-US" smtClean="0"/>
-              <a:t>2026-09-28</a:t>
+              <a:t>2026-10-01</a:t>
             </a:fld>
             <a:endParaRPr lang="zh-CN" altLang="en-US"/>
           </a:p>
@@ -986,7 +986,7 @@
           <a:p>
             <a:fld id="{D997B5FA-0921-464F-AAE1-844C04324D75}" type="datetimeFigureOut">
               <a:rPr lang="zh-CN" altLang="en-US" smtClean="0"/>
-              <a:t>2026-09-28</a:t>
+              <a:t>2026-10-01</a:t>
             </a:fld>
             <a:endParaRPr lang="zh-CN" altLang="en-US"/>
           </a:p>
@@ -1210,7 +1210,7 @@
           <a:p>
             <a:fld id="{D997B5FA-0921-464F-AAE1-844C04324D75}" type="datetimeFigureOut">
               <a:rPr lang="zh-CN" altLang="en-US" smtClean="0"/>
-              <a:t>2026-09-28</a:t>
+              <a:t>2026-10-01</a:t>
             </a:fld>
             <a:endParaRPr lang="zh-CN" altLang="en-US"/>
           </a:p>
@@ -1569,7 +1569,7 @@
           <a:p>
             <a:fld id="{D997B5FA-0921-464F-AAE1-844C04324D75}" type="datetimeFigureOut">
               <a:rPr lang="zh-CN" altLang="en-US" smtClean="0"/>
-              <a:t>2026-09-28</a:t>
+              <a:t>2026-10-01</a:t>
             </a:fld>
             <a:endParaRPr lang="zh-CN" altLang="en-US"/>
           </a:p>
@@ -1681,7 +1681,7 @@
           <a:p>
             <a:fld id="{D997B5FA-0921-464F-AAE1-844C04324D75}" type="datetimeFigureOut">
               <a:rPr lang="zh-CN" altLang="en-US" smtClean="0"/>
-              <a:t>2026-09-28</a:t>
+              <a:t>2026-10-01</a:t>
             </a:fld>
             <a:endParaRPr lang="zh-CN" altLang="en-US"/>
           </a:p>
@@ -1771,7 +1771,7 @@
           <a:p>
             <a:fld id="{D997B5FA-0921-464F-AAE1-844C04324D75}" type="datetimeFigureOut">
               <a:rPr lang="zh-CN" altLang="en-US" smtClean="0"/>
-              <a:t>2026-09-28</a:t>
+              <a:t>2026-10-01</a:t>
             </a:fld>
             <a:endParaRPr lang="zh-CN" altLang="en-US"/>
           </a:p>
@@ -2041,7 +2041,7 @@
           <a:p>
             <a:fld id="{D997B5FA-0921-464F-AAE1-844C04324D75}" type="datetimeFigureOut">
               <a:rPr lang="zh-CN" altLang="en-US" smtClean="0"/>
-              <a:t>2026-09-28</a:t>
+              <a:t>2026-10-01</a:t>
             </a:fld>
             <a:endParaRPr lang="zh-CN" altLang="en-US"/>
           </a:p>
@@ -2288,7 +2288,7 @@
           <a:p>
             <a:fld id="{D997B5FA-0921-464F-AAE1-844C04324D75}" type="datetimeFigureOut">
               <a:rPr lang="zh-CN" altLang="en-US" smtClean="0"/>
-              <a:t>2026-09-28</a:t>
+              <a:t>2026-10-01</a:t>
             </a:fld>
             <a:endParaRPr lang="zh-CN" altLang="en-US"/>
           </a:p>
@@ -2494,7 +2494,7 @@
           <a:p>
             <a:fld id="{D997B5FA-0921-464F-AAE1-844C04324D75}" type="datetimeFigureOut">
               <a:rPr lang="zh-CN" altLang="en-US" smtClean="0"/>
-              <a:t>2026-09-28</a:t>
+              <a:t>2026-10-01</a:t>
             </a:fld>
             <a:endParaRPr lang="zh-CN" altLang="en-US"/>
           </a:p>
@@ -13942,7 +13942,7 @@
         </p:nvGrpSpPr>
         <p:grpSpPr>
           <a:xfrm>
-            <a:off x="2772579" y="1497209"/>
+            <a:off x="673755" y="644178"/>
             <a:ext cx="2721842" cy="2311627"/>
             <a:chOff x="2772579" y="1497209"/>
             <a:chExt cx="2721842" cy="2311627"/>
@@ -14250,8 +14250,8 @@
             </a:p>
           </p:txBody>
         </p:sp>
-        <mc:AlternateContent xmlns:mc="http://schemas.openxmlformats.org/markup-compatibility/2006">
-          <mc:Choice xmlns:a14="http://schemas.microsoft.com/office/drawing/2010/main" Requires="a14">
+        <mc:AlternateContent xmlns:mc="http://schemas.openxmlformats.org/markup-compatibility/2006" xmlns:a14="http://schemas.microsoft.com/office/drawing/2010/main">
+          <mc:Choice Requires="a14">
             <p:sp>
               <p:nvSpPr>
                 <p:cNvPr id="20" name="文本框 19">
@@ -14280,6 +14280,7 @@
                 </a:bodyPr>
                 <a:lstStyle/>
                 <a:p>
+                  <a:pPr/>
                   <a14:m>
                     <m:oMathPara xmlns:m="http://schemas.openxmlformats.org/officeDocument/2006/math">
                       <m:oMath>
@@ -14297,7 +14298,7 @@
               </p:txBody>
             </p:sp>
           </mc:Choice>
-          <mc:Fallback>
+          <mc:Fallback xmlns="">
             <p:sp>
               <p:nvSpPr>
                 <p:cNvPr id="20" name="文本框 19">
@@ -14342,8 +14343,8 @@
             </p:sp>
           </mc:Fallback>
         </mc:AlternateContent>
-        <mc:AlternateContent xmlns:mc="http://schemas.openxmlformats.org/markup-compatibility/2006">
-          <mc:Choice xmlns:a14="http://schemas.microsoft.com/office/drawing/2010/main" Requires="a14">
+        <mc:AlternateContent xmlns:mc="http://schemas.openxmlformats.org/markup-compatibility/2006" xmlns:a14="http://schemas.microsoft.com/office/drawing/2010/main">
+          <mc:Choice Requires="a14">
             <p:sp>
               <p:nvSpPr>
                 <p:cNvPr id="21" name="文本框 20">
@@ -14372,6 +14373,7 @@
                 </a:bodyPr>
                 <a:lstStyle/>
                 <a:p>
+                  <a:pPr/>
                   <a14:m>
                     <m:oMathPara xmlns:m="http://schemas.openxmlformats.org/officeDocument/2006/math">
                       <m:oMath>
@@ -14389,7 +14391,7 @@
               </p:txBody>
             </p:sp>
           </mc:Choice>
-          <mc:Fallback>
+          <mc:Fallback xmlns="">
             <p:sp>
               <p:nvSpPr>
                 <p:cNvPr id="21" name="文本框 20">
@@ -14434,8 +14436,8 @@
             </p:sp>
           </mc:Fallback>
         </mc:AlternateContent>
-        <mc:AlternateContent xmlns:mc="http://schemas.openxmlformats.org/markup-compatibility/2006">
-          <mc:Choice xmlns:a14="http://schemas.microsoft.com/office/drawing/2010/main" Requires="a14">
+        <mc:AlternateContent xmlns:mc="http://schemas.openxmlformats.org/markup-compatibility/2006" xmlns:a14="http://schemas.microsoft.com/office/drawing/2010/main">
+          <mc:Choice Requires="a14">
             <p:sp>
               <p:nvSpPr>
                 <p:cNvPr id="22" name="文本框 21">
@@ -14464,6 +14466,7 @@
                 </a:bodyPr>
                 <a:lstStyle/>
                 <a:p>
+                  <a:pPr/>
                   <a14:m>
                     <m:oMathPara xmlns:m="http://schemas.openxmlformats.org/officeDocument/2006/math">
                       <m:oMath>
@@ -14481,7 +14484,7 @@
               </p:txBody>
             </p:sp>
           </mc:Choice>
-          <mc:Fallback>
+          <mc:Fallback xmlns="">
             <p:sp>
               <p:nvSpPr>
                 <p:cNvPr id="22" name="文本框 21">
@@ -14526,8 +14529,8 @@
             </p:sp>
           </mc:Fallback>
         </mc:AlternateContent>
-        <mc:AlternateContent xmlns:mc="http://schemas.openxmlformats.org/markup-compatibility/2006">
-          <mc:Choice xmlns:a14="http://schemas.microsoft.com/office/drawing/2010/main" Requires="a14">
+        <mc:AlternateContent xmlns:mc="http://schemas.openxmlformats.org/markup-compatibility/2006" xmlns:a14="http://schemas.microsoft.com/office/drawing/2010/main">
+          <mc:Choice Requires="a14">
             <p:sp>
               <p:nvSpPr>
                 <p:cNvPr id="23" name="文本框 22">
@@ -14556,6 +14559,7 @@
                 </a:bodyPr>
                 <a:lstStyle/>
                 <a:p>
+                  <a:pPr/>
                   <a14:m>
                     <m:oMathPara xmlns:m="http://schemas.openxmlformats.org/officeDocument/2006/math">
                       <m:oMath>
@@ -14573,7 +14577,7 @@
               </p:txBody>
             </p:sp>
           </mc:Choice>
-          <mc:Fallback>
+          <mc:Fallback xmlns="">
             <p:sp>
               <p:nvSpPr>
                 <p:cNvPr id="23" name="文本框 22">
@@ -14618,8 +14622,8 @@
             </p:sp>
           </mc:Fallback>
         </mc:AlternateContent>
-        <mc:AlternateContent xmlns:mc="http://schemas.openxmlformats.org/markup-compatibility/2006">
-          <mc:Choice xmlns:a14="http://schemas.microsoft.com/office/drawing/2010/main" Requires="a14">
+        <mc:AlternateContent xmlns:mc="http://schemas.openxmlformats.org/markup-compatibility/2006" xmlns:a14="http://schemas.microsoft.com/office/drawing/2010/main">
+          <mc:Choice Requires="a14">
             <p:sp>
               <p:nvSpPr>
                 <p:cNvPr id="24" name="文本框 23">
@@ -14648,6 +14652,7 @@
                 </a:bodyPr>
                 <a:lstStyle/>
                 <a:p>
+                  <a:pPr/>
                   <a14:m>
                     <m:oMathPara xmlns:m="http://schemas.openxmlformats.org/officeDocument/2006/math">
                       <m:oMath>
@@ -14665,7 +14670,7 @@
               </p:txBody>
             </p:sp>
           </mc:Choice>
-          <mc:Fallback>
+          <mc:Fallback xmlns="">
             <p:sp>
               <p:nvSpPr>
                 <p:cNvPr id="24" name="文本框 23">
@@ -14710,8 +14715,8 @@
             </p:sp>
           </mc:Fallback>
         </mc:AlternateContent>
-        <mc:AlternateContent xmlns:mc="http://schemas.openxmlformats.org/markup-compatibility/2006">
-          <mc:Choice xmlns:a14="http://schemas.microsoft.com/office/drawing/2010/main" Requires="a14">
+        <mc:AlternateContent xmlns:mc="http://schemas.openxmlformats.org/markup-compatibility/2006" xmlns:a14="http://schemas.microsoft.com/office/drawing/2010/main">
+          <mc:Choice Requires="a14">
             <p:sp>
               <p:nvSpPr>
                 <p:cNvPr id="25" name="文本框 24">
@@ -14740,6 +14745,7 @@
                 </a:bodyPr>
                 <a:lstStyle/>
                 <a:p>
+                  <a:pPr/>
                   <a14:m>
                     <m:oMathPara xmlns:m="http://schemas.openxmlformats.org/officeDocument/2006/math">
                       <m:oMath>
@@ -14757,7 +14763,7 @@
               </p:txBody>
             </p:sp>
           </mc:Choice>
-          <mc:Fallback>
+          <mc:Fallback xmlns="">
             <p:sp>
               <p:nvSpPr>
                 <p:cNvPr id="25" name="文本框 24">
@@ -14784,6 +14790,1477 @@
                   <a:blip r:embed="rId7"/>
                   <a:stretch>
                     <a:fillRect l="-21429" r="-14286"/>
+                  </a:stretch>
+                </a:blipFill>
+              </p:spPr>
+              <p:txBody>
+                <a:bodyPr/>
+                <a:lstStyle/>
+                <a:p>
+                  <a:r>
+                    <a:rPr lang="zh-CN" altLang="en-US">
+                      <a:noFill/>
+                    </a:rPr>
+                    <a:t> </a:t>
+                  </a:r>
+                </a:p>
+              </p:txBody>
+            </p:sp>
+          </mc:Fallback>
+        </mc:AlternateContent>
+      </p:grpSp>
+      <p:grpSp>
+        <p:nvGrpSpPr>
+          <p:cNvPr id="52" name="组合 51">
+            <a:extLst>
+              <a:ext uri="{FF2B5EF4-FFF2-40B4-BE49-F238E27FC236}">
+                <a16:creationId xmlns:a16="http://schemas.microsoft.com/office/drawing/2014/main" id="{0FF3B5FF-27CC-89C0-183E-2D913D3EB41E}"/>
+              </a:ext>
+            </a:extLst>
+          </p:cNvPr>
+          <p:cNvGrpSpPr/>
+          <p:nvPr/>
+        </p:nvGrpSpPr>
+        <p:grpSpPr>
+          <a:xfrm>
+            <a:off x="4464866" y="3370511"/>
+            <a:ext cx="1322141" cy="967843"/>
+            <a:chOff x="4464866" y="3370511"/>
+            <a:chExt cx="1322141" cy="967843"/>
+          </a:xfrm>
+        </p:grpSpPr>
+        <p:cxnSp>
+          <p:nvCxnSpPr>
+            <p:cNvPr id="7" name="直接箭头连接符 6">
+              <a:extLst>
+                <a:ext uri="{FF2B5EF4-FFF2-40B4-BE49-F238E27FC236}">
+                  <a16:creationId xmlns:a16="http://schemas.microsoft.com/office/drawing/2014/main" id="{6D1A4C04-B323-A76A-6DC8-3A39CFBAC95B}"/>
+                </a:ext>
+              </a:extLst>
+            </p:cNvPr>
+            <p:cNvCxnSpPr/>
+            <p:nvPr/>
+          </p:nvCxnSpPr>
+          <p:spPr>
+            <a:xfrm flipV="1">
+              <a:off x="5067006" y="3430970"/>
+              <a:ext cx="0" cy="720000"/>
+            </a:xfrm>
+            <a:prstGeom prst="straightConnector1">
+              <a:avLst/>
+            </a:prstGeom>
+            <a:ln>
+              <a:tailEnd type="stealth"/>
+            </a:ln>
+          </p:spPr>
+          <p:style>
+            <a:lnRef idx="1">
+              <a:schemeClr val="dk1"/>
+            </a:lnRef>
+            <a:fillRef idx="0">
+              <a:schemeClr val="dk1"/>
+            </a:fillRef>
+            <a:effectRef idx="0">
+              <a:schemeClr val="dk1"/>
+            </a:effectRef>
+            <a:fontRef idx="minor">
+              <a:schemeClr val="tx1"/>
+            </a:fontRef>
+          </p:style>
+        </p:cxnSp>
+        <p:cxnSp>
+          <p:nvCxnSpPr>
+            <p:cNvPr id="8" name="直接箭头连接符 7">
+              <a:extLst>
+                <a:ext uri="{FF2B5EF4-FFF2-40B4-BE49-F238E27FC236}">
+                  <a16:creationId xmlns:a16="http://schemas.microsoft.com/office/drawing/2014/main" id="{20FC738F-98BD-778E-6C11-7A129EACC992}"/>
+                </a:ext>
+              </a:extLst>
+            </p:cNvPr>
+            <p:cNvCxnSpPr>
+              <a:cxnSpLocks/>
+            </p:cNvCxnSpPr>
+            <p:nvPr/>
+          </p:nvCxnSpPr>
+          <p:spPr>
+            <a:xfrm rot="5400000" flipV="1">
+              <a:off x="5427007" y="3790970"/>
+              <a:ext cx="0" cy="720000"/>
+            </a:xfrm>
+            <a:prstGeom prst="straightConnector1">
+              <a:avLst/>
+            </a:prstGeom>
+            <a:ln>
+              <a:tailEnd type="stealth"/>
+            </a:ln>
+          </p:spPr>
+          <p:style>
+            <a:lnRef idx="1">
+              <a:schemeClr val="dk1"/>
+            </a:lnRef>
+            <a:fillRef idx="0">
+              <a:schemeClr val="dk1"/>
+            </a:fillRef>
+            <a:effectRef idx="0">
+              <a:schemeClr val="dk1"/>
+            </a:effectRef>
+            <a:fontRef idx="minor">
+              <a:schemeClr val="tx1"/>
+            </a:fontRef>
+          </p:style>
+        </p:cxnSp>
+        <p:cxnSp>
+          <p:nvCxnSpPr>
+            <p:cNvPr id="9" name="直接箭头连接符 8">
+              <a:extLst>
+                <a:ext uri="{FF2B5EF4-FFF2-40B4-BE49-F238E27FC236}">
+                  <a16:creationId xmlns:a16="http://schemas.microsoft.com/office/drawing/2014/main" id="{398DA8CA-EC5D-91F9-73E7-AD1506A62B1D}"/>
+                </a:ext>
+              </a:extLst>
+            </p:cNvPr>
+            <p:cNvCxnSpPr>
+              <a:cxnSpLocks/>
+            </p:cNvCxnSpPr>
+            <p:nvPr/>
+          </p:nvCxnSpPr>
+          <p:spPr>
+            <a:xfrm rot="1500000" flipV="1">
+              <a:off x="5219150" y="3464699"/>
+              <a:ext cx="0" cy="720000"/>
+            </a:xfrm>
+            <a:prstGeom prst="straightConnector1">
+              <a:avLst/>
+            </a:prstGeom>
+            <a:ln>
+              <a:tailEnd type="stealth"/>
+            </a:ln>
+          </p:spPr>
+          <p:style>
+            <a:lnRef idx="1">
+              <a:schemeClr val="dk1"/>
+            </a:lnRef>
+            <a:fillRef idx="0">
+              <a:schemeClr val="dk1"/>
+            </a:fillRef>
+            <a:effectRef idx="0">
+              <a:schemeClr val="dk1"/>
+            </a:effectRef>
+            <a:fontRef idx="minor">
+              <a:schemeClr val="tx1"/>
+            </a:fontRef>
+          </p:style>
+        </p:cxnSp>
+        <p:sp>
+          <p:nvSpPr>
+            <p:cNvPr id="12" name="弧形 11">
+              <a:extLst>
+                <a:ext uri="{FF2B5EF4-FFF2-40B4-BE49-F238E27FC236}">
+                  <a16:creationId xmlns:a16="http://schemas.microsoft.com/office/drawing/2014/main" id="{58D41A4D-D95E-D90A-2403-DE53F31C17FE}"/>
+                </a:ext>
+              </a:extLst>
+            </p:cNvPr>
+            <p:cNvSpPr/>
+            <p:nvPr/>
+          </p:nvSpPr>
+          <p:spPr>
+            <a:xfrm>
+              <a:off x="4887008" y="3972937"/>
+              <a:ext cx="360000" cy="360000"/>
+            </a:xfrm>
+            <a:prstGeom prst="arc">
+              <a:avLst>
+                <a:gd name="adj1" fmla="val 17832181"/>
+                <a:gd name="adj2" fmla="val 21468147"/>
+              </a:avLst>
+            </a:prstGeom>
+            <a:ln w="6350">
+              <a:solidFill>
+                <a:schemeClr val="tx1"/>
+              </a:solidFill>
+            </a:ln>
+          </p:spPr>
+          <p:style>
+            <a:lnRef idx="1">
+              <a:schemeClr val="accent1"/>
+            </a:lnRef>
+            <a:fillRef idx="0">
+              <a:schemeClr val="accent1"/>
+            </a:fillRef>
+            <a:effectRef idx="0">
+              <a:schemeClr val="accent1"/>
+            </a:effectRef>
+            <a:fontRef idx="minor">
+              <a:schemeClr val="tx1"/>
+            </a:fontRef>
+          </p:style>
+          <p:txBody>
+            <a:bodyPr rtlCol="0" anchor="ctr"/>
+            <a:lstStyle/>
+            <a:p>
+              <a:pPr algn="ctr"/>
+              <a:endParaRPr lang="zh-CN" altLang="en-US"/>
+            </a:p>
+          </p:txBody>
+        </p:sp>
+        <p:cxnSp>
+          <p:nvCxnSpPr>
+            <p:cNvPr id="16" name="直接连接符 15">
+              <a:extLst>
+                <a:ext uri="{FF2B5EF4-FFF2-40B4-BE49-F238E27FC236}">
+                  <a16:creationId xmlns:a16="http://schemas.microsoft.com/office/drawing/2014/main" id="{42D62936-31F4-17E2-50F6-D3BB1B57F0AE}"/>
+                </a:ext>
+              </a:extLst>
+            </p:cNvPr>
+            <p:cNvCxnSpPr>
+              <a:cxnSpLocks/>
+            </p:cNvCxnSpPr>
+            <p:nvPr/>
+          </p:nvCxnSpPr>
+          <p:spPr>
+            <a:xfrm>
+              <a:off x="5371293" y="3506807"/>
+              <a:ext cx="0" cy="644163"/>
+            </a:xfrm>
+            <a:prstGeom prst="line">
+              <a:avLst/>
+            </a:prstGeom>
+            <a:ln w="6350">
+              <a:solidFill>
+                <a:schemeClr val="tx1"/>
+              </a:solidFill>
+              <a:prstDash val="dash"/>
+            </a:ln>
+          </p:spPr>
+          <p:style>
+            <a:lnRef idx="1">
+              <a:schemeClr val="accent1"/>
+            </a:lnRef>
+            <a:fillRef idx="0">
+              <a:schemeClr val="accent1"/>
+            </a:fillRef>
+            <a:effectRef idx="0">
+              <a:schemeClr val="accent1"/>
+            </a:effectRef>
+            <a:fontRef idx="minor">
+              <a:schemeClr val="tx1"/>
+            </a:fontRef>
+          </p:style>
+        </p:cxnSp>
+        <p:cxnSp>
+          <p:nvCxnSpPr>
+            <p:cNvPr id="27" name="直接连接符 26">
+              <a:extLst>
+                <a:ext uri="{FF2B5EF4-FFF2-40B4-BE49-F238E27FC236}">
+                  <a16:creationId xmlns:a16="http://schemas.microsoft.com/office/drawing/2014/main" id="{9A7E31E7-615B-7B8D-E889-DE833D22772B}"/>
+                </a:ext>
+              </a:extLst>
+            </p:cNvPr>
+            <p:cNvCxnSpPr>
+              <a:cxnSpLocks/>
+            </p:cNvCxnSpPr>
+            <p:nvPr/>
+          </p:nvCxnSpPr>
+          <p:spPr>
+            <a:xfrm flipH="1">
+              <a:off x="5067006" y="3502618"/>
+              <a:ext cx="304287" cy="0"/>
+            </a:xfrm>
+            <a:prstGeom prst="line">
+              <a:avLst/>
+            </a:prstGeom>
+            <a:ln w="6350">
+              <a:solidFill>
+                <a:schemeClr val="tx1"/>
+              </a:solidFill>
+              <a:prstDash val="dash"/>
+            </a:ln>
+          </p:spPr>
+          <p:style>
+            <a:lnRef idx="1">
+              <a:schemeClr val="accent1"/>
+            </a:lnRef>
+            <a:fillRef idx="0">
+              <a:schemeClr val="accent1"/>
+            </a:fillRef>
+            <a:effectRef idx="0">
+              <a:schemeClr val="accent1"/>
+            </a:effectRef>
+            <a:fontRef idx="minor">
+              <a:schemeClr val="tx1"/>
+            </a:fontRef>
+          </p:style>
+        </p:cxnSp>
+        <p:grpSp>
+          <p:nvGrpSpPr>
+            <p:cNvPr id="39" name="组合 38">
+              <a:extLst>
+                <a:ext uri="{FF2B5EF4-FFF2-40B4-BE49-F238E27FC236}">
+                  <a16:creationId xmlns:a16="http://schemas.microsoft.com/office/drawing/2014/main" id="{4BB08FAD-5E59-4319-B39B-1D0C52E0CDBC}"/>
+                </a:ext>
+              </a:extLst>
+            </p:cNvPr>
+            <p:cNvGrpSpPr/>
+            <p:nvPr/>
+          </p:nvGrpSpPr>
+          <p:grpSpPr>
+            <a:xfrm>
+              <a:off x="4964880" y="3506807"/>
+              <a:ext cx="54780" cy="644163"/>
+              <a:chOff x="4660080" y="3522682"/>
+              <a:chExt cx="54780" cy="644163"/>
+            </a:xfrm>
+          </p:grpSpPr>
+          <p:cxnSp>
+            <p:nvCxnSpPr>
+              <p:cNvPr id="34" name="直接连接符 33">
+                <a:extLst>
+                  <a:ext uri="{FF2B5EF4-FFF2-40B4-BE49-F238E27FC236}">
+                    <a16:creationId xmlns:a16="http://schemas.microsoft.com/office/drawing/2014/main" id="{06F0E12C-32D4-0769-854A-6B3A15B984D2}"/>
+                  </a:ext>
+                </a:extLst>
+              </p:cNvPr>
+              <p:cNvCxnSpPr>
+                <a:cxnSpLocks/>
+              </p:cNvCxnSpPr>
+              <p:nvPr/>
+            </p:nvCxnSpPr>
+            <p:spPr>
+              <a:xfrm>
+                <a:off x="4687080" y="3522682"/>
+                <a:ext cx="0" cy="644163"/>
+              </a:xfrm>
+              <a:prstGeom prst="line">
+                <a:avLst/>
+              </a:prstGeom>
+              <a:ln w="6350">
+                <a:solidFill>
+                  <a:schemeClr val="tx1"/>
+                </a:solidFill>
+                <a:prstDash val="solid"/>
+              </a:ln>
+            </p:spPr>
+            <p:style>
+              <a:lnRef idx="1">
+                <a:schemeClr val="accent1"/>
+              </a:lnRef>
+              <a:fillRef idx="0">
+                <a:schemeClr val="accent1"/>
+              </a:fillRef>
+              <a:effectRef idx="0">
+                <a:schemeClr val="accent1"/>
+              </a:effectRef>
+              <a:fontRef idx="minor">
+                <a:schemeClr val="tx1"/>
+              </a:fontRef>
+            </p:style>
+          </p:cxnSp>
+          <p:cxnSp>
+            <p:nvCxnSpPr>
+              <p:cNvPr id="36" name="直接连接符 35">
+                <a:extLst>
+                  <a:ext uri="{FF2B5EF4-FFF2-40B4-BE49-F238E27FC236}">
+                    <a16:creationId xmlns:a16="http://schemas.microsoft.com/office/drawing/2014/main" id="{9495A3DB-525E-A486-111D-B39E1493F426}"/>
+                  </a:ext>
+                </a:extLst>
+              </p:cNvPr>
+              <p:cNvCxnSpPr/>
+              <p:nvPr/>
+            </p:nvCxnSpPr>
+            <p:spPr>
+              <a:xfrm>
+                <a:off x="4660080" y="3522682"/>
+                <a:ext cx="54000" cy="0"/>
+              </a:xfrm>
+              <a:prstGeom prst="line">
+                <a:avLst/>
+              </a:prstGeom>
+              <a:ln w="6350">
+                <a:solidFill>
+                  <a:schemeClr val="tx1"/>
+                </a:solidFill>
+              </a:ln>
+            </p:spPr>
+            <p:style>
+              <a:lnRef idx="1">
+                <a:schemeClr val="accent1"/>
+              </a:lnRef>
+              <a:fillRef idx="0">
+                <a:schemeClr val="accent1"/>
+              </a:fillRef>
+              <a:effectRef idx="0">
+                <a:schemeClr val="accent1"/>
+              </a:effectRef>
+              <a:fontRef idx="minor">
+                <a:schemeClr val="tx1"/>
+              </a:fontRef>
+            </p:style>
+          </p:cxnSp>
+          <p:cxnSp>
+            <p:nvCxnSpPr>
+              <p:cNvPr id="37" name="直接连接符 36">
+                <a:extLst>
+                  <a:ext uri="{FF2B5EF4-FFF2-40B4-BE49-F238E27FC236}">
+                    <a16:creationId xmlns:a16="http://schemas.microsoft.com/office/drawing/2014/main" id="{0F544B22-30ED-9A1B-18A3-6FA62FEF7E0D}"/>
+                  </a:ext>
+                </a:extLst>
+              </p:cNvPr>
+              <p:cNvCxnSpPr/>
+              <p:nvPr/>
+            </p:nvCxnSpPr>
+            <p:spPr>
+              <a:xfrm>
+                <a:off x="4660860" y="4166845"/>
+                <a:ext cx="54000" cy="0"/>
+              </a:xfrm>
+              <a:prstGeom prst="line">
+                <a:avLst/>
+              </a:prstGeom>
+              <a:ln w="6350">
+                <a:solidFill>
+                  <a:schemeClr val="tx1"/>
+                </a:solidFill>
+              </a:ln>
+            </p:spPr>
+            <p:style>
+              <a:lnRef idx="1">
+                <a:schemeClr val="accent1"/>
+              </a:lnRef>
+              <a:fillRef idx="0">
+                <a:schemeClr val="accent1"/>
+              </a:fillRef>
+              <a:effectRef idx="0">
+                <a:schemeClr val="accent1"/>
+              </a:effectRef>
+              <a:fontRef idx="minor">
+                <a:schemeClr val="tx1"/>
+              </a:fontRef>
+            </p:style>
+          </p:cxnSp>
+        </p:grpSp>
+        <p:cxnSp>
+          <p:nvCxnSpPr>
+            <p:cNvPr id="40" name="直接箭头连接符 39">
+              <a:extLst>
+                <a:ext uri="{FF2B5EF4-FFF2-40B4-BE49-F238E27FC236}">
+                  <a16:creationId xmlns:a16="http://schemas.microsoft.com/office/drawing/2014/main" id="{B4BE8912-E311-91C6-2224-7E3A1F435105}"/>
+                </a:ext>
+              </a:extLst>
+            </p:cNvPr>
+            <p:cNvCxnSpPr>
+              <a:cxnSpLocks/>
+            </p:cNvCxnSpPr>
+            <p:nvPr/>
+          </p:nvCxnSpPr>
+          <p:spPr>
+            <a:xfrm rot="-3900000" flipV="1">
+              <a:off x="4824866" y="3482334"/>
+              <a:ext cx="0" cy="720000"/>
+            </a:xfrm>
+            <a:prstGeom prst="straightConnector1">
+              <a:avLst/>
+            </a:prstGeom>
+            <a:ln>
+              <a:tailEnd type="stealth"/>
+            </a:ln>
+          </p:spPr>
+          <p:style>
+            <a:lnRef idx="1">
+              <a:schemeClr val="dk1"/>
+            </a:lnRef>
+            <a:fillRef idx="0">
+              <a:schemeClr val="dk1"/>
+            </a:fillRef>
+            <a:effectRef idx="0">
+              <a:schemeClr val="dk1"/>
+            </a:effectRef>
+            <a:fontRef idx="minor">
+              <a:schemeClr val="tx1"/>
+            </a:fontRef>
+          </p:style>
+        </p:cxnSp>
+        <p:sp>
+          <p:nvSpPr>
+            <p:cNvPr id="41" name="矩形 40">
+              <a:extLst>
+                <a:ext uri="{FF2B5EF4-FFF2-40B4-BE49-F238E27FC236}">
+                  <a16:creationId xmlns:a16="http://schemas.microsoft.com/office/drawing/2014/main" id="{24C0B848-F2EB-D721-2BBB-F07FCF38C7DC}"/>
+                </a:ext>
+              </a:extLst>
+            </p:cNvPr>
+            <p:cNvSpPr/>
+            <p:nvPr/>
+          </p:nvSpPr>
+          <p:spPr>
+            <a:xfrm rot="1500000">
+              <a:off x="5111151" y="3943756"/>
+              <a:ext cx="36000" cy="36000"/>
+            </a:xfrm>
+            <a:prstGeom prst="rect">
+              <a:avLst/>
+            </a:prstGeom>
+            <a:noFill/>
+            <a:ln w="6350">
+              <a:solidFill>
+                <a:schemeClr val="tx1"/>
+              </a:solidFill>
+            </a:ln>
+          </p:spPr>
+          <p:style>
+            <a:lnRef idx="2">
+              <a:schemeClr val="accent1">
+                <a:shade val="15000"/>
+              </a:schemeClr>
+            </a:lnRef>
+            <a:fillRef idx="1">
+              <a:schemeClr val="accent1"/>
+            </a:fillRef>
+            <a:effectRef idx="0">
+              <a:schemeClr val="accent1"/>
+            </a:effectRef>
+            <a:fontRef idx="minor">
+              <a:schemeClr val="lt1"/>
+            </a:fontRef>
+          </p:style>
+          <p:txBody>
+            <a:bodyPr rtlCol="0" anchor="ctr"/>
+            <a:lstStyle/>
+            <a:p>
+              <a:pPr algn="ctr"/>
+              <a:endParaRPr lang="zh-CN" altLang="en-US"/>
+            </a:p>
+          </p:txBody>
+        </p:sp>
+        <p:grpSp>
+          <p:nvGrpSpPr>
+            <p:cNvPr id="44" name="组合 43">
+              <a:extLst>
+                <a:ext uri="{FF2B5EF4-FFF2-40B4-BE49-F238E27FC236}">
+                  <a16:creationId xmlns:a16="http://schemas.microsoft.com/office/drawing/2014/main" id="{3BFAED3B-2EB7-D524-021E-53D9EE611B47}"/>
+                </a:ext>
+              </a:extLst>
+            </p:cNvPr>
+            <p:cNvGrpSpPr/>
+            <p:nvPr/>
+          </p:nvGrpSpPr>
+          <p:grpSpPr>
+            <a:xfrm>
+              <a:off x="5067006" y="4182049"/>
+              <a:ext cx="304287" cy="54000"/>
+              <a:chOff x="5122720" y="4432881"/>
+              <a:chExt cx="304287" cy="54000"/>
+            </a:xfrm>
+          </p:grpSpPr>
+          <p:cxnSp>
+            <p:nvCxnSpPr>
+              <p:cNvPr id="38" name="直接连接符 37">
+                <a:extLst>
+                  <a:ext uri="{FF2B5EF4-FFF2-40B4-BE49-F238E27FC236}">
+                    <a16:creationId xmlns:a16="http://schemas.microsoft.com/office/drawing/2014/main" id="{BD2F1A20-3CE4-E17C-B44B-E653D289B322}"/>
+                  </a:ext>
+                </a:extLst>
+              </p:cNvPr>
+              <p:cNvCxnSpPr>
+                <a:cxnSpLocks/>
+              </p:cNvCxnSpPr>
+              <p:nvPr/>
+            </p:nvCxnSpPr>
+            <p:spPr>
+              <a:xfrm rot="5400000">
+                <a:off x="5095720" y="4459881"/>
+                <a:ext cx="54000" cy="0"/>
+              </a:xfrm>
+              <a:prstGeom prst="line">
+                <a:avLst/>
+              </a:prstGeom>
+              <a:ln w="6350">
+                <a:solidFill>
+                  <a:schemeClr val="tx1"/>
+                </a:solidFill>
+              </a:ln>
+            </p:spPr>
+            <p:style>
+              <a:lnRef idx="1">
+                <a:schemeClr val="accent1"/>
+              </a:lnRef>
+              <a:fillRef idx="0">
+                <a:schemeClr val="accent1"/>
+              </a:fillRef>
+              <a:effectRef idx="0">
+                <a:schemeClr val="accent1"/>
+              </a:effectRef>
+              <a:fontRef idx="minor">
+                <a:schemeClr val="tx1"/>
+              </a:fontRef>
+            </p:style>
+          </p:cxnSp>
+          <p:cxnSp>
+            <p:nvCxnSpPr>
+              <p:cNvPr id="42" name="直接连接符 41">
+                <a:extLst>
+                  <a:ext uri="{FF2B5EF4-FFF2-40B4-BE49-F238E27FC236}">
+                    <a16:creationId xmlns:a16="http://schemas.microsoft.com/office/drawing/2014/main" id="{FB42B681-002F-706C-4739-11D512F0B265}"/>
+                  </a:ext>
+                </a:extLst>
+              </p:cNvPr>
+              <p:cNvCxnSpPr>
+                <a:cxnSpLocks/>
+              </p:cNvCxnSpPr>
+              <p:nvPr/>
+            </p:nvCxnSpPr>
+            <p:spPr>
+              <a:xfrm flipH="1">
+                <a:off x="5122720" y="4459881"/>
+                <a:ext cx="304287" cy="0"/>
+              </a:xfrm>
+              <a:prstGeom prst="line">
+                <a:avLst/>
+              </a:prstGeom>
+              <a:ln w="6350">
+                <a:solidFill>
+                  <a:schemeClr val="tx1"/>
+                </a:solidFill>
+                <a:prstDash val="solid"/>
+              </a:ln>
+            </p:spPr>
+            <p:style>
+              <a:lnRef idx="1">
+                <a:schemeClr val="accent1"/>
+              </a:lnRef>
+              <a:fillRef idx="0">
+                <a:schemeClr val="accent1"/>
+              </a:fillRef>
+              <a:effectRef idx="0">
+                <a:schemeClr val="accent1"/>
+              </a:effectRef>
+              <a:fontRef idx="minor">
+                <a:schemeClr val="tx1"/>
+              </a:fontRef>
+            </p:style>
+          </p:cxnSp>
+          <p:cxnSp>
+            <p:nvCxnSpPr>
+              <p:cNvPr id="43" name="直接连接符 42">
+                <a:extLst>
+                  <a:ext uri="{FF2B5EF4-FFF2-40B4-BE49-F238E27FC236}">
+                    <a16:creationId xmlns:a16="http://schemas.microsoft.com/office/drawing/2014/main" id="{E42F7DCC-ACE6-1356-1703-FD2753C239C2}"/>
+                  </a:ext>
+                </a:extLst>
+              </p:cNvPr>
+              <p:cNvCxnSpPr>
+                <a:cxnSpLocks/>
+              </p:cNvCxnSpPr>
+              <p:nvPr/>
+            </p:nvCxnSpPr>
+            <p:spPr>
+              <a:xfrm rot="5400000">
+                <a:off x="5399882" y="4459881"/>
+                <a:ext cx="54000" cy="0"/>
+              </a:xfrm>
+              <a:prstGeom prst="line">
+                <a:avLst/>
+              </a:prstGeom>
+              <a:ln w="6350">
+                <a:solidFill>
+                  <a:schemeClr val="tx1"/>
+                </a:solidFill>
+              </a:ln>
+            </p:spPr>
+            <p:style>
+              <a:lnRef idx="1">
+                <a:schemeClr val="accent1"/>
+              </a:lnRef>
+              <a:fillRef idx="0">
+                <a:schemeClr val="accent1"/>
+              </a:fillRef>
+              <a:effectRef idx="0">
+                <a:schemeClr val="accent1"/>
+              </a:effectRef>
+              <a:fontRef idx="minor">
+                <a:schemeClr val="tx1"/>
+              </a:fontRef>
+            </p:style>
+          </p:cxnSp>
+        </p:grpSp>
+        <mc:AlternateContent xmlns:mc="http://schemas.openxmlformats.org/markup-compatibility/2006">
+          <mc:Choice xmlns:a14="http://schemas.microsoft.com/office/drawing/2010/main" Requires="a14">
+            <p:sp>
+              <p:nvSpPr>
+                <p:cNvPr id="45" name="文本框 44">
+                  <a:extLst>
+                    <a:ext uri="{FF2B5EF4-FFF2-40B4-BE49-F238E27FC236}">
+                      <a16:creationId xmlns:a16="http://schemas.microsoft.com/office/drawing/2014/main" id="{9956EB6A-A415-92CE-66A1-D8E98E58160F}"/>
+                    </a:ext>
+                  </a:extLst>
+                </p:cNvPr>
+                <p:cNvSpPr txBox="1"/>
+                <p:nvPr/>
+              </p:nvSpPr>
+              <p:spPr>
+                <a:xfrm>
+                  <a:off x="5704225" y="4004927"/>
+                  <a:ext cx="72136" cy="107722"/>
+                </a:xfrm>
+                <a:prstGeom prst="rect">
+                  <a:avLst/>
+                </a:prstGeom>
+                <a:noFill/>
+              </p:spPr>
+              <p:txBody>
+                <a:bodyPr wrap="none" lIns="0" tIns="0" rIns="0" bIns="0" rtlCol="0">
+                  <a:spAutoFit/>
+                </a:bodyPr>
+                <a:lstStyle/>
+                <a:p>
+                  <a14:m>
+                    <m:oMathPara xmlns:m="http://schemas.openxmlformats.org/officeDocument/2006/math">
+                      <m:oMath>
+                        <m:acc>
+                          <m:accPr>
+                            <m:chr m:val="̂"/>
+                            <m:ctrlPr>
+                              <a:rPr lang="en-US" altLang="zh-CN" sz="700" b="0" i="1" smtClean="0">
+                                <a:latin typeface="Cambria Math" panose="02040503050406030204" pitchFamily="18" charset="0"/>
+                              </a:rPr>
+                            </m:ctrlPr>
+                          </m:accPr>
+                          <m:e>
+                            <m:r>
+                              <a:rPr lang="en-US" altLang="zh-CN" sz="700" b="0" i="1" smtClean="0">
+                                <a:latin typeface="Cambria Math" panose="02040503050406030204" pitchFamily="18" charset="0"/>
+                              </a:rPr>
+                              <m:t>𝒙</m:t>
+                            </m:r>
+                          </m:e>
+                        </m:acc>
+                      </m:oMath>
+                    </m:oMathPara>
+                  </a14:m>
+                  <a:endParaRPr lang="en-US" altLang="zh-CN" sz="700" b="0" dirty="0"/>
+                </a:p>
+              </p:txBody>
+            </p:sp>
+          </mc:Choice>
+          <mc:Fallback>
+            <p:sp>
+              <p:nvSpPr>
+                <p:cNvPr id="45" name="文本框 44">
+                  <a:extLst>
+                    <a:ext uri="{FF2B5EF4-FFF2-40B4-BE49-F238E27FC236}">
+                      <a16:creationId xmlns:a16="http://schemas.microsoft.com/office/drawing/2014/main" id="{9956EB6A-A415-92CE-66A1-D8E98E58160F}"/>
+                    </a:ext>
+                  </a:extLst>
+                </p:cNvPr>
+                <p:cNvSpPr txBox="1">
+                  <a:spLocks noRot="1" noChangeAspect="1" noMove="1" noResize="1" noEditPoints="1" noAdjustHandles="1" noChangeArrowheads="1" noChangeShapeType="1" noTextEdit="1"/>
+                </p:cNvSpPr>
+                <p:nvPr/>
+              </p:nvSpPr>
+              <p:spPr>
+                <a:xfrm>
+                  <a:off x="5704225" y="4004927"/>
+                  <a:ext cx="72136" cy="107722"/>
+                </a:xfrm>
+                <a:prstGeom prst="rect">
+                  <a:avLst/>
+                </a:prstGeom>
+                <a:blipFill>
+                  <a:blip r:embed="rId8"/>
+                  <a:stretch>
+                    <a:fillRect l="-41667" t="-27778" r="-66667"/>
+                  </a:stretch>
+                </a:blipFill>
+              </p:spPr>
+              <p:txBody>
+                <a:bodyPr/>
+                <a:lstStyle/>
+                <a:p>
+                  <a:r>
+                    <a:rPr lang="zh-CN" altLang="en-US">
+                      <a:noFill/>
+                    </a:rPr>
+                    <a:t> </a:t>
+                  </a:r>
+                </a:p>
+              </p:txBody>
+            </p:sp>
+          </mc:Fallback>
+        </mc:AlternateContent>
+        <mc:AlternateContent xmlns:mc="http://schemas.openxmlformats.org/markup-compatibility/2006">
+          <mc:Choice xmlns:a14="http://schemas.microsoft.com/office/drawing/2010/main" Requires="a14">
+            <p:sp>
+              <p:nvSpPr>
+                <p:cNvPr id="46" name="文本框 45">
+                  <a:extLst>
+                    <a:ext uri="{FF2B5EF4-FFF2-40B4-BE49-F238E27FC236}">
+                      <a16:creationId xmlns:a16="http://schemas.microsoft.com/office/drawing/2014/main" id="{460491F4-6E63-E98C-21FB-586428025E5E}"/>
+                    </a:ext>
+                  </a:extLst>
+                </p:cNvPr>
+                <p:cNvSpPr txBox="1"/>
+                <p:nvPr/>
+              </p:nvSpPr>
+              <p:spPr>
+                <a:xfrm>
+                  <a:off x="5108543" y="3370511"/>
+                  <a:ext cx="73738" cy="107722"/>
+                </a:xfrm>
+                <a:prstGeom prst="rect">
+                  <a:avLst/>
+                </a:prstGeom>
+                <a:noFill/>
+              </p:spPr>
+              <p:txBody>
+                <a:bodyPr wrap="none" lIns="0" tIns="0" rIns="0" bIns="0" rtlCol="0">
+                  <a:spAutoFit/>
+                </a:bodyPr>
+                <a:lstStyle/>
+                <a:p>
+                  <a14:m>
+                    <m:oMathPara xmlns:m="http://schemas.openxmlformats.org/officeDocument/2006/math">
+                      <m:oMath>
+                        <m:acc>
+                          <m:accPr>
+                            <m:chr m:val="̂"/>
+                            <m:ctrlPr>
+                              <a:rPr lang="en-US" altLang="zh-CN" sz="700" b="0" i="1" smtClean="0">
+                                <a:latin typeface="Cambria Math" panose="02040503050406030204" pitchFamily="18" charset="0"/>
+                              </a:rPr>
+                            </m:ctrlPr>
+                          </m:accPr>
+                          <m:e>
+                            <m:r>
+                              <a:rPr lang="en-US" altLang="zh-CN" sz="700" b="0" i="1" smtClean="0">
+                                <a:latin typeface="Cambria Math" panose="02040503050406030204" pitchFamily="18" charset="0"/>
+                              </a:rPr>
+                              <m:t>𝒚</m:t>
+                            </m:r>
+                          </m:e>
+                        </m:acc>
+                      </m:oMath>
+                    </m:oMathPara>
+                  </a14:m>
+                  <a:endParaRPr lang="en-US" altLang="zh-CN" sz="700" dirty="0"/>
+                </a:p>
+              </p:txBody>
+            </p:sp>
+          </mc:Choice>
+          <mc:Fallback>
+            <p:sp>
+              <p:nvSpPr>
+                <p:cNvPr id="46" name="文本框 45">
+                  <a:extLst>
+                    <a:ext uri="{FF2B5EF4-FFF2-40B4-BE49-F238E27FC236}">
+                      <a16:creationId xmlns:a16="http://schemas.microsoft.com/office/drawing/2014/main" id="{460491F4-6E63-E98C-21FB-586428025E5E}"/>
+                    </a:ext>
+                  </a:extLst>
+                </p:cNvPr>
+                <p:cNvSpPr txBox="1">
+                  <a:spLocks noRot="1" noChangeAspect="1" noMove="1" noResize="1" noEditPoints="1" noAdjustHandles="1" noChangeArrowheads="1" noChangeShapeType="1" noTextEdit="1"/>
+                </p:cNvSpPr>
+                <p:nvPr/>
+              </p:nvSpPr>
+              <p:spPr>
+                <a:xfrm>
+                  <a:off x="5108543" y="3370511"/>
+                  <a:ext cx="73738" cy="107722"/>
+                </a:xfrm>
+                <a:prstGeom prst="rect">
+                  <a:avLst/>
+                </a:prstGeom>
+                <a:blipFill>
+                  <a:blip r:embed="rId9"/>
+                  <a:stretch>
+                    <a:fillRect l="-33333" t="-27778" r="-75000" b="-22222"/>
+                  </a:stretch>
+                </a:blipFill>
+              </p:spPr>
+              <p:txBody>
+                <a:bodyPr/>
+                <a:lstStyle/>
+                <a:p>
+                  <a:r>
+                    <a:rPr lang="zh-CN" altLang="en-US">
+                      <a:noFill/>
+                    </a:rPr>
+                    <a:t> </a:t>
+                  </a:r>
+                </a:p>
+              </p:txBody>
+            </p:sp>
+          </mc:Fallback>
+        </mc:AlternateContent>
+        <mc:AlternateContent xmlns:mc="http://schemas.openxmlformats.org/markup-compatibility/2006">
+          <mc:Choice xmlns:a14="http://schemas.microsoft.com/office/drawing/2010/main" Requires="a14">
+            <p:sp>
+              <p:nvSpPr>
+                <p:cNvPr id="47" name="文本框 46">
+                  <a:extLst>
+                    <a:ext uri="{FF2B5EF4-FFF2-40B4-BE49-F238E27FC236}">
+                      <a16:creationId xmlns:a16="http://schemas.microsoft.com/office/drawing/2014/main" id="{DD3B012A-CB03-A183-5911-2E48488412B7}"/>
+                    </a:ext>
+                  </a:extLst>
+                </p:cNvPr>
+                <p:cNvSpPr txBox="1"/>
+                <p:nvPr/>
+              </p:nvSpPr>
+              <p:spPr>
+                <a:xfrm>
+                  <a:off x="4597826" y="3633861"/>
+                  <a:ext cx="89768" cy="112660"/>
+                </a:xfrm>
+                <a:prstGeom prst="rect">
+                  <a:avLst/>
+                </a:prstGeom>
+                <a:noFill/>
+              </p:spPr>
+              <p:txBody>
+                <a:bodyPr wrap="none" lIns="0" tIns="0" rIns="0" bIns="0" rtlCol="0">
+                  <a:spAutoFit/>
+                </a:bodyPr>
+                <a:lstStyle/>
+                <a:p>
+                  <a14:m>
+                    <m:oMathPara xmlns:m="http://schemas.openxmlformats.org/officeDocument/2006/math">
+                      <m:oMath>
+                        <m:acc>
+                          <m:accPr>
+                            <m:chr m:val="̂"/>
+                            <m:ctrlPr>
+                              <a:rPr lang="en-US" altLang="zh-CN" sz="700" b="0" i="1" smtClean="0">
+                                <a:latin typeface="Cambria Math" panose="02040503050406030204" pitchFamily="18" charset="0"/>
+                              </a:rPr>
+                            </m:ctrlPr>
+                          </m:accPr>
+                          <m:e>
+                            <m:r>
+                              <a:rPr lang="en-US" altLang="zh-CN" sz="700" b="0" i="1" smtClean="0">
+                                <a:latin typeface="Cambria Math" panose="02040503050406030204" pitchFamily="18" charset="0"/>
+                              </a:rPr>
+                              <m:t>𝝓</m:t>
+                            </m:r>
+                          </m:e>
+                        </m:acc>
+                      </m:oMath>
+                    </m:oMathPara>
+                  </a14:m>
+                  <a:endParaRPr lang="en-US" altLang="zh-CN" sz="700" dirty="0"/>
+                </a:p>
+              </p:txBody>
+            </p:sp>
+          </mc:Choice>
+          <mc:Fallback>
+            <p:sp>
+              <p:nvSpPr>
+                <p:cNvPr id="47" name="文本框 46">
+                  <a:extLst>
+                    <a:ext uri="{FF2B5EF4-FFF2-40B4-BE49-F238E27FC236}">
+                      <a16:creationId xmlns:a16="http://schemas.microsoft.com/office/drawing/2014/main" id="{DD3B012A-CB03-A183-5911-2E48488412B7}"/>
+                    </a:ext>
+                  </a:extLst>
+                </p:cNvPr>
+                <p:cNvSpPr txBox="1">
+                  <a:spLocks noRot="1" noChangeAspect="1" noMove="1" noResize="1" noEditPoints="1" noAdjustHandles="1" noChangeArrowheads="1" noChangeShapeType="1" noTextEdit="1"/>
+                </p:cNvSpPr>
+                <p:nvPr/>
+              </p:nvSpPr>
+              <p:spPr>
+                <a:xfrm>
+                  <a:off x="4597826" y="3633861"/>
+                  <a:ext cx="89768" cy="112660"/>
+                </a:xfrm>
+                <a:prstGeom prst="rect">
+                  <a:avLst/>
+                </a:prstGeom>
+                <a:blipFill>
+                  <a:blip r:embed="rId10"/>
+                  <a:stretch>
+                    <a:fillRect l="-33333" t="-21053" r="-53333" b="-31579"/>
+                  </a:stretch>
+                </a:blipFill>
+              </p:spPr>
+              <p:txBody>
+                <a:bodyPr/>
+                <a:lstStyle/>
+                <a:p>
+                  <a:r>
+                    <a:rPr lang="zh-CN" altLang="en-US">
+                      <a:noFill/>
+                    </a:rPr>
+                    <a:t> </a:t>
+                  </a:r>
+                </a:p>
+              </p:txBody>
+            </p:sp>
+          </mc:Fallback>
+        </mc:AlternateContent>
+        <mc:AlternateContent xmlns:mc="http://schemas.openxmlformats.org/markup-compatibility/2006">
+          <mc:Choice xmlns:a14="http://schemas.microsoft.com/office/drawing/2010/main" Requires="a14">
+            <p:sp>
+              <p:nvSpPr>
+                <p:cNvPr id="48" name="文本框 47">
+                  <a:extLst>
+                    <a:ext uri="{FF2B5EF4-FFF2-40B4-BE49-F238E27FC236}">
+                      <a16:creationId xmlns:a16="http://schemas.microsoft.com/office/drawing/2014/main" id="{690D798F-41CE-ED3E-A84D-824A4299CA54}"/>
+                    </a:ext>
+                  </a:extLst>
+                </p:cNvPr>
+                <p:cNvSpPr txBox="1"/>
+                <p:nvPr/>
+              </p:nvSpPr>
+              <p:spPr>
+                <a:xfrm>
+                  <a:off x="5392542" y="3498428"/>
+                  <a:ext cx="68930" cy="107722"/>
+                </a:xfrm>
+                <a:prstGeom prst="rect">
+                  <a:avLst/>
+                </a:prstGeom>
+                <a:noFill/>
+              </p:spPr>
+              <p:txBody>
+                <a:bodyPr wrap="none" lIns="0" tIns="0" rIns="0" bIns="0" rtlCol="0">
+                  <a:spAutoFit/>
+                </a:bodyPr>
+                <a:lstStyle/>
+                <a:p>
+                  <a14:m>
+                    <m:oMathPara xmlns:m="http://schemas.openxmlformats.org/officeDocument/2006/math">
+                      <m:oMath>
+                        <m:acc>
+                          <m:accPr>
+                            <m:chr m:val="̂"/>
+                            <m:ctrlPr>
+                              <a:rPr lang="en-US" altLang="zh-CN" sz="700" b="0" i="1" smtClean="0">
+                                <a:latin typeface="Cambria Math" panose="02040503050406030204" pitchFamily="18" charset="0"/>
+                              </a:rPr>
+                            </m:ctrlPr>
+                          </m:accPr>
+                          <m:e>
+                            <m:r>
+                              <a:rPr lang="en-US" altLang="zh-CN" sz="700" b="0" i="1" smtClean="0">
+                                <a:latin typeface="Cambria Math" panose="02040503050406030204" pitchFamily="18" charset="0"/>
+                              </a:rPr>
+                              <m:t>𝒓</m:t>
+                            </m:r>
+                          </m:e>
+                        </m:acc>
+                      </m:oMath>
+                    </m:oMathPara>
+                  </a14:m>
+                  <a:endParaRPr lang="zh-CN" altLang="en-US" sz="700" dirty="0"/>
+                </a:p>
+              </p:txBody>
+            </p:sp>
+          </mc:Choice>
+          <mc:Fallback>
+            <p:sp>
+              <p:nvSpPr>
+                <p:cNvPr id="48" name="文本框 47">
+                  <a:extLst>
+                    <a:ext uri="{FF2B5EF4-FFF2-40B4-BE49-F238E27FC236}">
+                      <a16:creationId xmlns:a16="http://schemas.microsoft.com/office/drawing/2014/main" id="{690D798F-41CE-ED3E-A84D-824A4299CA54}"/>
+                    </a:ext>
+                  </a:extLst>
+                </p:cNvPr>
+                <p:cNvSpPr txBox="1">
+                  <a:spLocks noRot="1" noChangeAspect="1" noMove="1" noResize="1" noEditPoints="1" noAdjustHandles="1" noChangeArrowheads="1" noChangeShapeType="1" noTextEdit="1"/>
+                </p:cNvSpPr>
+                <p:nvPr/>
+              </p:nvSpPr>
+              <p:spPr>
+                <a:xfrm>
+                  <a:off x="5392542" y="3498428"/>
+                  <a:ext cx="68930" cy="107722"/>
+                </a:xfrm>
+                <a:prstGeom prst="rect">
+                  <a:avLst/>
+                </a:prstGeom>
+                <a:blipFill>
+                  <a:blip r:embed="rId11"/>
+                  <a:stretch>
+                    <a:fillRect l="-36364" t="-27778" r="-81818"/>
+                  </a:stretch>
+                </a:blipFill>
+              </p:spPr>
+              <p:txBody>
+                <a:bodyPr/>
+                <a:lstStyle/>
+                <a:p>
+                  <a:r>
+                    <a:rPr lang="zh-CN" altLang="en-US">
+                      <a:noFill/>
+                    </a:rPr>
+                    <a:t> </a:t>
+                  </a:r>
+                </a:p>
+              </p:txBody>
+            </p:sp>
+          </mc:Fallback>
+        </mc:AlternateContent>
+        <mc:AlternateContent xmlns:mc="http://schemas.openxmlformats.org/markup-compatibility/2006">
+          <mc:Choice xmlns:a14="http://schemas.microsoft.com/office/drawing/2010/main" Requires="a14">
+            <p:sp>
+              <p:nvSpPr>
+                <p:cNvPr id="49" name="文本框 48">
+                  <a:extLst>
+                    <a:ext uri="{FF2B5EF4-FFF2-40B4-BE49-F238E27FC236}">
+                      <a16:creationId xmlns:a16="http://schemas.microsoft.com/office/drawing/2014/main" id="{B36AC108-70EE-142D-38EC-95F0FF7833FD}"/>
+                    </a:ext>
+                  </a:extLst>
+                </p:cNvPr>
+                <p:cNvSpPr txBox="1"/>
+                <p:nvPr/>
+              </p:nvSpPr>
+              <p:spPr>
+                <a:xfrm>
+                  <a:off x="5207840" y="3937835"/>
+                  <a:ext cx="83676" cy="107722"/>
+                </a:xfrm>
+                <a:prstGeom prst="rect">
+                  <a:avLst/>
+                </a:prstGeom>
+                <a:noFill/>
+              </p:spPr>
+              <p:txBody>
+                <a:bodyPr wrap="none" lIns="0" tIns="0" rIns="0" bIns="0" rtlCol="0">
+                  <a:spAutoFit/>
+                </a:bodyPr>
+                <a:lstStyle/>
+                <a:p>
+                  <a14:m>
+                    <m:oMathPara xmlns:m="http://schemas.openxmlformats.org/officeDocument/2006/math">
+                      <m:oMath>
+                        <m:r>
+                          <a:rPr lang="en-US" altLang="zh-CN" sz="700" b="0" i="1" smtClean="0">
+                            <a:latin typeface="Cambria Math" panose="02040503050406030204" pitchFamily="18" charset="0"/>
+                          </a:rPr>
+                          <m:t>𝜙</m:t>
+                        </m:r>
+                      </m:oMath>
+                    </m:oMathPara>
+                  </a14:m>
+                  <a:endParaRPr lang="en-US" altLang="zh-CN" sz="700" b="0" dirty="0"/>
+                </a:p>
+              </p:txBody>
+            </p:sp>
+          </mc:Choice>
+          <mc:Fallback>
+            <p:sp>
+              <p:nvSpPr>
+                <p:cNvPr id="49" name="文本框 48">
+                  <a:extLst>
+                    <a:ext uri="{FF2B5EF4-FFF2-40B4-BE49-F238E27FC236}">
+                      <a16:creationId xmlns:a16="http://schemas.microsoft.com/office/drawing/2014/main" id="{B36AC108-70EE-142D-38EC-95F0FF7833FD}"/>
+                    </a:ext>
+                  </a:extLst>
+                </p:cNvPr>
+                <p:cNvSpPr txBox="1">
+                  <a:spLocks noRot="1" noChangeAspect="1" noMove="1" noResize="1" noEditPoints="1" noAdjustHandles="1" noChangeArrowheads="1" noChangeShapeType="1" noTextEdit="1"/>
+                </p:cNvSpPr>
+                <p:nvPr/>
+              </p:nvSpPr>
+              <p:spPr>
+                <a:xfrm>
+                  <a:off x="5207840" y="3937835"/>
+                  <a:ext cx="83676" cy="107722"/>
+                </a:xfrm>
+                <a:prstGeom prst="rect">
+                  <a:avLst/>
+                </a:prstGeom>
+                <a:blipFill>
+                  <a:blip r:embed="rId12"/>
+                  <a:stretch>
+                    <a:fillRect l="-35714" r="-35714" b="-33333"/>
+                  </a:stretch>
+                </a:blipFill>
+              </p:spPr>
+              <p:txBody>
+                <a:bodyPr/>
+                <a:lstStyle/>
+                <a:p>
+                  <a:r>
+                    <a:rPr lang="zh-CN" altLang="en-US">
+                      <a:noFill/>
+                    </a:rPr>
+                    <a:t> </a:t>
+                  </a:r>
+                </a:p>
+              </p:txBody>
+            </p:sp>
+          </mc:Fallback>
+        </mc:AlternateContent>
+        <mc:AlternateContent xmlns:mc="http://schemas.openxmlformats.org/markup-compatibility/2006">
+          <mc:Choice xmlns:a14="http://schemas.microsoft.com/office/drawing/2010/main" Requires="a14">
+            <p:sp>
+              <p:nvSpPr>
+                <p:cNvPr id="50" name="文本框 49">
+                  <a:extLst>
+                    <a:ext uri="{FF2B5EF4-FFF2-40B4-BE49-F238E27FC236}">
+                      <a16:creationId xmlns:a16="http://schemas.microsoft.com/office/drawing/2014/main" id="{113CDDBE-40A8-229C-7B5F-7A350583E6A5}"/>
+                    </a:ext>
+                  </a:extLst>
+                </p:cNvPr>
+                <p:cNvSpPr txBox="1"/>
+                <p:nvPr/>
+              </p:nvSpPr>
+              <p:spPr>
+                <a:xfrm>
+                  <a:off x="5042762" y="4230632"/>
+                  <a:ext cx="330155" cy="107722"/>
+                </a:xfrm>
+                <a:prstGeom prst="rect">
+                  <a:avLst/>
+                </a:prstGeom>
+                <a:noFill/>
+              </p:spPr>
+              <p:txBody>
+                <a:bodyPr wrap="none" lIns="0" tIns="0" rIns="0" bIns="0" rtlCol="0">
+                  <a:spAutoFit/>
+                </a:bodyPr>
+                <a:lstStyle/>
+                <a:p>
+                  <a14:m>
+                    <m:oMathPara xmlns:m="http://schemas.openxmlformats.org/officeDocument/2006/math">
+                      <m:oMath>
+                        <m:func>
+                          <m:funcPr>
+                            <m:ctrlPr>
+                              <a:rPr lang="en-US" altLang="zh-CN" sz="700" b="0" i="0" smtClean="0">
+                                <a:latin typeface="Cambria Math" panose="02040503050406030204" pitchFamily="18" charset="0"/>
+                              </a:rPr>
+                            </m:ctrlPr>
+                          </m:funcPr>
+                          <m:fName>
+                            <m:r>
+                              <m:rPr>
+                                <m:sty m:val="p"/>
+                              </m:rPr>
+                              <a:rPr lang="en-US" altLang="zh-CN" sz="700" b="0" i="0" smtClean="0">
+                                <a:latin typeface="Cambria Math" panose="02040503050406030204" pitchFamily="18" charset="0"/>
+                              </a:rPr>
+                              <m:t>cos</m:t>
+                            </m:r>
+                          </m:fName>
+                          <m:e>
+                            <m:r>
+                              <a:rPr lang="en-US" altLang="zh-CN" sz="700" b="0" i="1" smtClean="0">
+                                <a:latin typeface="Cambria Math" panose="02040503050406030204" pitchFamily="18" charset="0"/>
+                              </a:rPr>
+                              <m:t>𝜙</m:t>
+                            </m:r>
+                            <m:d>
+                              <m:dPr>
+                                <m:begChr m:val="|"/>
+                                <m:endChr m:val="|"/>
+                                <m:ctrlPr>
+                                  <a:rPr lang="en-US" altLang="zh-CN" sz="700" b="0" i="1" smtClean="0">
+                                    <a:latin typeface="Cambria Math" panose="02040503050406030204" pitchFamily="18" charset="0"/>
+                                  </a:rPr>
+                                </m:ctrlPr>
+                              </m:dPr>
+                              <m:e>
+                                <m:acc>
+                                  <m:accPr>
+                                    <m:chr m:val="̂"/>
+                                    <m:ctrlPr>
+                                      <a:rPr lang="en-US" altLang="zh-CN" sz="700" i="1" smtClean="0">
+                                        <a:latin typeface="Cambria Math" panose="02040503050406030204" pitchFamily="18" charset="0"/>
+                                      </a:rPr>
+                                    </m:ctrlPr>
+                                  </m:accPr>
+                                  <m:e>
+                                    <m:r>
+                                      <a:rPr lang="en-US" altLang="zh-CN" sz="700" i="1" smtClean="0">
+                                        <a:latin typeface="Cambria Math" panose="02040503050406030204" pitchFamily="18" charset="0"/>
+                                      </a:rPr>
+                                      <m:t>𝒓</m:t>
+                                    </m:r>
+                                  </m:e>
+                                </m:acc>
+                              </m:e>
+                            </m:d>
+                          </m:e>
+                        </m:func>
+                      </m:oMath>
+                    </m:oMathPara>
+                  </a14:m>
+                  <a:endParaRPr lang="en-US" altLang="zh-CN" sz="700" b="0" dirty="0"/>
+                </a:p>
+              </p:txBody>
+            </p:sp>
+          </mc:Choice>
+          <mc:Fallback>
+            <p:sp>
+              <p:nvSpPr>
+                <p:cNvPr id="50" name="文本框 49">
+                  <a:extLst>
+                    <a:ext uri="{FF2B5EF4-FFF2-40B4-BE49-F238E27FC236}">
+                      <a16:creationId xmlns:a16="http://schemas.microsoft.com/office/drawing/2014/main" id="{113CDDBE-40A8-229C-7B5F-7A350583E6A5}"/>
+                    </a:ext>
+                  </a:extLst>
+                </p:cNvPr>
+                <p:cNvSpPr txBox="1">
+                  <a:spLocks noRot="1" noChangeAspect="1" noMove="1" noResize="1" noEditPoints="1" noAdjustHandles="1" noChangeArrowheads="1" noChangeShapeType="1" noTextEdit="1"/>
+                </p:cNvSpPr>
+                <p:nvPr/>
+              </p:nvSpPr>
+              <p:spPr>
+                <a:xfrm>
+                  <a:off x="5042762" y="4230632"/>
+                  <a:ext cx="330155" cy="107722"/>
+                </a:xfrm>
+                <a:prstGeom prst="rect">
+                  <a:avLst/>
+                </a:prstGeom>
+                <a:blipFill>
+                  <a:blip r:embed="rId13"/>
+                  <a:stretch>
+                    <a:fillRect l="-3704" t="-22222" r="-40741" b="-33333"/>
+                  </a:stretch>
+                </a:blipFill>
+              </p:spPr>
+              <p:txBody>
+                <a:bodyPr/>
+                <a:lstStyle/>
+                <a:p>
+                  <a:r>
+                    <a:rPr lang="zh-CN" altLang="en-US">
+                      <a:noFill/>
+                    </a:rPr>
+                    <a:t> </a:t>
+                  </a:r>
+                </a:p>
+              </p:txBody>
+            </p:sp>
+          </mc:Fallback>
+        </mc:AlternateContent>
+        <mc:AlternateContent xmlns:mc="http://schemas.openxmlformats.org/markup-compatibility/2006">
+          <mc:Choice xmlns:a14="http://schemas.microsoft.com/office/drawing/2010/main" Requires="a14">
+            <p:sp>
+              <p:nvSpPr>
+                <p:cNvPr id="51" name="文本框 50">
+                  <a:extLst>
+                    <a:ext uri="{FF2B5EF4-FFF2-40B4-BE49-F238E27FC236}">
+                      <a16:creationId xmlns:a16="http://schemas.microsoft.com/office/drawing/2014/main" id="{C321E69B-D1DF-7197-1763-4B4C7406DB32}"/>
+                    </a:ext>
+                  </a:extLst>
+                </p:cNvPr>
+                <p:cNvSpPr txBox="1"/>
+                <p:nvPr/>
+              </p:nvSpPr>
+              <p:spPr>
+                <a:xfrm>
+                  <a:off x="4658945" y="3955736"/>
+                  <a:ext cx="317331" cy="107722"/>
+                </a:xfrm>
+                <a:prstGeom prst="rect">
+                  <a:avLst/>
+                </a:prstGeom>
+                <a:noFill/>
+              </p:spPr>
+              <p:txBody>
+                <a:bodyPr wrap="none" lIns="0" tIns="0" rIns="0" bIns="0" rtlCol="0">
+                  <a:spAutoFit/>
+                </a:bodyPr>
+                <a:lstStyle/>
+                <a:p>
+                  <a14:m>
+                    <m:oMathPara xmlns:m="http://schemas.openxmlformats.org/officeDocument/2006/math">
+                      <m:oMath>
+                        <m:func>
+                          <m:funcPr>
+                            <m:ctrlPr>
+                              <a:rPr lang="en-US" altLang="zh-CN" sz="700" b="0" i="0" smtClean="0">
+                                <a:latin typeface="Cambria Math" panose="02040503050406030204" pitchFamily="18" charset="0"/>
+                              </a:rPr>
+                            </m:ctrlPr>
+                          </m:funcPr>
+                          <m:fName>
+                            <m:r>
+                              <m:rPr>
+                                <m:sty m:val="p"/>
+                              </m:rPr>
+                              <a:rPr lang="en-US" altLang="zh-CN" sz="700" b="0" i="0" smtClean="0">
+                                <a:latin typeface="Cambria Math" panose="02040503050406030204" pitchFamily="18" charset="0"/>
+                              </a:rPr>
+                              <m:t>sin</m:t>
+                            </m:r>
+                          </m:fName>
+                          <m:e>
+                            <m:r>
+                              <a:rPr lang="en-US" altLang="zh-CN" sz="700" b="0" i="1" smtClean="0">
+                                <a:latin typeface="Cambria Math" panose="02040503050406030204" pitchFamily="18" charset="0"/>
+                              </a:rPr>
+                              <m:t>𝜙</m:t>
+                            </m:r>
+                            <m:d>
+                              <m:dPr>
+                                <m:begChr m:val="|"/>
+                                <m:endChr m:val="|"/>
+                                <m:ctrlPr>
+                                  <a:rPr lang="en-US" altLang="zh-CN" sz="700" b="0" i="1" smtClean="0">
+                                    <a:latin typeface="Cambria Math" panose="02040503050406030204" pitchFamily="18" charset="0"/>
+                                  </a:rPr>
+                                </m:ctrlPr>
+                              </m:dPr>
+                              <m:e>
+                                <m:acc>
+                                  <m:accPr>
+                                    <m:chr m:val="̂"/>
+                                    <m:ctrlPr>
+                                      <a:rPr lang="en-US" altLang="zh-CN" sz="700" b="0" i="1" smtClean="0">
+                                        <a:latin typeface="Cambria Math" panose="02040503050406030204" pitchFamily="18" charset="0"/>
+                                      </a:rPr>
+                                    </m:ctrlPr>
+                                  </m:accPr>
+                                  <m:e>
+                                    <m:r>
+                                      <a:rPr lang="en-US" altLang="zh-CN" sz="700" b="0" i="1" smtClean="0">
+                                        <a:latin typeface="Cambria Math" panose="02040503050406030204" pitchFamily="18" charset="0"/>
+                                      </a:rPr>
+                                      <m:t>𝒓</m:t>
+                                    </m:r>
+                                  </m:e>
+                                </m:acc>
+                              </m:e>
+                            </m:d>
+                          </m:e>
+                        </m:func>
+                      </m:oMath>
+                    </m:oMathPara>
+                  </a14:m>
+                  <a:endParaRPr lang="en-US" altLang="zh-CN" sz="700" b="0" dirty="0"/>
+                </a:p>
+              </p:txBody>
+            </p:sp>
+          </mc:Choice>
+          <mc:Fallback>
+            <p:sp>
+              <p:nvSpPr>
+                <p:cNvPr id="51" name="文本框 50">
+                  <a:extLst>
+                    <a:ext uri="{FF2B5EF4-FFF2-40B4-BE49-F238E27FC236}">
+                      <a16:creationId xmlns:a16="http://schemas.microsoft.com/office/drawing/2014/main" id="{C321E69B-D1DF-7197-1763-4B4C7406DB32}"/>
+                    </a:ext>
+                  </a:extLst>
+                </p:cNvPr>
+                <p:cNvSpPr txBox="1">
+                  <a:spLocks noRot="1" noChangeAspect="1" noMove="1" noResize="1" noEditPoints="1" noAdjustHandles="1" noChangeArrowheads="1" noChangeShapeType="1" noTextEdit="1"/>
+                </p:cNvSpPr>
+                <p:nvPr/>
+              </p:nvSpPr>
+              <p:spPr>
+                <a:xfrm>
+                  <a:off x="4658945" y="3955736"/>
+                  <a:ext cx="317331" cy="107722"/>
+                </a:xfrm>
+                <a:prstGeom prst="rect">
+                  <a:avLst/>
+                </a:prstGeom>
+                <a:blipFill>
+                  <a:blip r:embed="rId14"/>
+                  <a:stretch>
+                    <a:fillRect l="-5769" t="-27778" r="-42308" b="-33333"/>
                   </a:stretch>
                 </a:blipFill>
               </p:spPr>
